--- a/examples/gallery/output/deck.pptx
+++ b/examples/gallery/output/deck.pptx
@@ -144,10 +144,10 @@
           <c:layoutTarget val="inner"/>
           <c:xMode val="edge"/>
           <c:yMode val="edge"/>
-          <c:x val="0.12218"/>
-          <c:y val="0.01064"/>
-          <c:w val="0.81782"/>
-          <c:h val="0.96936"/>
+          <c:x val="0.08072"/>
+          <c:y val="0.01255"/>
+          <c:w val="0.85928"/>
+          <c:h val="0.96745"/>
         </c:manualLayout>
       </c:layout>
       <c:barChart>
@@ -985,7 +985,7 @@
           <c:x val="0.07"/>
           <c:y val="0.04"/>
           <c:w val="0.91"/>
-          <c:h val="0.7994"/>
+          <c:h val="0.82383"/>
         </c:manualLayout>
       </c:layout>
       <c:scatterChart>
@@ -1676,10 +1676,18 @@
           </c:tx>
           <c:spPr>
             <a:solidFill>
-              <a:srgbClr val="13294B"/>
+              <a:srgbClr val="86A6C6"/>
             </a:solidFill>
           </c:spPr>
           <c:invertIfNegative val="0"/>
+          <c:dPt>
+            <c:idx val="2"/>
+            <c:spPr>
+              <a:solidFill>
+                <a:srgbClr val="13294B"/>
+              </a:solidFill>
+            </c:spPr>
+          </c:dPt>
           <c:dLbls>
             <c:numFmt formatCode="#,##0.0;-#,##0.0" sourceLinked="0"/>
             <c:txPr>
@@ -1868,10 +1876,18 @@
           </c:tx>
           <c:spPr>
             <a:solidFill>
-              <a:srgbClr val="13294B"/>
+              <a:srgbClr val="86A6C6"/>
             </a:solidFill>
           </c:spPr>
           <c:invertIfNegative val="0"/>
+          <c:dPt>
+            <c:idx val="2"/>
+            <c:spPr>
+              <a:solidFill>
+                <a:srgbClr val="13294B"/>
+              </a:solidFill>
+            </c:spPr>
+          </c:dPt>
           <c:dLbls>
             <c:numFmt formatCode="#,##0.0;-#,##0.0" sourceLinked="0"/>
             <c:txPr>
@@ -2060,10 +2076,18 @@
           </c:tx>
           <c:spPr>
             <a:solidFill>
-              <a:srgbClr val="13294B"/>
+              <a:srgbClr val="86A6C6"/>
             </a:solidFill>
           </c:spPr>
           <c:invertIfNegative val="0"/>
+          <c:dPt>
+            <c:idx val="2"/>
+            <c:spPr>
+              <a:solidFill>
+                <a:srgbClr val="13294B"/>
+              </a:solidFill>
+            </c:spPr>
+          </c:dPt>
           <c:dLbls>
             <c:numFmt formatCode="#,##0.0;-#,##0.0" sourceLinked="0"/>
             <c:txPr>
@@ -7370,7 +7394,7 @@
         <p:spPr>
           <a:xfrm>
             <a:off x="502920" y="6272784"/>
-            <a:ext cx="10088575" cy="402336"/>
+            <a:ext cx="8808415" cy="402336"/>
           </a:xfrm>
           <a:prstGeom prst="rect">
             <a:avLst/>
@@ -7818,7 +7842,7 @@
         <p:spPr>
           <a:xfrm>
             <a:off x="502920" y="6272784"/>
-            <a:ext cx="10088575" cy="402336"/>
+            <a:ext cx="8808415" cy="402336"/>
           </a:xfrm>
           <a:prstGeom prst="rect">
             <a:avLst/>
@@ -7887,16 +7911,125 @@
           </a:p>
         </p:txBody>
       </p:sp>
-      <p:sp>
-        <p:nvSpPr>
-          <p:cNvPr id="6" name="cpe|exhibit|text|5"/>
+      <p:cxnSp>
+        <p:nvCxnSpPr>
+          <p:cNvPr id="6" name="cpe|commentary|line|5"/>
+          <p:cNvCxnSpPr/>
+          <p:nvPr/>
+        </p:nvCxnSpPr>
+        <p:spPr>
+          <a:xfrm>
+            <a:off x="4097426" y="1481328"/>
+            <a:ext cx="0" cy="4718304"/>
+          </a:xfrm>
+          <a:prstGeom prst="line">
+            <a:avLst/>
+          </a:prstGeom>
+          <a:ln w="9525">
+            <a:solidFill>
+              <a:srgbClr val="B6C0CB"/>
+            </a:solidFill>
+          </a:ln>
+        </p:spPr>
+      </p:cxnSp>
+      <p:sp>
+        <p:nvSpPr>
+          <p:cNvPr id="7" name="cpe|commentary|text|6"/>
           <p:cNvSpPr txBox="1"/>
           <p:nvPr/>
         </p:nvSpPr>
         <p:spPr>
           <a:xfrm>
             <a:off x="502920" y="1481328"/>
-            <a:ext cx="11185855" cy="274320"/>
+            <a:ext cx="3365906" cy="4718304"/>
+          </a:xfrm>
+          <a:prstGeom prst="rect">
+            <a:avLst/>
+          </a:prstGeom>
+          <a:noFill/>
+        </p:spPr>
+        <p:txBody>
+          <a:bodyPr wrap="square" lIns="0" rIns="0" tIns="0" bIns="0" anchor="t">
+            <a:noAutofit/>
+          </a:bodyPr>
+          <a:lstStyle/>
+          <a:p>
+            <a:pPr algn="l" marL="155448" indent="-155448">
+              <a:lnSpc>
+                <a:spcPct val="108000"/>
+              </a:lnSpc>
+              <a:spcAft>
+                <a:spcPts val="800"/>
+              </a:spcAft>
+              <a:buClr>
+                <a:srgbClr val="1C2530"/>
+              </a:buClr>
+              <a:buSzPct val="100000"/>
+              <a:buFont typeface="Arial"/>
+              <a:buChar char="•"/>
+            </a:pPr>
+            <a:r>
+              <a:rPr sz="1400" b="0">
+                <a:solidFill>
+                  <a:srgbClr val="1C2530"/>
+                </a:solidFill>
+                <a:latin typeface="Arial"/>
+              </a:rPr>
+              <a:t>Below </a:t>
+            </a:r>
+            <a:r>
+              <a:rPr sz="1400" b="1">
+                <a:solidFill>
+                  <a:srgbClr val="1C2530"/>
+                </a:solidFill>
+                <a:latin typeface="Arial"/>
+              </a:rPr>
+              <a:t>400 drops a day</a:t>
+            </a:r>
+            <a:r>
+              <a:rPr sz="1400" b="0">
+                <a:solidFill>
+                  <a:srgbClr val="1C2530"/>
+                </a:solidFill>
+                <a:latin typeface="Arial"/>
+              </a:rPr>
+              <a:t> fixed costs dominate</a:t>
+            </a:r>
+          </a:p>
+          <a:p>
+            <a:pPr algn="l" marL="155448" indent="-155448">
+              <a:lnSpc>
+                <a:spcPct val="108000"/>
+              </a:lnSpc>
+              <a:buClr>
+                <a:srgbClr val="1C2530"/>
+              </a:buClr>
+              <a:buSzPct val="100000"/>
+              <a:buFont typeface="Arial"/>
+              <a:buChar char="•"/>
+            </a:pPr>
+            <a:r>
+              <a:rPr sz="1400" b="0">
+                <a:solidFill>
+                  <a:srgbClr val="1C2530"/>
+                </a:solidFill>
+                <a:latin typeface="Arial"/>
+              </a:rPr>
+              <a:t>Lugo and Oviedo are candidates for consolidation</a:t>
+            </a:r>
+          </a:p>
+        </p:txBody>
+      </p:sp>
+      <p:sp>
+        <p:nvSpPr>
+          <p:cNvPr id="8" name="cpe|exhibit|text|7"/>
+          <p:cNvSpPr txBox="1"/>
+          <p:nvPr/>
+        </p:nvSpPr>
+        <p:spPr>
+          <a:xfrm>
+            <a:off x="4298594" y="1481328"/>
+            <a:ext cx="7390181" cy="274320"/>
           </a:xfrm>
           <a:prstGeom prst="rect">
             <a:avLst/>
@@ -7928,15 +8061,15 @@
       </p:sp>
       <p:graphicFrame>
         <p:nvGraphicFramePr>
-          <p:cNvPr id="7" name="cpe|exhibit|chart|6"/>
+          <p:cNvPr id="9" name="cpe|exhibit|chart|8"/>
           <p:cNvGraphicFramePr>
             <a:graphicFrameLocks noGrp="1"/>
           </p:cNvGraphicFramePr>
           <p:nvPr/>
         </p:nvGraphicFramePr>
         <p:xfrm>
-          <a:off x="502920" y="1901952"/>
-          <a:ext cx="11185855" cy="3643884"/>
+          <a:off x="4298594" y="1901952"/>
+          <a:ext cx="7390181" cy="4297680"/>
         </p:xfrm>
         <a:graphic>
           <a:graphicData uri="http://schemas.openxmlformats.org/drawingml/2006/chart">
@@ -7946,14 +8079,14 @@
       </p:graphicFrame>
       <p:sp>
         <p:nvSpPr>
-          <p:cNvPr id="8" name="cpe|exhibit|label|7"/>
-          <p:cNvSpPr txBox="1"/>
-          <p:nvPr/>
-        </p:nvSpPr>
-        <p:spPr>
-          <a:xfrm>
-            <a:off x="1285930" y="5234940"/>
-            <a:ext cx="10179128" cy="310896"/>
+          <p:cNvPr id="10" name="cpe|exhibit|label|9"/>
+          <p:cNvSpPr txBox="1"/>
+          <p:nvPr/>
+        </p:nvSpPr>
+        <p:spPr>
+          <a:xfrm>
+            <a:off x="4815907" y="5888736"/>
+            <a:ext cx="6725065" cy="310896"/>
           </a:xfrm>
           <a:prstGeom prst="rect">
             <a:avLst/>
@@ -7985,13 +8118,13 @@
       </p:sp>
       <p:sp>
         <p:nvSpPr>
-          <p:cNvPr id="9" name="cpe|exhibit|label|8"/>
-          <p:cNvSpPr txBox="1"/>
-          <p:nvPr/>
-        </p:nvSpPr>
-        <p:spPr>
-          <a:xfrm>
-            <a:off x="502920" y="1883664"/>
+          <p:cNvPr id="11" name="cpe|exhibit|label|10"/>
+          <p:cNvSpPr txBox="1"/>
+          <p:nvPr/>
+        </p:nvSpPr>
+        <p:spPr>
+          <a:xfrm>
+            <a:off x="4298594" y="1883664"/>
             <a:ext cx="3200400" cy="237744"/>
           </a:xfrm>
           <a:prstGeom prst="rect">
@@ -8024,13 +8157,13 @@
       </p:sp>
       <p:sp>
         <p:nvSpPr>
-          <p:cNvPr id="10" name="cpe|exhibit|label|9"/>
-          <p:cNvSpPr txBox="1"/>
-          <p:nvPr/>
-        </p:nvSpPr>
-        <p:spPr>
-          <a:xfrm>
-            <a:off x="10656791" y="4559601"/>
+          <p:cNvPr id="12" name="cpe|exhibit|label|11"/>
+          <p:cNvSpPr txBox="1"/>
+          <p:nvPr/>
+        </p:nvSpPr>
+        <p:spPr>
+          <a:xfrm>
+            <a:off x="11041103" y="5150632"/>
             <a:ext cx="461316" cy="219456"/>
           </a:xfrm>
           <a:prstGeom prst="rect">
@@ -8063,13 +8196,13 @@
       </p:sp>
       <p:sp>
         <p:nvSpPr>
-          <p:cNvPr id="11" name="cpe|exhibit|label|10"/>
-          <p:cNvSpPr txBox="1"/>
-          <p:nvPr/>
-        </p:nvSpPr>
-        <p:spPr>
-          <a:xfrm>
-            <a:off x="8911798" y="4341132"/>
+          <p:cNvPr id="13" name="cpe|exhibit|label|12"/>
+          <p:cNvSpPr txBox="1"/>
+          <p:nvPr/>
+        </p:nvSpPr>
+        <p:spPr>
+          <a:xfrm>
+            <a:off x="9888235" y="4885091"/>
             <a:ext cx="644989" cy="219456"/>
           </a:xfrm>
           <a:prstGeom prst="rect">
@@ -8102,13 +8235,13 @@
       </p:sp>
       <p:sp>
         <p:nvSpPr>
-          <p:cNvPr id="12" name="cpe|exhibit|label|11"/>
-          <p:cNvSpPr txBox="1"/>
-          <p:nvPr/>
-        </p:nvSpPr>
-        <p:spPr>
-          <a:xfrm>
-            <a:off x="6076184" y="4122664"/>
+          <p:cNvPr id="14" name="cpe|exhibit|label|13"/>
+          <p:cNvSpPr txBox="1"/>
+          <p:nvPr/>
+        </p:nvSpPr>
+        <p:spPr>
+          <a:xfrm>
+            <a:off x="8014824" y="4619549"/>
             <a:ext cx="550870" cy="219456"/>
           </a:xfrm>
           <a:prstGeom prst="rect">
@@ -8141,13 +8274,13 @@
       </p:sp>
       <p:sp>
         <p:nvSpPr>
-          <p:cNvPr id="13" name="cpe|exhibit|label|12"/>
-          <p:cNvSpPr txBox="1"/>
-          <p:nvPr/>
-        </p:nvSpPr>
-        <p:spPr>
-          <a:xfrm>
-            <a:off x="5639935" y="3904195"/>
+          <p:cNvPr id="15" name="cpe|exhibit|label|14"/>
+          <p:cNvSpPr txBox="1"/>
+          <p:nvPr/>
+        </p:nvSpPr>
+        <p:spPr>
+          <a:xfrm>
+            <a:off x="7726607" y="4354007"/>
             <a:ext cx="447266" cy="219456"/>
           </a:xfrm>
           <a:prstGeom prst="rect">
@@ -8180,13 +8313,13 @@
       </p:sp>
       <p:sp>
         <p:nvSpPr>
-          <p:cNvPr id="14" name="cpe|exhibit|label|13"/>
-          <p:cNvSpPr txBox="1"/>
-          <p:nvPr/>
-        </p:nvSpPr>
-        <p:spPr>
-          <a:xfrm>
-            <a:off x="4185774" y="3685727"/>
+          <p:cNvPr id="16" name="cpe|exhibit|label|15"/>
+          <p:cNvSpPr txBox="1"/>
+          <p:nvPr/>
+        </p:nvSpPr>
+        <p:spPr>
+          <a:xfrm>
+            <a:off x="6765884" y="4088465"/>
             <a:ext cx="426172" cy="219456"/>
           </a:xfrm>
           <a:prstGeom prst="rect">
@@ -8219,13 +8352,13 @@
       </p:sp>
       <p:sp>
         <p:nvSpPr>
-          <p:cNvPr id="15" name="cpe|exhibit|label|14"/>
-          <p:cNvSpPr txBox="1"/>
-          <p:nvPr/>
-        </p:nvSpPr>
-        <p:spPr>
-          <a:xfrm>
-            <a:off x="2793314" y="3540081"/>
+          <p:cNvPr id="17" name="cpe|exhibit|label|16"/>
+          <p:cNvSpPr txBox="1"/>
+          <p:nvPr/>
+        </p:nvSpPr>
+        <p:spPr>
+          <a:xfrm>
+            <a:off x="5570799" y="3911437"/>
             <a:ext cx="609628" cy="219456"/>
           </a:xfrm>
           <a:prstGeom prst="rect">
@@ -8258,13 +8391,13 @@
       </p:sp>
       <p:sp>
         <p:nvSpPr>
-          <p:cNvPr id="16" name="cpe|exhibit|label|15"/>
-          <p:cNvSpPr txBox="1"/>
-          <p:nvPr/>
-        </p:nvSpPr>
-        <p:spPr>
-          <a:xfrm>
-            <a:off x="2222657" y="2447739"/>
+          <p:cNvPr id="18" name="cpe|exhibit|label|17"/>
+          <p:cNvSpPr txBox="1"/>
+          <p:nvPr/>
+        </p:nvSpPr>
+        <p:spPr>
+          <a:xfrm>
+            <a:off x="5468907" y="2583729"/>
             <a:ext cx="383429" cy="219456"/>
           </a:xfrm>
           <a:prstGeom prst="rect">
@@ -8297,13 +8430,13 @@
       </p:sp>
       <p:sp>
         <p:nvSpPr>
-          <p:cNvPr id="17" name="cpe|exhibit|label|16"/>
-          <p:cNvSpPr txBox="1"/>
-          <p:nvPr/>
-        </p:nvSpPr>
-        <p:spPr>
-          <a:xfrm>
-            <a:off x="2161103" y="2849088"/>
+          <p:cNvPr id="19" name="cpe|exhibit|label|18"/>
+          <p:cNvSpPr txBox="1"/>
+          <p:nvPr/>
+        </p:nvSpPr>
+        <p:spPr>
+          <a:xfrm>
+            <a:off x="5661052" y="2849270"/>
             <a:ext cx="503603" cy="219456"/>
           </a:xfrm>
           <a:prstGeom prst="rect">
@@ -8330,123 +8463,6 @@
                 <a:latin typeface="Arial"/>
               </a:rPr>
               <a:t>Oviedo</a:t>
-            </a:r>
-          </a:p>
-        </p:txBody>
-      </p:sp>
-      <p:cxnSp>
-        <p:nvCxnSpPr>
-          <p:cNvPr id="18" name="cpe|commentary|line|17"/>
-          <p:cNvCxnSpPr/>
-          <p:nvPr/>
-        </p:nvCxnSpPr>
-        <p:spPr>
-          <a:xfrm>
-            <a:off x="502920" y="5747004"/>
-            <a:ext cx="11185855" cy="0"/>
-          </a:xfrm>
-          <a:prstGeom prst="line">
-            <a:avLst/>
-          </a:prstGeom>
-          <a:ln w="9525">
-            <a:solidFill>
-              <a:srgbClr val="B6C0CB"/>
-            </a:solidFill>
-          </a:ln>
-        </p:spPr>
-      </p:cxnSp>
-      <p:sp>
-        <p:nvSpPr>
-          <p:cNvPr id="19" name="cpe|commentary|text|18"/>
-          <p:cNvSpPr txBox="1"/>
-          <p:nvPr/>
-        </p:nvSpPr>
-        <p:spPr>
-          <a:xfrm>
-            <a:off x="502920" y="5884164"/>
-            <a:ext cx="5492344" cy="315468"/>
-          </a:xfrm>
-          <a:prstGeom prst="rect">
-            <a:avLst/>
-          </a:prstGeom>
-          <a:noFill/>
-        </p:spPr>
-        <p:txBody>
-          <a:bodyPr wrap="square" lIns="0" rIns="0" tIns="0" bIns="0" anchor="t">
-            <a:noAutofit/>
-          </a:bodyPr>
-          <a:lstStyle/>
-          <a:p>
-            <a:pPr algn="l">
-              <a:lnSpc>
-                <a:spcPct val="100000"/>
-              </a:lnSpc>
-            </a:pPr>
-            <a:r>
-              <a:rPr sz="1200" b="0">
-                <a:solidFill>
-                  <a:srgbClr val="1C2530"/>
-                </a:solidFill>
-                <a:latin typeface="Arial"/>
-              </a:rPr>
-              <a:t>Below </a:t>
-            </a:r>
-            <a:r>
-              <a:rPr sz="1200" b="1">
-                <a:solidFill>
-                  <a:srgbClr val="1C2530"/>
-                </a:solidFill>
-                <a:latin typeface="Arial"/>
-              </a:rPr>
-              <a:t>400 drops a day</a:t>
-            </a:r>
-            <a:r>
-              <a:rPr sz="1200" b="0">
-                <a:solidFill>
-                  <a:srgbClr val="1C2530"/>
-                </a:solidFill>
-                <a:latin typeface="Arial"/>
-              </a:rPr>
-              <a:t> fixed costs dominate</a:t>
-            </a:r>
-          </a:p>
-        </p:txBody>
-      </p:sp>
-      <p:sp>
-        <p:nvSpPr>
-          <p:cNvPr id="20" name="cpe|commentary|text|19"/>
-          <p:cNvSpPr txBox="1"/>
-          <p:nvPr/>
-        </p:nvSpPr>
-        <p:spPr>
-          <a:xfrm>
-            <a:off x="6196432" y="5884164"/>
-            <a:ext cx="5492344" cy="315468"/>
-          </a:xfrm>
-          <a:prstGeom prst="rect">
-            <a:avLst/>
-          </a:prstGeom>
-          <a:noFill/>
-        </p:spPr>
-        <p:txBody>
-          <a:bodyPr wrap="square" lIns="0" rIns="0" tIns="0" bIns="0" anchor="t">
-            <a:noAutofit/>
-          </a:bodyPr>
-          <a:lstStyle/>
-          <a:p>
-            <a:pPr algn="l">
-              <a:lnSpc>
-                <a:spcPct val="100000"/>
-              </a:lnSpc>
-            </a:pPr>
-            <a:r>
-              <a:rPr sz="1200" b="0">
-                <a:solidFill>
-                  <a:srgbClr val="1C2530"/>
-                </a:solidFill>
-                <a:latin typeface="Arial"/>
-              </a:rPr>
-              <a:t>Lugo and Oviedo are candidates for consolidation</a:t>
             </a:r>
           </a:p>
         </p:txBody>
@@ -8528,7 +8544,7 @@
             <a:r>
               <a:rPr sz="3200" b="1">
                 <a:solidFill>
-                  <a:srgbClr val="E08A00"/>
+                  <a:srgbClr val="CC8005"/>
                 </a:solidFill>
                 <a:latin typeface="Arial"/>
               </a:rPr>
@@ -8681,7 +8697,7 @@
         <p:spPr>
           <a:xfrm>
             <a:off x="502920" y="6272784"/>
-            <a:ext cx="10088575" cy="402336"/>
+            <a:ext cx="8808415" cy="402336"/>
           </a:xfrm>
           <a:prstGeom prst="rect">
             <a:avLst/>
@@ -8799,7 +8815,7 @@
         </p:nvGraphicFramePr>
         <p:xfrm>
           <a:off x="502920" y="1901952"/>
-          <a:ext cx="11185855" cy="2234565"/>
+          <a:ext cx="11185855" cy="3136391"/>
         </p:xfrm>
         <a:graphic>
           <a:graphicData uri="http://schemas.openxmlformats.org/drawingml/2006/table">
@@ -8815,7 +8831,7 @@
                 <a:gridCol w="1615379"/>
                 <a:gridCol w="1615379"/>
               </a:tblGrid>
-              <a:tr h="300609">
+              <a:tr h="330327">
                 <a:tc>
                   <a:txBody>
                     <a:bodyPr wrap="square"/>
@@ -8823,7 +8839,7 @@
                     <a:p>
                       <a:pPr algn="l"/>
                       <a:r>
-                        <a:rPr sz="1100" b="1">
+                        <a:rPr sz="1300" b="1">
                           <a:solidFill>
                             <a:srgbClr val="1C2530"/>
                           </a:solidFill>
@@ -8859,7 +8875,7 @@
                     <a:p>
                       <a:pPr algn="ctr"/>
                       <a:r>
-                        <a:rPr sz="1100" b="1">
+                        <a:rPr sz="1300" b="1">
                           <a:solidFill>
                             <a:srgbClr val="13294B"/>
                           </a:solidFill>
@@ -8895,7 +8911,7 @@
                     <a:p>
                       <a:pPr algn="ctr"/>
                       <a:r>
-                        <a:rPr sz="1100" b="1">
+                        <a:rPr sz="1300" b="1">
                           <a:solidFill>
                             <a:srgbClr val="1C2530"/>
                           </a:solidFill>
@@ -8931,7 +8947,7 @@
                     <a:p>
                       <a:pPr algn="ctr"/>
                       <a:r>
-                        <a:rPr sz="1100" b="1">
+                        <a:rPr sz="1300" b="1">
                           <a:solidFill>
                             <a:srgbClr val="1C2530"/>
                           </a:solidFill>
@@ -8967,7 +8983,7 @@
                     <a:p>
                       <a:pPr algn="ctr"/>
                       <a:r>
-                        <a:rPr sz="1100" b="1">
+                        <a:rPr sz="1300" b="1">
                           <a:solidFill>
                             <a:srgbClr val="1C2530"/>
                           </a:solidFill>
@@ -9003,7 +9019,7 @@
                     <a:p>
                       <a:pPr algn="r"/>
                       <a:r>
-                        <a:rPr sz="1100" b="1">
+                        <a:rPr sz="1300" b="1">
                           <a:solidFill>
                             <a:srgbClr val="1C2530"/>
                           </a:solidFill>
@@ -9033,7 +9049,7 @@
                   </a:tcPr>
                 </a:tc>
               </a:tr>
-              <a:tr h="483489">
+              <a:tr h="701516">
                 <a:tc>
                   <a:txBody>
                     <a:bodyPr wrap="square"/>
@@ -9041,7 +9057,7 @@
                     <a:p>
                       <a:pPr algn="l"/>
                       <a:r>
-                        <a:rPr sz="1100" b="0">
+                        <a:rPr sz="1300" b="0">
                           <a:solidFill>
                             <a:srgbClr val="1C2530"/>
                           </a:solidFill>
@@ -9077,7 +9093,7 @@
                     <a:p>
                       <a:pPr algn="ctr"/>
                       <a:r>
-                        <a:rPr sz="1100" b="0">
+                        <a:rPr sz="1300" b="0">
                           <a:solidFill>
                             <a:srgbClr val="1C2530"/>
                           </a:solidFill>
@@ -9115,7 +9131,7 @@
                     <a:p>
                       <a:pPr algn="ctr"/>
                       <a:r>
-                        <a:rPr sz="1100" b="0">
+                        <a:rPr sz="1300" b="0">
                           <a:solidFill>
                             <a:srgbClr val="1C2530"/>
                           </a:solidFill>
@@ -9151,7 +9167,7 @@
                     <a:p>
                       <a:pPr algn="ctr"/>
                       <a:r>
-                        <a:rPr sz="1100" b="0">
+                        <a:rPr sz="1300" b="0">
                           <a:solidFill>
                             <a:srgbClr val="1C2530"/>
                           </a:solidFill>
@@ -9187,7 +9203,7 @@
                     <a:p>
                       <a:pPr algn="ctr"/>
                       <a:r>
-                        <a:rPr sz="1100" b="0">
+                        <a:rPr sz="1300" b="0">
                           <a:solidFill>
                             <a:srgbClr val="1C2530"/>
                           </a:solidFill>
@@ -9223,7 +9239,7 @@
                     <a:p>
                       <a:pPr algn="r"/>
                       <a:r>
-                        <a:rPr sz="1100" b="0">
+                        <a:rPr sz="1300" b="0">
                           <a:solidFill>
                             <a:srgbClr val="1C2530"/>
                           </a:solidFill>
@@ -9253,7 +9269,7 @@
                   </a:tcPr>
                 </a:tc>
               </a:tr>
-              <a:tr h="483489">
+              <a:tr h="701516">
                 <a:tc>
                   <a:txBody>
                     <a:bodyPr wrap="square"/>
@@ -9261,7 +9277,7 @@
                     <a:p>
                       <a:pPr algn="l"/>
                       <a:r>
-                        <a:rPr sz="1100" b="0">
+                        <a:rPr sz="1300" b="0">
                           <a:solidFill>
                             <a:srgbClr val="1C2530"/>
                           </a:solidFill>
@@ -9297,7 +9313,7 @@
                     <a:p>
                       <a:pPr algn="ctr"/>
                       <a:r>
-                        <a:rPr sz="1100" b="0">
+                        <a:rPr sz="1300" b="0">
                           <a:solidFill>
                             <a:srgbClr val="1C2530"/>
                           </a:solidFill>
@@ -9335,7 +9351,7 @@
                     <a:p>
                       <a:pPr algn="ctr"/>
                       <a:r>
-                        <a:rPr sz="1100" b="0">
+                        <a:rPr sz="1300" b="0">
                           <a:solidFill>
                             <a:srgbClr val="1C2530"/>
                           </a:solidFill>
@@ -9371,7 +9387,7 @@
                     <a:p>
                       <a:pPr algn="ctr"/>
                       <a:r>
-                        <a:rPr sz="1100" b="0">
+                        <a:rPr sz="1300" b="0">
                           <a:solidFill>
                             <a:srgbClr val="1C2530"/>
                           </a:solidFill>
@@ -9407,7 +9423,7 @@
                     <a:p>
                       <a:pPr algn="ctr"/>
                       <a:r>
-                        <a:rPr sz="1100" b="0">
+                        <a:rPr sz="1300" b="0">
                           <a:solidFill>
                             <a:srgbClr val="1C2530"/>
                           </a:solidFill>
@@ -9443,7 +9459,7 @@
                     <a:p>
                       <a:pPr algn="r"/>
                       <a:r>
-                        <a:rPr sz="1100" b="0">
+                        <a:rPr sz="1300" b="0">
                           <a:solidFill>
                             <a:srgbClr val="1C2530"/>
                           </a:solidFill>
@@ -9473,7 +9489,7 @@
                   </a:tcPr>
                 </a:tc>
               </a:tr>
-              <a:tr h="483489">
+              <a:tr h="701516">
                 <a:tc>
                   <a:txBody>
                     <a:bodyPr wrap="square"/>
@@ -9481,7 +9497,7 @@
                     <a:p>
                       <a:pPr algn="l"/>
                       <a:r>
-                        <a:rPr sz="1100" b="0">
+                        <a:rPr sz="1300" b="0">
                           <a:solidFill>
                             <a:srgbClr val="1C2530"/>
                           </a:solidFill>
@@ -9517,7 +9533,7 @@
                     <a:p>
                       <a:pPr algn="ctr"/>
                       <a:r>
-                        <a:rPr sz="1100" b="0">
+                        <a:rPr sz="1300" b="0">
                           <a:solidFill>
                             <a:srgbClr val="1C2530"/>
                           </a:solidFill>
@@ -9555,7 +9571,7 @@
                     <a:p>
                       <a:pPr algn="ctr"/>
                       <a:r>
-                        <a:rPr sz="1100" b="0">
+                        <a:rPr sz="1300" b="0">
                           <a:solidFill>
                             <a:srgbClr val="1C2530"/>
                           </a:solidFill>
@@ -9591,7 +9607,7 @@
                     <a:p>
                       <a:pPr algn="ctr"/>
                       <a:r>
-                        <a:rPr sz="1100" b="0">
+                        <a:rPr sz="1300" b="0">
                           <a:solidFill>
                             <a:srgbClr val="1C2530"/>
                           </a:solidFill>
@@ -9627,7 +9643,7 @@
                     <a:p>
                       <a:pPr algn="ctr"/>
                       <a:r>
-                        <a:rPr sz="1100" b="0">
+                        <a:rPr sz="1300" b="0">
                           <a:solidFill>
                             <a:srgbClr val="1C2530"/>
                           </a:solidFill>
@@ -9663,7 +9679,7 @@
                     <a:p>
                       <a:pPr algn="r"/>
                       <a:r>
-                        <a:rPr sz="1100" b="0">
+                        <a:rPr sz="1300" b="0">
                           <a:solidFill>
                             <a:srgbClr val="1C2530"/>
                           </a:solidFill>
@@ -9693,7 +9709,7 @@
                   </a:tcPr>
                 </a:tc>
               </a:tr>
-              <a:tr h="483489">
+              <a:tr h="701516">
                 <a:tc>
                   <a:txBody>
                     <a:bodyPr wrap="square"/>
@@ -9701,7 +9717,7 @@
                     <a:p>
                       <a:pPr algn="l"/>
                       <a:r>
-                        <a:rPr sz="1100" b="0">
+                        <a:rPr sz="1300" b="0">
                           <a:solidFill>
                             <a:srgbClr val="1C2530"/>
                           </a:solidFill>
@@ -9737,7 +9753,7 @@
                     <a:p>
                       <a:pPr algn="ctr"/>
                       <a:r>
-                        <a:rPr sz="1100" b="0">
+                        <a:rPr sz="1300" b="0">
                           <a:solidFill>
                             <a:srgbClr val="1C2530"/>
                           </a:solidFill>
@@ -9775,7 +9791,7 @@
                     <a:p>
                       <a:pPr algn="ctr"/>
                       <a:r>
-                        <a:rPr sz="1100" b="0">
+                        <a:rPr sz="1300" b="0">
                           <a:solidFill>
                             <a:srgbClr val="1C2530"/>
                           </a:solidFill>
@@ -9811,7 +9827,7 @@
                     <a:p>
                       <a:pPr algn="ctr"/>
                       <a:r>
-                        <a:rPr sz="1100" b="0">
+                        <a:rPr sz="1300" b="0">
                           <a:solidFill>
                             <a:srgbClr val="1C2530"/>
                           </a:solidFill>
@@ -9847,7 +9863,7 @@
                     <a:p>
                       <a:pPr algn="ctr"/>
                       <a:r>
-                        <a:rPr sz="1100" b="0">
+                        <a:rPr sz="1300" b="0">
                           <a:solidFill>
                             <a:srgbClr val="1C2530"/>
                           </a:solidFill>
@@ -9883,7 +9899,7 @@
                     <a:p>
                       <a:pPr algn="r"/>
                       <a:r>
-                        <a:rPr sz="1100" b="0">
+                        <a:rPr sz="1300" b="0">
                           <a:solidFill>
                             <a:srgbClr val="1C2530"/>
                           </a:solidFill>
@@ -9925,7 +9941,7 @@
         </p:nvSpPr>
         <p:spPr>
           <a:xfrm>
-            <a:off x="4300698" y="2325434"/>
+            <a:off x="4300698" y="2464165"/>
             <a:ext cx="237744" cy="237744"/>
           </a:xfrm>
           <a:prstGeom prst="ellipse">
@@ -9956,7 +9972,7 @@
         </p:nvSpPr>
         <p:spPr>
           <a:xfrm>
-            <a:off x="4300698" y="2325434"/>
+            <a:off x="4300698" y="2464165"/>
             <a:ext cx="237744" cy="237744"/>
           </a:xfrm>
           <a:prstGeom prst="ellipse">
@@ -9987,7 +10003,7 @@
         </p:nvSpPr>
         <p:spPr>
           <a:xfrm>
-            <a:off x="5916077" y="2325434"/>
+            <a:off x="5916077" y="2464165"/>
             <a:ext cx="237744" cy="237744"/>
           </a:xfrm>
           <a:prstGeom prst="ellipse">
@@ -10018,7 +10034,7 @@
         </p:nvSpPr>
         <p:spPr>
           <a:xfrm>
-            <a:off x="5916077" y="2325434"/>
+            <a:off x="5916077" y="2464165"/>
             <a:ext cx="237744" cy="237744"/>
           </a:xfrm>
           <a:prstGeom prst="pie">
@@ -10050,7 +10066,7 @@
         </p:nvSpPr>
         <p:spPr>
           <a:xfrm>
-            <a:off x="7531456" y="2325434"/>
+            <a:off x="7531456" y="2464165"/>
             <a:ext cx="237744" cy="237744"/>
           </a:xfrm>
           <a:prstGeom prst="ellipse">
@@ -10081,7 +10097,7 @@
         </p:nvSpPr>
         <p:spPr>
           <a:xfrm>
-            <a:off x="7531456" y="2325434"/>
+            <a:off x="7531456" y="2464165"/>
             <a:ext cx="237744" cy="237744"/>
           </a:xfrm>
           <a:prstGeom prst="pie">
@@ -10113,7 +10129,7 @@
         </p:nvSpPr>
         <p:spPr>
           <a:xfrm>
-            <a:off x="9146835" y="2325434"/>
+            <a:off x="9146835" y="2464165"/>
             <a:ext cx="237744" cy="237744"/>
           </a:xfrm>
           <a:prstGeom prst="ellipse">
@@ -10144,7 +10160,7 @@
         </p:nvSpPr>
         <p:spPr>
           <a:xfrm>
-            <a:off x="9146835" y="2325434"/>
+            <a:off x="9146835" y="2464165"/>
             <a:ext cx="237744" cy="237744"/>
           </a:xfrm>
           <a:prstGeom prst="pie">
@@ -10176,7 +10192,7 @@
         </p:nvSpPr>
         <p:spPr>
           <a:xfrm>
-            <a:off x="4300698" y="2808922"/>
+            <a:off x="4300698" y="3165681"/>
             <a:ext cx="237744" cy="237744"/>
           </a:xfrm>
           <a:prstGeom prst="ellipse">
@@ -10207,7 +10223,7 @@
         </p:nvSpPr>
         <p:spPr>
           <a:xfrm>
-            <a:off x="4300698" y="2808922"/>
+            <a:off x="4300698" y="3165681"/>
             <a:ext cx="237744" cy="237744"/>
           </a:xfrm>
           <a:prstGeom prst="ellipse">
@@ -10238,7 +10254,7 @@
         </p:nvSpPr>
         <p:spPr>
           <a:xfrm>
-            <a:off x="5916077" y="2808922"/>
+            <a:off x="5916077" y="3165681"/>
             <a:ext cx="237744" cy="237744"/>
           </a:xfrm>
           <a:prstGeom prst="ellipse">
@@ -10269,7 +10285,7 @@
         </p:nvSpPr>
         <p:spPr>
           <a:xfrm>
-            <a:off x="5916077" y="2808922"/>
+            <a:off x="5916077" y="3165681"/>
             <a:ext cx="237744" cy="237744"/>
           </a:xfrm>
           <a:prstGeom prst="pie">
@@ -10301,7 +10317,7 @@
         </p:nvSpPr>
         <p:spPr>
           <a:xfrm>
-            <a:off x="7531456" y="2808922"/>
+            <a:off x="7531456" y="3165681"/>
             <a:ext cx="237744" cy="237744"/>
           </a:xfrm>
           <a:prstGeom prst="ellipse">
@@ -10332,7 +10348,7 @@
         </p:nvSpPr>
         <p:spPr>
           <a:xfrm>
-            <a:off x="7531456" y="2808922"/>
+            <a:off x="7531456" y="3165681"/>
             <a:ext cx="237744" cy="237744"/>
           </a:xfrm>
           <a:prstGeom prst="pie">
@@ -10364,7 +10380,7 @@
         </p:nvSpPr>
         <p:spPr>
           <a:xfrm>
-            <a:off x="9146835" y="2808922"/>
+            <a:off x="9146835" y="3165681"/>
             <a:ext cx="237744" cy="237744"/>
           </a:xfrm>
           <a:prstGeom prst="ellipse">
@@ -10395,7 +10411,7 @@
         </p:nvSpPr>
         <p:spPr>
           <a:xfrm>
-            <a:off x="9146835" y="2808922"/>
+            <a:off x="9146835" y="3165681"/>
             <a:ext cx="237744" cy="237744"/>
           </a:xfrm>
           <a:prstGeom prst="pie">
@@ -10427,7 +10443,7 @@
         </p:nvSpPr>
         <p:spPr>
           <a:xfrm>
-            <a:off x="4300698" y="3292412"/>
+            <a:off x="4300698" y="3867198"/>
             <a:ext cx="237744" cy="237744"/>
           </a:xfrm>
           <a:prstGeom prst="ellipse">
@@ -10458,7 +10474,7 @@
         </p:nvSpPr>
         <p:spPr>
           <a:xfrm>
-            <a:off x="4300698" y="3292412"/>
+            <a:off x="4300698" y="3867198"/>
             <a:ext cx="237744" cy="237744"/>
           </a:xfrm>
           <a:prstGeom prst="pie">
@@ -10490,7 +10506,7 @@
         </p:nvSpPr>
         <p:spPr>
           <a:xfrm>
-            <a:off x="5916077" y="3292412"/>
+            <a:off x="5916077" y="3867198"/>
             <a:ext cx="237744" cy="237744"/>
           </a:xfrm>
           <a:prstGeom prst="ellipse">
@@ -10521,7 +10537,7 @@
         </p:nvSpPr>
         <p:spPr>
           <a:xfrm>
-            <a:off x="5916077" y="3292412"/>
+            <a:off x="5916077" y="3867198"/>
             <a:ext cx="237744" cy="237744"/>
           </a:xfrm>
           <a:prstGeom prst="ellipse">
@@ -10552,7 +10568,7 @@
         </p:nvSpPr>
         <p:spPr>
           <a:xfrm>
-            <a:off x="7531456" y="3292412"/>
+            <a:off x="7531456" y="3867198"/>
             <a:ext cx="237744" cy="237744"/>
           </a:xfrm>
           <a:prstGeom prst="ellipse">
@@ -10583,7 +10599,7 @@
         </p:nvSpPr>
         <p:spPr>
           <a:xfrm>
-            <a:off x="7531456" y="3292412"/>
+            <a:off x="7531456" y="3867198"/>
             <a:ext cx="237744" cy="237744"/>
           </a:xfrm>
           <a:prstGeom prst="pie">
@@ -10615,7 +10631,7 @@
         </p:nvSpPr>
         <p:spPr>
           <a:xfrm>
-            <a:off x="9146835" y="3292412"/>
+            <a:off x="9146835" y="3867198"/>
             <a:ext cx="237744" cy="237744"/>
           </a:xfrm>
           <a:prstGeom prst="ellipse">
@@ -10646,7 +10662,7 @@
         </p:nvSpPr>
         <p:spPr>
           <a:xfrm>
-            <a:off x="9146835" y="3292412"/>
+            <a:off x="9146835" y="3867198"/>
             <a:ext cx="237744" cy="237744"/>
           </a:xfrm>
           <a:prstGeom prst="pie">
@@ -10678,7 +10694,7 @@
         </p:nvSpPr>
         <p:spPr>
           <a:xfrm>
-            <a:off x="4300698" y="3775901"/>
+            <a:off x="4300698" y="4568714"/>
             <a:ext cx="237744" cy="237744"/>
           </a:xfrm>
           <a:prstGeom prst="ellipse">
@@ -10709,7 +10725,7 @@
         </p:nvSpPr>
         <p:spPr>
           <a:xfrm>
-            <a:off x="4300698" y="3775901"/>
+            <a:off x="4300698" y="4568714"/>
             <a:ext cx="237744" cy="237744"/>
           </a:xfrm>
           <a:prstGeom prst="pie">
@@ -10741,7 +10757,7 @@
         </p:nvSpPr>
         <p:spPr>
           <a:xfrm>
-            <a:off x="5916077" y="3775901"/>
+            <a:off x="5916077" y="4568714"/>
             <a:ext cx="237744" cy="237744"/>
           </a:xfrm>
           <a:prstGeom prst="ellipse">
@@ -10772,7 +10788,7 @@
         </p:nvSpPr>
         <p:spPr>
           <a:xfrm>
-            <a:off x="5916077" y="3775901"/>
+            <a:off x="5916077" y="4568714"/>
             <a:ext cx="237744" cy="237744"/>
           </a:xfrm>
           <a:prstGeom prst="ellipse">
@@ -10803,7 +10819,7 @@
         </p:nvSpPr>
         <p:spPr>
           <a:xfrm>
-            <a:off x="7531456" y="3775901"/>
+            <a:off x="7531456" y="4568714"/>
             <a:ext cx="237744" cy="237744"/>
           </a:xfrm>
           <a:prstGeom prst="ellipse">
@@ -10834,7 +10850,7 @@
         </p:nvSpPr>
         <p:spPr>
           <a:xfrm>
-            <a:off x="7531456" y="3775901"/>
+            <a:off x="7531456" y="4568714"/>
             <a:ext cx="237744" cy="237744"/>
           </a:xfrm>
           <a:prstGeom prst="ellipse">
@@ -10865,7 +10881,7 @@
         </p:nvSpPr>
         <p:spPr>
           <a:xfrm>
-            <a:off x="9146835" y="3775901"/>
+            <a:off x="9146835" y="4568714"/>
             <a:ext cx="237744" cy="237744"/>
           </a:xfrm>
           <a:prstGeom prst="ellipse">
@@ -10896,7 +10912,7 @@
         </p:nvSpPr>
         <p:spPr>
           <a:xfrm>
-            <a:off x="9146835" y="3775901"/>
+            <a:off x="9146835" y="4568714"/>
             <a:ext cx="237744" cy="237744"/>
           </a:xfrm>
           <a:prstGeom prst="ellipse">
@@ -10927,7 +10943,7 @@
         </p:nvSpPr>
         <p:spPr>
           <a:xfrm>
-            <a:off x="502920" y="4264533"/>
+            <a:off x="502920" y="5166360"/>
             <a:ext cx="164592" cy="164592"/>
           </a:xfrm>
           <a:prstGeom prst="ellipse">
@@ -10958,7 +10974,7 @@
         </p:nvSpPr>
         <p:spPr>
           <a:xfrm>
-            <a:off x="722376" y="4227957"/>
+            <a:off x="722376" y="5129784"/>
             <a:ext cx="731520" cy="237744"/>
           </a:xfrm>
           <a:prstGeom prst="rect">
@@ -10997,7 +11013,7 @@
         </p:nvSpPr>
         <p:spPr>
           <a:xfrm>
-            <a:off x="1417320" y="4264533"/>
+            <a:off x="1417320" y="5166360"/>
             <a:ext cx="164592" cy="164592"/>
           </a:xfrm>
           <a:prstGeom prst="ellipse">
@@ -11028,7 +11044,7 @@
         </p:nvSpPr>
         <p:spPr>
           <a:xfrm>
-            <a:off x="1417320" y="4264533"/>
+            <a:off x="1417320" y="5166360"/>
             <a:ext cx="164592" cy="164592"/>
           </a:xfrm>
           <a:prstGeom prst="pie">
@@ -11060,7 +11076,7 @@
         </p:nvSpPr>
         <p:spPr>
           <a:xfrm>
-            <a:off x="1636776" y="4227957"/>
+            <a:off x="1636776" y="5129784"/>
             <a:ext cx="731520" cy="237744"/>
           </a:xfrm>
           <a:prstGeom prst="rect">
@@ -11099,7 +11115,7 @@
         </p:nvSpPr>
         <p:spPr>
           <a:xfrm>
-            <a:off x="2331720" y="4264533"/>
+            <a:off x="2331720" y="5166360"/>
             <a:ext cx="164592" cy="164592"/>
           </a:xfrm>
           <a:prstGeom prst="ellipse">
@@ -11130,7 +11146,7 @@
         </p:nvSpPr>
         <p:spPr>
           <a:xfrm>
-            <a:off x="2331720" y="4264533"/>
+            <a:off x="2331720" y="5166360"/>
             <a:ext cx="164592" cy="164592"/>
           </a:xfrm>
           <a:prstGeom prst="ellipse">
@@ -11161,7 +11177,7 @@
         </p:nvSpPr>
         <p:spPr>
           <a:xfrm>
-            <a:off x="2551176" y="4227957"/>
+            <a:off x="2551176" y="5129784"/>
             <a:ext cx="731520" cy="237744"/>
           </a:xfrm>
           <a:prstGeom prst="rect">
@@ -11394,7 +11410,7 @@
         <p:spPr>
           <a:xfrm>
             <a:off x="502920" y="6272784"/>
-            <a:ext cx="10088575" cy="402336"/>
+            <a:ext cx="8808415" cy="402336"/>
           </a:xfrm>
           <a:prstGeom prst="rect">
             <a:avLst/>
@@ -12541,7 +12557,7 @@
         <p:spPr>
           <a:xfrm>
             <a:off x="502920" y="6272784"/>
-            <a:ext cx="10088575" cy="402336"/>
+            <a:ext cx="8808415" cy="402336"/>
           </a:xfrm>
           <a:prstGeom prst="rect">
             <a:avLst/>
@@ -13878,7 +13894,7 @@
         <p:spPr>
           <a:xfrm>
             <a:off x="502920" y="6272784"/>
-            <a:ext cx="10088575" cy="402336"/>
+            <a:ext cx="8808415" cy="402336"/>
           </a:xfrm>
           <a:prstGeom prst="rect">
             <a:avLst/>
@@ -14868,7 +14884,7 @@
         <p:spPr>
           <a:xfrm>
             <a:off x="502920" y="6272784"/>
-            <a:ext cx="10088575" cy="402336"/>
+            <a:ext cx="8808415" cy="402336"/>
           </a:xfrm>
           <a:prstGeom prst="rect">
             <a:avLst/>
@@ -16141,7 +16157,7 @@
         <p:spPr>
           <a:xfrm>
             <a:off x="502920" y="6272784"/>
-            <a:ext cx="10088575" cy="402336"/>
+            <a:ext cx="8808415" cy="402336"/>
           </a:xfrm>
           <a:prstGeom prst="rect">
             <a:avLst/>
@@ -17022,7 +17038,7 @@
         <p:spPr>
           <a:xfrm>
             <a:off x="502920" y="6272784"/>
-            <a:ext cx="10088575" cy="402336"/>
+            <a:ext cx="8808415" cy="402336"/>
           </a:xfrm>
           <a:prstGeom prst="rect">
             <a:avLst/>
@@ -18279,7 +18295,7 @@
             <a:r>
               <a:rPr sz="3200" b="1">
                 <a:solidFill>
-                  <a:srgbClr val="E08A00"/>
+                  <a:srgbClr val="CC8005"/>
                 </a:solidFill>
                 <a:latin typeface="Arial"/>
               </a:rPr>
@@ -18432,7 +18448,7 @@
         <p:spPr>
           <a:xfrm>
             <a:off x="502920" y="6272784"/>
-            <a:ext cx="10088575" cy="402336"/>
+            <a:ext cx="8808415" cy="402336"/>
           </a:xfrm>
           <a:prstGeom prst="rect">
             <a:avLst/>
@@ -18550,7 +18566,7 @@
         </p:nvGraphicFramePr>
         <p:xfrm>
           <a:off x="502920" y="1901952"/>
-          <a:ext cx="11185854" cy="2881503"/>
+          <a:ext cx="11185854" cy="4297679"/>
         </p:xfrm>
         <a:graphic>
           <a:graphicData uri="http://schemas.openxmlformats.org/drawingml/2006/table">
@@ -18560,13 +18576,13 @@
               </a:tblPr>
               <a:tblGrid>
                 <a:gridCol w="2743200"/>
-                <a:gridCol w="2013876"/>
-                <a:gridCol w="1045646"/>
-                <a:gridCol w="1045646"/>
-                <a:gridCol w="1045646"/>
+                <a:gridCol w="2025369"/>
+                <a:gridCol w="1041815"/>
+                <a:gridCol w="1041815"/>
+                <a:gridCol w="1041815"/>
                 <a:gridCol w="3291840"/>
               </a:tblGrid>
-              <a:tr h="464058">
+              <a:tr h="523494">
                 <a:tc>
                   <a:txBody>
                     <a:bodyPr wrap="square"/>
@@ -18574,7 +18590,7 @@
                     <a:p>
                       <a:pPr algn="l"/>
                       <a:r>
-                        <a:rPr sz="1100" b="1">
+                        <a:rPr sz="1300" b="1">
                           <a:solidFill>
                             <a:srgbClr val="1C2530"/>
                           </a:solidFill>
@@ -18610,7 +18626,7 @@
                     <a:p>
                       <a:pPr algn="l"/>
                       <a:r>
-                        <a:rPr sz="1100" b="1">
+                        <a:rPr sz="1300" b="1">
                           <a:solidFill>
                             <a:srgbClr val="1C2530"/>
                           </a:solidFill>
@@ -18646,7 +18662,7 @@
                     <a:p>
                       <a:pPr algn="r"/>
                       <a:r>
-                        <a:rPr sz="1100" b="1">
+                        <a:rPr sz="1300" b="1">
                           <a:solidFill>
                             <a:srgbClr val="1C2530"/>
                           </a:solidFill>
@@ -18682,7 +18698,7 @@
                     <a:p>
                       <a:pPr algn="r"/>
                       <a:r>
-                        <a:rPr sz="1100" b="1">
+                        <a:rPr sz="1300" b="1">
                           <a:solidFill>
                             <a:srgbClr val="1C2530"/>
                           </a:solidFill>
@@ -18718,7 +18734,7 @@
                     <a:p>
                       <a:pPr algn="ctr"/>
                       <a:r>
-                        <a:rPr sz="1100" b="1">
+                        <a:rPr sz="1300" b="1">
                           <a:solidFill>
                             <a:srgbClr val="1C2530"/>
                           </a:solidFill>
@@ -18754,7 +18770,7 @@
                     <a:p>
                       <a:pPr algn="l"/>
                       <a:r>
-                        <a:rPr sz="1100" b="1">
+                        <a:rPr sz="1300" b="1">
                           <a:solidFill>
                             <a:srgbClr val="1C2530"/>
                           </a:solidFill>
@@ -18784,7 +18800,7 @@
                   </a:tcPr>
                 </a:tc>
               </a:tr>
-              <a:tr h="483489">
+              <a:tr h="754837">
                 <a:tc>
                   <a:txBody>
                     <a:bodyPr wrap="square"/>
@@ -18792,7 +18808,7 @@
                     <a:p>
                       <a:pPr algn="l"/>
                       <a:r>
-                        <a:rPr sz="1100" b="0">
+                        <a:rPr sz="1300" b="0">
                           <a:solidFill>
                             <a:srgbClr val="1C2530"/>
                           </a:solidFill>
@@ -18828,7 +18844,7 @@
                     <a:p>
                       <a:pPr algn="l"/>
                       <a:r>
-                        <a:rPr sz="1100" b="0">
+                        <a:rPr sz="1300" b="0">
                           <a:solidFill>
                             <a:srgbClr val="1C2530"/>
                           </a:solidFill>
@@ -18864,7 +18880,7 @@
                     <a:p>
                       <a:pPr algn="r"/>
                       <a:r>
-                        <a:rPr sz="1100" b="0">
+                        <a:rPr sz="1300" b="0">
                           <a:solidFill>
                             <a:srgbClr val="1C2530"/>
                           </a:solidFill>
@@ -18900,7 +18916,7 @@
                     <a:p>
                       <a:pPr algn="r"/>
                       <a:r>
-                        <a:rPr sz="1100" b="0">
+                        <a:rPr sz="1300" b="0">
                           <a:solidFill>
                             <a:srgbClr val="1C2530"/>
                           </a:solidFill>
@@ -18936,7 +18952,7 @@
                     <a:p>
                       <a:pPr algn="ctr"/>
                       <a:r>
-                        <a:rPr sz="1100" b="0">
+                        <a:rPr sz="1300" b="0">
                           <a:solidFill>
                             <a:srgbClr val="1C2530"/>
                           </a:solidFill>
@@ -18972,7 +18988,7 @@
                     <a:p>
                       <a:pPr algn="l"/>
                       <a:r>
-                        <a:rPr sz="1100" b="0">
+                        <a:rPr sz="1300" b="0">
                           <a:solidFill>
                             <a:srgbClr val="1C2530"/>
                           </a:solidFill>
@@ -19002,7 +19018,7 @@
                   </a:tcPr>
                 </a:tc>
               </a:tr>
-              <a:tr h="483489">
+              <a:tr h="754837">
                 <a:tc>
                   <a:txBody>
                     <a:bodyPr wrap="square"/>
@@ -19010,7 +19026,7 @@
                     <a:p>
                       <a:pPr algn="l"/>
                       <a:r>
-                        <a:rPr sz="1100" b="0">
+                        <a:rPr sz="1300" b="0">
                           <a:solidFill>
                             <a:srgbClr val="1C2530"/>
                           </a:solidFill>
@@ -19046,7 +19062,7 @@
                     <a:p>
                       <a:pPr algn="l"/>
                       <a:r>
-                        <a:rPr sz="1100" b="0">
+                        <a:rPr sz="1300" b="0">
                           <a:solidFill>
                             <a:srgbClr val="1C2530"/>
                           </a:solidFill>
@@ -19082,7 +19098,7 @@
                     <a:p>
                       <a:pPr algn="r"/>
                       <a:r>
-                        <a:rPr sz="1100" b="0">
+                        <a:rPr sz="1300" b="0">
                           <a:solidFill>
                             <a:srgbClr val="1C2530"/>
                           </a:solidFill>
@@ -19118,7 +19134,7 @@
                     <a:p>
                       <a:pPr algn="r"/>
                       <a:r>
-                        <a:rPr sz="1100" b="0">
+                        <a:rPr sz="1300" b="0">
                           <a:solidFill>
                             <a:srgbClr val="1C2530"/>
                           </a:solidFill>
@@ -19154,7 +19170,7 @@
                     <a:p>
                       <a:pPr algn="ctr"/>
                       <a:r>
-                        <a:rPr sz="1100" b="0">
+                        <a:rPr sz="1300" b="0">
                           <a:solidFill>
                             <a:srgbClr val="1C2530"/>
                           </a:solidFill>
@@ -19190,7 +19206,7 @@
                     <a:p>
                       <a:pPr algn="l"/>
                       <a:r>
-                        <a:rPr sz="1100" b="0">
+                        <a:rPr sz="1300" b="0">
                           <a:solidFill>
                             <a:srgbClr val="1C2530"/>
                           </a:solidFill>
@@ -19220,7 +19236,7 @@
                   </a:tcPr>
                 </a:tc>
               </a:tr>
-              <a:tr h="483489">
+              <a:tr h="754837">
                 <a:tc>
                   <a:txBody>
                     <a:bodyPr wrap="square"/>
@@ -19228,7 +19244,7 @@
                     <a:p>
                       <a:pPr algn="l"/>
                       <a:r>
-                        <a:rPr sz="1100" b="0">
+                        <a:rPr sz="1300" b="0">
                           <a:solidFill>
                             <a:srgbClr val="1C2530"/>
                           </a:solidFill>
@@ -19264,7 +19280,7 @@
                     <a:p>
                       <a:pPr algn="l"/>
                       <a:r>
-                        <a:rPr sz="1100" b="0">
+                        <a:rPr sz="1300" b="0">
                           <a:solidFill>
                             <a:srgbClr val="1C2530"/>
                           </a:solidFill>
@@ -19300,7 +19316,7 @@
                     <a:p>
                       <a:pPr algn="r"/>
                       <a:r>
-                        <a:rPr sz="1100" b="0">
+                        <a:rPr sz="1300" b="0">
                           <a:solidFill>
                             <a:srgbClr val="1C2530"/>
                           </a:solidFill>
@@ -19336,7 +19352,7 @@
                     <a:p>
                       <a:pPr algn="r"/>
                       <a:r>
-                        <a:rPr sz="1100" b="0">
+                        <a:rPr sz="1300" b="0">
                           <a:solidFill>
                             <a:srgbClr val="1C2530"/>
                           </a:solidFill>
@@ -19372,7 +19388,7 @@
                     <a:p>
                       <a:pPr algn="ctr"/>
                       <a:r>
-                        <a:rPr sz="1100" b="0">
+                        <a:rPr sz="1300" b="0">
                           <a:solidFill>
                             <a:srgbClr val="1C2530"/>
                           </a:solidFill>
@@ -19408,7 +19424,7 @@
                     <a:p>
                       <a:pPr algn="l"/>
                       <a:r>
-                        <a:rPr sz="1100" b="0">
+                        <a:rPr sz="1300" b="0">
                           <a:solidFill>
                             <a:srgbClr val="1C2530"/>
                           </a:solidFill>
@@ -19438,7 +19454,7 @@
                   </a:tcPr>
                 </a:tc>
               </a:tr>
-              <a:tr h="483489">
+              <a:tr h="754837">
                 <a:tc>
                   <a:txBody>
                     <a:bodyPr wrap="square"/>
@@ -19446,7 +19462,7 @@
                     <a:p>
                       <a:pPr algn="l"/>
                       <a:r>
-                        <a:rPr sz="1100" b="0">
+                        <a:rPr sz="1300" b="0">
                           <a:solidFill>
                             <a:srgbClr val="1C2530"/>
                           </a:solidFill>
@@ -19482,7 +19498,7 @@
                     <a:p>
                       <a:pPr algn="l"/>
                       <a:r>
-                        <a:rPr sz="1100" b="0">
+                        <a:rPr sz="1300" b="0">
                           <a:solidFill>
                             <a:srgbClr val="1C2530"/>
                           </a:solidFill>
@@ -19518,7 +19534,7 @@
                     <a:p>
                       <a:pPr algn="r"/>
                       <a:r>
-                        <a:rPr sz="1100" b="0">
+                        <a:rPr sz="1300" b="0">
                           <a:solidFill>
                             <a:srgbClr val="1C2530"/>
                           </a:solidFill>
@@ -19554,7 +19570,7 @@
                     <a:p>
                       <a:pPr algn="r"/>
                       <a:r>
-                        <a:rPr sz="1100" b="0">
+                        <a:rPr sz="1300" b="0">
                           <a:solidFill>
                             <a:srgbClr val="1C2530"/>
                           </a:solidFill>
@@ -19590,7 +19606,7 @@
                     <a:p>
                       <a:pPr algn="ctr"/>
                       <a:r>
-                        <a:rPr sz="1100" b="0">
+                        <a:rPr sz="1300" b="0">
                           <a:solidFill>
                             <a:srgbClr val="1C2530"/>
                           </a:solidFill>
@@ -19626,7 +19642,7 @@
                     <a:p>
                       <a:pPr algn="l"/>
                       <a:r>
-                        <a:rPr sz="1100" b="0">
+                        <a:rPr sz="1300" b="0">
                           <a:solidFill>
                             <a:srgbClr val="1C2530"/>
                           </a:solidFill>
@@ -19656,7 +19672,7 @@
                   </a:tcPr>
                 </a:tc>
               </a:tr>
-              <a:tr h="483489">
+              <a:tr h="754837">
                 <a:tc>
                   <a:txBody>
                     <a:bodyPr wrap="square"/>
@@ -19664,7 +19680,7 @@
                     <a:p>
                       <a:pPr algn="l"/>
                       <a:r>
-                        <a:rPr sz="1100" b="1">
+                        <a:rPr sz="1300" b="1">
                           <a:solidFill>
                             <a:srgbClr val="1C2530"/>
                           </a:solidFill>
@@ -19703,7 +19719,7 @@
                     <a:p>
                       <a:pPr algn="l"/>
                       <a:r>
-                        <a:rPr sz="1100" b="1">
+                        <a:rPr sz="1300" b="1">
                           <a:solidFill>
                             <a:srgbClr val="1C2530"/>
                           </a:solidFill>
@@ -19742,7 +19758,7 @@
                     <a:p>
                       <a:pPr algn="r"/>
                       <a:r>
-                        <a:rPr sz="1100" b="1">
+                        <a:rPr sz="1300" b="1">
                           <a:solidFill>
                             <a:srgbClr val="1C2530"/>
                           </a:solidFill>
@@ -19781,7 +19797,7 @@
                     <a:p>
                       <a:pPr algn="r"/>
                       <a:r>
-                        <a:rPr sz="1100" b="1">
+                        <a:rPr sz="1300" b="1">
                           <a:solidFill>
                             <a:srgbClr val="1C2530"/>
                           </a:solidFill>
@@ -19820,7 +19836,7 @@
                     <a:p>
                       <a:pPr algn="ctr"/>
                       <a:r>
-                        <a:rPr sz="1100" b="1">
+                        <a:rPr sz="1300" b="1">
                           <a:solidFill>
                             <a:srgbClr val="1C2530"/>
                           </a:solidFill>
@@ -19859,7 +19875,7 @@
                     <a:p>
                       <a:pPr algn="l"/>
                       <a:r>
-                        <a:rPr sz="1100" b="1">
+                        <a:rPr sz="1300" b="1">
                           <a:solidFill>
                             <a:srgbClr val="1C2530"/>
                           </a:solidFill>
@@ -19904,7 +19920,7 @@
         </p:nvSpPr>
         <p:spPr>
           <a:xfrm>
-            <a:off x="7755240" y="2488883"/>
+            <a:off x="7757156" y="2683993"/>
             <a:ext cx="237744" cy="237744"/>
           </a:xfrm>
           <a:prstGeom prst="ellipse">
@@ -19933,7 +19949,7 @@
         </p:nvSpPr>
         <p:spPr>
           <a:xfrm>
-            <a:off x="7755240" y="2972372"/>
+            <a:off x="7757156" y="3438830"/>
             <a:ext cx="237744" cy="237744"/>
           </a:xfrm>
           <a:prstGeom prst="ellipse">
@@ -19962,7 +19978,7 @@
         </p:nvSpPr>
         <p:spPr>
           <a:xfrm>
-            <a:off x="7755240" y="3455861"/>
+            <a:off x="7757156" y="4193667"/>
             <a:ext cx="237744" cy="237744"/>
           </a:xfrm>
           <a:prstGeom prst="ellipse">
@@ -19991,7 +20007,7 @@
         </p:nvSpPr>
         <p:spPr>
           <a:xfrm>
-            <a:off x="7755240" y="3939350"/>
+            <a:off x="7757156" y="4948504"/>
             <a:ext cx="237744" cy="237744"/>
           </a:xfrm>
           <a:prstGeom prst="ellipse">
@@ -20020,7 +20036,7 @@
         </p:nvSpPr>
         <p:spPr>
           <a:xfrm>
-            <a:off x="7755240" y="4422838"/>
+            <a:off x="7757156" y="5703341"/>
             <a:ext cx="237744" cy="237744"/>
           </a:xfrm>
           <a:prstGeom prst="ellipse">
@@ -20146,7 +20162,7 @@
         <p:spPr>
           <a:xfrm>
             <a:off x="502920" y="6272784"/>
-            <a:ext cx="10088575" cy="402336"/>
+            <a:ext cx="8808415" cy="402336"/>
           </a:xfrm>
           <a:prstGeom prst="rect">
             <a:avLst/>
@@ -21028,7 +21044,7 @@
         <p:spPr>
           <a:xfrm>
             <a:off x="502920" y="6272784"/>
-            <a:ext cx="10088575" cy="402336"/>
+            <a:ext cx="8808415" cy="402336"/>
           </a:xfrm>
           <a:prstGeom prst="rect">
             <a:avLst/>
@@ -21716,7 +21732,7 @@
         <p:spPr>
           <a:xfrm>
             <a:off x="502920" y="6272784"/>
-            <a:ext cx="10088575" cy="402336"/>
+            <a:ext cx="8808415" cy="402336"/>
           </a:xfrm>
           <a:prstGeom prst="rect">
             <a:avLst/>
@@ -22088,7 +22104,7 @@
         <p:spPr>
           <a:xfrm>
             <a:off x="502920" y="6272784"/>
-            <a:ext cx="10088575" cy="402336"/>
+            <a:ext cx="8808415" cy="402336"/>
           </a:xfrm>
           <a:prstGeom prst="rect">
             <a:avLst/>
@@ -22157,509 +22173,15 @@
           </a:p>
         </p:txBody>
       </p:sp>
-      <p:sp>
-        <p:nvSpPr>
-          <p:cNvPr id="6" name="cpe|exhibit|text|5"/>
-          <p:cNvSpPr txBox="1"/>
-          <p:nvPr/>
-        </p:nvSpPr>
-        <p:spPr>
-          <a:xfrm>
-            <a:off x="502920" y="1481328"/>
-            <a:ext cx="7390181" cy="274320"/>
-          </a:xfrm>
-          <a:prstGeom prst="rect">
-            <a:avLst/>
-          </a:prstGeom>
-          <a:noFill/>
-        </p:spPr>
-        <p:txBody>
-          <a:bodyPr wrap="square" lIns="0" rIns="0" tIns="0" bIns="0" anchor="t">
-            <a:noAutofit/>
-          </a:bodyPr>
-          <a:lstStyle/>
-          <a:p>
-            <a:pPr algn="l">
-              <a:lnSpc>
-                <a:spcPct val="100000"/>
-              </a:lnSpc>
-            </a:pPr>
-            <a:r>
-              <a:rPr sz="1100" b="1">
-                <a:solidFill>
-                  <a:srgbClr val="1C2530"/>
-                </a:solidFill>
-                <a:latin typeface="Arial"/>
-              </a:rPr>
-              <a:t>Run-rate savings by initiative, 2027</a:t>
-            </a:r>
-            <a:r>
-              <a:rPr sz="1100" b="0">
-                <a:solidFill>
-                  <a:srgbClr val="1C2530"/>
-                </a:solidFill>
-                <a:latin typeface="Arial"/>
-              </a:rPr>
-              <a:t>, €M</a:t>
-            </a:r>
-          </a:p>
-        </p:txBody>
-      </p:sp>
-      <p:graphicFrame>
-        <p:nvGraphicFramePr>
-          <p:cNvPr id="7" name="cpe|exhibit|chart|6"/>
-          <p:cNvGraphicFramePr>
-            <a:graphicFrameLocks noGrp="1"/>
-          </p:cNvGraphicFramePr>
-          <p:nvPr/>
-        </p:nvGraphicFramePr>
-        <p:xfrm>
-          <a:off x="502920" y="2018492"/>
-          <a:ext cx="4064599" cy="4064599"/>
-        </p:xfrm>
-        <a:graphic>
-          <a:graphicData uri="http://schemas.openxmlformats.org/drawingml/2006/chart">
-            <c:chart xmlns:c="http://schemas.openxmlformats.org/drawingml/2006/chart" r:id="rId2"/>
-          </a:graphicData>
-        </a:graphic>
-      </p:graphicFrame>
-      <p:sp>
-        <p:nvSpPr>
-          <p:cNvPr id="8" name="cpe|exhibit|marker|7"/>
-          <p:cNvSpPr/>
-          <p:nvPr/>
-        </p:nvSpPr>
-        <p:spPr>
-          <a:xfrm>
-            <a:off x="4887559" y="3410712"/>
-            <a:ext cx="128016" cy="128016"/>
-          </a:xfrm>
-          <a:prstGeom prst="rect">
-            <a:avLst/>
-          </a:prstGeom>
-          <a:solidFill>
-            <a:srgbClr val="13294B"/>
-          </a:solidFill>
-          <a:ln>
-            <a:noFill/>
-          </a:ln>
-        </p:spPr>
-        <p:txBody>
-          <a:bodyPr rtlCol="0" anchor="ctr" lIns="0" rIns="0" tIns="0" bIns="0"/>
-          <a:lstStyle/>
-          <a:p>
-            <a:pPr algn="ctr"/>
-          </a:p>
-        </p:txBody>
-      </p:sp>
-      <p:sp>
-        <p:nvSpPr>
-          <p:cNvPr id="9" name="cpe|exhibit|label|8"/>
-          <p:cNvSpPr txBox="1"/>
-          <p:nvPr/>
-        </p:nvSpPr>
-        <p:spPr>
-          <a:xfrm>
-            <a:off x="5116159" y="3282696"/>
-            <a:ext cx="640080" cy="384048"/>
-          </a:xfrm>
-          <a:prstGeom prst="rect">
-            <a:avLst/>
-          </a:prstGeom>
-          <a:noFill/>
-        </p:spPr>
-        <p:txBody>
-          <a:bodyPr wrap="square" lIns="0" rIns="0" tIns="0" bIns="0" anchor="ctr">
-            <a:noAutofit/>
-          </a:bodyPr>
-          <a:lstStyle/>
-          <a:p>
-            <a:pPr algn="l">
-              <a:lnSpc>
-                <a:spcPct val="100000"/>
-              </a:lnSpc>
-            </a:pPr>
-            <a:r>
-              <a:rPr sz="1100" b="1">
-                <a:solidFill>
-                  <a:srgbClr val="1C2530"/>
-                </a:solidFill>
-                <a:latin typeface="Arial"/>
-              </a:rPr>
-              <a:t>35%</a:t>
-            </a:r>
-          </a:p>
-        </p:txBody>
-      </p:sp>
-      <p:sp>
-        <p:nvSpPr>
-          <p:cNvPr id="10" name="cpe|exhibit|label|9"/>
-          <p:cNvSpPr txBox="1"/>
-          <p:nvPr/>
-        </p:nvSpPr>
-        <p:spPr>
-          <a:xfrm>
-            <a:off x="5756239" y="3282696"/>
-            <a:ext cx="2136861" cy="384048"/>
-          </a:xfrm>
-          <a:prstGeom prst="rect">
-            <a:avLst/>
-          </a:prstGeom>
-          <a:noFill/>
-        </p:spPr>
-        <p:txBody>
-          <a:bodyPr wrap="square" lIns="0" rIns="0" tIns="0" bIns="0" anchor="ctr">
-            <a:noAutofit/>
-          </a:bodyPr>
-          <a:lstStyle/>
-          <a:p>
-            <a:pPr algn="l">
-              <a:lnSpc>
-                <a:spcPct val="100000"/>
-              </a:lnSpc>
-            </a:pPr>
-            <a:r>
-              <a:rPr sz="1100" b="0">
-                <a:solidFill>
-                  <a:srgbClr val="1C2530"/>
-                </a:solidFill>
-                <a:latin typeface="Arial"/>
-              </a:rPr>
-              <a:t>Network  (17)</a:t>
-            </a:r>
-          </a:p>
-        </p:txBody>
-      </p:sp>
-      <p:sp>
-        <p:nvSpPr>
-          <p:cNvPr id="11" name="cpe|exhibit|marker|10"/>
-          <p:cNvSpPr/>
-          <p:nvPr/>
-        </p:nvSpPr>
-        <p:spPr>
-          <a:xfrm>
-            <a:off x="4887559" y="3794760"/>
-            <a:ext cx="128016" cy="128016"/>
-          </a:xfrm>
-          <a:prstGeom prst="rect">
-            <a:avLst/>
-          </a:prstGeom>
-          <a:solidFill>
-            <a:srgbClr val="2F5F8A"/>
-          </a:solidFill>
-          <a:ln>
-            <a:noFill/>
-          </a:ln>
-        </p:spPr>
-        <p:txBody>
-          <a:bodyPr rtlCol="0" anchor="ctr" lIns="0" rIns="0" tIns="0" bIns="0"/>
-          <a:lstStyle/>
-          <a:p>
-            <a:pPr algn="ctr"/>
-          </a:p>
-        </p:txBody>
-      </p:sp>
-      <p:sp>
-        <p:nvSpPr>
-          <p:cNvPr id="12" name="cpe|exhibit|label|11"/>
-          <p:cNvSpPr txBox="1"/>
-          <p:nvPr/>
-        </p:nvSpPr>
-        <p:spPr>
-          <a:xfrm>
-            <a:off x="5116159" y="3666744"/>
-            <a:ext cx="640080" cy="384048"/>
-          </a:xfrm>
-          <a:prstGeom prst="rect">
-            <a:avLst/>
-          </a:prstGeom>
-          <a:noFill/>
-        </p:spPr>
-        <p:txBody>
-          <a:bodyPr wrap="square" lIns="0" rIns="0" tIns="0" bIns="0" anchor="ctr">
-            <a:noAutofit/>
-          </a:bodyPr>
-          <a:lstStyle/>
-          <a:p>
-            <a:pPr algn="l">
-              <a:lnSpc>
-                <a:spcPct val="100000"/>
-              </a:lnSpc>
-            </a:pPr>
-            <a:r>
-              <a:rPr sz="1100" b="1">
-                <a:solidFill>
-                  <a:srgbClr val="1C2530"/>
-                </a:solidFill>
-                <a:latin typeface="Arial"/>
-              </a:rPr>
-              <a:t>27%</a:t>
-            </a:r>
-          </a:p>
-        </p:txBody>
-      </p:sp>
-      <p:sp>
-        <p:nvSpPr>
-          <p:cNvPr id="13" name="cpe|exhibit|label|12"/>
-          <p:cNvSpPr txBox="1"/>
-          <p:nvPr/>
-        </p:nvSpPr>
-        <p:spPr>
-          <a:xfrm>
-            <a:off x="5756239" y="3666744"/>
-            <a:ext cx="2136861" cy="384048"/>
-          </a:xfrm>
-          <a:prstGeom prst="rect">
-            <a:avLst/>
-          </a:prstGeom>
-          <a:noFill/>
-        </p:spPr>
-        <p:txBody>
-          <a:bodyPr wrap="square" lIns="0" rIns="0" tIns="0" bIns="0" anchor="ctr">
-            <a:noAutofit/>
-          </a:bodyPr>
-          <a:lstStyle/>
-          <a:p>
-            <a:pPr algn="l">
-              <a:lnSpc>
-                <a:spcPct val="100000"/>
-              </a:lnSpc>
-            </a:pPr>
-            <a:r>
-              <a:rPr sz="1100" b="0">
-                <a:solidFill>
-                  <a:srgbClr val="1C2530"/>
-                </a:solidFill>
-                <a:latin typeface="Arial"/>
-              </a:rPr>
-              <a:t>Hub automation  (13)</a:t>
-            </a:r>
-          </a:p>
-        </p:txBody>
-      </p:sp>
-      <p:sp>
-        <p:nvSpPr>
-          <p:cNvPr id="14" name="cpe|exhibit|marker|13"/>
-          <p:cNvSpPr/>
-          <p:nvPr/>
-        </p:nvSpPr>
-        <p:spPr>
-          <a:xfrm>
-            <a:off x="4887559" y="4178808"/>
-            <a:ext cx="128016" cy="128016"/>
-          </a:xfrm>
-          <a:prstGeom prst="rect">
-            <a:avLst/>
-          </a:prstGeom>
-          <a:solidFill>
-            <a:srgbClr val="CAD2DB"/>
-          </a:solidFill>
-          <a:ln>
-            <a:noFill/>
-          </a:ln>
-        </p:spPr>
-        <p:txBody>
-          <a:bodyPr rtlCol="0" anchor="ctr" lIns="0" rIns="0" tIns="0" bIns="0"/>
-          <a:lstStyle/>
-          <a:p>
-            <a:pPr algn="ctr"/>
-          </a:p>
-        </p:txBody>
-      </p:sp>
-      <p:sp>
-        <p:nvSpPr>
-          <p:cNvPr id="15" name="cpe|exhibit|label|14"/>
-          <p:cNvSpPr txBox="1"/>
-          <p:nvPr/>
-        </p:nvSpPr>
-        <p:spPr>
-          <a:xfrm>
-            <a:off x="5116159" y="4050792"/>
-            <a:ext cx="640080" cy="384048"/>
-          </a:xfrm>
-          <a:prstGeom prst="rect">
-            <a:avLst/>
-          </a:prstGeom>
-          <a:noFill/>
-        </p:spPr>
-        <p:txBody>
-          <a:bodyPr wrap="square" lIns="0" rIns="0" tIns="0" bIns="0" anchor="ctr">
-            <a:noAutofit/>
-          </a:bodyPr>
-          <a:lstStyle/>
-          <a:p>
-            <a:pPr algn="l">
-              <a:lnSpc>
-                <a:spcPct val="100000"/>
-              </a:lnSpc>
-            </a:pPr>
-            <a:r>
-              <a:rPr sz="1100" b="1">
-                <a:solidFill>
-                  <a:srgbClr val="1C2530"/>
-                </a:solidFill>
-                <a:latin typeface="Arial"/>
-              </a:rPr>
-              <a:t>23%</a:t>
-            </a:r>
-          </a:p>
-        </p:txBody>
-      </p:sp>
-      <p:sp>
-        <p:nvSpPr>
-          <p:cNvPr id="16" name="cpe|exhibit|label|15"/>
-          <p:cNvSpPr txBox="1"/>
-          <p:nvPr/>
-        </p:nvSpPr>
-        <p:spPr>
-          <a:xfrm>
-            <a:off x="5756239" y="4050792"/>
-            <a:ext cx="2136861" cy="384048"/>
-          </a:xfrm>
-          <a:prstGeom prst="rect">
-            <a:avLst/>
-          </a:prstGeom>
-          <a:noFill/>
-        </p:spPr>
-        <p:txBody>
-          <a:bodyPr wrap="square" lIns="0" rIns="0" tIns="0" bIns="0" anchor="ctr">
-            <a:noAutofit/>
-          </a:bodyPr>
-          <a:lstStyle/>
-          <a:p>
-            <a:pPr algn="l">
-              <a:lnSpc>
-                <a:spcPct val="100000"/>
-              </a:lnSpc>
-            </a:pPr>
-            <a:r>
-              <a:rPr sz="1100" b="0">
-                <a:solidFill>
-                  <a:srgbClr val="1C2530"/>
-                </a:solidFill>
-                <a:latin typeface="Arial"/>
-              </a:rPr>
-              <a:t>Customer terms  (11)</a:t>
-            </a:r>
-          </a:p>
-        </p:txBody>
-      </p:sp>
-      <p:sp>
-        <p:nvSpPr>
-          <p:cNvPr id="17" name="cpe|exhibit|marker|16"/>
-          <p:cNvSpPr/>
-          <p:nvPr/>
-        </p:nvSpPr>
-        <p:spPr>
-          <a:xfrm>
-            <a:off x="4887559" y="4562856"/>
-            <a:ext cx="128016" cy="128016"/>
-          </a:xfrm>
-          <a:prstGeom prst="rect">
-            <a:avLst/>
-          </a:prstGeom>
-          <a:solidFill>
-            <a:srgbClr val="B6C0CB"/>
-          </a:solidFill>
-          <a:ln>
-            <a:noFill/>
-          </a:ln>
-        </p:spPr>
-        <p:txBody>
-          <a:bodyPr rtlCol="0" anchor="ctr" lIns="0" rIns="0" tIns="0" bIns="0"/>
-          <a:lstStyle/>
-          <a:p>
-            <a:pPr algn="ctr"/>
-          </a:p>
-        </p:txBody>
-      </p:sp>
-      <p:sp>
-        <p:nvSpPr>
-          <p:cNvPr id="18" name="cpe|exhibit|label|17"/>
-          <p:cNvSpPr txBox="1"/>
-          <p:nvPr/>
-        </p:nvSpPr>
-        <p:spPr>
-          <a:xfrm>
-            <a:off x="5116159" y="4434840"/>
-            <a:ext cx="640080" cy="384048"/>
-          </a:xfrm>
-          <a:prstGeom prst="rect">
-            <a:avLst/>
-          </a:prstGeom>
-          <a:noFill/>
-        </p:spPr>
-        <p:txBody>
-          <a:bodyPr wrap="square" lIns="0" rIns="0" tIns="0" bIns="0" anchor="ctr">
-            <a:noAutofit/>
-          </a:bodyPr>
-          <a:lstStyle/>
-          <a:p>
-            <a:pPr algn="l">
-              <a:lnSpc>
-                <a:spcPct val="100000"/>
-              </a:lnSpc>
-            </a:pPr>
-            <a:r>
-              <a:rPr sz="1100" b="1">
-                <a:solidFill>
-                  <a:srgbClr val="1C2530"/>
-                </a:solidFill>
-                <a:latin typeface="Arial"/>
-              </a:rPr>
-              <a:t>15%</a:t>
-            </a:r>
-          </a:p>
-        </p:txBody>
-      </p:sp>
-      <p:sp>
-        <p:nvSpPr>
-          <p:cNvPr id="19" name="cpe|exhibit|label|18"/>
-          <p:cNvSpPr txBox="1"/>
-          <p:nvPr/>
-        </p:nvSpPr>
-        <p:spPr>
-          <a:xfrm>
-            <a:off x="5756239" y="4434840"/>
-            <a:ext cx="2136861" cy="384048"/>
-          </a:xfrm>
-          <a:prstGeom prst="rect">
-            <a:avLst/>
-          </a:prstGeom>
-          <a:noFill/>
-        </p:spPr>
-        <p:txBody>
-          <a:bodyPr wrap="square" lIns="0" rIns="0" tIns="0" bIns="0" anchor="ctr">
-            <a:noAutofit/>
-          </a:bodyPr>
-          <a:lstStyle/>
-          <a:p>
-            <a:pPr algn="l">
-              <a:lnSpc>
-                <a:spcPct val="100000"/>
-              </a:lnSpc>
-            </a:pPr>
-            <a:r>
-              <a:rPr sz="1100" b="0">
-                <a:solidFill>
-                  <a:srgbClr val="1C2530"/>
-                </a:solidFill>
-                <a:latin typeface="Arial"/>
-              </a:rPr>
-              <a:t>Procurement  (7)</a:t>
-            </a:r>
-          </a:p>
-        </p:txBody>
-      </p:sp>
       <p:cxnSp>
         <p:nvCxnSpPr>
-          <p:cNvPr id="20" name="cpe|commentary|line|19"/>
+          <p:cNvPr id="6" name="cpe|commentary|line|5"/>
           <p:cNvCxnSpPr/>
           <p:nvPr/>
         </p:nvCxnSpPr>
         <p:spPr>
           <a:xfrm>
-            <a:off x="8094269" y="1481328"/>
+            <a:off x="4097426" y="1481328"/>
             <a:ext cx="0" cy="4718304"/>
           </a:xfrm>
           <a:prstGeom prst="line">
@@ -22674,13 +22196,13 @@
       </p:cxnSp>
       <p:sp>
         <p:nvSpPr>
-          <p:cNvPr id="21" name="cpe|commentary|text|20"/>
-          <p:cNvSpPr txBox="1"/>
-          <p:nvPr/>
-        </p:nvSpPr>
-        <p:spPr>
-          <a:xfrm>
-            <a:off x="8322869" y="1481328"/>
+          <p:cNvPr id="7" name="cpe|commentary|text|6"/>
+          <p:cNvSpPr txBox="1"/>
+          <p:nvPr/>
+        </p:nvSpPr>
+        <p:spPr>
+          <a:xfrm>
+            <a:off x="502920" y="1481328"/>
             <a:ext cx="3365906" cy="4718304"/>
           </a:xfrm>
           <a:prstGeom prst="rect">
@@ -22709,7 +22231,7 @@
               <a:buChar char="•"/>
             </a:pPr>
             <a:r>
-              <a:rPr sz="1200" b="0">
+              <a:rPr sz="1400" b="0">
                 <a:solidFill>
                   <a:srgbClr val="1C2530"/>
                 </a:solidFill>
@@ -22731,13 +22253,567 @@
               <a:buChar char="•"/>
             </a:pPr>
             <a:r>
-              <a:rPr sz="1200" b="0">
+              <a:rPr sz="1400" b="0">
                 <a:solidFill>
                   <a:srgbClr val="1C2530"/>
                 </a:solidFill>
                 <a:latin typeface="Arial"/>
               </a:rPr>
               <a:t>Both depend on capex released today</a:t>
+            </a:r>
+          </a:p>
+        </p:txBody>
+      </p:sp>
+      <p:sp>
+        <p:nvSpPr>
+          <p:cNvPr id="8" name="cpe|exhibit|text|7"/>
+          <p:cNvSpPr txBox="1"/>
+          <p:nvPr/>
+        </p:nvSpPr>
+        <p:spPr>
+          <a:xfrm>
+            <a:off x="4298594" y="1481328"/>
+            <a:ext cx="7390181" cy="274320"/>
+          </a:xfrm>
+          <a:prstGeom prst="rect">
+            <a:avLst/>
+          </a:prstGeom>
+          <a:noFill/>
+        </p:spPr>
+        <p:txBody>
+          <a:bodyPr wrap="square" lIns="0" rIns="0" tIns="0" bIns="0" anchor="t">
+            <a:noAutofit/>
+          </a:bodyPr>
+          <a:lstStyle/>
+          <a:p>
+            <a:pPr algn="l">
+              <a:lnSpc>
+                <a:spcPct val="100000"/>
+              </a:lnSpc>
+            </a:pPr>
+            <a:r>
+              <a:rPr sz="1100" b="1">
+                <a:solidFill>
+                  <a:srgbClr val="1C2530"/>
+                </a:solidFill>
+                <a:latin typeface="Arial"/>
+              </a:rPr>
+              <a:t>Run-rate savings by initiative, 2027</a:t>
+            </a:r>
+            <a:r>
+              <a:rPr sz="1100" b="0">
+                <a:solidFill>
+                  <a:srgbClr val="1C2530"/>
+                </a:solidFill>
+                <a:latin typeface="Arial"/>
+              </a:rPr>
+              <a:t>, €M</a:t>
+            </a:r>
+          </a:p>
+        </p:txBody>
+      </p:sp>
+      <p:graphicFrame>
+        <p:nvGraphicFramePr>
+          <p:cNvPr id="9" name="cpe|exhibit|chart|8"/>
+          <p:cNvGraphicFramePr>
+            <a:graphicFrameLocks noGrp="1"/>
+          </p:cNvGraphicFramePr>
+          <p:nvPr/>
+        </p:nvGraphicFramePr>
+        <p:xfrm>
+          <a:off x="4298594" y="2018492"/>
+          <a:ext cx="4064599" cy="4064599"/>
+        </p:xfrm>
+        <a:graphic>
+          <a:graphicData uri="http://schemas.openxmlformats.org/drawingml/2006/chart">
+            <c:chart xmlns:c="http://schemas.openxmlformats.org/drawingml/2006/chart" r:id="rId2"/>
+          </a:graphicData>
+        </a:graphic>
+      </p:graphicFrame>
+      <p:sp>
+        <p:nvSpPr>
+          <p:cNvPr id="10" name="cpe|exhibit|marker|9"/>
+          <p:cNvSpPr/>
+          <p:nvPr/>
+        </p:nvSpPr>
+        <p:spPr>
+          <a:xfrm>
+            <a:off x="8683234" y="3410712"/>
+            <a:ext cx="128016" cy="128016"/>
+          </a:xfrm>
+          <a:prstGeom prst="rect">
+            <a:avLst/>
+          </a:prstGeom>
+          <a:solidFill>
+            <a:srgbClr val="13294B"/>
+          </a:solidFill>
+          <a:ln>
+            <a:noFill/>
+          </a:ln>
+        </p:spPr>
+        <p:txBody>
+          <a:bodyPr rtlCol="0" anchor="ctr" lIns="0" rIns="0" tIns="0" bIns="0"/>
+          <a:lstStyle/>
+          <a:p>
+            <a:pPr algn="ctr"/>
+          </a:p>
+        </p:txBody>
+      </p:sp>
+      <p:sp>
+        <p:nvSpPr>
+          <p:cNvPr id="11" name="cpe|exhibit|label|10"/>
+          <p:cNvSpPr txBox="1"/>
+          <p:nvPr/>
+        </p:nvSpPr>
+        <p:spPr>
+          <a:xfrm>
+            <a:off x="8911834" y="3282696"/>
+            <a:ext cx="640080" cy="384048"/>
+          </a:xfrm>
+          <a:prstGeom prst="rect">
+            <a:avLst/>
+          </a:prstGeom>
+          <a:noFill/>
+        </p:spPr>
+        <p:txBody>
+          <a:bodyPr wrap="square" lIns="0" rIns="0" tIns="0" bIns="0" anchor="ctr">
+            <a:noAutofit/>
+          </a:bodyPr>
+          <a:lstStyle/>
+          <a:p>
+            <a:pPr algn="l">
+              <a:lnSpc>
+                <a:spcPct val="100000"/>
+              </a:lnSpc>
+            </a:pPr>
+            <a:r>
+              <a:rPr sz="1100" b="1">
+                <a:solidFill>
+                  <a:srgbClr val="1C2530"/>
+                </a:solidFill>
+                <a:latin typeface="Arial"/>
+              </a:rPr>
+              <a:t>35%</a:t>
+            </a:r>
+          </a:p>
+        </p:txBody>
+      </p:sp>
+      <p:sp>
+        <p:nvSpPr>
+          <p:cNvPr id="12" name="cpe|exhibit|label|11"/>
+          <p:cNvSpPr txBox="1"/>
+          <p:nvPr/>
+        </p:nvSpPr>
+        <p:spPr>
+          <a:xfrm>
+            <a:off x="9551914" y="3282696"/>
+            <a:ext cx="2136861" cy="384048"/>
+          </a:xfrm>
+          <a:prstGeom prst="rect">
+            <a:avLst/>
+          </a:prstGeom>
+          <a:noFill/>
+        </p:spPr>
+        <p:txBody>
+          <a:bodyPr wrap="square" lIns="0" rIns="0" tIns="0" bIns="0" anchor="ctr">
+            <a:noAutofit/>
+          </a:bodyPr>
+          <a:lstStyle/>
+          <a:p>
+            <a:pPr algn="l">
+              <a:lnSpc>
+                <a:spcPct val="100000"/>
+              </a:lnSpc>
+            </a:pPr>
+            <a:r>
+              <a:rPr sz="1100" b="0">
+                <a:solidFill>
+                  <a:srgbClr val="1C2530"/>
+                </a:solidFill>
+                <a:latin typeface="Arial"/>
+              </a:rPr>
+              <a:t>Network  (17)</a:t>
+            </a:r>
+          </a:p>
+        </p:txBody>
+      </p:sp>
+      <p:sp>
+        <p:nvSpPr>
+          <p:cNvPr id="13" name="cpe|exhibit|marker|12"/>
+          <p:cNvSpPr/>
+          <p:nvPr/>
+        </p:nvSpPr>
+        <p:spPr>
+          <a:xfrm>
+            <a:off x="8683234" y="3794760"/>
+            <a:ext cx="128016" cy="128016"/>
+          </a:xfrm>
+          <a:prstGeom prst="rect">
+            <a:avLst/>
+          </a:prstGeom>
+          <a:solidFill>
+            <a:srgbClr val="2F5F8A"/>
+          </a:solidFill>
+          <a:ln>
+            <a:noFill/>
+          </a:ln>
+        </p:spPr>
+        <p:txBody>
+          <a:bodyPr rtlCol="0" anchor="ctr" lIns="0" rIns="0" tIns="0" bIns="0"/>
+          <a:lstStyle/>
+          <a:p>
+            <a:pPr algn="ctr"/>
+          </a:p>
+        </p:txBody>
+      </p:sp>
+      <p:sp>
+        <p:nvSpPr>
+          <p:cNvPr id="14" name="cpe|exhibit|label|13"/>
+          <p:cNvSpPr txBox="1"/>
+          <p:nvPr/>
+        </p:nvSpPr>
+        <p:spPr>
+          <a:xfrm>
+            <a:off x="8911834" y="3666744"/>
+            <a:ext cx="640080" cy="384048"/>
+          </a:xfrm>
+          <a:prstGeom prst="rect">
+            <a:avLst/>
+          </a:prstGeom>
+          <a:noFill/>
+        </p:spPr>
+        <p:txBody>
+          <a:bodyPr wrap="square" lIns="0" rIns="0" tIns="0" bIns="0" anchor="ctr">
+            <a:noAutofit/>
+          </a:bodyPr>
+          <a:lstStyle/>
+          <a:p>
+            <a:pPr algn="l">
+              <a:lnSpc>
+                <a:spcPct val="100000"/>
+              </a:lnSpc>
+            </a:pPr>
+            <a:r>
+              <a:rPr sz="1100" b="1">
+                <a:solidFill>
+                  <a:srgbClr val="1C2530"/>
+                </a:solidFill>
+                <a:latin typeface="Arial"/>
+              </a:rPr>
+              <a:t>27%</a:t>
+            </a:r>
+          </a:p>
+        </p:txBody>
+      </p:sp>
+      <p:sp>
+        <p:nvSpPr>
+          <p:cNvPr id="15" name="cpe|exhibit|label|14"/>
+          <p:cNvSpPr txBox="1"/>
+          <p:nvPr/>
+        </p:nvSpPr>
+        <p:spPr>
+          <a:xfrm>
+            <a:off x="9551914" y="3666744"/>
+            <a:ext cx="2136861" cy="384048"/>
+          </a:xfrm>
+          <a:prstGeom prst="rect">
+            <a:avLst/>
+          </a:prstGeom>
+          <a:noFill/>
+        </p:spPr>
+        <p:txBody>
+          <a:bodyPr wrap="square" lIns="0" rIns="0" tIns="0" bIns="0" anchor="ctr">
+            <a:noAutofit/>
+          </a:bodyPr>
+          <a:lstStyle/>
+          <a:p>
+            <a:pPr algn="l">
+              <a:lnSpc>
+                <a:spcPct val="100000"/>
+              </a:lnSpc>
+            </a:pPr>
+            <a:r>
+              <a:rPr sz="1100" b="0">
+                <a:solidFill>
+                  <a:srgbClr val="1C2530"/>
+                </a:solidFill>
+                <a:latin typeface="Arial"/>
+              </a:rPr>
+              <a:t>Hub automation  (13)</a:t>
+            </a:r>
+          </a:p>
+        </p:txBody>
+      </p:sp>
+      <p:sp>
+        <p:nvSpPr>
+          <p:cNvPr id="16" name="cpe|exhibit|marker|15"/>
+          <p:cNvSpPr/>
+          <p:nvPr/>
+        </p:nvSpPr>
+        <p:spPr>
+          <a:xfrm>
+            <a:off x="8683234" y="4178808"/>
+            <a:ext cx="128016" cy="128016"/>
+          </a:xfrm>
+          <a:prstGeom prst="rect">
+            <a:avLst/>
+          </a:prstGeom>
+          <a:solidFill>
+            <a:srgbClr val="CAD2DB"/>
+          </a:solidFill>
+          <a:ln>
+            <a:noFill/>
+          </a:ln>
+        </p:spPr>
+        <p:txBody>
+          <a:bodyPr rtlCol="0" anchor="ctr" lIns="0" rIns="0" tIns="0" bIns="0"/>
+          <a:lstStyle/>
+          <a:p>
+            <a:pPr algn="ctr"/>
+          </a:p>
+        </p:txBody>
+      </p:sp>
+      <p:sp>
+        <p:nvSpPr>
+          <p:cNvPr id="17" name="cpe|exhibit|label|16"/>
+          <p:cNvSpPr txBox="1"/>
+          <p:nvPr/>
+        </p:nvSpPr>
+        <p:spPr>
+          <a:xfrm>
+            <a:off x="8911834" y="4050792"/>
+            <a:ext cx="640080" cy="384048"/>
+          </a:xfrm>
+          <a:prstGeom prst="rect">
+            <a:avLst/>
+          </a:prstGeom>
+          <a:noFill/>
+        </p:spPr>
+        <p:txBody>
+          <a:bodyPr wrap="square" lIns="0" rIns="0" tIns="0" bIns="0" anchor="ctr">
+            <a:noAutofit/>
+          </a:bodyPr>
+          <a:lstStyle/>
+          <a:p>
+            <a:pPr algn="l">
+              <a:lnSpc>
+                <a:spcPct val="100000"/>
+              </a:lnSpc>
+            </a:pPr>
+            <a:r>
+              <a:rPr sz="1100" b="1">
+                <a:solidFill>
+                  <a:srgbClr val="1C2530"/>
+                </a:solidFill>
+                <a:latin typeface="Arial"/>
+              </a:rPr>
+              <a:t>23%</a:t>
+            </a:r>
+          </a:p>
+        </p:txBody>
+      </p:sp>
+      <p:sp>
+        <p:nvSpPr>
+          <p:cNvPr id="18" name="cpe|exhibit|label|17"/>
+          <p:cNvSpPr txBox="1"/>
+          <p:nvPr/>
+        </p:nvSpPr>
+        <p:spPr>
+          <a:xfrm>
+            <a:off x="9551914" y="4050792"/>
+            <a:ext cx="2136861" cy="384048"/>
+          </a:xfrm>
+          <a:prstGeom prst="rect">
+            <a:avLst/>
+          </a:prstGeom>
+          <a:noFill/>
+        </p:spPr>
+        <p:txBody>
+          <a:bodyPr wrap="square" lIns="0" rIns="0" tIns="0" bIns="0" anchor="ctr">
+            <a:noAutofit/>
+          </a:bodyPr>
+          <a:lstStyle/>
+          <a:p>
+            <a:pPr algn="l">
+              <a:lnSpc>
+                <a:spcPct val="100000"/>
+              </a:lnSpc>
+            </a:pPr>
+            <a:r>
+              <a:rPr sz="1100" b="0">
+                <a:solidFill>
+                  <a:srgbClr val="1C2530"/>
+                </a:solidFill>
+                <a:latin typeface="Arial"/>
+              </a:rPr>
+              <a:t>Customer terms  (11)</a:t>
+            </a:r>
+          </a:p>
+        </p:txBody>
+      </p:sp>
+      <p:sp>
+        <p:nvSpPr>
+          <p:cNvPr id="19" name="cpe|exhibit|marker|18"/>
+          <p:cNvSpPr/>
+          <p:nvPr/>
+        </p:nvSpPr>
+        <p:spPr>
+          <a:xfrm>
+            <a:off x="8683234" y="4562856"/>
+            <a:ext cx="128016" cy="128016"/>
+          </a:xfrm>
+          <a:prstGeom prst="rect">
+            <a:avLst/>
+          </a:prstGeom>
+          <a:solidFill>
+            <a:srgbClr val="B6C0CB"/>
+          </a:solidFill>
+          <a:ln>
+            <a:noFill/>
+          </a:ln>
+        </p:spPr>
+        <p:txBody>
+          <a:bodyPr rtlCol="0" anchor="ctr" lIns="0" rIns="0" tIns="0" bIns="0"/>
+          <a:lstStyle/>
+          <a:p>
+            <a:pPr algn="ctr"/>
+          </a:p>
+        </p:txBody>
+      </p:sp>
+      <p:sp>
+        <p:nvSpPr>
+          <p:cNvPr id="20" name="cpe|exhibit|label|19"/>
+          <p:cNvSpPr txBox="1"/>
+          <p:nvPr/>
+        </p:nvSpPr>
+        <p:spPr>
+          <a:xfrm>
+            <a:off x="8911834" y="4434840"/>
+            <a:ext cx="640080" cy="384048"/>
+          </a:xfrm>
+          <a:prstGeom prst="rect">
+            <a:avLst/>
+          </a:prstGeom>
+          <a:noFill/>
+        </p:spPr>
+        <p:txBody>
+          <a:bodyPr wrap="square" lIns="0" rIns="0" tIns="0" bIns="0" anchor="ctr">
+            <a:noAutofit/>
+          </a:bodyPr>
+          <a:lstStyle/>
+          <a:p>
+            <a:pPr algn="l">
+              <a:lnSpc>
+                <a:spcPct val="100000"/>
+              </a:lnSpc>
+            </a:pPr>
+            <a:r>
+              <a:rPr sz="1100" b="1">
+                <a:solidFill>
+                  <a:srgbClr val="1C2530"/>
+                </a:solidFill>
+                <a:latin typeface="Arial"/>
+              </a:rPr>
+              <a:t>15%</a:t>
+            </a:r>
+          </a:p>
+        </p:txBody>
+      </p:sp>
+      <p:sp>
+        <p:nvSpPr>
+          <p:cNvPr id="21" name="cpe|exhibit|label|20"/>
+          <p:cNvSpPr txBox="1"/>
+          <p:nvPr/>
+        </p:nvSpPr>
+        <p:spPr>
+          <a:xfrm>
+            <a:off x="9551914" y="4434840"/>
+            <a:ext cx="2136861" cy="384048"/>
+          </a:xfrm>
+          <a:prstGeom prst="rect">
+            <a:avLst/>
+          </a:prstGeom>
+          <a:noFill/>
+        </p:spPr>
+        <p:txBody>
+          <a:bodyPr wrap="square" lIns="0" rIns="0" tIns="0" bIns="0" anchor="ctr">
+            <a:noAutofit/>
+          </a:bodyPr>
+          <a:lstStyle/>
+          <a:p>
+            <a:pPr algn="l">
+              <a:lnSpc>
+                <a:spcPct val="100000"/>
+              </a:lnSpc>
+            </a:pPr>
+            <a:r>
+              <a:rPr sz="1100" b="0">
+                <a:solidFill>
+                  <a:srgbClr val="1C2530"/>
+                </a:solidFill>
+                <a:latin typeface="Arial"/>
+              </a:rPr>
+              <a:t>Procurement  (7)</a:t>
+            </a:r>
+          </a:p>
+        </p:txBody>
+      </p:sp>
+      <p:cxnSp>
+        <p:nvCxnSpPr>
+          <p:cNvPr id="22" name="cpe|exhibit|line|21"/>
+          <p:cNvCxnSpPr/>
+          <p:nvPr/>
+        </p:nvCxnSpPr>
+        <p:spPr>
+          <a:xfrm>
+            <a:off x="8683234" y="4864608"/>
+            <a:ext cx="3005541" cy="0"/>
+          </a:xfrm>
+          <a:prstGeom prst="line">
+            <a:avLst/>
+          </a:prstGeom>
+          <a:ln w="6350">
+            <a:solidFill>
+              <a:srgbClr val="B6C0CB"/>
+            </a:solidFill>
+          </a:ln>
+        </p:spPr>
+      </p:cxnSp>
+      <p:sp>
+        <p:nvSpPr>
+          <p:cNvPr id="23" name="cpe|exhibit|label|22"/>
+          <p:cNvSpPr txBox="1"/>
+          <p:nvPr/>
+        </p:nvSpPr>
+        <p:spPr>
+          <a:xfrm>
+            <a:off x="8911834" y="4882896"/>
+            <a:ext cx="2776941" cy="274320"/>
+          </a:xfrm>
+          <a:prstGeom prst="rect">
+            <a:avLst/>
+          </a:prstGeom>
+          <a:noFill/>
+        </p:spPr>
+        <p:txBody>
+          <a:bodyPr wrap="square" lIns="0" rIns="0" tIns="0" bIns="0" anchor="ctr">
+            <a:noAutofit/>
+          </a:bodyPr>
+          <a:lstStyle/>
+          <a:p>
+            <a:pPr algn="l">
+              <a:lnSpc>
+                <a:spcPct val="100000"/>
+              </a:lnSpc>
+            </a:pPr>
+            <a:r>
+              <a:rPr sz="1100" b="1">
+                <a:solidFill>
+                  <a:srgbClr val="1C2530"/>
+                </a:solidFill>
+                <a:latin typeface="Arial"/>
+              </a:rPr>
+              <a:t>Top 2: 62%</a:t>
             </a:r>
           </a:p>
         </p:txBody>
@@ -23089,7 +23165,7 @@
         <p:spPr>
           <a:xfrm>
             <a:off x="502920" y="6272784"/>
-            <a:ext cx="10088575" cy="402336"/>
+            <a:ext cx="8808415" cy="402336"/>
           </a:xfrm>
           <a:prstGeom prst="rect">
             <a:avLst/>
@@ -23628,7 +23704,7 @@
             <a:r>
               <a:rPr sz="3200" b="1">
                 <a:solidFill>
-                  <a:srgbClr val="E08A00"/>
+                  <a:srgbClr val="CC8005"/>
                 </a:solidFill>
                 <a:latin typeface="Arial"/>
               </a:rPr>
@@ -23781,7 +23857,7 @@
         <p:spPr>
           <a:xfrm>
             <a:off x="502920" y="6272784"/>
-            <a:ext cx="10088575" cy="402336"/>
+            <a:ext cx="8808415" cy="402336"/>
           </a:xfrm>
           <a:prstGeom prst="rect">
             <a:avLst/>
@@ -23859,7 +23935,7 @@
         <p:spPr>
           <a:xfrm>
             <a:off x="502920" y="1481328"/>
-            <a:ext cx="7390181" cy="274320"/>
+            <a:ext cx="11185855" cy="274320"/>
           </a:xfrm>
           <a:prstGeom prst="rect">
             <a:avLst/>
@@ -23908,7 +23984,7 @@
         </p:nvGraphicFramePr>
         <p:xfrm>
           <a:off x="502920" y="1901952"/>
-          <a:ext cx="7390181" cy="4297680"/>
+          <a:ext cx="11185855" cy="3643884"/>
         </p:xfrm>
         <a:graphic>
           <a:graphicData uri="http://schemas.openxmlformats.org/drawingml/2006/chart">
@@ -23924,8 +24000,8 @@
         </p:nvCxnSpPr>
         <p:spPr>
           <a:xfrm>
-            <a:off x="5722873" y="1947672"/>
-            <a:ext cx="0" cy="4166006"/>
+            <a:off x="8271397" y="1947672"/>
+            <a:ext cx="0" cy="3525286"/>
           </a:xfrm>
           <a:prstGeom prst="line">
             <a:avLst/>
@@ -23946,7 +24022,7 @@
         </p:nvSpPr>
         <p:spPr>
           <a:xfrm>
-            <a:off x="5768593" y="1673352"/>
+            <a:off x="8317117" y="1673352"/>
             <a:ext cx="2011680" cy="237744"/>
           </a:xfrm>
           <a:prstGeom prst="rect">
@@ -23985,8 +24061,8 @@
         </p:nvCxnSpPr>
         <p:spPr>
           <a:xfrm>
-            <a:off x="8094269" y="1481328"/>
-            <a:ext cx="0" cy="4718304"/>
+            <a:off x="502920" y="5747004"/>
+            <a:ext cx="11185855" cy="0"/>
           </a:xfrm>
           <a:prstGeom prst="line">
             <a:avLst/>
@@ -24006,8 +24082,8 @@
         </p:nvSpPr>
         <p:spPr>
           <a:xfrm>
-            <a:off x="8322869" y="1481328"/>
-            <a:ext cx="3365906" cy="4718304"/>
+            <a:off x="502920" y="5884164"/>
+            <a:ext cx="5492344" cy="315468"/>
           </a:xfrm>
           <a:prstGeom prst="rect">
             <a:avLst/>
@@ -24020,19 +24096,10 @@
           </a:bodyPr>
           <a:lstStyle/>
           <a:p>
-            <a:pPr algn="l" marL="155448" indent="-155448">
-              <a:lnSpc>
-                <a:spcPct val="108000"/>
-              </a:lnSpc>
-              <a:spcAft>
-                <a:spcPts val="800"/>
-              </a:spcAft>
-              <a:buClr>
-                <a:srgbClr val="1C2530"/>
-              </a:buClr>
-              <a:buSzPct val="100000"/>
-              <a:buFont typeface="Arial"/>
-              <a:buChar char="•"/>
+            <a:pPr algn="l">
+              <a:lnSpc>
+                <a:spcPct val="100000"/>
+              </a:lnSpc>
             </a:pPr>
             <a:r>
               <a:rPr sz="1200" b="0">
@@ -24062,17 +24129,34 @@
               <a:t> above the median and 9 above the next worst peer</a:t>
             </a:r>
           </a:p>
-          <a:p>
-            <a:pPr algn="l" marL="155448" indent="-155448">
-              <a:lnSpc>
-                <a:spcPct val="108000"/>
-              </a:lnSpc>
-              <a:buClr>
-                <a:srgbClr val="1C2530"/>
-              </a:buClr>
-              <a:buSzPct val="100000"/>
-              <a:buFont typeface="Arial"/>
-              <a:buChar char="•"/>
+        </p:txBody>
+      </p:sp>
+      <p:sp>
+        <p:nvSpPr>
+          <p:cNvPr id="12" name="cpe|commentary|text|11"/>
+          <p:cNvSpPr txBox="1"/>
+          <p:nvPr/>
+        </p:nvSpPr>
+        <p:spPr>
+          <a:xfrm>
+            <a:off x="6196432" y="5884164"/>
+            <a:ext cx="5492344" cy="315468"/>
+          </a:xfrm>
+          <a:prstGeom prst="rect">
+            <a:avLst/>
+          </a:prstGeom>
+          <a:noFill/>
+        </p:spPr>
+        <p:txBody>
+          <a:bodyPr wrap="square" lIns="0" rIns="0" tIns="0" bIns="0" anchor="t">
+            <a:noAutofit/>
+          </a:bodyPr>
+          <a:lstStyle/>
+          <a:p>
+            <a:pPr algn="l">
+              <a:lnSpc>
+                <a:spcPct val="100000"/>
+              </a:lnSpc>
             </a:pPr>
             <a:r>
               <a:rPr sz="1200" b="0">
@@ -24191,7 +24275,7 @@
         <p:spPr>
           <a:xfrm>
             <a:off x="502920" y="6272784"/>
-            <a:ext cx="10088575" cy="402336"/>
+            <a:ext cx="8808415" cy="402336"/>
           </a:xfrm>
           <a:prstGeom prst="rect">
             <a:avLst/>
@@ -24260,1341 +24344,15 @@
           </a:p>
         </p:txBody>
       </p:sp>
-      <p:sp>
-        <p:nvSpPr>
-          <p:cNvPr id="6" name="cpe|exhibit|fill|5"/>
-          <p:cNvSpPr/>
-          <p:nvPr/>
-        </p:nvSpPr>
-        <p:spPr>
-          <a:xfrm>
-            <a:off x="502920" y="3533790"/>
-            <a:ext cx="2189074" cy="613380"/>
-          </a:xfrm>
-          <a:prstGeom prst="rect">
-            <a:avLst/>
-          </a:prstGeom>
-          <a:solidFill>
-            <a:srgbClr val="13294B"/>
-          </a:solidFill>
-          <a:ln>
-            <a:noFill/>
-          </a:ln>
-        </p:spPr>
-        <p:txBody>
-          <a:bodyPr rtlCol="0" anchor="ctr" lIns="0" rIns="0" tIns="0" bIns="0"/>
-          <a:lstStyle/>
-          <a:p>
-            <a:pPr algn="ctr"/>
-          </a:p>
-        </p:txBody>
-      </p:sp>
-      <p:sp>
-        <p:nvSpPr>
-          <p:cNvPr id="7" name="cpe|exhibit|text|6"/>
-          <p:cNvSpPr txBox="1"/>
-          <p:nvPr/>
-        </p:nvSpPr>
-        <p:spPr>
-          <a:xfrm>
-            <a:off x="576072" y="3552078"/>
-            <a:ext cx="2042770" cy="576804"/>
-          </a:xfrm>
-          <a:prstGeom prst="rect">
-            <a:avLst/>
-          </a:prstGeom>
-          <a:noFill/>
-        </p:spPr>
-        <p:txBody>
-          <a:bodyPr wrap="square" lIns="0" rIns="0" tIns="0" bIns="0" anchor="ctr">
-            <a:noAutofit/>
-          </a:bodyPr>
-          <a:lstStyle/>
-          <a:p>
-            <a:pPr algn="l">
-              <a:lnSpc>
-                <a:spcPct val="100000"/>
-              </a:lnSpc>
-            </a:pPr>
-            <a:r>
-              <a:rPr sz="1200" b="0">
-                <a:solidFill>
-                  <a:srgbClr val="FFFFFF"/>
-                </a:solidFill>
-                <a:latin typeface="Arial"/>
-              </a:rPr>
-              <a:t>Gap to peer median
-</a:t>
-            </a:r>
-            <a:r>
-              <a:rPr sz="1200" b="1">
-                <a:solidFill>
-                  <a:srgbClr val="FFFFFF"/>
-                </a:solidFill>
-                <a:latin typeface="Arial"/>
-              </a:rPr>
-              <a:t>€44M</a:t>
-            </a:r>
-          </a:p>
-        </p:txBody>
-      </p:sp>
       <p:cxnSp>
         <p:nvCxnSpPr>
-          <p:cNvPr id="8" name="cpe|exhibit|connector|7"/>
+          <p:cNvPr id="6" name="cpe|commentary|line|5"/>
           <p:cNvCxnSpPr/>
           <p:nvPr/>
         </p:nvCxnSpPr>
         <p:spPr>
           <a:xfrm>
-            <a:off x="2691994" y="3840480"/>
-            <a:ext cx="205740" cy="0"/>
-          </a:xfrm>
-          <a:prstGeom prst="line">
-            <a:avLst/>
-          </a:prstGeom>
-          <a:ln w="9525">
-            <a:solidFill>
-              <a:srgbClr val="8A95A1"/>
-            </a:solidFill>
-          </a:ln>
-        </p:spPr>
-      </p:cxnSp>
-      <p:cxnSp>
-        <p:nvCxnSpPr>
-          <p:cNvPr id="9" name="cpe|exhibit|connector|8"/>
-          <p:cNvCxnSpPr/>
-          <p:nvPr/>
-        </p:nvCxnSpPr>
-        <p:spPr>
-          <a:xfrm>
-            <a:off x="2897734" y="2267712"/>
-            <a:ext cx="0" cy="1572768"/>
-          </a:xfrm>
-          <a:prstGeom prst="line">
-            <a:avLst/>
-          </a:prstGeom>
-          <a:ln w="9525">
-            <a:solidFill>
-              <a:srgbClr val="8A95A1"/>
-            </a:solidFill>
-          </a:ln>
-        </p:spPr>
-      </p:cxnSp>
-      <p:cxnSp>
-        <p:nvCxnSpPr>
-          <p:cNvPr id="10" name="cpe|exhibit|connector|9"/>
-          <p:cNvCxnSpPr/>
-          <p:nvPr/>
-        </p:nvCxnSpPr>
-        <p:spPr>
-          <a:xfrm>
-            <a:off x="2897734" y="2267712"/>
-            <a:ext cx="205740" cy="0"/>
-          </a:xfrm>
-          <a:prstGeom prst="line">
-            <a:avLst/>
-          </a:prstGeom>
-          <a:ln w="9525">
-            <a:solidFill>
-              <a:srgbClr val="8A95A1"/>
-            </a:solidFill>
-          </a:ln>
-        </p:spPr>
-      </p:cxnSp>
-      <p:sp>
-        <p:nvSpPr>
-          <p:cNvPr id="11" name="cpe|exhibit|fill|10"/>
-          <p:cNvSpPr/>
-          <p:nvPr/>
-        </p:nvSpPr>
-        <p:spPr>
-          <a:xfrm>
-            <a:off x="3103474" y="1961022"/>
-            <a:ext cx="2189074" cy="613380"/>
-          </a:xfrm>
-          <a:prstGeom prst="rect">
-            <a:avLst/>
-          </a:prstGeom>
-          <a:solidFill>
-            <a:srgbClr val="E08A00"/>
-          </a:solidFill>
-          <a:ln>
-            <a:noFill/>
-          </a:ln>
-        </p:spPr>
-        <p:txBody>
-          <a:bodyPr rtlCol="0" anchor="ctr" lIns="0" rIns="0" tIns="0" bIns="0"/>
-          <a:lstStyle/>
-          <a:p>
-            <a:pPr algn="ctr"/>
-          </a:p>
-        </p:txBody>
-      </p:sp>
-      <p:sp>
-        <p:nvSpPr>
-          <p:cNvPr id="12" name="cpe|exhibit|text|11"/>
-          <p:cNvSpPr txBox="1"/>
-          <p:nvPr/>
-        </p:nvSpPr>
-        <p:spPr>
-          <a:xfrm>
-            <a:off x="3176626" y="1979310"/>
-            <a:ext cx="2042770" cy="576804"/>
-          </a:xfrm>
-          <a:prstGeom prst="rect">
-            <a:avLst/>
-          </a:prstGeom>
-          <a:noFill/>
-        </p:spPr>
-        <p:txBody>
-          <a:bodyPr wrap="square" lIns="0" rIns="0" tIns="0" bIns="0" anchor="ctr">
-            <a:noAutofit/>
-          </a:bodyPr>
-          <a:lstStyle/>
-          <a:p>
-            <a:pPr algn="l">
-              <a:lnSpc>
-                <a:spcPct val="100000"/>
-              </a:lnSpc>
-            </a:pPr>
-            <a:r>
-              <a:rPr sz="1200" b="0">
-                <a:solidFill>
-                  <a:srgbClr val="1C2530"/>
-                </a:solidFill>
-                <a:latin typeface="Arial"/>
-              </a:rPr>
-              <a:t>Network
-</a:t>
-            </a:r>
-            <a:r>
-              <a:rPr sz="1200" b="1">
-                <a:solidFill>
-                  <a:srgbClr val="1C2530"/>
-                </a:solidFill>
-                <a:latin typeface="Arial"/>
-              </a:rPr>
-              <a:t>€19M</a:t>
-            </a:r>
-          </a:p>
-        </p:txBody>
-      </p:sp>
-      <p:cxnSp>
-        <p:nvCxnSpPr>
-          <p:cNvPr id="13" name="cpe|exhibit|connector|12"/>
-          <p:cNvCxnSpPr/>
-          <p:nvPr/>
-        </p:nvCxnSpPr>
-        <p:spPr>
-          <a:xfrm>
-            <a:off x="5292547" y="2267712"/>
-            <a:ext cx="205740" cy="0"/>
-          </a:xfrm>
-          <a:prstGeom prst="line">
-            <a:avLst/>
-          </a:prstGeom>
-          <a:ln w="9525">
-            <a:solidFill>
-              <a:srgbClr val="8A95A1"/>
-            </a:solidFill>
-          </a:ln>
-        </p:spPr>
-      </p:cxnSp>
-      <p:cxnSp>
-        <p:nvCxnSpPr>
-          <p:cNvPr id="14" name="cpe|exhibit|connector|13"/>
-          <p:cNvCxnSpPr/>
-          <p:nvPr/>
-        </p:nvCxnSpPr>
-        <p:spPr>
-          <a:xfrm>
-            <a:off x="5498287" y="1874520"/>
-            <a:ext cx="0" cy="393192"/>
-          </a:xfrm>
-          <a:prstGeom prst="line">
-            <a:avLst/>
-          </a:prstGeom>
-          <a:ln w="9525">
-            <a:solidFill>
-              <a:srgbClr val="8A95A1"/>
-            </a:solidFill>
-          </a:ln>
-        </p:spPr>
-      </p:cxnSp>
-      <p:cxnSp>
-        <p:nvCxnSpPr>
-          <p:cNvPr id="15" name="cpe|exhibit|connector|14"/>
-          <p:cNvCxnSpPr/>
-          <p:nvPr/>
-        </p:nvCxnSpPr>
-        <p:spPr>
-          <a:xfrm>
-            <a:off x="5498287" y="1874520"/>
-            <a:ext cx="205740" cy="0"/>
-          </a:xfrm>
-          <a:prstGeom prst="line">
-            <a:avLst/>
-          </a:prstGeom>
-          <a:ln w="9525">
-            <a:solidFill>
-              <a:srgbClr val="8A95A1"/>
-            </a:solidFill>
-          </a:ln>
-        </p:spPr>
-      </p:cxnSp>
-      <p:sp>
-        <p:nvSpPr>
-          <p:cNvPr id="16" name="cpe|exhibit|fill|15"/>
-          <p:cNvSpPr/>
-          <p:nvPr/>
-        </p:nvSpPr>
-        <p:spPr>
-          <a:xfrm>
-            <a:off x="5704027" y="1567830"/>
-            <a:ext cx="2189074" cy="613380"/>
-          </a:xfrm>
-          <a:prstGeom prst="rect">
-            <a:avLst/>
-          </a:prstGeom>
-          <a:solidFill>
-            <a:srgbClr val="F4F6F9"/>
-          </a:solidFill>
-          <a:ln>
-            <a:noFill/>
-          </a:ln>
-        </p:spPr>
-        <p:txBody>
-          <a:bodyPr rtlCol="0" anchor="ctr" lIns="0" rIns="0" tIns="0" bIns="0"/>
-          <a:lstStyle/>
-          <a:p>
-            <a:pPr algn="ctr"/>
-          </a:p>
-        </p:txBody>
-      </p:sp>
-      <p:sp>
-        <p:nvSpPr>
-          <p:cNvPr id="17" name="cpe|exhibit|text|16"/>
-          <p:cNvSpPr txBox="1"/>
-          <p:nvPr/>
-        </p:nvSpPr>
-        <p:spPr>
-          <a:xfrm>
-            <a:off x="5777179" y="1586118"/>
-            <a:ext cx="2042770" cy="576804"/>
-          </a:xfrm>
-          <a:prstGeom prst="rect">
-            <a:avLst/>
-          </a:prstGeom>
-          <a:noFill/>
-        </p:spPr>
-        <p:txBody>
-          <a:bodyPr wrap="square" lIns="0" rIns="0" tIns="0" bIns="0" anchor="ctr">
-            <a:noAutofit/>
-          </a:bodyPr>
-          <a:lstStyle/>
-          <a:p>
-            <a:pPr algn="l">
-              <a:lnSpc>
-                <a:spcPct val="100000"/>
-              </a:lnSpc>
-            </a:pPr>
-            <a:r>
-              <a:rPr sz="1200" b="0">
-                <a:solidFill>
-                  <a:srgbClr val="1C2530"/>
-                </a:solidFill>
-                <a:latin typeface="Arial"/>
-              </a:rPr>
-              <a:t>Too many depots
-</a:t>
-            </a:r>
-            <a:r>
-              <a:rPr sz="1200" b="1">
-                <a:solidFill>
-                  <a:srgbClr val="1C2530"/>
-                </a:solidFill>
-                <a:latin typeface="Arial"/>
-              </a:rPr>
-              <a:t>€11M</a:t>
-            </a:r>
-          </a:p>
-        </p:txBody>
-      </p:sp>
-      <p:cxnSp>
-        <p:nvCxnSpPr>
-          <p:cNvPr id="18" name="cpe|exhibit|connector|17"/>
-          <p:cNvCxnSpPr/>
-          <p:nvPr/>
-        </p:nvCxnSpPr>
-        <p:spPr>
-          <a:xfrm>
-            <a:off x="5292547" y="2267712"/>
-            <a:ext cx="205740" cy="0"/>
-          </a:xfrm>
-          <a:prstGeom prst="line">
-            <a:avLst/>
-          </a:prstGeom>
-          <a:ln w="9525">
-            <a:solidFill>
-              <a:srgbClr val="8A95A1"/>
-            </a:solidFill>
-          </a:ln>
-        </p:spPr>
-      </p:cxnSp>
-      <p:cxnSp>
-        <p:nvCxnSpPr>
-          <p:cNvPr id="19" name="cpe|exhibit|connector|18"/>
-          <p:cNvCxnSpPr/>
-          <p:nvPr/>
-        </p:nvCxnSpPr>
-        <p:spPr>
-          <a:xfrm>
-            <a:off x="5498287" y="2267712"/>
-            <a:ext cx="0" cy="393192"/>
-          </a:xfrm>
-          <a:prstGeom prst="line">
-            <a:avLst/>
-          </a:prstGeom>
-          <a:ln w="9525">
-            <a:solidFill>
-              <a:srgbClr val="8A95A1"/>
-            </a:solidFill>
-          </a:ln>
-        </p:spPr>
-      </p:cxnSp>
-      <p:cxnSp>
-        <p:nvCxnSpPr>
-          <p:cNvPr id="20" name="cpe|exhibit|connector|19"/>
-          <p:cNvCxnSpPr/>
-          <p:nvPr/>
-        </p:nvCxnSpPr>
-        <p:spPr>
-          <a:xfrm>
-            <a:off x="5498287" y="2660904"/>
-            <a:ext cx="205740" cy="0"/>
-          </a:xfrm>
-          <a:prstGeom prst="line">
-            <a:avLst/>
-          </a:prstGeom>
-          <a:ln w="9525">
-            <a:solidFill>
-              <a:srgbClr val="8A95A1"/>
-            </a:solidFill>
-          </a:ln>
-        </p:spPr>
-      </p:cxnSp>
-      <p:sp>
-        <p:nvSpPr>
-          <p:cNvPr id="21" name="cpe|exhibit|fill|20"/>
-          <p:cNvSpPr/>
-          <p:nvPr/>
-        </p:nvSpPr>
-        <p:spPr>
-          <a:xfrm>
-            <a:off x="5704027" y="2354214"/>
-            <a:ext cx="2189074" cy="613380"/>
-          </a:xfrm>
-          <a:prstGeom prst="rect">
-            <a:avLst/>
-          </a:prstGeom>
-          <a:solidFill>
-            <a:srgbClr val="F4F6F9"/>
-          </a:solidFill>
-          <a:ln>
-            <a:noFill/>
-          </a:ln>
-        </p:spPr>
-        <p:txBody>
-          <a:bodyPr rtlCol="0" anchor="ctr" lIns="0" rIns="0" tIns="0" bIns="0"/>
-          <a:lstStyle/>
-          <a:p>
-            <a:pPr algn="ctr"/>
-          </a:p>
-        </p:txBody>
-      </p:sp>
-      <p:sp>
-        <p:nvSpPr>
-          <p:cNvPr id="22" name="cpe|exhibit|text|21"/>
-          <p:cNvSpPr txBox="1"/>
-          <p:nvPr/>
-        </p:nvSpPr>
-        <p:spPr>
-          <a:xfrm>
-            <a:off x="5777179" y="2372502"/>
-            <a:ext cx="2042770" cy="576804"/>
-          </a:xfrm>
-          <a:prstGeom prst="rect">
-            <a:avLst/>
-          </a:prstGeom>
-          <a:noFill/>
-        </p:spPr>
-        <p:txBody>
-          <a:bodyPr wrap="square" lIns="0" rIns="0" tIns="0" bIns="0" anchor="ctr">
-            <a:noAutofit/>
-          </a:bodyPr>
-          <a:lstStyle/>
-          <a:p>
-            <a:pPr algn="l">
-              <a:lnSpc>
-                <a:spcPct val="100000"/>
-              </a:lnSpc>
-            </a:pPr>
-            <a:r>
-              <a:rPr sz="1200" b="0">
-                <a:solidFill>
-                  <a:srgbClr val="1C2530"/>
-                </a:solidFill>
-                <a:latin typeface="Arial"/>
-              </a:rPr>
-              <a:t>Low truck fill
-</a:t>
-            </a:r>
-            <a:r>
-              <a:rPr sz="1200" b="1">
-                <a:solidFill>
-                  <a:srgbClr val="1C2530"/>
-                </a:solidFill>
-                <a:latin typeface="Arial"/>
-              </a:rPr>
-              <a:t>€8M</a:t>
-            </a:r>
-          </a:p>
-        </p:txBody>
-      </p:sp>
-      <p:cxnSp>
-        <p:nvCxnSpPr>
-          <p:cNvPr id="23" name="cpe|exhibit|connector|22"/>
-          <p:cNvCxnSpPr/>
-          <p:nvPr/>
-        </p:nvCxnSpPr>
-        <p:spPr>
-          <a:xfrm>
-            <a:off x="2691994" y="3840480"/>
-            <a:ext cx="205740" cy="0"/>
-          </a:xfrm>
-          <a:prstGeom prst="line">
-            <a:avLst/>
-          </a:prstGeom>
-          <a:ln w="9525">
-            <a:solidFill>
-              <a:srgbClr val="8A95A1"/>
-            </a:solidFill>
-          </a:ln>
-        </p:spPr>
-      </p:cxnSp>
-      <p:cxnSp>
-        <p:nvCxnSpPr>
-          <p:cNvPr id="24" name="cpe|exhibit|connector|23"/>
-          <p:cNvCxnSpPr/>
-          <p:nvPr/>
-        </p:nvCxnSpPr>
-        <p:spPr>
-          <a:xfrm>
-            <a:off x="2897734" y="3840480"/>
-            <a:ext cx="205740" cy="0"/>
-          </a:xfrm>
-          <a:prstGeom prst="line">
-            <a:avLst/>
-          </a:prstGeom>
-          <a:ln w="9525">
-            <a:solidFill>
-              <a:srgbClr val="8A95A1"/>
-            </a:solidFill>
-          </a:ln>
-        </p:spPr>
-      </p:cxnSp>
-      <p:sp>
-        <p:nvSpPr>
-          <p:cNvPr id="25" name="cpe|exhibit|fill|24"/>
-          <p:cNvSpPr/>
-          <p:nvPr/>
-        </p:nvSpPr>
-        <p:spPr>
-          <a:xfrm>
-            <a:off x="3103474" y="3533790"/>
-            <a:ext cx="2189074" cy="613380"/>
-          </a:xfrm>
-          <a:prstGeom prst="rect">
-            <a:avLst/>
-          </a:prstGeom>
-          <a:solidFill>
-            <a:srgbClr val="E08A00"/>
-          </a:solidFill>
-          <a:ln>
-            <a:noFill/>
-          </a:ln>
-        </p:spPr>
-        <p:txBody>
-          <a:bodyPr rtlCol="0" anchor="ctr" lIns="0" rIns="0" tIns="0" bIns="0"/>
-          <a:lstStyle/>
-          <a:p>
-            <a:pPr algn="ctr"/>
-          </a:p>
-        </p:txBody>
-      </p:sp>
-      <p:sp>
-        <p:nvSpPr>
-          <p:cNvPr id="26" name="cpe|exhibit|text|25"/>
-          <p:cNvSpPr txBox="1"/>
-          <p:nvPr/>
-        </p:nvSpPr>
-        <p:spPr>
-          <a:xfrm>
-            <a:off x="3176626" y="3552078"/>
-            <a:ext cx="2042770" cy="576804"/>
-          </a:xfrm>
-          <a:prstGeom prst="rect">
-            <a:avLst/>
-          </a:prstGeom>
-          <a:noFill/>
-        </p:spPr>
-        <p:txBody>
-          <a:bodyPr wrap="square" lIns="0" rIns="0" tIns="0" bIns="0" anchor="ctr">
-            <a:noAutofit/>
-          </a:bodyPr>
-          <a:lstStyle/>
-          <a:p>
-            <a:pPr algn="l">
-              <a:lnSpc>
-                <a:spcPct val="100000"/>
-              </a:lnSpc>
-            </a:pPr>
-            <a:r>
-              <a:rPr sz="1200" b="0">
-                <a:solidFill>
-                  <a:srgbClr val="1C2530"/>
-                </a:solidFill>
-                <a:latin typeface="Arial"/>
-              </a:rPr>
-              <a:t>Warehousing
-</a:t>
-            </a:r>
-            <a:r>
-              <a:rPr sz="1200" b="1">
-                <a:solidFill>
-                  <a:srgbClr val="1C2530"/>
-                </a:solidFill>
-                <a:latin typeface="Arial"/>
-              </a:rPr>
-              <a:t>€12M</a:t>
-            </a:r>
-          </a:p>
-        </p:txBody>
-      </p:sp>
-      <p:cxnSp>
-        <p:nvCxnSpPr>
-          <p:cNvPr id="27" name="cpe|exhibit|connector|26"/>
-          <p:cNvCxnSpPr/>
-          <p:nvPr/>
-        </p:nvCxnSpPr>
-        <p:spPr>
-          <a:xfrm>
-            <a:off x="5292547" y="3840480"/>
-            <a:ext cx="205740" cy="0"/>
-          </a:xfrm>
-          <a:prstGeom prst="line">
-            <a:avLst/>
-          </a:prstGeom>
-          <a:ln w="9525">
-            <a:solidFill>
-              <a:srgbClr val="8A95A1"/>
-            </a:solidFill>
-          </a:ln>
-        </p:spPr>
-      </p:cxnSp>
-      <p:cxnSp>
-        <p:nvCxnSpPr>
-          <p:cNvPr id="28" name="cpe|exhibit|connector|27"/>
-          <p:cNvCxnSpPr/>
-          <p:nvPr/>
-        </p:nvCxnSpPr>
-        <p:spPr>
-          <a:xfrm>
-            <a:off x="5498287" y="3447288"/>
-            <a:ext cx="0" cy="393192"/>
-          </a:xfrm>
-          <a:prstGeom prst="line">
-            <a:avLst/>
-          </a:prstGeom>
-          <a:ln w="9525">
-            <a:solidFill>
-              <a:srgbClr val="8A95A1"/>
-            </a:solidFill>
-          </a:ln>
-        </p:spPr>
-      </p:cxnSp>
-      <p:cxnSp>
-        <p:nvCxnSpPr>
-          <p:cNvPr id="29" name="cpe|exhibit|connector|28"/>
-          <p:cNvCxnSpPr/>
-          <p:nvPr/>
-        </p:nvCxnSpPr>
-        <p:spPr>
-          <a:xfrm>
-            <a:off x="5498287" y="3447288"/>
-            <a:ext cx="205740" cy="0"/>
-          </a:xfrm>
-          <a:prstGeom prst="line">
-            <a:avLst/>
-          </a:prstGeom>
-          <a:ln w="9525">
-            <a:solidFill>
-              <a:srgbClr val="8A95A1"/>
-            </a:solidFill>
-          </a:ln>
-        </p:spPr>
-      </p:cxnSp>
-      <p:sp>
-        <p:nvSpPr>
-          <p:cNvPr id="30" name="cpe|exhibit|fill|29"/>
-          <p:cNvSpPr/>
-          <p:nvPr/>
-        </p:nvSpPr>
-        <p:spPr>
-          <a:xfrm>
-            <a:off x="5704027" y="3140598"/>
-            <a:ext cx="2189074" cy="613380"/>
-          </a:xfrm>
-          <a:prstGeom prst="rect">
-            <a:avLst/>
-          </a:prstGeom>
-          <a:solidFill>
-            <a:srgbClr val="F4F6F9"/>
-          </a:solidFill>
-          <a:ln>
-            <a:noFill/>
-          </a:ln>
-        </p:spPr>
-        <p:txBody>
-          <a:bodyPr rtlCol="0" anchor="ctr" lIns="0" rIns="0" tIns="0" bIns="0"/>
-          <a:lstStyle/>
-          <a:p>
-            <a:pPr algn="ctr"/>
-          </a:p>
-        </p:txBody>
-      </p:sp>
-      <p:sp>
-        <p:nvSpPr>
-          <p:cNvPr id="31" name="cpe|exhibit|text|30"/>
-          <p:cNvSpPr txBox="1"/>
-          <p:nvPr/>
-        </p:nvSpPr>
-        <p:spPr>
-          <a:xfrm>
-            <a:off x="5777179" y="3158886"/>
-            <a:ext cx="2042770" cy="576804"/>
-          </a:xfrm>
-          <a:prstGeom prst="rect">
-            <a:avLst/>
-          </a:prstGeom>
-          <a:noFill/>
-        </p:spPr>
-        <p:txBody>
-          <a:bodyPr wrap="square" lIns="0" rIns="0" tIns="0" bIns="0" anchor="ctr">
-            <a:noAutofit/>
-          </a:bodyPr>
-          <a:lstStyle/>
-          <a:p>
-            <a:pPr algn="l">
-              <a:lnSpc>
-                <a:spcPct val="100000"/>
-              </a:lnSpc>
-            </a:pPr>
-            <a:r>
-              <a:rPr sz="1200" b="0">
-                <a:solidFill>
-                  <a:srgbClr val="1C2530"/>
-                </a:solidFill>
-                <a:latin typeface="Arial"/>
-              </a:rPr>
-              <a:t>Manual picking
-</a:t>
-            </a:r>
-            <a:r>
-              <a:rPr sz="1200" b="1">
-                <a:solidFill>
-                  <a:srgbClr val="1C2530"/>
-                </a:solidFill>
-                <a:latin typeface="Arial"/>
-              </a:rPr>
-              <a:t>€9M</a:t>
-            </a:r>
-          </a:p>
-        </p:txBody>
-      </p:sp>
-      <p:cxnSp>
-        <p:nvCxnSpPr>
-          <p:cNvPr id="32" name="cpe|exhibit|connector|31"/>
-          <p:cNvCxnSpPr/>
-          <p:nvPr/>
-        </p:nvCxnSpPr>
-        <p:spPr>
-          <a:xfrm>
-            <a:off x="5292547" y="3840480"/>
-            <a:ext cx="205740" cy="0"/>
-          </a:xfrm>
-          <a:prstGeom prst="line">
-            <a:avLst/>
-          </a:prstGeom>
-          <a:ln w="9525">
-            <a:solidFill>
-              <a:srgbClr val="8A95A1"/>
-            </a:solidFill>
-          </a:ln>
-        </p:spPr>
-      </p:cxnSp>
-      <p:cxnSp>
-        <p:nvCxnSpPr>
-          <p:cNvPr id="33" name="cpe|exhibit|connector|32"/>
-          <p:cNvCxnSpPr/>
-          <p:nvPr/>
-        </p:nvCxnSpPr>
-        <p:spPr>
-          <a:xfrm>
-            <a:off x="5498287" y="3840480"/>
-            <a:ext cx="0" cy="393192"/>
-          </a:xfrm>
-          <a:prstGeom prst="line">
-            <a:avLst/>
-          </a:prstGeom>
-          <a:ln w="9525">
-            <a:solidFill>
-              <a:srgbClr val="8A95A1"/>
-            </a:solidFill>
-          </a:ln>
-        </p:spPr>
-      </p:cxnSp>
-      <p:cxnSp>
-        <p:nvCxnSpPr>
-          <p:cNvPr id="34" name="cpe|exhibit|connector|33"/>
-          <p:cNvCxnSpPr/>
-          <p:nvPr/>
-        </p:nvCxnSpPr>
-        <p:spPr>
-          <a:xfrm>
-            <a:off x="5498287" y="4233672"/>
-            <a:ext cx="205740" cy="0"/>
-          </a:xfrm>
-          <a:prstGeom prst="line">
-            <a:avLst/>
-          </a:prstGeom>
-          <a:ln w="9525">
-            <a:solidFill>
-              <a:srgbClr val="8A95A1"/>
-            </a:solidFill>
-          </a:ln>
-        </p:spPr>
-      </p:cxnSp>
-      <p:sp>
-        <p:nvSpPr>
-          <p:cNvPr id="35" name="cpe|exhibit|fill|34"/>
-          <p:cNvSpPr/>
-          <p:nvPr/>
-        </p:nvSpPr>
-        <p:spPr>
-          <a:xfrm>
-            <a:off x="5704027" y="3926982"/>
-            <a:ext cx="2189074" cy="613380"/>
-          </a:xfrm>
-          <a:prstGeom prst="rect">
-            <a:avLst/>
-          </a:prstGeom>
-          <a:solidFill>
-            <a:srgbClr val="F4F6F9"/>
-          </a:solidFill>
-          <a:ln>
-            <a:noFill/>
-          </a:ln>
-        </p:spPr>
-        <p:txBody>
-          <a:bodyPr rtlCol="0" anchor="ctr" lIns="0" rIns="0" tIns="0" bIns="0"/>
-          <a:lstStyle/>
-          <a:p>
-            <a:pPr algn="ctr"/>
-          </a:p>
-        </p:txBody>
-      </p:sp>
-      <p:sp>
-        <p:nvSpPr>
-          <p:cNvPr id="36" name="cpe|exhibit|text|35"/>
-          <p:cNvSpPr txBox="1"/>
-          <p:nvPr/>
-        </p:nvSpPr>
-        <p:spPr>
-          <a:xfrm>
-            <a:off x="5777179" y="3945270"/>
-            <a:ext cx="2042770" cy="576804"/>
-          </a:xfrm>
-          <a:prstGeom prst="rect">
-            <a:avLst/>
-          </a:prstGeom>
-          <a:noFill/>
-        </p:spPr>
-        <p:txBody>
-          <a:bodyPr wrap="square" lIns="0" rIns="0" tIns="0" bIns="0" anchor="ctr">
-            <a:noAutofit/>
-          </a:bodyPr>
-          <a:lstStyle/>
-          <a:p>
-            <a:pPr algn="l">
-              <a:lnSpc>
-                <a:spcPct val="100000"/>
-              </a:lnSpc>
-            </a:pPr>
-            <a:r>
-              <a:rPr sz="1200" b="0">
-                <a:solidFill>
-                  <a:srgbClr val="1C2530"/>
-                </a:solidFill>
-                <a:latin typeface="Arial"/>
-              </a:rPr>
-              <a:t>Overtime
-</a:t>
-            </a:r>
-            <a:r>
-              <a:rPr sz="1200" b="1">
-                <a:solidFill>
-                  <a:srgbClr val="1C2530"/>
-                </a:solidFill>
-                <a:latin typeface="Arial"/>
-              </a:rPr>
-              <a:t>€3M</a:t>
-            </a:r>
-          </a:p>
-        </p:txBody>
-      </p:sp>
-      <p:cxnSp>
-        <p:nvCxnSpPr>
-          <p:cNvPr id="37" name="cpe|exhibit|connector|36"/>
-          <p:cNvCxnSpPr/>
-          <p:nvPr/>
-        </p:nvCxnSpPr>
-        <p:spPr>
-          <a:xfrm>
-            <a:off x="2691994" y="3840480"/>
-            <a:ext cx="205740" cy="0"/>
-          </a:xfrm>
-          <a:prstGeom prst="line">
-            <a:avLst/>
-          </a:prstGeom>
-          <a:ln w="9525">
-            <a:solidFill>
-              <a:srgbClr val="8A95A1"/>
-            </a:solidFill>
-          </a:ln>
-        </p:spPr>
-      </p:cxnSp>
-      <p:cxnSp>
-        <p:nvCxnSpPr>
-          <p:cNvPr id="38" name="cpe|exhibit|connector|37"/>
-          <p:cNvCxnSpPr/>
-          <p:nvPr/>
-        </p:nvCxnSpPr>
-        <p:spPr>
-          <a:xfrm>
-            <a:off x="2897734" y="3840480"/>
-            <a:ext cx="0" cy="1572768"/>
-          </a:xfrm>
-          <a:prstGeom prst="line">
-            <a:avLst/>
-          </a:prstGeom>
-          <a:ln w="9525">
-            <a:solidFill>
-              <a:srgbClr val="8A95A1"/>
-            </a:solidFill>
-          </a:ln>
-        </p:spPr>
-      </p:cxnSp>
-      <p:cxnSp>
-        <p:nvCxnSpPr>
-          <p:cNvPr id="39" name="cpe|exhibit|connector|38"/>
-          <p:cNvCxnSpPr/>
-          <p:nvPr/>
-        </p:nvCxnSpPr>
-        <p:spPr>
-          <a:xfrm>
-            <a:off x="2897734" y="5413248"/>
-            <a:ext cx="205740" cy="0"/>
-          </a:xfrm>
-          <a:prstGeom prst="line">
-            <a:avLst/>
-          </a:prstGeom>
-          <a:ln w="9525">
-            <a:solidFill>
-              <a:srgbClr val="8A95A1"/>
-            </a:solidFill>
-          </a:ln>
-        </p:spPr>
-      </p:cxnSp>
-      <p:sp>
-        <p:nvSpPr>
-          <p:cNvPr id="40" name="cpe|exhibit|fill|39"/>
-          <p:cNvSpPr/>
-          <p:nvPr/>
-        </p:nvSpPr>
-        <p:spPr>
-          <a:xfrm>
-            <a:off x="3103474" y="5106558"/>
-            <a:ext cx="2189074" cy="613380"/>
-          </a:xfrm>
-          <a:prstGeom prst="rect">
-            <a:avLst/>
-          </a:prstGeom>
-          <a:solidFill>
-            <a:srgbClr val="F4F6F9"/>
-          </a:solidFill>
-          <a:ln>
-            <a:noFill/>
-          </a:ln>
-        </p:spPr>
-        <p:txBody>
-          <a:bodyPr rtlCol="0" anchor="ctr" lIns="0" rIns="0" tIns="0" bIns="0"/>
-          <a:lstStyle/>
-          <a:p>
-            <a:pPr algn="ctr"/>
-          </a:p>
-        </p:txBody>
-      </p:sp>
-      <p:sp>
-        <p:nvSpPr>
-          <p:cNvPr id="41" name="cpe|exhibit|text|40"/>
-          <p:cNvSpPr txBox="1"/>
-          <p:nvPr/>
-        </p:nvSpPr>
-        <p:spPr>
-          <a:xfrm>
-            <a:off x="3176626" y="5124846"/>
-            <a:ext cx="2042770" cy="576804"/>
-          </a:xfrm>
-          <a:prstGeom prst="rect">
-            <a:avLst/>
-          </a:prstGeom>
-          <a:noFill/>
-        </p:spPr>
-        <p:txBody>
-          <a:bodyPr wrap="square" lIns="0" rIns="0" tIns="0" bIns="0" anchor="ctr">
-            <a:noAutofit/>
-          </a:bodyPr>
-          <a:lstStyle/>
-          <a:p>
-            <a:pPr algn="l">
-              <a:lnSpc>
-                <a:spcPct val="100000"/>
-              </a:lnSpc>
-            </a:pPr>
-            <a:r>
-              <a:rPr sz="1200" b="0">
-                <a:solidFill>
-                  <a:srgbClr val="1C2530"/>
-                </a:solidFill>
-                <a:latin typeface="Arial"/>
-              </a:rPr>
-              <a:t>Customer terms
-</a:t>
-            </a:r>
-            <a:r>
-              <a:rPr sz="1200" b="1">
-                <a:solidFill>
-                  <a:srgbClr val="1C2530"/>
-                </a:solidFill>
-                <a:latin typeface="Arial"/>
-              </a:rPr>
-              <a:t>€13M</a:t>
-            </a:r>
-          </a:p>
-        </p:txBody>
-      </p:sp>
-      <p:cxnSp>
-        <p:nvCxnSpPr>
-          <p:cNvPr id="42" name="cpe|exhibit|connector|41"/>
-          <p:cNvCxnSpPr/>
-          <p:nvPr/>
-        </p:nvCxnSpPr>
-        <p:spPr>
-          <a:xfrm>
-            <a:off x="5292547" y="5413248"/>
-            <a:ext cx="205740" cy="0"/>
-          </a:xfrm>
-          <a:prstGeom prst="line">
-            <a:avLst/>
-          </a:prstGeom>
-          <a:ln w="9525">
-            <a:solidFill>
-              <a:srgbClr val="8A95A1"/>
-            </a:solidFill>
-          </a:ln>
-        </p:spPr>
-      </p:cxnSp>
-      <p:cxnSp>
-        <p:nvCxnSpPr>
-          <p:cNvPr id="43" name="cpe|exhibit|connector|42"/>
-          <p:cNvCxnSpPr/>
-          <p:nvPr/>
-        </p:nvCxnSpPr>
-        <p:spPr>
-          <a:xfrm>
-            <a:off x="5498287" y="5020056"/>
-            <a:ext cx="0" cy="393192"/>
-          </a:xfrm>
-          <a:prstGeom prst="line">
-            <a:avLst/>
-          </a:prstGeom>
-          <a:ln w="9525">
-            <a:solidFill>
-              <a:srgbClr val="8A95A1"/>
-            </a:solidFill>
-          </a:ln>
-        </p:spPr>
-      </p:cxnSp>
-      <p:cxnSp>
-        <p:nvCxnSpPr>
-          <p:cNvPr id="44" name="cpe|exhibit|connector|43"/>
-          <p:cNvCxnSpPr/>
-          <p:nvPr/>
-        </p:nvCxnSpPr>
-        <p:spPr>
-          <a:xfrm>
-            <a:off x="5498287" y="5020056"/>
-            <a:ext cx="205740" cy="0"/>
-          </a:xfrm>
-          <a:prstGeom prst="line">
-            <a:avLst/>
-          </a:prstGeom>
-          <a:ln w="9525">
-            <a:solidFill>
-              <a:srgbClr val="8A95A1"/>
-            </a:solidFill>
-          </a:ln>
-        </p:spPr>
-      </p:cxnSp>
-      <p:sp>
-        <p:nvSpPr>
-          <p:cNvPr id="45" name="cpe|exhibit|fill|44"/>
-          <p:cNvSpPr/>
-          <p:nvPr/>
-        </p:nvSpPr>
-        <p:spPr>
-          <a:xfrm>
-            <a:off x="5704027" y="4713366"/>
-            <a:ext cx="2189074" cy="613380"/>
-          </a:xfrm>
-          <a:prstGeom prst="rect">
-            <a:avLst/>
-          </a:prstGeom>
-          <a:solidFill>
-            <a:srgbClr val="F4F6F9"/>
-          </a:solidFill>
-          <a:ln>
-            <a:noFill/>
-          </a:ln>
-        </p:spPr>
-        <p:txBody>
-          <a:bodyPr rtlCol="0" anchor="ctr" lIns="0" rIns="0" tIns="0" bIns="0"/>
-          <a:lstStyle/>
-          <a:p>
-            <a:pPr algn="ctr"/>
-          </a:p>
-        </p:txBody>
-      </p:sp>
-      <p:sp>
-        <p:nvSpPr>
-          <p:cNvPr id="46" name="cpe|exhibit|text|45"/>
-          <p:cNvSpPr txBox="1"/>
-          <p:nvPr/>
-        </p:nvSpPr>
-        <p:spPr>
-          <a:xfrm>
-            <a:off x="5777179" y="4731654"/>
-            <a:ext cx="2042770" cy="576804"/>
-          </a:xfrm>
-          <a:prstGeom prst="rect">
-            <a:avLst/>
-          </a:prstGeom>
-          <a:noFill/>
-        </p:spPr>
-        <p:txBody>
-          <a:bodyPr wrap="square" lIns="0" rIns="0" tIns="0" bIns="0" anchor="ctr">
-            <a:noAutofit/>
-          </a:bodyPr>
-          <a:lstStyle/>
-          <a:p>
-            <a:pPr algn="l">
-              <a:lnSpc>
-                <a:spcPct val="100000"/>
-              </a:lnSpc>
-            </a:pPr>
-            <a:r>
-              <a:rPr sz="1200" b="0">
-                <a:solidFill>
-                  <a:srgbClr val="1C2530"/>
-                </a:solidFill>
-                <a:latin typeface="Arial"/>
-              </a:rPr>
-              <a:t>Small drops
-</a:t>
-            </a:r>
-            <a:r>
-              <a:rPr sz="1200" b="1">
-                <a:solidFill>
-                  <a:srgbClr val="1C2530"/>
-                </a:solidFill>
-                <a:latin typeface="Arial"/>
-              </a:rPr>
-              <a:t>€8M</a:t>
-            </a:r>
-          </a:p>
-        </p:txBody>
-      </p:sp>
-      <p:cxnSp>
-        <p:nvCxnSpPr>
-          <p:cNvPr id="47" name="cpe|exhibit|connector|46"/>
-          <p:cNvCxnSpPr/>
-          <p:nvPr/>
-        </p:nvCxnSpPr>
-        <p:spPr>
-          <a:xfrm>
-            <a:off x="5292547" y="5413248"/>
-            <a:ext cx="205740" cy="0"/>
-          </a:xfrm>
-          <a:prstGeom prst="line">
-            <a:avLst/>
-          </a:prstGeom>
-          <a:ln w="9525">
-            <a:solidFill>
-              <a:srgbClr val="8A95A1"/>
-            </a:solidFill>
-          </a:ln>
-        </p:spPr>
-      </p:cxnSp>
-      <p:cxnSp>
-        <p:nvCxnSpPr>
-          <p:cNvPr id="48" name="cpe|exhibit|connector|47"/>
-          <p:cNvCxnSpPr/>
-          <p:nvPr/>
-        </p:nvCxnSpPr>
-        <p:spPr>
-          <a:xfrm>
-            <a:off x="5498287" y="5413248"/>
-            <a:ext cx="0" cy="393192"/>
-          </a:xfrm>
-          <a:prstGeom prst="line">
-            <a:avLst/>
-          </a:prstGeom>
-          <a:ln w="9525">
-            <a:solidFill>
-              <a:srgbClr val="8A95A1"/>
-            </a:solidFill>
-          </a:ln>
-        </p:spPr>
-      </p:cxnSp>
-      <p:cxnSp>
-        <p:nvCxnSpPr>
-          <p:cNvPr id="49" name="cpe|exhibit|connector|48"/>
-          <p:cNvCxnSpPr/>
-          <p:nvPr/>
-        </p:nvCxnSpPr>
-        <p:spPr>
-          <a:xfrm>
-            <a:off x="5498287" y="5806440"/>
-            <a:ext cx="205740" cy="0"/>
-          </a:xfrm>
-          <a:prstGeom prst="line">
-            <a:avLst/>
-          </a:prstGeom>
-          <a:ln w="9525">
-            <a:solidFill>
-              <a:srgbClr val="8A95A1"/>
-            </a:solidFill>
-          </a:ln>
-        </p:spPr>
-      </p:cxnSp>
-      <p:sp>
-        <p:nvSpPr>
-          <p:cNvPr id="50" name="cpe|exhibit|fill|49"/>
-          <p:cNvSpPr/>
-          <p:nvPr/>
-        </p:nvSpPr>
-        <p:spPr>
-          <a:xfrm>
-            <a:off x="5704027" y="5499750"/>
-            <a:ext cx="2189074" cy="613380"/>
-          </a:xfrm>
-          <a:prstGeom prst="rect">
-            <a:avLst/>
-          </a:prstGeom>
-          <a:solidFill>
-            <a:srgbClr val="F4F6F9"/>
-          </a:solidFill>
-          <a:ln>
-            <a:noFill/>
-          </a:ln>
-        </p:spPr>
-        <p:txBody>
-          <a:bodyPr rtlCol="0" anchor="ctr" lIns="0" rIns="0" tIns="0" bIns="0"/>
-          <a:lstStyle/>
-          <a:p>
-            <a:pPr algn="ctr"/>
-          </a:p>
-        </p:txBody>
-      </p:sp>
-      <p:sp>
-        <p:nvSpPr>
-          <p:cNvPr id="51" name="cpe|exhibit|text|50"/>
-          <p:cNvSpPr txBox="1"/>
-          <p:nvPr/>
-        </p:nvSpPr>
-        <p:spPr>
-          <a:xfrm>
-            <a:off x="5777179" y="5518038"/>
-            <a:ext cx="2042770" cy="576804"/>
-          </a:xfrm>
-          <a:prstGeom prst="rect">
-            <a:avLst/>
-          </a:prstGeom>
-          <a:noFill/>
-        </p:spPr>
-        <p:txBody>
-          <a:bodyPr wrap="square" lIns="0" rIns="0" tIns="0" bIns="0" anchor="ctr">
-            <a:noAutofit/>
-          </a:bodyPr>
-          <a:lstStyle/>
-          <a:p>
-            <a:pPr algn="l">
-              <a:lnSpc>
-                <a:spcPct val="100000"/>
-              </a:lnSpc>
-            </a:pPr>
-            <a:r>
-              <a:rPr sz="1200" b="0">
-                <a:solidFill>
-                  <a:srgbClr val="1C2530"/>
-                </a:solidFill>
-                <a:latin typeface="Arial"/>
-              </a:rPr>
-              <a:t>Free returns
-</a:t>
-            </a:r>
-            <a:r>
-              <a:rPr sz="1200" b="1">
-                <a:solidFill>
-                  <a:srgbClr val="1C2530"/>
-                </a:solidFill>
-                <a:latin typeface="Arial"/>
-              </a:rPr>
-              <a:t>€5M</a:t>
-            </a:r>
-          </a:p>
-        </p:txBody>
-      </p:sp>
-      <p:cxnSp>
-        <p:nvCxnSpPr>
-          <p:cNvPr id="52" name="cpe|commentary|line|51"/>
-          <p:cNvCxnSpPr/>
-          <p:nvPr/>
-        </p:nvCxnSpPr>
-        <p:spPr>
-          <a:xfrm>
-            <a:off x="8094269" y="1481328"/>
+            <a:off x="4097426" y="1481328"/>
             <a:ext cx="0" cy="4718304"/>
           </a:xfrm>
           <a:prstGeom prst="line">
@@ -25609,13 +24367,13 @@
       </p:cxnSp>
       <p:sp>
         <p:nvSpPr>
-          <p:cNvPr id="53" name="cpe|commentary|text|52"/>
-          <p:cNvSpPr txBox="1"/>
-          <p:nvPr/>
-        </p:nvSpPr>
-        <p:spPr>
-          <a:xfrm>
-            <a:off x="8322869" y="1481328"/>
+          <p:cNvPr id="7" name="cpe|commentary|text|6"/>
+          <p:cNvSpPr txBox="1"/>
+          <p:nvPr/>
+        </p:nvSpPr>
+        <p:spPr>
+          <a:xfrm>
+            <a:off x="502920" y="1481328"/>
             <a:ext cx="3365906" cy="4718304"/>
           </a:xfrm>
           <a:prstGeom prst="rect">
@@ -25644,7 +24402,7 @@
               <a:buChar char="•"/>
             </a:pPr>
             <a:r>
-              <a:rPr sz="1200" b="1">
+              <a:rPr sz="1400" b="1">
                 <a:solidFill>
                   <a:srgbClr val="1C2530"/>
                 </a:solidFill>
@@ -25653,7 +24411,7 @@
               <a:t>Network</a:t>
             </a:r>
             <a:r>
-              <a:rPr sz="1200" b="0">
+              <a:rPr sz="1400" b="0">
                 <a:solidFill>
                   <a:srgbClr val="1C2530"/>
                 </a:solidFill>
@@ -25678,7 +24436,7 @@
               <a:buChar char="•"/>
             </a:pPr>
             <a:r>
-              <a:rPr sz="1200" b="1">
+              <a:rPr sz="1400" b="1">
                 <a:solidFill>
                   <a:srgbClr val="1C2530"/>
                 </a:solidFill>
@@ -25687,7 +24445,7 @@
               <a:t>Warehousing</a:t>
             </a:r>
             <a:r>
-              <a:rPr sz="1200" b="0">
+              <a:rPr sz="1400" b="0">
                 <a:solidFill>
                   <a:srgbClr val="1C2530"/>
                 </a:solidFill>
@@ -25709,13 +24467,1339 @@
               <a:buChar char="•"/>
             </a:pPr>
             <a:r>
-              <a:rPr sz="1200" b="0">
+              <a:rPr sz="1400" b="0">
                 <a:solidFill>
                   <a:srgbClr val="1C2530"/>
                 </a:solidFill>
                 <a:latin typeface="Arial"/>
               </a:rPr>
               <a:t>Customer terms need commercial, not operational, action</a:t>
+            </a:r>
+          </a:p>
+        </p:txBody>
+      </p:sp>
+      <p:sp>
+        <p:nvSpPr>
+          <p:cNvPr id="8" name="cpe|exhibit|fill|7"/>
+          <p:cNvSpPr/>
+          <p:nvPr/>
+        </p:nvSpPr>
+        <p:spPr>
+          <a:xfrm>
+            <a:off x="4298594" y="3533790"/>
+            <a:ext cx="2189074" cy="613380"/>
+          </a:xfrm>
+          <a:prstGeom prst="rect">
+            <a:avLst/>
+          </a:prstGeom>
+          <a:solidFill>
+            <a:srgbClr val="13294B"/>
+          </a:solidFill>
+          <a:ln>
+            <a:noFill/>
+          </a:ln>
+        </p:spPr>
+        <p:txBody>
+          <a:bodyPr rtlCol="0" anchor="ctr" lIns="0" rIns="0" tIns="0" bIns="0"/>
+          <a:lstStyle/>
+          <a:p>
+            <a:pPr algn="ctr"/>
+          </a:p>
+        </p:txBody>
+      </p:sp>
+      <p:sp>
+        <p:nvSpPr>
+          <p:cNvPr id="9" name="cpe|exhibit|text|8"/>
+          <p:cNvSpPr txBox="1"/>
+          <p:nvPr/>
+        </p:nvSpPr>
+        <p:spPr>
+          <a:xfrm>
+            <a:off x="4371746" y="3552078"/>
+            <a:ext cx="2042770" cy="576804"/>
+          </a:xfrm>
+          <a:prstGeom prst="rect">
+            <a:avLst/>
+          </a:prstGeom>
+          <a:noFill/>
+        </p:spPr>
+        <p:txBody>
+          <a:bodyPr wrap="square" lIns="0" rIns="0" tIns="0" bIns="0" anchor="ctr">
+            <a:noAutofit/>
+          </a:bodyPr>
+          <a:lstStyle/>
+          <a:p>
+            <a:pPr algn="l">
+              <a:lnSpc>
+                <a:spcPct val="100000"/>
+              </a:lnSpc>
+            </a:pPr>
+            <a:r>
+              <a:rPr sz="1400" b="0">
+                <a:solidFill>
+                  <a:srgbClr val="FFFFFF"/>
+                </a:solidFill>
+                <a:latin typeface="Arial"/>
+              </a:rPr>
+              <a:t>Gap to peer median
+</a:t>
+            </a:r>
+            <a:r>
+              <a:rPr sz="1400" b="1">
+                <a:solidFill>
+                  <a:srgbClr val="FFFFFF"/>
+                </a:solidFill>
+                <a:latin typeface="Arial"/>
+              </a:rPr>
+              <a:t>€44M</a:t>
+            </a:r>
+          </a:p>
+        </p:txBody>
+      </p:sp>
+      <p:cxnSp>
+        <p:nvCxnSpPr>
+          <p:cNvPr id="10" name="cpe|exhibit|connector|9"/>
+          <p:cNvCxnSpPr/>
+          <p:nvPr/>
+        </p:nvCxnSpPr>
+        <p:spPr>
+          <a:xfrm>
+            <a:off x="6487668" y="3840480"/>
+            <a:ext cx="205740" cy="0"/>
+          </a:xfrm>
+          <a:prstGeom prst="line">
+            <a:avLst/>
+          </a:prstGeom>
+          <a:ln w="9525">
+            <a:solidFill>
+              <a:srgbClr val="8A95A1"/>
+            </a:solidFill>
+          </a:ln>
+        </p:spPr>
+      </p:cxnSp>
+      <p:cxnSp>
+        <p:nvCxnSpPr>
+          <p:cNvPr id="11" name="cpe|exhibit|connector|10"/>
+          <p:cNvCxnSpPr/>
+          <p:nvPr/>
+        </p:nvCxnSpPr>
+        <p:spPr>
+          <a:xfrm>
+            <a:off x="6693408" y="2267712"/>
+            <a:ext cx="0" cy="1572768"/>
+          </a:xfrm>
+          <a:prstGeom prst="line">
+            <a:avLst/>
+          </a:prstGeom>
+          <a:ln w="9525">
+            <a:solidFill>
+              <a:srgbClr val="8A95A1"/>
+            </a:solidFill>
+          </a:ln>
+        </p:spPr>
+      </p:cxnSp>
+      <p:cxnSp>
+        <p:nvCxnSpPr>
+          <p:cNvPr id="12" name="cpe|exhibit|connector|11"/>
+          <p:cNvCxnSpPr/>
+          <p:nvPr/>
+        </p:nvCxnSpPr>
+        <p:spPr>
+          <a:xfrm>
+            <a:off x="6693408" y="2267712"/>
+            <a:ext cx="205740" cy="0"/>
+          </a:xfrm>
+          <a:prstGeom prst="line">
+            <a:avLst/>
+          </a:prstGeom>
+          <a:ln w="9525">
+            <a:solidFill>
+              <a:srgbClr val="8A95A1"/>
+            </a:solidFill>
+          </a:ln>
+        </p:spPr>
+      </p:cxnSp>
+      <p:sp>
+        <p:nvSpPr>
+          <p:cNvPr id="13" name="cpe|exhibit|fill|12"/>
+          <p:cNvSpPr/>
+          <p:nvPr/>
+        </p:nvSpPr>
+        <p:spPr>
+          <a:xfrm>
+            <a:off x="6899148" y="1961022"/>
+            <a:ext cx="2189074" cy="613380"/>
+          </a:xfrm>
+          <a:prstGeom prst="rect">
+            <a:avLst/>
+          </a:prstGeom>
+          <a:solidFill>
+            <a:srgbClr val="E08A00"/>
+          </a:solidFill>
+          <a:ln>
+            <a:noFill/>
+          </a:ln>
+        </p:spPr>
+        <p:txBody>
+          <a:bodyPr rtlCol="0" anchor="ctr" lIns="0" rIns="0" tIns="0" bIns="0"/>
+          <a:lstStyle/>
+          <a:p>
+            <a:pPr algn="ctr"/>
+          </a:p>
+        </p:txBody>
+      </p:sp>
+      <p:sp>
+        <p:nvSpPr>
+          <p:cNvPr id="14" name="cpe|exhibit|text|13"/>
+          <p:cNvSpPr txBox="1"/>
+          <p:nvPr/>
+        </p:nvSpPr>
+        <p:spPr>
+          <a:xfrm>
+            <a:off x="6972300" y="1979310"/>
+            <a:ext cx="2042770" cy="576804"/>
+          </a:xfrm>
+          <a:prstGeom prst="rect">
+            <a:avLst/>
+          </a:prstGeom>
+          <a:noFill/>
+        </p:spPr>
+        <p:txBody>
+          <a:bodyPr wrap="square" lIns="0" rIns="0" tIns="0" bIns="0" anchor="ctr">
+            <a:noAutofit/>
+          </a:bodyPr>
+          <a:lstStyle/>
+          <a:p>
+            <a:pPr algn="l">
+              <a:lnSpc>
+                <a:spcPct val="100000"/>
+              </a:lnSpc>
+            </a:pPr>
+            <a:r>
+              <a:rPr sz="1400" b="0">
+                <a:solidFill>
+                  <a:srgbClr val="1C2530"/>
+                </a:solidFill>
+                <a:latin typeface="Arial"/>
+              </a:rPr>
+              <a:t>Network
+</a:t>
+            </a:r>
+            <a:r>
+              <a:rPr sz="1400" b="1">
+                <a:solidFill>
+                  <a:srgbClr val="1C2530"/>
+                </a:solidFill>
+                <a:latin typeface="Arial"/>
+              </a:rPr>
+              <a:t>€19M</a:t>
+            </a:r>
+          </a:p>
+        </p:txBody>
+      </p:sp>
+      <p:cxnSp>
+        <p:nvCxnSpPr>
+          <p:cNvPr id="15" name="cpe|exhibit|connector|14"/>
+          <p:cNvCxnSpPr/>
+          <p:nvPr/>
+        </p:nvCxnSpPr>
+        <p:spPr>
+          <a:xfrm>
+            <a:off x="9088222" y="2267712"/>
+            <a:ext cx="205740" cy="0"/>
+          </a:xfrm>
+          <a:prstGeom prst="line">
+            <a:avLst/>
+          </a:prstGeom>
+          <a:ln w="9525">
+            <a:solidFill>
+              <a:srgbClr val="8A95A1"/>
+            </a:solidFill>
+          </a:ln>
+        </p:spPr>
+      </p:cxnSp>
+      <p:cxnSp>
+        <p:nvCxnSpPr>
+          <p:cNvPr id="16" name="cpe|exhibit|connector|15"/>
+          <p:cNvCxnSpPr/>
+          <p:nvPr/>
+        </p:nvCxnSpPr>
+        <p:spPr>
+          <a:xfrm>
+            <a:off x="9293962" y="1874520"/>
+            <a:ext cx="0" cy="393192"/>
+          </a:xfrm>
+          <a:prstGeom prst="line">
+            <a:avLst/>
+          </a:prstGeom>
+          <a:ln w="9525">
+            <a:solidFill>
+              <a:srgbClr val="8A95A1"/>
+            </a:solidFill>
+          </a:ln>
+        </p:spPr>
+      </p:cxnSp>
+      <p:cxnSp>
+        <p:nvCxnSpPr>
+          <p:cNvPr id="17" name="cpe|exhibit|connector|16"/>
+          <p:cNvCxnSpPr/>
+          <p:nvPr/>
+        </p:nvCxnSpPr>
+        <p:spPr>
+          <a:xfrm>
+            <a:off x="9293962" y="1874520"/>
+            <a:ext cx="205740" cy="0"/>
+          </a:xfrm>
+          <a:prstGeom prst="line">
+            <a:avLst/>
+          </a:prstGeom>
+          <a:ln w="9525">
+            <a:solidFill>
+              <a:srgbClr val="8A95A1"/>
+            </a:solidFill>
+          </a:ln>
+        </p:spPr>
+      </p:cxnSp>
+      <p:sp>
+        <p:nvSpPr>
+          <p:cNvPr id="18" name="cpe|exhibit|fill|17"/>
+          <p:cNvSpPr/>
+          <p:nvPr/>
+        </p:nvSpPr>
+        <p:spPr>
+          <a:xfrm>
+            <a:off x="9499702" y="1567830"/>
+            <a:ext cx="2189074" cy="613380"/>
+          </a:xfrm>
+          <a:prstGeom prst="rect">
+            <a:avLst/>
+          </a:prstGeom>
+          <a:solidFill>
+            <a:srgbClr val="F4F6F9"/>
+          </a:solidFill>
+          <a:ln>
+            <a:noFill/>
+          </a:ln>
+        </p:spPr>
+        <p:txBody>
+          <a:bodyPr rtlCol="0" anchor="ctr" lIns="0" rIns="0" tIns="0" bIns="0"/>
+          <a:lstStyle/>
+          <a:p>
+            <a:pPr algn="ctr"/>
+          </a:p>
+        </p:txBody>
+      </p:sp>
+      <p:sp>
+        <p:nvSpPr>
+          <p:cNvPr id="19" name="cpe|exhibit|text|18"/>
+          <p:cNvSpPr txBox="1"/>
+          <p:nvPr/>
+        </p:nvSpPr>
+        <p:spPr>
+          <a:xfrm>
+            <a:off x="9572854" y="1586118"/>
+            <a:ext cx="2042770" cy="576804"/>
+          </a:xfrm>
+          <a:prstGeom prst="rect">
+            <a:avLst/>
+          </a:prstGeom>
+          <a:noFill/>
+        </p:spPr>
+        <p:txBody>
+          <a:bodyPr wrap="square" lIns="0" rIns="0" tIns="0" bIns="0" anchor="ctr">
+            <a:noAutofit/>
+          </a:bodyPr>
+          <a:lstStyle/>
+          <a:p>
+            <a:pPr algn="l">
+              <a:lnSpc>
+                <a:spcPct val="100000"/>
+              </a:lnSpc>
+            </a:pPr>
+            <a:r>
+              <a:rPr sz="1400" b="0">
+                <a:solidFill>
+                  <a:srgbClr val="1C2530"/>
+                </a:solidFill>
+                <a:latin typeface="Arial"/>
+              </a:rPr>
+              <a:t>Too many depots
+</a:t>
+            </a:r>
+            <a:r>
+              <a:rPr sz="1400" b="1">
+                <a:solidFill>
+                  <a:srgbClr val="1C2530"/>
+                </a:solidFill>
+                <a:latin typeface="Arial"/>
+              </a:rPr>
+              <a:t>€11M</a:t>
+            </a:r>
+          </a:p>
+        </p:txBody>
+      </p:sp>
+      <p:cxnSp>
+        <p:nvCxnSpPr>
+          <p:cNvPr id="20" name="cpe|exhibit|connector|19"/>
+          <p:cNvCxnSpPr/>
+          <p:nvPr/>
+        </p:nvCxnSpPr>
+        <p:spPr>
+          <a:xfrm>
+            <a:off x="9088222" y="2267712"/>
+            <a:ext cx="205740" cy="0"/>
+          </a:xfrm>
+          <a:prstGeom prst="line">
+            <a:avLst/>
+          </a:prstGeom>
+          <a:ln w="9525">
+            <a:solidFill>
+              <a:srgbClr val="8A95A1"/>
+            </a:solidFill>
+          </a:ln>
+        </p:spPr>
+      </p:cxnSp>
+      <p:cxnSp>
+        <p:nvCxnSpPr>
+          <p:cNvPr id="21" name="cpe|exhibit|connector|20"/>
+          <p:cNvCxnSpPr/>
+          <p:nvPr/>
+        </p:nvCxnSpPr>
+        <p:spPr>
+          <a:xfrm>
+            <a:off x="9293962" y="2267712"/>
+            <a:ext cx="0" cy="393192"/>
+          </a:xfrm>
+          <a:prstGeom prst="line">
+            <a:avLst/>
+          </a:prstGeom>
+          <a:ln w="9525">
+            <a:solidFill>
+              <a:srgbClr val="8A95A1"/>
+            </a:solidFill>
+          </a:ln>
+        </p:spPr>
+      </p:cxnSp>
+      <p:cxnSp>
+        <p:nvCxnSpPr>
+          <p:cNvPr id="22" name="cpe|exhibit|connector|21"/>
+          <p:cNvCxnSpPr/>
+          <p:nvPr/>
+        </p:nvCxnSpPr>
+        <p:spPr>
+          <a:xfrm>
+            <a:off x="9293962" y="2660904"/>
+            <a:ext cx="205740" cy="0"/>
+          </a:xfrm>
+          <a:prstGeom prst="line">
+            <a:avLst/>
+          </a:prstGeom>
+          <a:ln w="9525">
+            <a:solidFill>
+              <a:srgbClr val="8A95A1"/>
+            </a:solidFill>
+          </a:ln>
+        </p:spPr>
+      </p:cxnSp>
+      <p:sp>
+        <p:nvSpPr>
+          <p:cNvPr id="23" name="cpe|exhibit|fill|22"/>
+          <p:cNvSpPr/>
+          <p:nvPr/>
+        </p:nvSpPr>
+        <p:spPr>
+          <a:xfrm>
+            <a:off x="9499702" y="2354214"/>
+            <a:ext cx="2189074" cy="613380"/>
+          </a:xfrm>
+          <a:prstGeom prst="rect">
+            <a:avLst/>
+          </a:prstGeom>
+          <a:solidFill>
+            <a:srgbClr val="F4F6F9"/>
+          </a:solidFill>
+          <a:ln>
+            <a:noFill/>
+          </a:ln>
+        </p:spPr>
+        <p:txBody>
+          <a:bodyPr rtlCol="0" anchor="ctr" lIns="0" rIns="0" tIns="0" bIns="0"/>
+          <a:lstStyle/>
+          <a:p>
+            <a:pPr algn="ctr"/>
+          </a:p>
+        </p:txBody>
+      </p:sp>
+      <p:sp>
+        <p:nvSpPr>
+          <p:cNvPr id="24" name="cpe|exhibit|text|23"/>
+          <p:cNvSpPr txBox="1"/>
+          <p:nvPr/>
+        </p:nvSpPr>
+        <p:spPr>
+          <a:xfrm>
+            <a:off x="9572854" y="2372502"/>
+            <a:ext cx="2042770" cy="576804"/>
+          </a:xfrm>
+          <a:prstGeom prst="rect">
+            <a:avLst/>
+          </a:prstGeom>
+          <a:noFill/>
+        </p:spPr>
+        <p:txBody>
+          <a:bodyPr wrap="square" lIns="0" rIns="0" tIns="0" bIns="0" anchor="ctr">
+            <a:noAutofit/>
+          </a:bodyPr>
+          <a:lstStyle/>
+          <a:p>
+            <a:pPr algn="l">
+              <a:lnSpc>
+                <a:spcPct val="100000"/>
+              </a:lnSpc>
+            </a:pPr>
+            <a:r>
+              <a:rPr sz="1400" b="0">
+                <a:solidFill>
+                  <a:srgbClr val="1C2530"/>
+                </a:solidFill>
+                <a:latin typeface="Arial"/>
+              </a:rPr>
+              <a:t>Low truck fill
+</a:t>
+            </a:r>
+            <a:r>
+              <a:rPr sz="1400" b="1">
+                <a:solidFill>
+                  <a:srgbClr val="1C2530"/>
+                </a:solidFill>
+                <a:latin typeface="Arial"/>
+              </a:rPr>
+              <a:t>€8M</a:t>
+            </a:r>
+          </a:p>
+        </p:txBody>
+      </p:sp>
+      <p:cxnSp>
+        <p:nvCxnSpPr>
+          <p:cNvPr id="25" name="cpe|exhibit|connector|24"/>
+          <p:cNvCxnSpPr/>
+          <p:nvPr/>
+        </p:nvCxnSpPr>
+        <p:spPr>
+          <a:xfrm>
+            <a:off x="6487668" y="3840480"/>
+            <a:ext cx="205740" cy="0"/>
+          </a:xfrm>
+          <a:prstGeom prst="line">
+            <a:avLst/>
+          </a:prstGeom>
+          <a:ln w="9525">
+            <a:solidFill>
+              <a:srgbClr val="8A95A1"/>
+            </a:solidFill>
+          </a:ln>
+        </p:spPr>
+      </p:cxnSp>
+      <p:cxnSp>
+        <p:nvCxnSpPr>
+          <p:cNvPr id="26" name="cpe|exhibit|connector|25"/>
+          <p:cNvCxnSpPr/>
+          <p:nvPr/>
+        </p:nvCxnSpPr>
+        <p:spPr>
+          <a:xfrm>
+            <a:off x="6693408" y="3840480"/>
+            <a:ext cx="205740" cy="0"/>
+          </a:xfrm>
+          <a:prstGeom prst="line">
+            <a:avLst/>
+          </a:prstGeom>
+          <a:ln w="9525">
+            <a:solidFill>
+              <a:srgbClr val="8A95A1"/>
+            </a:solidFill>
+          </a:ln>
+        </p:spPr>
+      </p:cxnSp>
+      <p:sp>
+        <p:nvSpPr>
+          <p:cNvPr id="27" name="cpe|exhibit|fill|26"/>
+          <p:cNvSpPr/>
+          <p:nvPr/>
+        </p:nvSpPr>
+        <p:spPr>
+          <a:xfrm>
+            <a:off x="6899148" y="3533790"/>
+            <a:ext cx="2189074" cy="613380"/>
+          </a:xfrm>
+          <a:prstGeom prst="rect">
+            <a:avLst/>
+          </a:prstGeom>
+          <a:solidFill>
+            <a:srgbClr val="E08A00"/>
+          </a:solidFill>
+          <a:ln>
+            <a:noFill/>
+          </a:ln>
+        </p:spPr>
+        <p:txBody>
+          <a:bodyPr rtlCol="0" anchor="ctr" lIns="0" rIns="0" tIns="0" bIns="0"/>
+          <a:lstStyle/>
+          <a:p>
+            <a:pPr algn="ctr"/>
+          </a:p>
+        </p:txBody>
+      </p:sp>
+      <p:sp>
+        <p:nvSpPr>
+          <p:cNvPr id="28" name="cpe|exhibit|text|27"/>
+          <p:cNvSpPr txBox="1"/>
+          <p:nvPr/>
+        </p:nvSpPr>
+        <p:spPr>
+          <a:xfrm>
+            <a:off x="6972300" y="3552078"/>
+            <a:ext cx="2042770" cy="576804"/>
+          </a:xfrm>
+          <a:prstGeom prst="rect">
+            <a:avLst/>
+          </a:prstGeom>
+          <a:noFill/>
+        </p:spPr>
+        <p:txBody>
+          <a:bodyPr wrap="square" lIns="0" rIns="0" tIns="0" bIns="0" anchor="ctr">
+            <a:noAutofit/>
+          </a:bodyPr>
+          <a:lstStyle/>
+          <a:p>
+            <a:pPr algn="l">
+              <a:lnSpc>
+                <a:spcPct val="100000"/>
+              </a:lnSpc>
+            </a:pPr>
+            <a:r>
+              <a:rPr sz="1400" b="0">
+                <a:solidFill>
+                  <a:srgbClr val="1C2530"/>
+                </a:solidFill>
+                <a:latin typeface="Arial"/>
+              </a:rPr>
+              <a:t>Warehousing
+</a:t>
+            </a:r>
+            <a:r>
+              <a:rPr sz="1400" b="1">
+                <a:solidFill>
+                  <a:srgbClr val="1C2530"/>
+                </a:solidFill>
+                <a:latin typeface="Arial"/>
+              </a:rPr>
+              <a:t>€12M</a:t>
+            </a:r>
+          </a:p>
+        </p:txBody>
+      </p:sp>
+      <p:cxnSp>
+        <p:nvCxnSpPr>
+          <p:cNvPr id="29" name="cpe|exhibit|connector|28"/>
+          <p:cNvCxnSpPr/>
+          <p:nvPr/>
+        </p:nvCxnSpPr>
+        <p:spPr>
+          <a:xfrm>
+            <a:off x="9088222" y="3840480"/>
+            <a:ext cx="205740" cy="0"/>
+          </a:xfrm>
+          <a:prstGeom prst="line">
+            <a:avLst/>
+          </a:prstGeom>
+          <a:ln w="9525">
+            <a:solidFill>
+              <a:srgbClr val="8A95A1"/>
+            </a:solidFill>
+          </a:ln>
+        </p:spPr>
+      </p:cxnSp>
+      <p:cxnSp>
+        <p:nvCxnSpPr>
+          <p:cNvPr id="30" name="cpe|exhibit|connector|29"/>
+          <p:cNvCxnSpPr/>
+          <p:nvPr/>
+        </p:nvCxnSpPr>
+        <p:spPr>
+          <a:xfrm>
+            <a:off x="9293962" y="3447288"/>
+            <a:ext cx="0" cy="393192"/>
+          </a:xfrm>
+          <a:prstGeom prst="line">
+            <a:avLst/>
+          </a:prstGeom>
+          <a:ln w="9525">
+            <a:solidFill>
+              <a:srgbClr val="8A95A1"/>
+            </a:solidFill>
+          </a:ln>
+        </p:spPr>
+      </p:cxnSp>
+      <p:cxnSp>
+        <p:nvCxnSpPr>
+          <p:cNvPr id="31" name="cpe|exhibit|connector|30"/>
+          <p:cNvCxnSpPr/>
+          <p:nvPr/>
+        </p:nvCxnSpPr>
+        <p:spPr>
+          <a:xfrm>
+            <a:off x="9293962" y="3447288"/>
+            <a:ext cx="205740" cy="0"/>
+          </a:xfrm>
+          <a:prstGeom prst="line">
+            <a:avLst/>
+          </a:prstGeom>
+          <a:ln w="9525">
+            <a:solidFill>
+              <a:srgbClr val="8A95A1"/>
+            </a:solidFill>
+          </a:ln>
+        </p:spPr>
+      </p:cxnSp>
+      <p:sp>
+        <p:nvSpPr>
+          <p:cNvPr id="32" name="cpe|exhibit|fill|31"/>
+          <p:cNvSpPr/>
+          <p:nvPr/>
+        </p:nvSpPr>
+        <p:spPr>
+          <a:xfrm>
+            <a:off x="9499702" y="3140598"/>
+            <a:ext cx="2189074" cy="613380"/>
+          </a:xfrm>
+          <a:prstGeom prst="rect">
+            <a:avLst/>
+          </a:prstGeom>
+          <a:solidFill>
+            <a:srgbClr val="F4F6F9"/>
+          </a:solidFill>
+          <a:ln>
+            <a:noFill/>
+          </a:ln>
+        </p:spPr>
+        <p:txBody>
+          <a:bodyPr rtlCol="0" anchor="ctr" lIns="0" rIns="0" tIns="0" bIns="0"/>
+          <a:lstStyle/>
+          <a:p>
+            <a:pPr algn="ctr"/>
+          </a:p>
+        </p:txBody>
+      </p:sp>
+      <p:sp>
+        <p:nvSpPr>
+          <p:cNvPr id="33" name="cpe|exhibit|text|32"/>
+          <p:cNvSpPr txBox="1"/>
+          <p:nvPr/>
+        </p:nvSpPr>
+        <p:spPr>
+          <a:xfrm>
+            <a:off x="9572854" y="3158886"/>
+            <a:ext cx="2042770" cy="576804"/>
+          </a:xfrm>
+          <a:prstGeom prst="rect">
+            <a:avLst/>
+          </a:prstGeom>
+          <a:noFill/>
+        </p:spPr>
+        <p:txBody>
+          <a:bodyPr wrap="square" lIns="0" rIns="0" tIns="0" bIns="0" anchor="ctr">
+            <a:noAutofit/>
+          </a:bodyPr>
+          <a:lstStyle/>
+          <a:p>
+            <a:pPr algn="l">
+              <a:lnSpc>
+                <a:spcPct val="100000"/>
+              </a:lnSpc>
+            </a:pPr>
+            <a:r>
+              <a:rPr sz="1400" b="0">
+                <a:solidFill>
+                  <a:srgbClr val="1C2530"/>
+                </a:solidFill>
+                <a:latin typeface="Arial"/>
+              </a:rPr>
+              <a:t>Manual picking
+</a:t>
+            </a:r>
+            <a:r>
+              <a:rPr sz="1400" b="1">
+                <a:solidFill>
+                  <a:srgbClr val="1C2530"/>
+                </a:solidFill>
+                <a:latin typeface="Arial"/>
+              </a:rPr>
+              <a:t>€9M</a:t>
+            </a:r>
+          </a:p>
+        </p:txBody>
+      </p:sp>
+      <p:cxnSp>
+        <p:nvCxnSpPr>
+          <p:cNvPr id="34" name="cpe|exhibit|connector|33"/>
+          <p:cNvCxnSpPr/>
+          <p:nvPr/>
+        </p:nvCxnSpPr>
+        <p:spPr>
+          <a:xfrm>
+            <a:off x="9088222" y="3840480"/>
+            <a:ext cx="205740" cy="0"/>
+          </a:xfrm>
+          <a:prstGeom prst="line">
+            <a:avLst/>
+          </a:prstGeom>
+          <a:ln w="9525">
+            <a:solidFill>
+              <a:srgbClr val="8A95A1"/>
+            </a:solidFill>
+          </a:ln>
+        </p:spPr>
+      </p:cxnSp>
+      <p:cxnSp>
+        <p:nvCxnSpPr>
+          <p:cNvPr id="35" name="cpe|exhibit|connector|34"/>
+          <p:cNvCxnSpPr/>
+          <p:nvPr/>
+        </p:nvCxnSpPr>
+        <p:spPr>
+          <a:xfrm>
+            <a:off x="9293962" y="3840480"/>
+            <a:ext cx="0" cy="393192"/>
+          </a:xfrm>
+          <a:prstGeom prst="line">
+            <a:avLst/>
+          </a:prstGeom>
+          <a:ln w="9525">
+            <a:solidFill>
+              <a:srgbClr val="8A95A1"/>
+            </a:solidFill>
+          </a:ln>
+        </p:spPr>
+      </p:cxnSp>
+      <p:cxnSp>
+        <p:nvCxnSpPr>
+          <p:cNvPr id="36" name="cpe|exhibit|connector|35"/>
+          <p:cNvCxnSpPr/>
+          <p:nvPr/>
+        </p:nvCxnSpPr>
+        <p:spPr>
+          <a:xfrm>
+            <a:off x="9293962" y="4233672"/>
+            <a:ext cx="205740" cy="0"/>
+          </a:xfrm>
+          <a:prstGeom prst="line">
+            <a:avLst/>
+          </a:prstGeom>
+          <a:ln w="9525">
+            <a:solidFill>
+              <a:srgbClr val="8A95A1"/>
+            </a:solidFill>
+          </a:ln>
+        </p:spPr>
+      </p:cxnSp>
+      <p:sp>
+        <p:nvSpPr>
+          <p:cNvPr id="37" name="cpe|exhibit|fill|36"/>
+          <p:cNvSpPr/>
+          <p:nvPr/>
+        </p:nvSpPr>
+        <p:spPr>
+          <a:xfrm>
+            <a:off x="9499702" y="3926982"/>
+            <a:ext cx="2189074" cy="613380"/>
+          </a:xfrm>
+          <a:prstGeom prst="rect">
+            <a:avLst/>
+          </a:prstGeom>
+          <a:solidFill>
+            <a:srgbClr val="F4F6F9"/>
+          </a:solidFill>
+          <a:ln>
+            <a:noFill/>
+          </a:ln>
+        </p:spPr>
+        <p:txBody>
+          <a:bodyPr rtlCol="0" anchor="ctr" lIns="0" rIns="0" tIns="0" bIns="0"/>
+          <a:lstStyle/>
+          <a:p>
+            <a:pPr algn="ctr"/>
+          </a:p>
+        </p:txBody>
+      </p:sp>
+      <p:sp>
+        <p:nvSpPr>
+          <p:cNvPr id="38" name="cpe|exhibit|text|37"/>
+          <p:cNvSpPr txBox="1"/>
+          <p:nvPr/>
+        </p:nvSpPr>
+        <p:spPr>
+          <a:xfrm>
+            <a:off x="9572854" y="3945270"/>
+            <a:ext cx="2042770" cy="576804"/>
+          </a:xfrm>
+          <a:prstGeom prst="rect">
+            <a:avLst/>
+          </a:prstGeom>
+          <a:noFill/>
+        </p:spPr>
+        <p:txBody>
+          <a:bodyPr wrap="square" lIns="0" rIns="0" tIns="0" bIns="0" anchor="ctr">
+            <a:noAutofit/>
+          </a:bodyPr>
+          <a:lstStyle/>
+          <a:p>
+            <a:pPr algn="l">
+              <a:lnSpc>
+                <a:spcPct val="100000"/>
+              </a:lnSpc>
+            </a:pPr>
+            <a:r>
+              <a:rPr sz="1400" b="0">
+                <a:solidFill>
+                  <a:srgbClr val="1C2530"/>
+                </a:solidFill>
+                <a:latin typeface="Arial"/>
+              </a:rPr>
+              <a:t>Overtime
+</a:t>
+            </a:r>
+            <a:r>
+              <a:rPr sz="1400" b="1">
+                <a:solidFill>
+                  <a:srgbClr val="1C2530"/>
+                </a:solidFill>
+                <a:latin typeface="Arial"/>
+              </a:rPr>
+              <a:t>€3M</a:t>
+            </a:r>
+          </a:p>
+        </p:txBody>
+      </p:sp>
+      <p:cxnSp>
+        <p:nvCxnSpPr>
+          <p:cNvPr id="39" name="cpe|exhibit|connector|38"/>
+          <p:cNvCxnSpPr/>
+          <p:nvPr/>
+        </p:nvCxnSpPr>
+        <p:spPr>
+          <a:xfrm>
+            <a:off x="6487668" y="3840480"/>
+            <a:ext cx="205740" cy="0"/>
+          </a:xfrm>
+          <a:prstGeom prst="line">
+            <a:avLst/>
+          </a:prstGeom>
+          <a:ln w="9525">
+            <a:solidFill>
+              <a:srgbClr val="8A95A1"/>
+            </a:solidFill>
+          </a:ln>
+        </p:spPr>
+      </p:cxnSp>
+      <p:cxnSp>
+        <p:nvCxnSpPr>
+          <p:cNvPr id="40" name="cpe|exhibit|connector|39"/>
+          <p:cNvCxnSpPr/>
+          <p:nvPr/>
+        </p:nvCxnSpPr>
+        <p:spPr>
+          <a:xfrm>
+            <a:off x="6693408" y="3840480"/>
+            <a:ext cx="0" cy="1572768"/>
+          </a:xfrm>
+          <a:prstGeom prst="line">
+            <a:avLst/>
+          </a:prstGeom>
+          <a:ln w="9525">
+            <a:solidFill>
+              <a:srgbClr val="8A95A1"/>
+            </a:solidFill>
+          </a:ln>
+        </p:spPr>
+      </p:cxnSp>
+      <p:cxnSp>
+        <p:nvCxnSpPr>
+          <p:cNvPr id="41" name="cpe|exhibit|connector|40"/>
+          <p:cNvCxnSpPr/>
+          <p:nvPr/>
+        </p:nvCxnSpPr>
+        <p:spPr>
+          <a:xfrm>
+            <a:off x="6693408" y="5413248"/>
+            <a:ext cx="205740" cy="0"/>
+          </a:xfrm>
+          <a:prstGeom prst="line">
+            <a:avLst/>
+          </a:prstGeom>
+          <a:ln w="9525">
+            <a:solidFill>
+              <a:srgbClr val="8A95A1"/>
+            </a:solidFill>
+          </a:ln>
+        </p:spPr>
+      </p:cxnSp>
+      <p:sp>
+        <p:nvSpPr>
+          <p:cNvPr id="42" name="cpe|exhibit|fill|41"/>
+          <p:cNvSpPr/>
+          <p:nvPr/>
+        </p:nvSpPr>
+        <p:spPr>
+          <a:xfrm>
+            <a:off x="6899148" y="5106558"/>
+            <a:ext cx="2189074" cy="613380"/>
+          </a:xfrm>
+          <a:prstGeom prst="rect">
+            <a:avLst/>
+          </a:prstGeom>
+          <a:solidFill>
+            <a:srgbClr val="F4F6F9"/>
+          </a:solidFill>
+          <a:ln>
+            <a:noFill/>
+          </a:ln>
+        </p:spPr>
+        <p:txBody>
+          <a:bodyPr rtlCol="0" anchor="ctr" lIns="0" rIns="0" tIns="0" bIns="0"/>
+          <a:lstStyle/>
+          <a:p>
+            <a:pPr algn="ctr"/>
+          </a:p>
+        </p:txBody>
+      </p:sp>
+      <p:sp>
+        <p:nvSpPr>
+          <p:cNvPr id="43" name="cpe|exhibit|text|42"/>
+          <p:cNvSpPr txBox="1"/>
+          <p:nvPr/>
+        </p:nvSpPr>
+        <p:spPr>
+          <a:xfrm>
+            <a:off x="6972300" y="5124846"/>
+            <a:ext cx="2042770" cy="576804"/>
+          </a:xfrm>
+          <a:prstGeom prst="rect">
+            <a:avLst/>
+          </a:prstGeom>
+          <a:noFill/>
+        </p:spPr>
+        <p:txBody>
+          <a:bodyPr wrap="square" lIns="0" rIns="0" tIns="0" bIns="0" anchor="ctr">
+            <a:noAutofit/>
+          </a:bodyPr>
+          <a:lstStyle/>
+          <a:p>
+            <a:pPr algn="l">
+              <a:lnSpc>
+                <a:spcPct val="100000"/>
+              </a:lnSpc>
+            </a:pPr>
+            <a:r>
+              <a:rPr sz="1400" b="0">
+                <a:solidFill>
+                  <a:srgbClr val="1C2530"/>
+                </a:solidFill>
+                <a:latin typeface="Arial"/>
+              </a:rPr>
+              <a:t>Customer terms
+</a:t>
+            </a:r>
+            <a:r>
+              <a:rPr sz="1400" b="1">
+                <a:solidFill>
+                  <a:srgbClr val="1C2530"/>
+                </a:solidFill>
+                <a:latin typeface="Arial"/>
+              </a:rPr>
+              <a:t>€13M</a:t>
+            </a:r>
+          </a:p>
+        </p:txBody>
+      </p:sp>
+      <p:cxnSp>
+        <p:nvCxnSpPr>
+          <p:cNvPr id="44" name="cpe|exhibit|connector|43"/>
+          <p:cNvCxnSpPr/>
+          <p:nvPr/>
+        </p:nvCxnSpPr>
+        <p:spPr>
+          <a:xfrm>
+            <a:off x="9088222" y="5413248"/>
+            <a:ext cx="205740" cy="0"/>
+          </a:xfrm>
+          <a:prstGeom prst="line">
+            <a:avLst/>
+          </a:prstGeom>
+          <a:ln w="9525">
+            <a:solidFill>
+              <a:srgbClr val="8A95A1"/>
+            </a:solidFill>
+          </a:ln>
+        </p:spPr>
+      </p:cxnSp>
+      <p:cxnSp>
+        <p:nvCxnSpPr>
+          <p:cNvPr id="45" name="cpe|exhibit|connector|44"/>
+          <p:cNvCxnSpPr/>
+          <p:nvPr/>
+        </p:nvCxnSpPr>
+        <p:spPr>
+          <a:xfrm>
+            <a:off x="9293962" y="5020056"/>
+            <a:ext cx="0" cy="393192"/>
+          </a:xfrm>
+          <a:prstGeom prst="line">
+            <a:avLst/>
+          </a:prstGeom>
+          <a:ln w="9525">
+            <a:solidFill>
+              <a:srgbClr val="8A95A1"/>
+            </a:solidFill>
+          </a:ln>
+        </p:spPr>
+      </p:cxnSp>
+      <p:cxnSp>
+        <p:nvCxnSpPr>
+          <p:cNvPr id="46" name="cpe|exhibit|connector|45"/>
+          <p:cNvCxnSpPr/>
+          <p:nvPr/>
+        </p:nvCxnSpPr>
+        <p:spPr>
+          <a:xfrm>
+            <a:off x="9293962" y="5020056"/>
+            <a:ext cx="205740" cy="0"/>
+          </a:xfrm>
+          <a:prstGeom prst="line">
+            <a:avLst/>
+          </a:prstGeom>
+          <a:ln w="9525">
+            <a:solidFill>
+              <a:srgbClr val="8A95A1"/>
+            </a:solidFill>
+          </a:ln>
+        </p:spPr>
+      </p:cxnSp>
+      <p:sp>
+        <p:nvSpPr>
+          <p:cNvPr id="47" name="cpe|exhibit|fill|46"/>
+          <p:cNvSpPr/>
+          <p:nvPr/>
+        </p:nvSpPr>
+        <p:spPr>
+          <a:xfrm>
+            <a:off x="9499702" y="4713366"/>
+            <a:ext cx="2189074" cy="613380"/>
+          </a:xfrm>
+          <a:prstGeom prst="rect">
+            <a:avLst/>
+          </a:prstGeom>
+          <a:solidFill>
+            <a:srgbClr val="F4F6F9"/>
+          </a:solidFill>
+          <a:ln>
+            <a:noFill/>
+          </a:ln>
+        </p:spPr>
+        <p:txBody>
+          <a:bodyPr rtlCol="0" anchor="ctr" lIns="0" rIns="0" tIns="0" bIns="0"/>
+          <a:lstStyle/>
+          <a:p>
+            <a:pPr algn="ctr"/>
+          </a:p>
+        </p:txBody>
+      </p:sp>
+      <p:sp>
+        <p:nvSpPr>
+          <p:cNvPr id="48" name="cpe|exhibit|text|47"/>
+          <p:cNvSpPr txBox="1"/>
+          <p:nvPr/>
+        </p:nvSpPr>
+        <p:spPr>
+          <a:xfrm>
+            <a:off x="9572854" y="4731654"/>
+            <a:ext cx="2042770" cy="576804"/>
+          </a:xfrm>
+          <a:prstGeom prst="rect">
+            <a:avLst/>
+          </a:prstGeom>
+          <a:noFill/>
+        </p:spPr>
+        <p:txBody>
+          <a:bodyPr wrap="square" lIns="0" rIns="0" tIns="0" bIns="0" anchor="ctr">
+            <a:noAutofit/>
+          </a:bodyPr>
+          <a:lstStyle/>
+          <a:p>
+            <a:pPr algn="l">
+              <a:lnSpc>
+                <a:spcPct val="100000"/>
+              </a:lnSpc>
+            </a:pPr>
+            <a:r>
+              <a:rPr sz="1400" b="0">
+                <a:solidFill>
+                  <a:srgbClr val="1C2530"/>
+                </a:solidFill>
+                <a:latin typeface="Arial"/>
+              </a:rPr>
+              <a:t>Small drops
+</a:t>
+            </a:r>
+            <a:r>
+              <a:rPr sz="1400" b="1">
+                <a:solidFill>
+                  <a:srgbClr val="1C2530"/>
+                </a:solidFill>
+                <a:latin typeface="Arial"/>
+              </a:rPr>
+              <a:t>€8M</a:t>
+            </a:r>
+          </a:p>
+        </p:txBody>
+      </p:sp>
+      <p:cxnSp>
+        <p:nvCxnSpPr>
+          <p:cNvPr id="49" name="cpe|exhibit|connector|48"/>
+          <p:cNvCxnSpPr/>
+          <p:nvPr/>
+        </p:nvCxnSpPr>
+        <p:spPr>
+          <a:xfrm>
+            <a:off x="9088222" y="5413248"/>
+            <a:ext cx="205740" cy="0"/>
+          </a:xfrm>
+          <a:prstGeom prst="line">
+            <a:avLst/>
+          </a:prstGeom>
+          <a:ln w="9525">
+            <a:solidFill>
+              <a:srgbClr val="8A95A1"/>
+            </a:solidFill>
+          </a:ln>
+        </p:spPr>
+      </p:cxnSp>
+      <p:cxnSp>
+        <p:nvCxnSpPr>
+          <p:cNvPr id="50" name="cpe|exhibit|connector|49"/>
+          <p:cNvCxnSpPr/>
+          <p:nvPr/>
+        </p:nvCxnSpPr>
+        <p:spPr>
+          <a:xfrm>
+            <a:off x="9293962" y="5413248"/>
+            <a:ext cx="0" cy="393192"/>
+          </a:xfrm>
+          <a:prstGeom prst="line">
+            <a:avLst/>
+          </a:prstGeom>
+          <a:ln w="9525">
+            <a:solidFill>
+              <a:srgbClr val="8A95A1"/>
+            </a:solidFill>
+          </a:ln>
+        </p:spPr>
+      </p:cxnSp>
+      <p:cxnSp>
+        <p:nvCxnSpPr>
+          <p:cNvPr id="51" name="cpe|exhibit|connector|50"/>
+          <p:cNvCxnSpPr/>
+          <p:nvPr/>
+        </p:nvCxnSpPr>
+        <p:spPr>
+          <a:xfrm>
+            <a:off x="9293962" y="5806440"/>
+            <a:ext cx="205740" cy="0"/>
+          </a:xfrm>
+          <a:prstGeom prst="line">
+            <a:avLst/>
+          </a:prstGeom>
+          <a:ln w="9525">
+            <a:solidFill>
+              <a:srgbClr val="8A95A1"/>
+            </a:solidFill>
+          </a:ln>
+        </p:spPr>
+      </p:cxnSp>
+      <p:sp>
+        <p:nvSpPr>
+          <p:cNvPr id="52" name="cpe|exhibit|fill|51"/>
+          <p:cNvSpPr/>
+          <p:nvPr/>
+        </p:nvSpPr>
+        <p:spPr>
+          <a:xfrm>
+            <a:off x="9499702" y="5499750"/>
+            <a:ext cx="2189074" cy="613380"/>
+          </a:xfrm>
+          <a:prstGeom prst="rect">
+            <a:avLst/>
+          </a:prstGeom>
+          <a:solidFill>
+            <a:srgbClr val="F4F6F9"/>
+          </a:solidFill>
+          <a:ln>
+            <a:noFill/>
+          </a:ln>
+        </p:spPr>
+        <p:txBody>
+          <a:bodyPr rtlCol="0" anchor="ctr" lIns="0" rIns="0" tIns="0" bIns="0"/>
+          <a:lstStyle/>
+          <a:p>
+            <a:pPr algn="ctr"/>
+          </a:p>
+        </p:txBody>
+      </p:sp>
+      <p:sp>
+        <p:nvSpPr>
+          <p:cNvPr id="53" name="cpe|exhibit|text|52"/>
+          <p:cNvSpPr txBox="1"/>
+          <p:nvPr/>
+        </p:nvSpPr>
+        <p:spPr>
+          <a:xfrm>
+            <a:off x="9572854" y="5518038"/>
+            <a:ext cx="2042770" cy="576804"/>
+          </a:xfrm>
+          <a:prstGeom prst="rect">
+            <a:avLst/>
+          </a:prstGeom>
+          <a:noFill/>
+        </p:spPr>
+        <p:txBody>
+          <a:bodyPr wrap="square" lIns="0" rIns="0" tIns="0" bIns="0" anchor="ctr">
+            <a:noAutofit/>
+          </a:bodyPr>
+          <a:lstStyle/>
+          <a:p>
+            <a:pPr algn="l">
+              <a:lnSpc>
+                <a:spcPct val="100000"/>
+              </a:lnSpc>
+            </a:pPr>
+            <a:r>
+              <a:rPr sz="1400" b="0">
+                <a:solidFill>
+                  <a:srgbClr val="1C2530"/>
+                </a:solidFill>
+                <a:latin typeface="Arial"/>
+              </a:rPr>
+              <a:t>Free returns
+</a:t>
+            </a:r>
+            <a:r>
+              <a:rPr sz="1400" b="1">
+                <a:solidFill>
+                  <a:srgbClr val="1C2530"/>
+                </a:solidFill>
+                <a:latin typeface="Arial"/>
+              </a:rPr>
+              <a:t>€5M</a:t>
             </a:r>
           </a:p>
         </p:txBody>
@@ -25825,7 +25909,7 @@
         <p:spPr>
           <a:xfrm>
             <a:off x="502920" y="6272784"/>
-            <a:ext cx="10088575" cy="402336"/>
+            <a:ext cx="8808415" cy="402336"/>
           </a:xfrm>
           <a:prstGeom prst="rect">
             <a:avLst/>
@@ -26365,7 +26449,7 @@
         <p:spPr>
           <a:xfrm>
             <a:off x="502920" y="6272784"/>
-            <a:ext cx="10088575" cy="402336"/>
+            <a:ext cx="8808415" cy="402336"/>
           </a:xfrm>
           <a:prstGeom prst="rect">
             <a:avLst/>
@@ -27387,7 +27471,7 @@
         <p:spPr>
           <a:xfrm>
             <a:off x="502920" y="6272784"/>
-            <a:ext cx="10088575" cy="402336"/>
+            <a:ext cx="8808415" cy="402336"/>
           </a:xfrm>
           <a:prstGeom prst="rect">
             <a:avLst/>
@@ -27465,7 +27549,7 @@
         <p:spPr>
           <a:xfrm>
             <a:off x="502920" y="1481328"/>
-            <a:ext cx="7390181" cy="274320"/>
+            <a:ext cx="11185855" cy="274320"/>
           </a:xfrm>
           <a:prstGeom prst="rect">
             <a:avLst/>
@@ -27512,8 +27596,8 @@
         </p:nvSpPr>
         <p:spPr>
           <a:xfrm>
-            <a:off x="1473098" y="1929384"/>
-            <a:ext cx="731520" cy="731520"/>
+            <a:off x="3828593" y="1929384"/>
+            <a:ext cx="600761" cy="600761"/>
           </a:xfrm>
           <a:prstGeom prst="rect">
             <a:avLst/>
@@ -27543,8 +27627,8 @@
         </p:nvSpPr>
         <p:spPr>
           <a:xfrm>
-            <a:off x="1473098" y="1929384"/>
-            <a:ext cx="731520" cy="731520"/>
+            <a:off x="3828593" y="1929384"/>
+            <a:ext cx="600761" cy="600761"/>
           </a:xfrm>
           <a:prstGeom prst="rect">
             <a:avLst/>
@@ -27601,8 +27685,8 @@
         </p:nvSpPr>
         <p:spPr>
           <a:xfrm>
-            <a:off x="2259482" y="1929384"/>
-            <a:ext cx="731520" cy="731520"/>
+            <a:off x="4484218" y="1929384"/>
+            <a:ext cx="600761" cy="600761"/>
           </a:xfrm>
           <a:prstGeom prst="rect">
             <a:avLst/>
@@ -27632,8 +27716,8 @@
         </p:nvSpPr>
         <p:spPr>
           <a:xfrm>
-            <a:off x="2259482" y="1929384"/>
-            <a:ext cx="731520" cy="731520"/>
+            <a:off x="4484218" y="1929384"/>
+            <a:ext cx="600761" cy="600761"/>
           </a:xfrm>
           <a:prstGeom prst="rect">
             <a:avLst/>
@@ -27690,8 +27774,8 @@
         </p:nvSpPr>
         <p:spPr>
           <a:xfrm>
-            <a:off x="3045866" y="1929384"/>
-            <a:ext cx="731520" cy="731520"/>
+            <a:off x="5139842" y="1929384"/>
+            <a:ext cx="600761" cy="600761"/>
           </a:xfrm>
           <a:prstGeom prst="rect">
             <a:avLst/>
@@ -27719,8 +27803,8 @@
         </p:nvSpPr>
         <p:spPr>
           <a:xfrm>
-            <a:off x="3045866" y="1929384"/>
-            <a:ext cx="731520" cy="731520"/>
+            <a:off x="5139842" y="1929384"/>
+            <a:ext cx="600761" cy="600761"/>
           </a:xfrm>
           <a:prstGeom prst="rect">
             <a:avLst/>
@@ -27777,8 +27861,8 @@
         </p:nvSpPr>
         <p:spPr>
           <a:xfrm>
-            <a:off x="3832250" y="1929384"/>
-            <a:ext cx="731520" cy="731520"/>
+            <a:off x="5795467" y="1929384"/>
+            <a:ext cx="600761" cy="600761"/>
           </a:xfrm>
           <a:prstGeom prst="rect">
             <a:avLst/>
@@ -27806,8 +27890,8 @@
         </p:nvSpPr>
         <p:spPr>
           <a:xfrm>
-            <a:off x="3832250" y="1929384"/>
-            <a:ext cx="731520" cy="731520"/>
+            <a:off x="5795467" y="1929384"/>
+            <a:ext cx="600761" cy="600761"/>
           </a:xfrm>
           <a:prstGeom prst="rect">
             <a:avLst/>
@@ -27864,8 +27948,8 @@
         </p:nvSpPr>
         <p:spPr>
           <a:xfrm>
-            <a:off x="4618634" y="1929384"/>
-            <a:ext cx="731520" cy="731520"/>
+            <a:off x="6451092" y="1929384"/>
+            <a:ext cx="600761" cy="600761"/>
           </a:xfrm>
           <a:prstGeom prst="rect">
             <a:avLst/>
@@ -27893,8 +27977,8 @@
         </p:nvSpPr>
         <p:spPr>
           <a:xfrm>
-            <a:off x="4618634" y="1929384"/>
-            <a:ext cx="731520" cy="731520"/>
+            <a:off x="6451092" y="1929384"/>
+            <a:ext cx="600761" cy="600761"/>
           </a:xfrm>
           <a:prstGeom prst="rect">
             <a:avLst/>
@@ -27951,8 +28035,8 @@
         </p:nvSpPr>
         <p:spPr>
           <a:xfrm>
-            <a:off x="2259482" y="2715768"/>
-            <a:ext cx="731520" cy="731520"/>
+            <a:off x="4484218" y="2585009"/>
+            <a:ext cx="600761" cy="600761"/>
           </a:xfrm>
           <a:prstGeom prst="rect">
             <a:avLst/>
@@ -27980,8 +28064,8 @@
         </p:nvSpPr>
         <p:spPr>
           <a:xfrm>
-            <a:off x="2259482" y="2715768"/>
-            <a:ext cx="731520" cy="731520"/>
+            <a:off x="4484218" y="2585009"/>
+            <a:ext cx="600761" cy="600761"/>
           </a:xfrm>
           <a:prstGeom prst="rect">
             <a:avLst/>
@@ -28038,8 +28122,8 @@
         </p:nvSpPr>
         <p:spPr>
           <a:xfrm>
-            <a:off x="3832250" y="2715768"/>
-            <a:ext cx="731520" cy="731520"/>
+            <a:off x="5795467" y="2585009"/>
+            <a:ext cx="600761" cy="600761"/>
           </a:xfrm>
           <a:prstGeom prst="rect">
             <a:avLst/>
@@ -28067,8 +28151,8 @@
         </p:nvSpPr>
         <p:spPr>
           <a:xfrm>
-            <a:off x="3832250" y="2715768"/>
-            <a:ext cx="731520" cy="731520"/>
+            <a:off x="5795467" y="2585009"/>
+            <a:ext cx="600761" cy="600761"/>
           </a:xfrm>
           <a:prstGeom prst="rect">
             <a:avLst/>
@@ -28125,8 +28209,8 @@
         </p:nvSpPr>
         <p:spPr>
           <a:xfrm>
-            <a:off x="4618634" y="2715768"/>
-            <a:ext cx="731520" cy="731520"/>
+            <a:off x="6451092" y="2585009"/>
+            <a:ext cx="600761" cy="600761"/>
           </a:xfrm>
           <a:prstGeom prst="rect">
             <a:avLst/>
@@ -28154,8 +28238,8 @@
         </p:nvSpPr>
         <p:spPr>
           <a:xfrm>
-            <a:off x="4618634" y="2715768"/>
-            <a:ext cx="731520" cy="731520"/>
+            <a:off x="6451092" y="2585009"/>
+            <a:ext cx="600761" cy="600761"/>
           </a:xfrm>
           <a:prstGeom prst="rect">
             <a:avLst/>
@@ -28212,8 +28296,8 @@
         </p:nvSpPr>
         <p:spPr>
           <a:xfrm>
-            <a:off x="5405018" y="2715768"/>
-            <a:ext cx="731520" cy="731520"/>
+            <a:off x="7106717" y="2585009"/>
+            <a:ext cx="600761" cy="600761"/>
           </a:xfrm>
           <a:prstGeom prst="rect">
             <a:avLst/>
@@ -28241,8 +28325,8 @@
         </p:nvSpPr>
         <p:spPr>
           <a:xfrm>
-            <a:off x="5405018" y="2715768"/>
-            <a:ext cx="731520" cy="731520"/>
+            <a:off x="7106717" y="2585009"/>
+            <a:ext cx="600761" cy="600761"/>
           </a:xfrm>
           <a:prstGeom prst="rect">
             <a:avLst/>
@@ -28299,8 +28383,8 @@
         </p:nvSpPr>
         <p:spPr>
           <a:xfrm>
-            <a:off x="3045866" y="3502152"/>
-            <a:ext cx="731520" cy="731520"/>
+            <a:off x="5139842" y="3240634"/>
+            <a:ext cx="600761" cy="600761"/>
           </a:xfrm>
           <a:prstGeom prst="rect">
             <a:avLst/>
@@ -28328,8 +28412,8 @@
         </p:nvSpPr>
         <p:spPr>
           <a:xfrm>
-            <a:off x="3045866" y="3502152"/>
-            <a:ext cx="731520" cy="731520"/>
+            <a:off x="5139842" y="3240634"/>
+            <a:ext cx="600761" cy="600761"/>
           </a:xfrm>
           <a:prstGeom prst="rect">
             <a:avLst/>
@@ -28386,8 +28470,8 @@
         </p:nvSpPr>
         <p:spPr>
           <a:xfrm>
-            <a:off x="1473098" y="3502152"/>
-            <a:ext cx="731520" cy="731520"/>
+            <a:off x="3828593" y="3240634"/>
+            <a:ext cx="600761" cy="600761"/>
           </a:xfrm>
           <a:prstGeom prst="rect">
             <a:avLst/>
@@ -28415,8 +28499,8 @@
         </p:nvSpPr>
         <p:spPr>
           <a:xfrm>
-            <a:off x="1473098" y="3502152"/>
-            <a:ext cx="731520" cy="731520"/>
+            <a:off x="3828593" y="3240634"/>
+            <a:ext cx="600761" cy="600761"/>
           </a:xfrm>
           <a:prstGeom prst="rect">
             <a:avLst/>
@@ -28473,8 +28557,8 @@
         </p:nvSpPr>
         <p:spPr>
           <a:xfrm>
-            <a:off x="3832250" y="3502152"/>
-            <a:ext cx="731520" cy="731520"/>
+            <a:off x="5795467" y="3240634"/>
+            <a:ext cx="600761" cy="600761"/>
           </a:xfrm>
           <a:prstGeom prst="rect">
             <a:avLst/>
@@ -28502,8 +28586,8 @@
         </p:nvSpPr>
         <p:spPr>
           <a:xfrm>
-            <a:off x="3832250" y="3502152"/>
-            <a:ext cx="731520" cy="731520"/>
+            <a:off x="5795467" y="3240634"/>
+            <a:ext cx="600761" cy="600761"/>
           </a:xfrm>
           <a:prstGeom prst="rect">
             <a:avLst/>
@@ -28560,8 +28644,8 @@
         </p:nvSpPr>
         <p:spPr>
           <a:xfrm>
-            <a:off x="4618634" y="3502152"/>
-            <a:ext cx="731520" cy="731520"/>
+            <a:off x="6451092" y="3240634"/>
+            <a:ext cx="600761" cy="600761"/>
           </a:xfrm>
           <a:prstGeom prst="rect">
             <a:avLst/>
@@ -28589,8 +28673,8 @@
         </p:nvSpPr>
         <p:spPr>
           <a:xfrm>
-            <a:off x="4618634" y="3502152"/>
-            <a:ext cx="731520" cy="731520"/>
+            <a:off x="6451092" y="3240634"/>
+            <a:ext cx="600761" cy="600761"/>
           </a:xfrm>
           <a:prstGeom prst="rect">
             <a:avLst/>
@@ -28647,8 +28731,8 @@
         </p:nvSpPr>
         <p:spPr>
           <a:xfrm>
-            <a:off x="6191402" y="3502152"/>
-            <a:ext cx="731520" cy="731520"/>
+            <a:off x="7762342" y="3240634"/>
+            <a:ext cx="600761" cy="600761"/>
           </a:xfrm>
           <a:prstGeom prst="rect">
             <a:avLst/>
@@ -28676,8 +28760,8 @@
         </p:nvSpPr>
         <p:spPr>
           <a:xfrm>
-            <a:off x="6191402" y="3502152"/>
-            <a:ext cx="731520" cy="731520"/>
+            <a:off x="7762342" y="3240634"/>
+            <a:ext cx="600761" cy="600761"/>
           </a:xfrm>
           <a:prstGeom prst="rect">
             <a:avLst/>
@@ -28734,8 +28818,8 @@
         </p:nvSpPr>
         <p:spPr>
           <a:xfrm>
-            <a:off x="2259482" y="4288536"/>
-            <a:ext cx="731520" cy="731520"/>
+            <a:off x="4484218" y="3896258"/>
+            <a:ext cx="600761" cy="600761"/>
           </a:xfrm>
           <a:prstGeom prst="rect">
             <a:avLst/>
@@ -28763,8 +28847,8 @@
         </p:nvSpPr>
         <p:spPr>
           <a:xfrm>
-            <a:off x="2259482" y="4288536"/>
-            <a:ext cx="731520" cy="731520"/>
+            <a:off x="4484218" y="3896258"/>
+            <a:ext cx="600761" cy="600761"/>
           </a:xfrm>
           <a:prstGeom prst="rect">
             <a:avLst/>
@@ -28821,8 +28905,8 @@
         </p:nvSpPr>
         <p:spPr>
           <a:xfrm>
-            <a:off x="3832250" y="4288536"/>
-            <a:ext cx="731520" cy="731520"/>
+            <a:off x="5795467" y="3896258"/>
+            <a:ext cx="600761" cy="600761"/>
           </a:xfrm>
           <a:prstGeom prst="rect">
             <a:avLst/>
@@ -28850,8 +28934,8 @@
         </p:nvSpPr>
         <p:spPr>
           <a:xfrm>
-            <a:off x="3832250" y="4288536"/>
-            <a:ext cx="731520" cy="731520"/>
+            <a:off x="5795467" y="3896258"/>
+            <a:ext cx="600761" cy="600761"/>
           </a:xfrm>
           <a:prstGeom prst="rect">
             <a:avLst/>
@@ -28908,8 +28992,8 @@
         </p:nvSpPr>
         <p:spPr>
           <a:xfrm>
-            <a:off x="1473098" y="5074920"/>
-            <a:ext cx="731520" cy="731520"/>
+            <a:off x="3828593" y="4551883"/>
+            <a:ext cx="600761" cy="600761"/>
           </a:xfrm>
           <a:prstGeom prst="rect">
             <a:avLst/>
@@ -28937,8 +29021,8 @@
         </p:nvSpPr>
         <p:spPr>
           <a:xfrm>
-            <a:off x="1473098" y="5074920"/>
-            <a:ext cx="731520" cy="731520"/>
+            <a:off x="3828593" y="4551883"/>
+            <a:ext cx="600761" cy="600761"/>
           </a:xfrm>
           <a:prstGeom prst="rect">
             <a:avLst/>
@@ -28995,8 +29079,8 @@
         </p:nvSpPr>
         <p:spPr>
           <a:xfrm>
-            <a:off x="3045866" y="5074920"/>
-            <a:ext cx="731520" cy="731520"/>
+            <a:off x="5139842" y="4551883"/>
+            <a:ext cx="600761" cy="600761"/>
           </a:xfrm>
           <a:prstGeom prst="rect">
             <a:avLst/>
@@ -29024,8 +29108,8 @@
         </p:nvSpPr>
         <p:spPr>
           <a:xfrm>
-            <a:off x="3045866" y="5074920"/>
-            <a:ext cx="731520" cy="731520"/>
+            <a:off x="5139842" y="4551883"/>
+            <a:ext cx="600761" cy="600761"/>
           </a:xfrm>
           <a:prstGeom prst="rect">
             <a:avLst/>
@@ -29063,8 +29147,8 @@
         </p:nvSpPr>
         <p:spPr>
           <a:xfrm>
-            <a:off x="3832250" y="5074920"/>
-            <a:ext cx="731520" cy="731520"/>
+            <a:off x="5795467" y="4551883"/>
+            <a:ext cx="600761" cy="600761"/>
           </a:xfrm>
           <a:prstGeom prst="rect">
             <a:avLst/>
@@ -29092,8 +29176,8 @@
         </p:nvSpPr>
         <p:spPr>
           <a:xfrm>
-            <a:off x="3832250" y="5074920"/>
-            <a:ext cx="731520" cy="731520"/>
+            <a:off x="5795467" y="4551883"/>
+            <a:ext cx="600761" cy="600761"/>
           </a:xfrm>
           <a:prstGeom prst="rect">
             <a:avLst/>
@@ -29131,7 +29215,7 @@
         </p:nvSpPr>
         <p:spPr>
           <a:xfrm>
-            <a:off x="1445666" y="5971032"/>
+            <a:off x="3801161" y="5317236"/>
             <a:ext cx="384048" cy="146304"/>
           </a:xfrm>
           <a:prstGeom prst="rect">
@@ -29160,7 +29244,7 @@
         </p:nvSpPr>
         <p:spPr>
           <a:xfrm>
-            <a:off x="1829714" y="5971032"/>
+            <a:off x="4185209" y="5317236"/>
             <a:ext cx="384048" cy="146304"/>
           </a:xfrm>
           <a:prstGeom prst="rect">
@@ -29189,7 +29273,7 @@
         </p:nvSpPr>
         <p:spPr>
           <a:xfrm>
-            <a:off x="2213762" y="5971032"/>
+            <a:off x="4569257" y="5317236"/>
             <a:ext cx="384048" cy="146304"/>
           </a:xfrm>
           <a:prstGeom prst="rect">
@@ -29218,7 +29302,7 @@
         </p:nvSpPr>
         <p:spPr>
           <a:xfrm>
-            <a:off x="2597810" y="5971032"/>
+            <a:off x="4953305" y="5317236"/>
             <a:ext cx="384048" cy="146304"/>
           </a:xfrm>
           <a:prstGeom prst="rect">
@@ -29247,7 +29331,7 @@
         </p:nvSpPr>
         <p:spPr>
           <a:xfrm>
-            <a:off x="2981858" y="5971032"/>
+            <a:off x="5337353" y="5317236"/>
             <a:ext cx="384048" cy="146304"/>
           </a:xfrm>
           <a:prstGeom prst="rect">
@@ -29276,7 +29360,7 @@
         </p:nvSpPr>
         <p:spPr>
           <a:xfrm>
-            <a:off x="3457346" y="5925312"/>
+            <a:off x="5812841" y="5271516"/>
             <a:ext cx="3200400" cy="237744"/>
           </a:xfrm>
           <a:prstGeom prst="rect">
@@ -29315,8 +29399,8 @@
         </p:nvCxnSpPr>
         <p:spPr>
           <a:xfrm>
-            <a:off x="8094269" y="1481328"/>
-            <a:ext cx="0" cy="4718304"/>
+            <a:off x="502920" y="5747004"/>
+            <a:ext cx="11185855" cy="0"/>
           </a:xfrm>
           <a:prstGeom prst="line">
             <a:avLst/>
@@ -29336,8 +29420,8 @@
         </p:nvSpPr>
         <p:spPr>
           <a:xfrm>
-            <a:off x="8322869" y="1481328"/>
-            <a:ext cx="3365906" cy="4718304"/>
+            <a:off x="502920" y="5884164"/>
+            <a:ext cx="5492344" cy="315468"/>
           </a:xfrm>
           <a:prstGeom prst="rect">
             <a:avLst/>
@@ -29350,19 +29434,10 @@
           </a:bodyPr>
           <a:lstStyle/>
           <a:p>
-            <a:pPr algn="l" marL="155448" indent="-155448">
-              <a:lnSpc>
-                <a:spcPct val="108000"/>
-              </a:lnSpc>
-              <a:spcAft>
-                <a:spcPts val="800"/>
-              </a:spcAft>
-              <a:buClr>
-                <a:srgbClr val="1C2530"/>
-              </a:buClr>
-              <a:buSzPct val="100000"/>
-              <a:buFont typeface="Arial"/>
-              <a:buChar char="•"/>
+            <a:pPr algn="l">
+              <a:lnSpc>
+                <a:spcPct val="100000"/>
+              </a:lnSpc>
             </a:pPr>
             <a:r>
               <a:rPr sz="1200" b="0">
@@ -29392,17 +29467,34 @@
               <a:t>, 55% above Madrid</a:t>
             </a:r>
           </a:p>
-          <a:p>
-            <a:pPr algn="l" marL="155448" indent="-155448">
-              <a:lnSpc>
-                <a:spcPct val="108000"/>
-              </a:lnSpc>
-              <a:buClr>
-                <a:srgbClr val="1C2530"/>
-              </a:buClr>
-              <a:buSzPct val="100000"/>
-              <a:buFont typeface="Arial"/>
-              <a:buChar char="•"/>
+        </p:txBody>
+      </p:sp>
+      <p:sp>
+        <p:nvSpPr>
+          <p:cNvPr id="53" name="cpe|commentary|text|52"/>
+          <p:cNvSpPr txBox="1"/>
+          <p:nvPr/>
+        </p:nvSpPr>
+        <p:spPr>
+          <a:xfrm>
+            <a:off x="6196432" y="5884164"/>
+            <a:ext cx="5492344" cy="315468"/>
+          </a:xfrm>
+          <a:prstGeom prst="rect">
+            <a:avLst/>
+          </a:prstGeom>
+          <a:noFill/>
+        </p:spPr>
+        <p:txBody>
+          <a:bodyPr wrap="square" lIns="0" rIns="0" tIns="0" bIns="0" anchor="t">
+            <a:noAutofit/>
+          </a:bodyPr>
+          <a:lstStyle/>
+          <a:p>
+            <a:pPr algn="l">
+              <a:lnSpc>
+                <a:spcPct val="100000"/>
+              </a:lnSpc>
             </a:pPr>
             <a:r>
               <a:rPr sz="1200" b="0">

--- a/examples/gallery/output/deck.pptx
+++ b/examples/gallery/output/deck.pptx
@@ -575,7 +575,7 @@
       <c:valAx>
         <c:axId val="2140495176"/>
         <c:scaling>
-          <c:max val="6.125"/>
+          <c:max val="6.375"/>
           <c:min val="4.375"/>
         </c:scaling>
         <c:delete/>
@@ -10014,7 +10014,7 @@
           </a:solidFill>
           <a:ln w="9525">
             <a:solidFill>
-              <a:srgbClr val="13294B"/>
+              <a:srgbClr val="2F5F8A"/>
             </a:solidFill>
           </a:ln>
         </p:spPr>
@@ -10044,7 +10044,7 @@
             </a:avLst>
           </a:prstGeom>
           <a:solidFill>
-            <a:srgbClr val="13294B"/>
+            <a:srgbClr val="2F5F8A"/>
           </a:solidFill>
           <a:ln>
             <a:noFill/>
@@ -10067,6 +10067,132 @@
         <p:spPr>
           <a:xfrm>
             <a:off x="7531456" y="2464165"/>
+            <a:ext cx="237744" cy="237744"/>
+          </a:xfrm>
+          <a:prstGeom prst="ellipse">
+            <a:avLst/>
+          </a:prstGeom>
+          <a:solidFill>
+            <a:srgbClr val="FFFFFF"/>
+          </a:solidFill>
+          <a:ln w="9525">
+            <a:solidFill>
+              <a:srgbClr val="2F5F8A"/>
+            </a:solidFill>
+          </a:ln>
+        </p:spPr>
+        <p:txBody>
+          <a:bodyPr rtlCol="0" anchor="ctr" lIns="0" rIns="0" tIns="0" bIns="0"/>
+          <a:lstStyle/>
+          <a:p>
+            <a:pPr algn="ctr"/>
+          </a:p>
+        </p:txBody>
+      </p:sp>
+      <p:sp>
+        <p:nvSpPr>
+          <p:cNvPr id="13" name="cpe|exhibit|marker|12"/>
+          <p:cNvSpPr/>
+          <p:nvPr/>
+        </p:nvSpPr>
+        <p:spPr>
+          <a:xfrm>
+            <a:off x="7531456" y="2464165"/>
+            <a:ext cx="237744" cy="237744"/>
+          </a:xfrm>
+          <a:prstGeom prst="pie">
+            <a:avLst>
+              <a:gd name="adj1" fmla="val 16200000"/>
+              <a:gd name="adj2" fmla="val 10800000"/>
+            </a:avLst>
+          </a:prstGeom>
+          <a:solidFill>
+            <a:srgbClr val="2F5F8A"/>
+          </a:solidFill>
+          <a:ln>
+            <a:noFill/>
+          </a:ln>
+        </p:spPr>
+        <p:txBody>
+          <a:bodyPr rtlCol="0" anchor="ctr" lIns="0" rIns="0" tIns="0" bIns="0"/>
+          <a:lstStyle/>
+          <a:p>
+            <a:pPr algn="ctr"/>
+          </a:p>
+        </p:txBody>
+      </p:sp>
+      <p:sp>
+        <p:nvSpPr>
+          <p:cNvPr id="14" name="cpe|exhibit|marker|13"/>
+          <p:cNvSpPr/>
+          <p:nvPr/>
+        </p:nvSpPr>
+        <p:spPr>
+          <a:xfrm>
+            <a:off x="9146835" y="2464165"/>
+            <a:ext cx="237744" cy="237744"/>
+          </a:xfrm>
+          <a:prstGeom prst="ellipse">
+            <a:avLst/>
+          </a:prstGeom>
+          <a:solidFill>
+            <a:srgbClr val="FFFFFF"/>
+          </a:solidFill>
+          <a:ln w="9525">
+            <a:solidFill>
+              <a:srgbClr val="2F5F8A"/>
+            </a:solidFill>
+          </a:ln>
+        </p:spPr>
+        <p:txBody>
+          <a:bodyPr rtlCol="0" anchor="ctr" lIns="0" rIns="0" tIns="0" bIns="0"/>
+          <a:lstStyle/>
+          <a:p>
+            <a:pPr algn="ctr"/>
+          </a:p>
+        </p:txBody>
+      </p:sp>
+      <p:sp>
+        <p:nvSpPr>
+          <p:cNvPr id="15" name="cpe|exhibit|marker|14"/>
+          <p:cNvSpPr/>
+          <p:nvPr/>
+        </p:nvSpPr>
+        <p:spPr>
+          <a:xfrm>
+            <a:off x="9146835" y="2464165"/>
+            <a:ext cx="237744" cy="237744"/>
+          </a:xfrm>
+          <a:prstGeom prst="pie">
+            <a:avLst>
+              <a:gd name="adj1" fmla="val 16200000"/>
+              <a:gd name="adj2" fmla="val 10800000"/>
+            </a:avLst>
+          </a:prstGeom>
+          <a:solidFill>
+            <a:srgbClr val="2F5F8A"/>
+          </a:solidFill>
+          <a:ln>
+            <a:noFill/>
+          </a:ln>
+        </p:spPr>
+        <p:txBody>
+          <a:bodyPr rtlCol="0" anchor="ctr" lIns="0" rIns="0" tIns="0" bIns="0"/>
+          <a:lstStyle/>
+          <a:p>
+            <a:pPr algn="ctr"/>
+          </a:p>
+        </p:txBody>
+      </p:sp>
+      <p:sp>
+        <p:nvSpPr>
+          <p:cNvPr id="16" name="cpe|exhibit|marker|15"/>
+          <p:cNvSpPr/>
+          <p:nvPr/>
+        </p:nvSpPr>
+        <p:spPr>
+          <a:xfrm>
+            <a:off x="4300698" y="3165681"/>
             <a:ext cx="237744" cy="237744"/>
           </a:xfrm>
           <a:prstGeom prst="ellipse">
@@ -10091,13 +10217,138 @@
       </p:sp>
       <p:sp>
         <p:nvSpPr>
-          <p:cNvPr id="13" name="cpe|exhibit|marker|12"/>
+          <p:cNvPr id="17" name="cpe|exhibit|marker|16"/>
           <p:cNvSpPr/>
           <p:nvPr/>
         </p:nvSpPr>
         <p:spPr>
           <a:xfrm>
-            <a:off x="7531456" y="2464165"/>
+            <a:off x="4300698" y="3165681"/>
+            <a:ext cx="237744" cy="237744"/>
+          </a:xfrm>
+          <a:prstGeom prst="ellipse">
+            <a:avLst/>
+          </a:prstGeom>
+          <a:solidFill>
+            <a:srgbClr val="13294B"/>
+          </a:solidFill>
+          <a:ln w="9525">
+            <a:solidFill>
+              <a:srgbClr val="13294B"/>
+            </a:solidFill>
+          </a:ln>
+        </p:spPr>
+        <p:txBody>
+          <a:bodyPr rtlCol="0" anchor="ctr" lIns="0" rIns="0" tIns="0" bIns="0"/>
+          <a:lstStyle/>
+          <a:p>
+            <a:pPr algn="ctr"/>
+          </a:p>
+        </p:txBody>
+      </p:sp>
+      <p:sp>
+        <p:nvSpPr>
+          <p:cNvPr id="18" name="cpe|exhibit|marker|17"/>
+          <p:cNvSpPr/>
+          <p:nvPr/>
+        </p:nvSpPr>
+        <p:spPr>
+          <a:xfrm>
+            <a:off x="5916077" y="3165681"/>
+            <a:ext cx="237744" cy="237744"/>
+          </a:xfrm>
+          <a:prstGeom prst="ellipse">
+            <a:avLst/>
+          </a:prstGeom>
+          <a:solidFill>
+            <a:srgbClr val="FFFFFF"/>
+          </a:solidFill>
+          <a:ln w="9525">
+            <a:solidFill>
+              <a:srgbClr val="2F5F8A"/>
+            </a:solidFill>
+          </a:ln>
+        </p:spPr>
+        <p:txBody>
+          <a:bodyPr rtlCol="0" anchor="ctr" lIns="0" rIns="0" tIns="0" bIns="0"/>
+          <a:lstStyle/>
+          <a:p>
+            <a:pPr algn="ctr"/>
+          </a:p>
+        </p:txBody>
+      </p:sp>
+      <p:sp>
+        <p:nvSpPr>
+          <p:cNvPr id="19" name="cpe|exhibit|marker|18"/>
+          <p:cNvSpPr/>
+          <p:nvPr/>
+        </p:nvSpPr>
+        <p:spPr>
+          <a:xfrm>
+            <a:off x="5916077" y="3165681"/>
+            <a:ext cx="237744" cy="237744"/>
+          </a:xfrm>
+          <a:prstGeom prst="pie">
+            <a:avLst>
+              <a:gd name="adj1" fmla="val 16200000"/>
+              <a:gd name="adj2" fmla="val 0"/>
+            </a:avLst>
+          </a:prstGeom>
+          <a:solidFill>
+            <a:srgbClr val="2F5F8A"/>
+          </a:solidFill>
+          <a:ln>
+            <a:noFill/>
+          </a:ln>
+        </p:spPr>
+        <p:txBody>
+          <a:bodyPr rtlCol="0" anchor="ctr" lIns="0" rIns="0" tIns="0" bIns="0"/>
+          <a:lstStyle/>
+          <a:p>
+            <a:pPr algn="ctr"/>
+          </a:p>
+        </p:txBody>
+      </p:sp>
+      <p:sp>
+        <p:nvSpPr>
+          <p:cNvPr id="20" name="cpe|exhibit|marker|19"/>
+          <p:cNvSpPr/>
+          <p:nvPr/>
+        </p:nvSpPr>
+        <p:spPr>
+          <a:xfrm>
+            <a:off x="7531456" y="3165681"/>
+            <a:ext cx="237744" cy="237744"/>
+          </a:xfrm>
+          <a:prstGeom prst="ellipse">
+            <a:avLst/>
+          </a:prstGeom>
+          <a:solidFill>
+            <a:srgbClr val="FFFFFF"/>
+          </a:solidFill>
+          <a:ln w="9525">
+            <a:solidFill>
+              <a:srgbClr val="2F5F8A"/>
+            </a:solidFill>
+          </a:ln>
+        </p:spPr>
+        <p:txBody>
+          <a:bodyPr rtlCol="0" anchor="ctr" lIns="0" rIns="0" tIns="0" bIns="0"/>
+          <a:lstStyle/>
+          <a:p>
+            <a:pPr algn="ctr"/>
+          </a:p>
+        </p:txBody>
+      </p:sp>
+      <p:sp>
+        <p:nvSpPr>
+          <p:cNvPr id="21" name="cpe|exhibit|marker|20"/>
+          <p:cNvSpPr/>
+          <p:nvPr/>
+        </p:nvSpPr>
+        <p:spPr>
+          <a:xfrm>
+            <a:off x="7531456" y="3165681"/>
             <a:ext cx="237744" cy="237744"/>
           </a:xfrm>
           <a:prstGeom prst="pie">
@@ -10107,7 +10358,7 @@
             </a:avLst>
           </a:prstGeom>
           <a:solidFill>
-            <a:srgbClr val="13294B"/>
+            <a:srgbClr val="2F5F8A"/>
           </a:solidFill>
           <a:ln>
             <a:noFill/>
@@ -10123,13 +10374,76 @@
       </p:sp>
       <p:sp>
         <p:nvSpPr>
-          <p:cNvPr id="14" name="cpe|exhibit|marker|13"/>
+          <p:cNvPr id="22" name="cpe|exhibit|marker|21"/>
           <p:cNvSpPr/>
           <p:nvPr/>
         </p:nvSpPr>
         <p:spPr>
           <a:xfrm>
-            <a:off x="9146835" y="2464165"/>
+            <a:off x="9146835" y="3165681"/>
+            <a:ext cx="237744" cy="237744"/>
+          </a:xfrm>
+          <a:prstGeom prst="ellipse">
+            <a:avLst/>
+          </a:prstGeom>
+          <a:solidFill>
+            <a:srgbClr val="FFFFFF"/>
+          </a:solidFill>
+          <a:ln w="9525">
+            <a:solidFill>
+              <a:srgbClr val="2F5F8A"/>
+            </a:solidFill>
+          </a:ln>
+        </p:spPr>
+        <p:txBody>
+          <a:bodyPr rtlCol="0" anchor="ctr" lIns="0" rIns="0" tIns="0" bIns="0"/>
+          <a:lstStyle/>
+          <a:p>
+            <a:pPr algn="ctr"/>
+          </a:p>
+        </p:txBody>
+      </p:sp>
+      <p:sp>
+        <p:nvSpPr>
+          <p:cNvPr id="23" name="cpe|exhibit|marker|22"/>
+          <p:cNvSpPr/>
+          <p:nvPr/>
+        </p:nvSpPr>
+        <p:spPr>
+          <a:xfrm>
+            <a:off x="9146835" y="3165681"/>
+            <a:ext cx="237744" cy="237744"/>
+          </a:xfrm>
+          <a:prstGeom prst="pie">
+            <a:avLst>
+              <a:gd name="adj1" fmla="val 16200000"/>
+              <a:gd name="adj2" fmla="val 5400000"/>
+            </a:avLst>
+          </a:prstGeom>
+          <a:solidFill>
+            <a:srgbClr val="2F5F8A"/>
+          </a:solidFill>
+          <a:ln>
+            <a:noFill/>
+          </a:ln>
+        </p:spPr>
+        <p:txBody>
+          <a:bodyPr rtlCol="0" anchor="ctr" lIns="0" rIns="0" tIns="0" bIns="0"/>
+          <a:lstStyle/>
+          <a:p>
+            <a:pPr algn="ctr"/>
+          </a:p>
+        </p:txBody>
+      </p:sp>
+      <p:sp>
+        <p:nvSpPr>
+          <p:cNvPr id="24" name="cpe|exhibit|marker|23"/>
+          <p:cNvSpPr/>
+          <p:nvPr/>
+        </p:nvSpPr>
+        <p:spPr>
+          <a:xfrm>
+            <a:off x="4300698" y="3867198"/>
             <a:ext cx="237744" cy="237744"/>
           </a:xfrm>
           <a:prstGeom prst="ellipse">
@@ -10154,13 +10468,13 @@
       </p:sp>
       <p:sp>
         <p:nvSpPr>
-          <p:cNvPr id="15" name="cpe|exhibit|marker|14"/>
+          <p:cNvPr id="25" name="cpe|exhibit|marker|24"/>
           <p:cNvSpPr/>
           <p:nvPr/>
         </p:nvSpPr>
         <p:spPr>
           <a:xfrm>
-            <a:off x="9146835" y="2464165"/>
+            <a:off x="4300698" y="3867198"/>
             <a:ext cx="237744" cy="237744"/>
           </a:xfrm>
           <a:prstGeom prst="pie">
@@ -10186,13 +10500,201 @@
       </p:sp>
       <p:sp>
         <p:nvSpPr>
-          <p:cNvPr id="16" name="cpe|exhibit|marker|15"/>
+          <p:cNvPr id="26" name="cpe|exhibit|marker|25"/>
           <p:cNvSpPr/>
           <p:nvPr/>
         </p:nvSpPr>
         <p:spPr>
           <a:xfrm>
-            <a:off x="4300698" y="3165681"/>
+            <a:off x="5916077" y="3867198"/>
+            <a:ext cx="237744" cy="237744"/>
+          </a:xfrm>
+          <a:prstGeom prst="ellipse">
+            <a:avLst/>
+          </a:prstGeom>
+          <a:solidFill>
+            <a:srgbClr val="FFFFFF"/>
+          </a:solidFill>
+          <a:ln w="9525">
+            <a:solidFill>
+              <a:srgbClr val="2F5F8A"/>
+            </a:solidFill>
+          </a:ln>
+        </p:spPr>
+        <p:txBody>
+          <a:bodyPr rtlCol="0" anchor="ctr" lIns="0" rIns="0" tIns="0" bIns="0"/>
+          <a:lstStyle/>
+          <a:p>
+            <a:pPr algn="ctr"/>
+          </a:p>
+        </p:txBody>
+      </p:sp>
+      <p:sp>
+        <p:nvSpPr>
+          <p:cNvPr id="27" name="cpe|exhibit|marker|26"/>
+          <p:cNvSpPr/>
+          <p:nvPr/>
+        </p:nvSpPr>
+        <p:spPr>
+          <a:xfrm>
+            <a:off x="5916077" y="3867198"/>
+            <a:ext cx="237744" cy="237744"/>
+          </a:xfrm>
+          <a:prstGeom prst="ellipse">
+            <a:avLst/>
+          </a:prstGeom>
+          <a:solidFill>
+            <a:srgbClr val="2F5F8A"/>
+          </a:solidFill>
+          <a:ln w="9525">
+            <a:solidFill>
+              <a:srgbClr val="2F5F8A"/>
+            </a:solidFill>
+          </a:ln>
+        </p:spPr>
+        <p:txBody>
+          <a:bodyPr rtlCol="0" anchor="ctr" lIns="0" rIns="0" tIns="0" bIns="0"/>
+          <a:lstStyle/>
+          <a:p>
+            <a:pPr algn="ctr"/>
+          </a:p>
+        </p:txBody>
+      </p:sp>
+      <p:sp>
+        <p:nvSpPr>
+          <p:cNvPr id="28" name="cpe|exhibit|marker|27"/>
+          <p:cNvSpPr/>
+          <p:nvPr/>
+        </p:nvSpPr>
+        <p:spPr>
+          <a:xfrm>
+            <a:off x="7531456" y="3867198"/>
+            <a:ext cx="237744" cy="237744"/>
+          </a:xfrm>
+          <a:prstGeom prst="ellipse">
+            <a:avLst/>
+          </a:prstGeom>
+          <a:solidFill>
+            <a:srgbClr val="FFFFFF"/>
+          </a:solidFill>
+          <a:ln w="9525">
+            <a:solidFill>
+              <a:srgbClr val="2F5F8A"/>
+            </a:solidFill>
+          </a:ln>
+        </p:spPr>
+        <p:txBody>
+          <a:bodyPr rtlCol="0" anchor="ctr" lIns="0" rIns="0" tIns="0" bIns="0"/>
+          <a:lstStyle/>
+          <a:p>
+            <a:pPr algn="ctr"/>
+          </a:p>
+        </p:txBody>
+      </p:sp>
+      <p:sp>
+        <p:nvSpPr>
+          <p:cNvPr id="29" name="cpe|exhibit|marker|28"/>
+          <p:cNvSpPr/>
+          <p:nvPr/>
+        </p:nvSpPr>
+        <p:spPr>
+          <a:xfrm>
+            <a:off x="7531456" y="3867198"/>
+            <a:ext cx="237744" cy="237744"/>
+          </a:xfrm>
+          <a:prstGeom prst="pie">
+            <a:avLst>
+              <a:gd name="adj1" fmla="val 16200000"/>
+              <a:gd name="adj2" fmla="val 5400000"/>
+            </a:avLst>
+          </a:prstGeom>
+          <a:solidFill>
+            <a:srgbClr val="2F5F8A"/>
+          </a:solidFill>
+          <a:ln>
+            <a:noFill/>
+          </a:ln>
+        </p:spPr>
+        <p:txBody>
+          <a:bodyPr rtlCol="0" anchor="ctr" lIns="0" rIns="0" tIns="0" bIns="0"/>
+          <a:lstStyle/>
+          <a:p>
+            <a:pPr algn="ctr"/>
+          </a:p>
+        </p:txBody>
+      </p:sp>
+      <p:sp>
+        <p:nvSpPr>
+          <p:cNvPr id="30" name="cpe|exhibit|marker|29"/>
+          <p:cNvSpPr/>
+          <p:nvPr/>
+        </p:nvSpPr>
+        <p:spPr>
+          <a:xfrm>
+            <a:off x="9146835" y="3867198"/>
+            <a:ext cx="237744" cy="237744"/>
+          </a:xfrm>
+          <a:prstGeom prst="ellipse">
+            <a:avLst/>
+          </a:prstGeom>
+          <a:solidFill>
+            <a:srgbClr val="FFFFFF"/>
+          </a:solidFill>
+          <a:ln w="9525">
+            <a:solidFill>
+              <a:srgbClr val="2F5F8A"/>
+            </a:solidFill>
+          </a:ln>
+        </p:spPr>
+        <p:txBody>
+          <a:bodyPr rtlCol="0" anchor="ctr" lIns="0" rIns="0" tIns="0" bIns="0"/>
+          <a:lstStyle/>
+          <a:p>
+            <a:pPr algn="ctr"/>
+          </a:p>
+        </p:txBody>
+      </p:sp>
+      <p:sp>
+        <p:nvSpPr>
+          <p:cNvPr id="31" name="cpe|exhibit|marker|30"/>
+          <p:cNvSpPr/>
+          <p:nvPr/>
+        </p:nvSpPr>
+        <p:spPr>
+          <a:xfrm>
+            <a:off x="9146835" y="3867198"/>
+            <a:ext cx="237744" cy="237744"/>
+          </a:xfrm>
+          <a:prstGeom prst="pie">
+            <a:avLst>
+              <a:gd name="adj1" fmla="val 16200000"/>
+              <a:gd name="adj2" fmla="val 5400000"/>
+            </a:avLst>
+          </a:prstGeom>
+          <a:solidFill>
+            <a:srgbClr val="2F5F8A"/>
+          </a:solidFill>
+          <a:ln>
+            <a:noFill/>
+          </a:ln>
+        </p:spPr>
+        <p:txBody>
+          <a:bodyPr rtlCol="0" anchor="ctr" lIns="0" rIns="0" tIns="0" bIns="0"/>
+          <a:lstStyle/>
+          <a:p>
+            <a:pPr algn="ctr"/>
+          </a:p>
+        </p:txBody>
+      </p:sp>
+      <p:sp>
+        <p:nvSpPr>
+          <p:cNvPr id="32" name="cpe|exhibit|marker|31"/>
+          <p:cNvSpPr/>
+          <p:nvPr/>
+        </p:nvSpPr>
+        <p:spPr>
+          <a:xfrm>
+            <a:off x="4300698" y="4568714"/>
             <a:ext cx="237744" cy="237744"/>
           </a:xfrm>
           <a:prstGeom prst="ellipse">
@@ -10217,81 +10719,19 @@
       </p:sp>
       <p:sp>
         <p:nvSpPr>
-          <p:cNvPr id="17" name="cpe|exhibit|marker|16"/>
+          <p:cNvPr id="33" name="cpe|exhibit|marker|32"/>
           <p:cNvSpPr/>
           <p:nvPr/>
         </p:nvSpPr>
         <p:spPr>
           <a:xfrm>
-            <a:off x="4300698" y="3165681"/>
-            <a:ext cx="237744" cy="237744"/>
-          </a:xfrm>
-          <a:prstGeom prst="ellipse">
-            <a:avLst/>
-          </a:prstGeom>
-          <a:solidFill>
-            <a:srgbClr val="13294B"/>
-          </a:solidFill>
-          <a:ln w="9525">
-            <a:solidFill>
-              <a:srgbClr val="13294B"/>
-            </a:solidFill>
-          </a:ln>
-        </p:spPr>
-        <p:txBody>
-          <a:bodyPr rtlCol="0" anchor="ctr" lIns="0" rIns="0" tIns="0" bIns="0"/>
-          <a:lstStyle/>
-          <a:p>
-            <a:pPr algn="ctr"/>
-          </a:p>
-        </p:txBody>
-      </p:sp>
-      <p:sp>
-        <p:nvSpPr>
-          <p:cNvPr id="18" name="cpe|exhibit|marker|17"/>
-          <p:cNvSpPr/>
-          <p:nvPr/>
-        </p:nvSpPr>
-        <p:spPr>
-          <a:xfrm>
-            <a:off x="5916077" y="3165681"/>
-            <a:ext cx="237744" cy="237744"/>
-          </a:xfrm>
-          <a:prstGeom prst="ellipse">
-            <a:avLst/>
-          </a:prstGeom>
-          <a:solidFill>
-            <a:srgbClr val="FFFFFF"/>
-          </a:solidFill>
-          <a:ln w="9525">
-            <a:solidFill>
-              <a:srgbClr val="13294B"/>
-            </a:solidFill>
-          </a:ln>
-        </p:spPr>
-        <p:txBody>
-          <a:bodyPr rtlCol="0" anchor="ctr" lIns="0" rIns="0" tIns="0" bIns="0"/>
-          <a:lstStyle/>
-          <a:p>
-            <a:pPr algn="ctr"/>
-          </a:p>
-        </p:txBody>
-      </p:sp>
-      <p:sp>
-        <p:nvSpPr>
-          <p:cNvPr id="19" name="cpe|exhibit|marker|18"/>
-          <p:cNvSpPr/>
-          <p:nvPr/>
-        </p:nvSpPr>
-        <p:spPr>
-          <a:xfrm>
-            <a:off x="5916077" y="3165681"/>
+            <a:off x="4300698" y="4568714"/>
             <a:ext cx="237744" cy="237744"/>
           </a:xfrm>
           <a:prstGeom prst="pie">
             <a:avLst>
               <a:gd name="adj1" fmla="val 16200000"/>
-              <a:gd name="adj2" fmla="val 0"/>
+              <a:gd name="adj2" fmla="val 5400000"/>
             </a:avLst>
           </a:prstGeom>
           <a:solidFill>
@@ -10311,13 +10751,13 @@
       </p:sp>
       <p:sp>
         <p:nvSpPr>
-          <p:cNvPr id="20" name="cpe|exhibit|marker|19"/>
+          <p:cNvPr id="34" name="cpe|exhibit|marker|33"/>
           <p:cNvSpPr/>
           <p:nvPr/>
         </p:nvSpPr>
         <p:spPr>
           <a:xfrm>
-            <a:off x="7531456" y="3165681"/>
+            <a:off x="5916077" y="4568714"/>
             <a:ext cx="237744" cy="237744"/>
           </a:xfrm>
           <a:prstGeom prst="ellipse">
@@ -10328,7 +10768,7 @@
           </a:solidFill>
           <a:ln w="9525">
             <a:solidFill>
-              <a:srgbClr val="13294B"/>
+              <a:srgbClr val="2F5F8A"/>
             </a:solidFill>
           </a:ln>
         </p:spPr>
@@ -10342,26 +10782,25 @@
       </p:sp>
       <p:sp>
         <p:nvSpPr>
-          <p:cNvPr id="21" name="cpe|exhibit|marker|20"/>
+          <p:cNvPr id="35" name="cpe|exhibit|marker|34"/>
           <p:cNvSpPr/>
           <p:nvPr/>
         </p:nvSpPr>
         <p:spPr>
           <a:xfrm>
-            <a:off x="7531456" y="3165681"/>
+            <a:off x="5916077" y="4568714"/>
             <a:ext cx="237744" cy="237744"/>
           </a:xfrm>
-          <a:prstGeom prst="pie">
-            <a:avLst>
-              <a:gd name="adj1" fmla="val 16200000"/>
-              <a:gd name="adj2" fmla="val 10800000"/>
-            </a:avLst>
+          <a:prstGeom prst="ellipse">
+            <a:avLst/>
           </a:prstGeom>
           <a:solidFill>
-            <a:srgbClr val="13294B"/>
+            <a:srgbClr val="2F5F8A"/>
           </a:solidFill>
-          <a:ln>
-            <a:noFill/>
+          <a:ln w="9525">
+            <a:solidFill>
+              <a:srgbClr val="2F5F8A"/>
+            </a:solidFill>
           </a:ln>
         </p:spPr>
         <p:txBody>
@@ -10374,13 +10813,13 @@
       </p:sp>
       <p:sp>
         <p:nvSpPr>
-          <p:cNvPr id="22" name="cpe|exhibit|marker|21"/>
+          <p:cNvPr id="36" name="cpe|exhibit|marker|35"/>
           <p:cNvSpPr/>
           <p:nvPr/>
         </p:nvSpPr>
         <p:spPr>
           <a:xfrm>
-            <a:off x="9146835" y="3165681"/>
+            <a:off x="7531456" y="4568714"/>
             <a:ext cx="237744" cy="237744"/>
           </a:xfrm>
           <a:prstGeom prst="ellipse">
@@ -10391,7 +10830,7 @@
           </a:solidFill>
           <a:ln w="9525">
             <a:solidFill>
-              <a:srgbClr val="13294B"/>
+              <a:srgbClr val="2F5F8A"/>
             </a:solidFill>
           </a:ln>
         </p:spPr>
@@ -10405,14 +10844,208 @@
       </p:sp>
       <p:sp>
         <p:nvSpPr>
-          <p:cNvPr id="23" name="cpe|exhibit|marker|22"/>
+          <p:cNvPr id="37" name="cpe|exhibit|marker|36"/>
           <p:cNvSpPr/>
           <p:nvPr/>
         </p:nvSpPr>
         <p:spPr>
           <a:xfrm>
-            <a:off x="9146835" y="3165681"/>
+            <a:off x="7531456" y="4568714"/>
             <a:ext cx="237744" cy="237744"/>
+          </a:xfrm>
+          <a:prstGeom prst="ellipse">
+            <a:avLst/>
+          </a:prstGeom>
+          <a:solidFill>
+            <a:srgbClr val="2F5F8A"/>
+          </a:solidFill>
+          <a:ln w="9525">
+            <a:solidFill>
+              <a:srgbClr val="2F5F8A"/>
+            </a:solidFill>
+          </a:ln>
+        </p:spPr>
+        <p:txBody>
+          <a:bodyPr rtlCol="0" anchor="ctr" lIns="0" rIns="0" tIns="0" bIns="0"/>
+          <a:lstStyle/>
+          <a:p>
+            <a:pPr algn="ctr"/>
+          </a:p>
+        </p:txBody>
+      </p:sp>
+      <p:sp>
+        <p:nvSpPr>
+          <p:cNvPr id="38" name="cpe|exhibit|marker|37"/>
+          <p:cNvSpPr/>
+          <p:nvPr/>
+        </p:nvSpPr>
+        <p:spPr>
+          <a:xfrm>
+            <a:off x="9146835" y="4568714"/>
+            <a:ext cx="237744" cy="237744"/>
+          </a:xfrm>
+          <a:prstGeom prst="ellipse">
+            <a:avLst/>
+          </a:prstGeom>
+          <a:solidFill>
+            <a:srgbClr val="FFFFFF"/>
+          </a:solidFill>
+          <a:ln w="9525">
+            <a:solidFill>
+              <a:srgbClr val="2F5F8A"/>
+            </a:solidFill>
+          </a:ln>
+        </p:spPr>
+        <p:txBody>
+          <a:bodyPr rtlCol="0" anchor="ctr" lIns="0" rIns="0" tIns="0" bIns="0"/>
+          <a:lstStyle/>
+          <a:p>
+            <a:pPr algn="ctr"/>
+          </a:p>
+        </p:txBody>
+      </p:sp>
+      <p:sp>
+        <p:nvSpPr>
+          <p:cNvPr id="39" name="cpe|exhibit|marker|38"/>
+          <p:cNvSpPr/>
+          <p:nvPr/>
+        </p:nvSpPr>
+        <p:spPr>
+          <a:xfrm>
+            <a:off x="9146835" y="4568714"/>
+            <a:ext cx="237744" cy="237744"/>
+          </a:xfrm>
+          <a:prstGeom prst="ellipse">
+            <a:avLst/>
+          </a:prstGeom>
+          <a:solidFill>
+            <a:srgbClr val="2F5F8A"/>
+          </a:solidFill>
+          <a:ln w="9525">
+            <a:solidFill>
+              <a:srgbClr val="2F5F8A"/>
+            </a:solidFill>
+          </a:ln>
+        </p:spPr>
+        <p:txBody>
+          <a:bodyPr rtlCol="0" anchor="ctr" lIns="0" rIns="0" tIns="0" bIns="0"/>
+          <a:lstStyle/>
+          <a:p>
+            <a:pPr algn="ctr"/>
+          </a:p>
+        </p:txBody>
+      </p:sp>
+      <p:sp>
+        <p:nvSpPr>
+          <p:cNvPr id="40" name="cpe|exhibit|marker|39"/>
+          <p:cNvSpPr/>
+          <p:nvPr/>
+        </p:nvSpPr>
+        <p:spPr>
+          <a:xfrm>
+            <a:off x="502920" y="5166360"/>
+            <a:ext cx="164592" cy="164592"/>
+          </a:xfrm>
+          <a:prstGeom prst="ellipse">
+            <a:avLst/>
+          </a:prstGeom>
+          <a:solidFill>
+            <a:srgbClr val="FFFFFF"/>
+          </a:solidFill>
+          <a:ln w="9525">
+            <a:solidFill>
+              <a:srgbClr val="2F5F8A"/>
+            </a:solidFill>
+          </a:ln>
+        </p:spPr>
+        <p:txBody>
+          <a:bodyPr rtlCol="0" anchor="ctr" lIns="0" rIns="0" tIns="0" bIns="0"/>
+          <a:lstStyle/>
+          <a:p>
+            <a:pPr algn="ctr"/>
+          </a:p>
+        </p:txBody>
+      </p:sp>
+      <p:sp>
+        <p:nvSpPr>
+          <p:cNvPr id="41" name="cpe|exhibit|label|40"/>
+          <p:cNvSpPr txBox="1"/>
+          <p:nvPr/>
+        </p:nvSpPr>
+        <p:spPr>
+          <a:xfrm>
+            <a:off x="722376" y="5129784"/>
+            <a:ext cx="731520" cy="237744"/>
+          </a:xfrm>
+          <a:prstGeom prst="rect">
+            <a:avLst/>
+          </a:prstGeom>
+          <a:noFill/>
+        </p:spPr>
+        <p:txBody>
+          <a:bodyPr wrap="square" lIns="0" rIns="0" tIns="0" bIns="0" anchor="ctr">
+            <a:noAutofit/>
+          </a:bodyPr>
+          <a:lstStyle/>
+          <a:p>
+            <a:pPr algn="l">
+              <a:lnSpc>
+                <a:spcPct val="100000"/>
+              </a:lnSpc>
+            </a:pPr>
+            <a:r>
+              <a:rPr sz="1000" b="0">
+                <a:solidFill>
+                  <a:srgbClr val="5B6776"/>
+                </a:solidFill>
+                <a:latin typeface="Arial"/>
+              </a:rPr>
+              <a:t>None</a:t>
+            </a:r>
+          </a:p>
+        </p:txBody>
+      </p:sp>
+      <p:sp>
+        <p:nvSpPr>
+          <p:cNvPr id="42" name="cpe|exhibit|marker|41"/>
+          <p:cNvSpPr/>
+          <p:nvPr/>
+        </p:nvSpPr>
+        <p:spPr>
+          <a:xfrm>
+            <a:off x="1417320" y="5166360"/>
+            <a:ext cx="164592" cy="164592"/>
+          </a:xfrm>
+          <a:prstGeom prst="ellipse">
+            <a:avLst/>
+          </a:prstGeom>
+          <a:solidFill>
+            <a:srgbClr val="FFFFFF"/>
+          </a:solidFill>
+          <a:ln w="9525">
+            <a:solidFill>
+              <a:srgbClr val="2F5F8A"/>
+            </a:solidFill>
+          </a:ln>
+        </p:spPr>
+        <p:txBody>
+          <a:bodyPr rtlCol="0" anchor="ctr" lIns="0" rIns="0" tIns="0" bIns="0"/>
+          <a:lstStyle/>
+          <a:p>
+            <a:pPr algn="ctr"/>
+          </a:p>
+        </p:txBody>
+      </p:sp>
+      <p:sp>
+        <p:nvSpPr>
+          <p:cNvPr id="43" name="cpe|exhibit|marker|42"/>
+          <p:cNvSpPr/>
+          <p:nvPr/>
+        </p:nvSpPr>
+        <p:spPr>
+          <a:xfrm>
+            <a:off x="1417320" y="5166360"/>
+            <a:ext cx="164592" cy="164592"/>
           </a:xfrm>
           <a:prstGeom prst="pie">
             <a:avLst>
@@ -10421,7 +11054,7 @@
             </a:avLst>
           </a:prstGeom>
           <a:solidFill>
-            <a:srgbClr val="13294B"/>
+            <a:srgbClr val="2F5F8A"/>
           </a:solidFill>
           <a:ln>
             <a:noFill/>
@@ -10437,14 +11070,53 @@
       </p:sp>
       <p:sp>
         <p:nvSpPr>
-          <p:cNvPr id="24" name="cpe|exhibit|marker|23"/>
+          <p:cNvPr id="44" name="cpe|exhibit|label|43"/>
+          <p:cNvSpPr txBox="1"/>
+          <p:nvPr/>
+        </p:nvSpPr>
+        <p:spPr>
+          <a:xfrm>
+            <a:off x="1636776" y="5129784"/>
+            <a:ext cx="731520" cy="237744"/>
+          </a:xfrm>
+          <a:prstGeom prst="rect">
+            <a:avLst/>
+          </a:prstGeom>
+          <a:noFill/>
+        </p:spPr>
+        <p:txBody>
+          <a:bodyPr wrap="square" lIns="0" rIns="0" tIns="0" bIns="0" anchor="ctr">
+            <a:noAutofit/>
+          </a:bodyPr>
+          <a:lstStyle/>
+          <a:p>
+            <a:pPr algn="l">
+              <a:lnSpc>
+                <a:spcPct val="100000"/>
+              </a:lnSpc>
+            </a:pPr>
+            <a:r>
+              <a:rPr sz="1000" b="0">
+                <a:solidFill>
+                  <a:srgbClr val="5B6776"/>
+                </a:solidFill>
+                <a:latin typeface="Arial"/>
+              </a:rPr>
+              <a:t>Partial</a:t>
+            </a:r>
+          </a:p>
+        </p:txBody>
+      </p:sp>
+      <p:sp>
+        <p:nvSpPr>
+          <p:cNvPr id="45" name="cpe|exhibit|marker|44"/>
           <p:cNvSpPr/>
           <p:nvPr/>
         </p:nvSpPr>
         <p:spPr>
           <a:xfrm>
-            <a:off x="4300698" y="3867198"/>
-            <a:ext cx="237744" cy="237744"/>
+            <a:off x="2331720" y="5166360"/>
+            <a:ext cx="164592" cy="164592"/>
           </a:xfrm>
           <a:prstGeom prst="ellipse">
             <a:avLst/>
@@ -10454,7 +11126,7 @@
           </a:solidFill>
           <a:ln w="9525">
             <a:solidFill>
-              <a:srgbClr val="13294B"/>
+              <a:srgbClr val="2F5F8A"/>
             </a:solidFill>
           </a:ln>
         </p:spPr>
@@ -10468,696 +11140,24 @@
       </p:sp>
       <p:sp>
         <p:nvSpPr>
-          <p:cNvPr id="25" name="cpe|exhibit|marker|24"/>
+          <p:cNvPr id="46" name="cpe|exhibit|marker|45"/>
           <p:cNvSpPr/>
           <p:nvPr/>
         </p:nvSpPr>
         <p:spPr>
           <a:xfrm>
-            <a:off x="4300698" y="3867198"/>
-            <a:ext cx="237744" cy="237744"/>
-          </a:xfrm>
-          <a:prstGeom prst="pie">
-            <a:avLst>
-              <a:gd name="adj1" fmla="val 16200000"/>
-              <a:gd name="adj2" fmla="val 10800000"/>
-            </a:avLst>
+            <a:off x="2331720" y="5166360"/>
+            <a:ext cx="164592" cy="164592"/>
+          </a:xfrm>
+          <a:prstGeom prst="ellipse">
+            <a:avLst/>
           </a:prstGeom>
           <a:solidFill>
-            <a:srgbClr val="13294B"/>
-          </a:solidFill>
-          <a:ln>
-            <a:noFill/>
-          </a:ln>
-        </p:spPr>
-        <p:txBody>
-          <a:bodyPr rtlCol="0" anchor="ctr" lIns="0" rIns="0" tIns="0" bIns="0"/>
-          <a:lstStyle/>
-          <a:p>
-            <a:pPr algn="ctr"/>
-          </a:p>
-        </p:txBody>
-      </p:sp>
-      <p:sp>
-        <p:nvSpPr>
-          <p:cNvPr id="26" name="cpe|exhibit|marker|25"/>
-          <p:cNvSpPr/>
-          <p:nvPr/>
-        </p:nvSpPr>
-        <p:spPr>
-          <a:xfrm>
-            <a:off x="5916077" y="3867198"/>
-            <a:ext cx="237744" cy="237744"/>
-          </a:xfrm>
-          <a:prstGeom prst="ellipse">
-            <a:avLst/>
-          </a:prstGeom>
-          <a:solidFill>
-            <a:srgbClr val="FFFFFF"/>
+            <a:srgbClr val="2F5F8A"/>
           </a:solidFill>
           <a:ln w="9525">
             <a:solidFill>
-              <a:srgbClr val="13294B"/>
-            </a:solidFill>
-          </a:ln>
-        </p:spPr>
-        <p:txBody>
-          <a:bodyPr rtlCol="0" anchor="ctr" lIns="0" rIns="0" tIns="0" bIns="0"/>
-          <a:lstStyle/>
-          <a:p>
-            <a:pPr algn="ctr"/>
-          </a:p>
-        </p:txBody>
-      </p:sp>
-      <p:sp>
-        <p:nvSpPr>
-          <p:cNvPr id="27" name="cpe|exhibit|marker|26"/>
-          <p:cNvSpPr/>
-          <p:nvPr/>
-        </p:nvSpPr>
-        <p:spPr>
-          <a:xfrm>
-            <a:off x="5916077" y="3867198"/>
-            <a:ext cx="237744" cy="237744"/>
-          </a:xfrm>
-          <a:prstGeom prst="ellipse">
-            <a:avLst/>
-          </a:prstGeom>
-          <a:solidFill>
-            <a:srgbClr val="13294B"/>
-          </a:solidFill>
-          <a:ln w="9525">
-            <a:solidFill>
-              <a:srgbClr val="13294B"/>
-            </a:solidFill>
-          </a:ln>
-        </p:spPr>
-        <p:txBody>
-          <a:bodyPr rtlCol="0" anchor="ctr" lIns="0" rIns="0" tIns="0" bIns="0"/>
-          <a:lstStyle/>
-          <a:p>
-            <a:pPr algn="ctr"/>
-          </a:p>
-        </p:txBody>
-      </p:sp>
-      <p:sp>
-        <p:nvSpPr>
-          <p:cNvPr id="28" name="cpe|exhibit|marker|27"/>
-          <p:cNvSpPr/>
-          <p:nvPr/>
-        </p:nvSpPr>
-        <p:spPr>
-          <a:xfrm>
-            <a:off x="7531456" y="3867198"/>
-            <a:ext cx="237744" cy="237744"/>
-          </a:xfrm>
-          <a:prstGeom prst="ellipse">
-            <a:avLst/>
-          </a:prstGeom>
-          <a:solidFill>
-            <a:srgbClr val="FFFFFF"/>
-          </a:solidFill>
-          <a:ln w="9525">
-            <a:solidFill>
-              <a:srgbClr val="13294B"/>
-            </a:solidFill>
-          </a:ln>
-        </p:spPr>
-        <p:txBody>
-          <a:bodyPr rtlCol="0" anchor="ctr" lIns="0" rIns="0" tIns="0" bIns="0"/>
-          <a:lstStyle/>
-          <a:p>
-            <a:pPr algn="ctr"/>
-          </a:p>
-        </p:txBody>
-      </p:sp>
-      <p:sp>
-        <p:nvSpPr>
-          <p:cNvPr id="29" name="cpe|exhibit|marker|28"/>
-          <p:cNvSpPr/>
-          <p:nvPr/>
-        </p:nvSpPr>
-        <p:spPr>
-          <a:xfrm>
-            <a:off x="7531456" y="3867198"/>
-            <a:ext cx="237744" cy="237744"/>
-          </a:xfrm>
-          <a:prstGeom prst="pie">
-            <a:avLst>
-              <a:gd name="adj1" fmla="val 16200000"/>
-              <a:gd name="adj2" fmla="val 5400000"/>
-            </a:avLst>
-          </a:prstGeom>
-          <a:solidFill>
-            <a:srgbClr val="13294B"/>
-          </a:solidFill>
-          <a:ln>
-            <a:noFill/>
-          </a:ln>
-        </p:spPr>
-        <p:txBody>
-          <a:bodyPr rtlCol="0" anchor="ctr" lIns="0" rIns="0" tIns="0" bIns="0"/>
-          <a:lstStyle/>
-          <a:p>
-            <a:pPr algn="ctr"/>
-          </a:p>
-        </p:txBody>
-      </p:sp>
-      <p:sp>
-        <p:nvSpPr>
-          <p:cNvPr id="30" name="cpe|exhibit|marker|29"/>
-          <p:cNvSpPr/>
-          <p:nvPr/>
-        </p:nvSpPr>
-        <p:spPr>
-          <a:xfrm>
-            <a:off x="9146835" y="3867198"/>
-            <a:ext cx="237744" cy="237744"/>
-          </a:xfrm>
-          <a:prstGeom prst="ellipse">
-            <a:avLst/>
-          </a:prstGeom>
-          <a:solidFill>
-            <a:srgbClr val="FFFFFF"/>
-          </a:solidFill>
-          <a:ln w="9525">
-            <a:solidFill>
-              <a:srgbClr val="13294B"/>
-            </a:solidFill>
-          </a:ln>
-        </p:spPr>
-        <p:txBody>
-          <a:bodyPr rtlCol="0" anchor="ctr" lIns="0" rIns="0" tIns="0" bIns="0"/>
-          <a:lstStyle/>
-          <a:p>
-            <a:pPr algn="ctr"/>
-          </a:p>
-        </p:txBody>
-      </p:sp>
-      <p:sp>
-        <p:nvSpPr>
-          <p:cNvPr id="31" name="cpe|exhibit|marker|30"/>
-          <p:cNvSpPr/>
-          <p:nvPr/>
-        </p:nvSpPr>
-        <p:spPr>
-          <a:xfrm>
-            <a:off x="9146835" y="3867198"/>
-            <a:ext cx="237744" cy="237744"/>
-          </a:xfrm>
-          <a:prstGeom prst="pie">
-            <a:avLst>
-              <a:gd name="adj1" fmla="val 16200000"/>
-              <a:gd name="adj2" fmla="val 5400000"/>
-            </a:avLst>
-          </a:prstGeom>
-          <a:solidFill>
-            <a:srgbClr val="13294B"/>
-          </a:solidFill>
-          <a:ln>
-            <a:noFill/>
-          </a:ln>
-        </p:spPr>
-        <p:txBody>
-          <a:bodyPr rtlCol="0" anchor="ctr" lIns="0" rIns="0" tIns="0" bIns="0"/>
-          <a:lstStyle/>
-          <a:p>
-            <a:pPr algn="ctr"/>
-          </a:p>
-        </p:txBody>
-      </p:sp>
-      <p:sp>
-        <p:nvSpPr>
-          <p:cNvPr id="32" name="cpe|exhibit|marker|31"/>
-          <p:cNvSpPr/>
-          <p:nvPr/>
-        </p:nvSpPr>
-        <p:spPr>
-          <a:xfrm>
-            <a:off x="4300698" y="4568714"/>
-            <a:ext cx="237744" cy="237744"/>
-          </a:xfrm>
-          <a:prstGeom prst="ellipse">
-            <a:avLst/>
-          </a:prstGeom>
-          <a:solidFill>
-            <a:srgbClr val="FFFFFF"/>
-          </a:solidFill>
-          <a:ln w="9525">
-            <a:solidFill>
-              <a:srgbClr val="13294B"/>
-            </a:solidFill>
-          </a:ln>
-        </p:spPr>
-        <p:txBody>
-          <a:bodyPr rtlCol="0" anchor="ctr" lIns="0" rIns="0" tIns="0" bIns="0"/>
-          <a:lstStyle/>
-          <a:p>
-            <a:pPr algn="ctr"/>
-          </a:p>
-        </p:txBody>
-      </p:sp>
-      <p:sp>
-        <p:nvSpPr>
-          <p:cNvPr id="33" name="cpe|exhibit|marker|32"/>
-          <p:cNvSpPr/>
-          <p:nvPr/>
-        </p:nvSpPr>
-        <p:spPr>
-          <a:xfrm>
-            <a:off x="4300698" y="4568714"/>
-            <a:ext cx="237744" cy="237744"/>
-          </a:xfrm>
-          <a:prstGeom prst="pie">
-            <a:avLst>
-              <a:gd name="adj1" fmla="val 16200000"/>
-              <a:gd name="adj2" fmla="val 5400000"/>
-            </a:avLst>
-          </a:prstGeom>
-          <a:solidFill>
-            <a:srgbClr val="13294B"/>
-          </a:solidFill>
-          <a:ln>
-            <a:noFill/>
-          </a:ln>
-        </p:spPr>
-        <p:txBody>
-          <a:bodyPr rtlCol="0" anchor="ctr" lIns="0" rIns="0" tIns="0" bIns="0"/>
-          <a:lstStyle/>
-          <a:p>
-            <a:pPr algn="ctr"/>
-          </a:p>
-        </p:txBody>
-      </p:sp>
-      <p:sp>
-        <p:nvSpPr>
-          <p:cNvPr id="34" name="cpe|exhibit|marker|33"/>
-          <p:cNvSpPr/>
-          <p:nvPr/>
-        </p:nvSpPr>
-        <p:spPr>
-          <a:xfrm>
-            <a:off x="5916077" y="4568714"/>
-            <a:ext cx="237744" cy="237744"/>
-          </a:xfrm>
-          <a:prstGeom prst="ellipse">
-            <a:avLst/>
-          </a:prstGeom>
-          <a:solidFill>
-            <a:srgbClr val="FFFFFF"/>
-          </a:solidFill>
-          <a:ln w="9525">
-            <a:solidFill>
-              <a:srgbClr val="13294B"/>
-            </a:solidFill>
-          </a:ln>
-        </p:spPr>
-        <p:txBody>
-          <a:bodyPr rtlCol="0" anchor="ctr" lIns="0" rIns="0" tIns="0" bIns="0"/>
-          <a:lstStyle/>
-          <a:p>
-            <a:pPr algn="ctr"/>
-          </a:p>
-        </p:txBody>
-      </p:sp>
-      <p:sp>
-        <p:nvSpPr>
-          <p:cNvPr id="35" name="cpe|exhibit|marker|34"/>
-          <p:cNvSpPr/>
-          <p:nvPr/>
-        </p:nvSpPr>
-        <p:spPr>
-          <a:xfrm>
-            <a:off x="5916077" y="4568714"/>
-            <a:ext cx="237744" cy="237744"/>
-          </a:xfrm>
-          <a:prstGeom prst="ellipse">
-            <a:avLst/>
-          </a:prstGeom>
-          <a:solidFill>
-            <a:srgbClr val="13294B"/>
-          </a:solidFill>
-          <a:ln w="9525">
-            <a:solidFill>
-              <a:srgbClr val="13294B"/>
-            </a:solidFill>
-          </a:ln>
-        </p:spPr>
-        <p:txBody>
-          <a:bodyPr rtlCol="0" anchor="ctr" lIns="0" rIns="0" tIns="0" bIns="0"/>
-          <a:lstStyle/>
-          <a:p>
-            <a:pPr algn="ctr"/>
-          </a:p>
-        </p:txBody>
-      </p:sp>
-      <p:sp>
-        <p:nvSpPr>
-          <p:cNvPr id="36" name="cpe|exhibit|marker|35"/>
-          <p:cNvSpPr/>
-          <p:nvPr/>
-        </p:nvSpPr>
-        <p:spPr>
-          <a:xfrm>
-            <a:off x="7531456" y="4568714"/>
-            <a:ext cx="237744" cy="237744"/>
-          </a:xfrm>
-          <a:prstGeom prst="ellipse">
-            <a:avLst/>
-          </a:prstGeom>
-          <a:solidFill>
-            <a:srgbClr val="FFFFFF"/>
-          </a:solidFill>
-          <a:ln w="9525">
-            <a:solidFill>
-              <a:srgbClr val="13294B"/>
-            </a:solidFill>
-          </a:ln>
-        </p:spPr>
-        <p:txBody>
-          <a:bodyPr rtlCol="0" anchor="ctr" lIns="0" rIns="0" tIns="0" bIns="0"/>
-          <a:lstStyle/>
-          <a:p>
-            <a:pPr algn="ctr"/>
-          </a:p>
-        </p:txBody>
-      </p:sp>
-      <p:sp>
-        <p:nvSpPr>
-          <p:cNvPr id="37" name="cpe|exhibit|marker|36"/>
-          <p:cNvSpPr/>
-          <p:nvPr/>
-        </p:nvSpPr>
-        <p:spPr>
-          <a:xfrm>
-            <a:off x="7531456" y="4568714"/>
-            <a:ext cx="237744" cy="237744"/>
-          </a:xfrm>
-          <a:prstGeom prst="ellipse">
-            <a:avLst/>
-          </a:prstGeom>
-          <a:solidFill>
-            <a:srgbClr val="13294B"/>
-          </a:solidFill>
-          <a:ln w="9525">
-            <a:solidFill>
-              <a:srgbClr val="13294B"/>
-            </a:solidFill>
-          </a:ln>
-        </p:spPr>
-        <p:txBody>
-          <a:bodyPr rtlCol="0" anchor="ctr" lIns="0" rIns="0" tIns="0" bIns="0"/>
-          <a:lstStyle/>
-          <a:p>
-            <a:pPr algn="ctr"/>
-          </a:p>
-        </p:txBody>
-      </p:sp>
-      <p:sp>
-        <p:nvSpPr>
-          <p:cNvPr id="38" name="cpe|exhibit|marker|37"/>
-          <p:cNvSpPr/>
-          <p:nvPr/>
-        </p:nvSpPr>
-        <p:spPr>
-          <a:xfrm>
-            <a:off x="9146835" y="4568714"/>
-            <a:ext cx="237744" cy="237744"/>
-          </a:xfrm>
-          <a:prstGeom prst="ellipse">
-            <a:avLst/>
-          </a:prstGeom>
-          <a:solidFill>
-            <a:srgbClr val="FFFFFF"/>
-          </a:solidFill>
-          <a:ln w="9525">
-            <a:solidFill>
-              <a:srgbClr val="13294B"/>
-            </a:solidFill>
-          </a:ln>
-        </p:spPr>
-        <p:txBody>
-          <a:bodyPr rtlCol="0" anchor="ctr" lIns="0" rIns="0" tIns="0" bIns="0"/>
-          <a:lstStyle/>
-          <a:p>
-            <a:pPr algn="ctr"/>
-          </a:p>
-        </p:txBody>
-      </p:sp>
-      <p:sp>
-        <p:nvSpPr>
-          <p:cNvPr id="39" name="cpe|exhibit|marker|38"/>
-          <p:cNvSpPr/>
-          <p:nvPr/>
-        </p:nvSpPr>
-        <p:spPr>
-          <a:xfrm>
-            <a:off x="9146835" y="4568714"/>
-            <a:ext cx="237744" cy="237744"/>
-          </a:xfrm>
-          <a:prstGeom prst="ellipse">
-            <a:avLst/>
-          </a:prstGeom>
-          <a:solidFill>
-            <a:srgbClr val="13294B"/>
-          </a:solidFill>
-          <a:ln w="9525">
-            <a:solidFill>
-              <a:srgbClr val="13294B"/>
-            </a:solidFill>
-          </a:ln>
-        </p:spPr>
-        <p:txBody>
-          <a:bodyPr rtlCol="0" anchor="ctr" lIns="0" rIns="0" tIns="0" bIns="0"/>
-          <a:lstStyle/>
-          <a:p>
-            <a:pPr algn="ctr"/>
-          </a:p>
-        </p:txBody>
-      </p:sp>
-      <p:sp>
-        <p:nvSpPr>
-          <p:cNvPr id="40" name="cpe|exhibit|marker|39"/>
-          <p:cNvSpPr/>
-          <p:nvPr/>
-        </p:nvSpPr>
-        <p:spPr>
-          <a:xfrm>
-            <a:off x="502920" y="5166360"/>
-            <a:ext cx="164592" cy="164592"/>
-          </a:xfrm>
-          <a:prstGeom prst="ellipse">
-            <a:avLst/>
-          </a:prstGeom>
-          <a:solidFill>
-            <a:srgbClr val="FFFFFF"/>
-          </a:solidFill>
-          <a:ln w="9525">
-            <a:solidFill>
-              <a:srgbClr val="13294B"/>
-            </a:solidFill>
-          </a:ln>
-        </p:spPr>
-        <p:txBody>
-          <a:bodyPr rtlCol="0" anchor="ctr" lIns="0" rIns="0" tIns="0" bIns="0"/>
-          <a:lstStyle/>
-          <a:p>
-            <a:pPr algn="ctr"/>
-          </a:p>
-        </p:txBody>
-      </p:sp>
-      <p:sp>
-        <p:nvSpPr>
-          <p:cNvPr id="41" name="cpe|exhibit|label|40"/>
-          <p:cNvSpPr txBox="1"/>
-          <p:nvPr/>
-        </p:nvSpPr>
-        <p:spPr>
-          <a:xfrm>
-            <a:off x="722376" y="5129784"/>
-            <a:ext cx="731520" cy="237744"/>
-          </a:xfrm>
-          <a:prstGeom prst="rect">
-            <a:avLst/>
-          </a:prstGeom>
-          <a:noFill/>
-        </p:spPr>
-        <p:txBody>
-          <a:bodyPr wrap="square" lIns="0" rIns="0" tIns="0" bIns="0" anchor="ctr">
-            <a:noAutofit/>
-          </a:bodyPr>
-          <a:lstStyle/>
-          <a:p>
-            <a:pPr algn="l">
-              <a:lnSpc>
-                <a:spcPct val="100000"/>
-              </a:lnSpc>
-            </a:pPr>
-            <a:r>
-              <a:rPr sz="1000" b="0">
-                <a:solidFill>
-                  <a:srgbClr val="5B6776"/>
-                </a:solidFill>
-                <a:latin typeface="Arial"/>
-              </a:rPr>
-              <a:t>None</a:t>
-            </a:r>
-          </a:p>
-        </p:txBody>
-      </p:sp>
-      <p:sp>
-        <p:nvSpPr>
-          <p:cNvPr id="42" name="cpe|exhibit|marker|41"/>
-          <p:cNvSpPr/>
-          <p:nvPr/>
-        </p:nvSpPr>
-        <p:spPr>
-          <a:xfrm>
-            <a:off x="1417320" y="5166360"/>
-            <a:ext cx="164592" cy="164592"/>
-          </a:xfrm>
-          <a:prstGeom prst="ellipse">
-            <a:avLst/>
-          </a:prstGeom>
-          <a:solidFill>
-            <a:srgbClr val="FFFFFF"/>
-          </a:solidFill>
-          <a:ln w="9525">
-            <a:solidFill>
-              <a:srgbClr val="13294B"/>
-            </a:solidFill>
-          </a:ln>
-        </p:spPr>
-        <p:txBody>
-          <a:bodyPr rtlCol="0" anchor="ctr" lIns="0" rIns="0" tIns="0" bIns="0"/>
-          <a:lstStyle/>
-          <a:p>
-            <a:pPr algn="ctr"/>
-          </a:p>
-        </p:txBody>
-      </p:sp>
-      <p:sp>
-        <p:nvSpPr>
-          <p:cNvPr id="43" name="cpe|exhibit|marker|42"/>
-          <p:cNvSpPr/>
-          <p:nvPr/>
-        </p:nvSpPr>
-        <p:spPr>
-          <a:xfrm>
-            <a:off x="1417320" y="5166360"/>
-            <a:ext cx="164592" cy="164592"/>
-          </a:xfrm>
-          <a:prstGeom prst="pie">
-            <a:avLst>
-              <a:gd name="adj1" fmla="val 16200000"/>
-              <a:gd name="adj2" fmla="val 5400000"/>
-            </a:avLst>
-          </a:prstGeom>
-          <a:solidFill>
-            <a:srgbClr val="13294B"/>
-          </a:solidFill>
-          <a:ln>
-            <a:noFill/>
-          </a:ln>
-        </p:spPr>
-        <p:txBody>
-          <a:bodyPr rtlCol="0" anchor="ctr" lIns="0" rIns="0" tIns="0" bIns="0"/>
-          <a:lstStyle/>
-          <a:p>
-            <a:pPr algn="ctr"/>
-          </a:p>
-        </p:txBody>
-      </p:sp>
-      <p:sp>
-        <p:nvSpPr>
-          <p:cNvPr id="44" name="cpe|exhibit|label|43"/>
-          <p:cNvSpPr txBox="1"/>
-          <p:nvPr/>
-        </p:nvSpPr>
-        <p:spPr>
-          <a:xfrm>
-            <a:off x="1636776" y="5129784"/>
-            <a:ext cx="731520" cy="237744"/>
-          </a:xfrm>
-          <a:prstGeom prst="rect">
-            <a:avLst/>
-          </a:prstGeom>
-          <a:noFill/>
-        </p:spPr>
-        <p:txBody>
-          <a:bodyPr wrap="square" lIns="0" rIns="0" tIns="0" bIns="0" anchor="ctr">
-            <a:noAutofit/>
-          </a:bodyPr>
-          <a:lstStyle/>
-          <a:p>
-            <a:pPr algn="l">
-              <a:lnSpc>
-                <a:spcPct val="100000"/>
-              </a:lnSpc>
-            </a:pPr>
-            <a:r>
-              <a:rPr sz="1000" b="0">
-                <a:solidFill>
-                  <a:srgbClr val="5B6776"/>
-                </a:solidFill>
-                <a:latin typeface="Arial"/>
-              </a:rPr>
-              <a:t>Partial</a:t>
-            </a:r>
-          </a:p>
-        </p:txBody>
-      </p:sp>
-      <p:sp>
-        <p:nvSpPr>
-          <p:cNvPr id="45" name="cpe|exhibit|marker|44"/>
-          <p:cNvSpPr/>
-          <p:nvPr/>
-        </p:nvSpPr>
-        <p:spPr>
-          <a:xfrm>
-            <a:off x="2331720" y="5166360"/>
-            <a:ext cx="164592" cy="164592"/>
-          </a:xfrm>
-          <a:prstGeom prst="ellipse">
-            <a:avLst/>
-          </a:prstGeom>
-          <a:solidFill>
-            <a:srgbClr val="FFFFFF"/>
-          </a:solidFill>
-          <a:ln w="9525">
-            <a:solidFill>
-              <a:srgbClr val="13294B"/>
-            </a:solidFill>
-          </a:ln>
-        </p:spPr>
-        <p:txBody>
-          <a:bodyPr rtlCol="0" anchor="ctr" lIns="0" rIns="0" tIns="0" bIns="0"/>
-          <a:lstStyle/>
-          <a:p>
-            <a:pPr algn="ctr"/>
-          </a:p>
-        </p:txBody>
-      </p:sp>
-      <p:sp>
-        <p:nvSpPr>
-          <p:cNvPr id="46" name="cpe|exhibit|marker|45"/>
-          <p:cNvSpPr/>
-          <p:nvPr/>
-        </p:nvSpPr>
-        <p:spPr>
-          <a:xfrm>
-            <a:off x="2331720" y="5166360"/>
-            <a:ext cx="164592" cy="164592"/>
-          </a:xfrm>
-          <a:prstGeom prst="ellipse">
-            <a:avLst/>
-          </a:prstGeom>
-          <a:solidFill>
-            <a:srgbClr val="13294B"/>
-          </a:solidFill>
-          <a:ln w="9525">
-            <a:solidFill>
-              <a:srgbClr val="13294B"/>
+              <a:srgbClr val="2F5F8A"/>
             </a:solidFill>
           </a:ln>
         </p:spPr>
@@ -11371,7 +11371,7 @@
         <p:spPr>
           <a:xfrm>
             <a:off x="502920" y="475488"/>
-            <a:ext cx="6382527" cy="786384"/>
+            <a:ext cx="10746943" cy="786384"/>
           </a:xfrm>
           <a:prstGeom prst="rect">
             <a:avLst/>
@@ -11569,9 +11569,108 @@
           </a:ln>
         </p:spPr>
       </p:cxnSp>
-      <p:sp>
-        <p:nvSpPr>
-          <p:cNvPr id="9" name="cpe|exhibit|text|8"/>
+      <p:cxnSp>
+        <p:nvCxnSpPr>
+          <p:cNvPr id="9" name="cpe|exhibit|line|8"/>
+          <p:cNvCxnSpPr/>
+          <p:nvPr/>
+        </p:nvCxnSpPr>
+        <p:spPr>
+          <a:xfrm>
+            <a:off x="502920" y="4489704"/>
+            <a:ext cx="2076237" cy="0"/>
+          </a:xfrm>
+          <a:prstGeom prst="line">
+            <a:avLst/>
+          </a:prstGeom>
+          <a:ln w="9525">
+            <a:solidFill>
+              <a:srgbClr val="B6C0CB"/>
+            </a:solidFill>
+          </a:ln>
+        </p:spPr>
+      </p:cxnSp>
+      <p:sp>
+        <p:nvSpPr>
+          <p:cNvPr id="10" name="cpe|exhibit|text|9"/>
+          <p:cNvSpPr txBox="1"/>
+          <p:nvPr/>
+        </p:nvSpPr>
+        <p:spPr>
+          <a:xfrm>
+            <a:off x="502920" y="4581144"/>
+            <a:ext cx="2076237" cy="457200"/>
+          </a:xfrm>
+          <a:prstGeom prst="rect">
+            <a:avLst/>
+          </a:prstGeom>
+          <a:noFill/>
+        </p:spPr>
+        <p:txBody>
+          <a:bodyPr wrap="square" lIns="0" rIns="0" tIns="0" bIns="0" anchor="t">
+            <a:noAutofit/>
+          </a:bodyPr>
+          <a:lstStyle/>
+          <a:p>
+            <a:pPr algn="l">
+              <a:lnSpc>
+                <a:spcPct val="100000"/>
+              </a:lnSpc>
+            </a:pPr>
+            <a:r>
+              <a:rPr sz="2200" b="1">
+                <a:solidFill>
+                  <a:srgbClr val="1C2530"/>
+                </a:solidFill>
+                <a:latin typeface="Arial"/>
+              </a:rPr>
+              <a:t>0.3%</a:t>
+            </a:r>
+          </a:p>
+        </p:txBody>
+      </p:sp>
+      <p:sp>
+        <p:nvSpPr>
+          <p:cNvPr id="11" name="cpe|exhibit|text|10"/>
+          <p:cNvSpPr txBox="1"/>
+          <p:nvPr/>
+        </p:nvSpPr>
+        <p:spPr>
+          <a:xfrm>
+            <a:off x="502920" y="5038344"/>
+            <a:ext cx="2076237" cy="347472"/>
+          </a:xfrm>
+          <a:prstGeom prst="rect">
+            <a:avLst/>
+          </a:prstGeom>
+          <a:noFill/>
+        </p:spPr>
+        <p:txBody>
+          <a:bodyPr wrap="square" lIns="0" rIns="0" tIns="0" bIns="0" anchor="t">
+            <a:noAutofit/>
+          </a:bodyPr>
+          <a:lstStyle/>
+          <a:p>
+            <a:pPr algn="l">
+              <a:lnSpc>
+                <a:spcPct val="100000"/>
+              </a:lnSpc>
+            </a:pPr>
+            <a:r>
+              <a:rPr sz="1100" b="0">
+                <a:solidFill>
+                  <a:srgbClr val="5B6776"/>
+                </a:solidFill>
+                <a:latin typeface="Arial"/>
+              </a:rPr>
+              <a:t>order errors (from 2.1%)</a:t>
+            </a:r>
+          </a:p>
+        </p:txBody>
+      </p:sp>
+      <p:sp>
+        <p:nvSpPr>
+          <p:cNvPr id="12" name="cpe|exhibit|text|11"/>
           <p:cNvSpPr txBox="1"/>
           <p:nvPr/>
         </p:nvSpPr>
@@ -11610,14 +11709,14 @@
       </p:sp>
       <p:sp>
         <p:nvSpPr>
-          <p:cNvPr id="10" name="cpe|exhibit|text|9"/>
+          <p:cNvPr id="13" name="cpe|exhibit|text|12"/>
           <p:cNvSpPr txBox="1"/>
           <p:nvPr/>
         </p:nvSpPr>
         <p:spPr>
           <a:xfrm>
             <a:off x="502920" y="2679192"/>
-            <a:ext cx="2076237" cy="3520440"/>
+            <a:ext cx="2076237" cy="1673352"/>
           </a:xfrm>
           <a:prstGeom prst="rect">
             <a:avLst/>
@@ -11680,7 +11779,7 @@
       </p:sp>
       <p:sp>
         <p:nvSpPr>
-          <p:cNvPr id="11" name="cpe|exhibit|fill|10"/>
+          <p:cNvPr id="14" name="cpe|exhibit|fill|13"/>
           <p:cNvSpPr/>
           <p:nvPr/>
         </p:nvSpPr>
@@ -11709,7 +11808,7 @@
       </p:sp>
       <p:sp>
         <p:nvSpPr>
-          <p:cNvPr id="12" name="cpe|exhibit|text|11"/>
+          <p:cNvPr id="15" name="cpe|exhibit|text|14"/>
           <p:cNvSpPr txBox="1"/>
           <p:nvPr/>
         </p:nvSpPr>
@@ -11748,7 +11847,7 @@
       </p:sp>
       <p:cxnSp>
         <p:nvCxnSpPr>
-          <p:cNvPr id="13" name="cpe|exhibit|connector|12"/>
+          <p:cNvPr id="16" name="cpe|exhibit|connector|15"/>
           <p:cNvCxnSpPr/>
           <p:nvPr/>
         </p:nvCxnSpPr>
@@ -11768,9 +11867,108 @@
           </a:ln>
         </p:spPr>
       </p:cxnSp>
-      <p:sp>
-        <p:nvSpPr>
-          <p:cNvPr id="14" name="cpe|exhibit|text|13"/>
+      <p:cxnSp>
+        <p:nvCxnSpPr>
+          <p:cNvPr id="17" name="cpe|exhibit|line|16"/>
+          <p:cNvCxnSpPr/>
+          <p:nvPr/>
+        </p:nvCxnSpPr>
+        <p:spPr>
+          <a:xfrm>
+            <a:off x="2780325" y="4489704"/>
+            <a:ext cx="2076236" cy="0"/>
+          </a:xfrm>
+          <a:prstGeom prst="line">
+            <a:avLst/>
+          </a:prstGeom>
+          <a:ln w="9525">
+            <a:solidFill>
+              <a:srgbClr val="B6C0CB"/>
+            </a:solidFill>
+          </a:ln>
+        </p:spPr>
+      </p:cxnSp>
+      <p:sp>
+        <p:nvSpPr>
+          <p:cNvPr id="18" name="cpe|exhibit|text|17"/>
+          <p:cNvSpPr txBox="1"/>
+          <p:nvPr/>
+        </p:nvSpPr>
+        <p:spPr>
+          <a:xfrm>
+            <a:off x="2780325" y="4581144"/>
+            <a:ext cx="2076237" cy="457200"/>
+          </a:xfrm>
+          <a:prstGeom prst="rect">
+            <a:avLst/>
+          </a:prstGeom>
+          <a:noFill/>
+        </p:spPr>
+        <p:txBody>
+          <a:bodyPr wrap="square" lIns="0" rIns="0" tIns="0" bIns="0" anchor="t">
+            <a:noAutofit/>
+          </a:bodyPr>
+          <a:lstStyle/>
+          <a:p>
+            <a:pPr algn="l">
+              <a:lnSpc>
+                <a:spcPct val="100000"/>
+              </a:lnSpc>
+            </a:pPr>
+            <a:r>
+              <a:rPr sz="2200" b="1">
+                <a:solidFill>
+                  <a:srgbClr val="1C2530"/>
+                </a:solidFill>
+                <a:latin typeface="Arial"/>
+              </a:rPr>
+              <a:t>2h</a:t>
+            </a:r>
+          </a:p>
+        </p:txBody>
+      </p:sp>
+      <p:sp>
+        <p:nvSpPr>
+          <p:cNvPr id="19" name="cpe|exhibit|text|18"/>
+          <p:cNvSpPr txBox="1"/>
+          <p:nvPr/>
+        </p:nvSpPr>
+        <p:spPr>
+          <a:xfrm>
+            <a:off x="2780325" y="5038344"/>
+            <a:ext cx="2076237" cy="347472"/>
+          </a:xfrm>
+          <a:prstGeom prst="rect">
+            <a:avLst/>
+          </a:prstGeom>
+          <a:noFill/>
+        </p:spPr>
+        <p:txBody>
+          <a:bodyPr wrap="square" lIns="0" rIns="0" tIns="0" bIns="0" anchor="t">
+            <a:noAutofit/>
+          </a:bodyPr>
+          <a:lstStyle/>
+          <a:p>
+            <a:pPr algn="l">
+              <a:lnSpc>
+                <a:spcPct val="100000"/>
+              </a:lnSpc>
+            </a:pPr>
+            <a:r>
+              <a:rPr sz="1100" b="0">
+                <a:solidFill>
+                  <a:srgbClr val="5B6776"/>
+                </a:solidFill>
+                <a:latin typeface="Arial"/>
+              </a:rPr>
+              <a:t>planning time (from 3h)</a:t>
+            </a:r>
+          </a:p>
+        </p:txBody>
+      </p:sp>
+      <p:sp>
+        <p:nvSpPr>
+          <p:cNvPr id="20" name="cpe|exhibit|text|19"/>
           <p:cNvSpPr txBox="1"/>
           <p:nvPr/>
         </p:nvSpPr>
@@ -11809,14 +12007,14 @@
       </p:sp>
       <p:sp>
         <p:nvSpPr>
-          <p:cNvPr id="15" name="cpe|exhibit|text|14"/>
+          <p:cNvPr id="21" name="cpe|exhibit|text|20"/>
           <p:cNvSpPr txBox="1"/>
           <p:nvPr/>
         </p:nvSpPr>
         <p:spPr>
           <a:xfrm>
             <a:off x="2780325" y="2679192"/>
-            <a:ext cx="2076237" cy="3520440"/>
+            <a:ext cx="2076237" cy="1673352"/>
           </a:xfrm>
           <a:prstGeom prst="rect">
             <a:avLst/>
@@ -11879,7 +12077,7 @@
       </p:sp>
       <p:sp>
         <p:nvSpPr>
-          <p:cNvPr id="16" name="cpe|exhibit|fill|15"/>
+          <p:cNvPr id="22" name="cpe|exhibit|fill|21"/>
           <p:cNvSpPr/>
           <p:nvPr/>
         </p:nvSpPr>
@@ -11908,7 +12106,7 @@
       </p:sp>
       <p:sp>
         <p:nvSpPr>
-          <p:cNvPr id="17" name="cpe|exhibit|text|16"/>
+          <p:cNvPr id="23" name="cpe|exhibit|text|22"/>
           <p:cNvSpPr txBox="1"/>
           <p:nvPr/>
         </p:nvSpPr>
@@ -11947,7 +12145,7 @@
       </p:sp>
       <p:cxnSp>
         <p:nvCxnSpPr>
-          <p:cNvPr id="18" name="cpe|exhibit|connector|17"/>
+          <p:cNvPr id="24" name="cpe|exhibit|connector|23"/>
           <p:cNvCxnSpPr/>
           <p:nvPr/>
         </p:nvCxnSpPr>
@@ -11967,9 +12165,108 @@
           </a:ln>
         </p:spPr>
       </p:cxnSp>
-      <p:sp>
-        <p:nvSpPr>
-          <p:cNvPr id="19" name="cpe|exhibit|text|18"/>
+      <p:cxnSp>
+        <p:nvCxnSpPr>
+          <p:cNvPr id="25" name="cpe|exhibit|line|24"/>
+          <p:cNvCxnSpPr/>
+          <p:nvPr/>
+        </p:nvCxnSpPr>
+        <p:spPr>
+          <a:xfrm>
+            <a:off x="5057729" y="4489704"/>
+            <a:ext cx="2076237" cy="0"/>
+          </a:xfrm>
+          <a:prstGeom prst="line">
+            <a:avLst/>
+          </a:prstGeom>
+          <a:ln w="9525">
+            <a:solidFill>
+              <a:srgbClr val="B6C0CB"/>
+            </a:solidFill>
+          </a:ln>
+        </p:spPr>
+      </p:cxnSp>
+      <p:sp>
+        <p:nvSpPr>
+          <p:cNvPr id="26" name="cpe|exhibit|text|25"/>
+          <p:cNvSpPr txBox="1"/>
+          <p:nvPr/>
+        </p:nvSpPr>
+        <p:spPr>
+          <a:xfrm>
+            <a:off x="5057729" y="4581144"/>
+            <a:ext cx="2076237" cy="457200"/>
+          </a:xfrm>
+          <a:prstGeom prst="rect">
+            <a:avLst/>
+          </a:prstGeom>
+          <a:noFill/>
+        </p:spPr>
+        <p:txBody>
+          <a:bodyPr wrap="square" lIns="0" rIns="0" tIns="0" bIns="0" anchor="t">
+            <a:noAutofit/>
+          </a:bodyPr>
+          <a:lstStyle/>
+          <a:p>
+            <a:pPr algn="l">
+              <a:lnSpc>
+                <a:spcPct val="100000"/>
+              </a:lnSpc>
+            </a:pPr>
+            <a:r>
+              <a:rPr sz="2200" b="1">
+                <a:solidFill>
+                  <a:srgbClr val="13294B"/>
+                </a:solidFill>
+                <a:latin typeface="Arial"/>
+              </a:rPr>
+              <a:t>99.7%</a:t>
+            </a:r>
+          </a:p>
+        </p:txBody>
+      </p:sp>
+      <p:sp>
+        <p:nvSpPr>
+          <p:cNvPr id="27" name="cpe|exhibit|text|26"/>
+          <p:cNvSpPr txBox="1"/>
+          <p:nvPr/>
+        </p:nvSpPr>
+        <p:spPr>
+          <a:xfrm>
+            <a:off x="5057729" y="5038344"/>
+            <a:ext cx="2076237" cy="347472"/>
+          </a:xfrm>
+          <a:prstGeom prst="rect">
+            <a:avLst/>
+          </a:prstGeom>
+          <a:noFill/>
+        </p:spPr>
+        <p:txBody>
+          <a:bodyPr wrap="square" lIns="0" rIns="0" tIns="0" bIns="0" anchor="t">
+            <a:noAutofit/>
+          </a:bodyPr>
+          <a:lstStyle/>
+          <a:p>
+            <a:pPr algn="l">
+              <a:lnSpc>
+                <a:spcPct val="100000"/>
+              </a:lnSpc>
+            </a:pPr>
+            <a:r>
+              <a:rPr sz="1100" b="0">
+                <a:solidFill>
+                  <a:srgbClr val="5B6776"/>
+                </a:solidFill>
+                <a:latin typeface="Arial"/>
+              </a:rPr>
+              <a:t>pick accuracy (from 97.9%)</a:t>
+            </a:r>
+          </a:p>
+        </p:txBody>
+      </p:sp>
+      <p:sp>
+        <p:nvSpPr>
+          <p:cNvPr id="28" name="cpe|exhibit|text|27"/>
           <p:cNvSpPr txBox="1"/>
           <p:nvPr/>
         </p:nvSpPr>
@@ -12008,14 +12305,14 @@
       </p:sp>
       <p:sp>
         <p:nvSpPr>
-          <p:cNvPr id="20" name="cpe|exhibit|text|19"/>
+          <p:cNvPr id="29" name="cpe|exhibit|text|28"/>
           <p:cNvSpPr txBox="1"/>
           <p:nvPr/>
         </p:nvSpPr>
         <p:spPr>
           <a:xfrm>
             <a:off x="5057729" y="2679192"/>
-            <a:ext cx="2076237" cy="3520440"/>
+            <a:ext cx="2076237" cy="1673352"/>
           </a:xfrm>
           <a:prstGeom prst="rect">
             <a:avLst/>
@@ -12078,7 +12375,7 @@
       </p:sp>
       <p:sp>
         <p:nvSpPr>
-          <p:cNvPr id="21" name="cpe|exhibit|fill|20"/>
+          <p:cNvPr id="30" name="cpe|exhibit|fill|29"/>
           <p:cNvSpPr/>
           <p:nvPr/>
         </p:nvSpPr>
@@ -12107,7 +12404,7 @@
       </p:sp>
       <p:sp>
         <p:nvSpPr>
-          <p:cNvPr id="22" name="cpe|exhibit|text|21"/>
+          <p:cNvPr id="31" name="cpe|exhibit|text|30"/>
           <p:cNvSpPr txBox="1"/>
           <p:nvPr/>
         </p:nvSpPr>
@@ -12146,7 +12443,7 @@
       </p:sp>
       <p:cxnSp>
         <p:nvCxnSpPr>
-          <p:cNvPr id="23" name="cpe|exhibit|connector|22"/>
+          <p:cNvPr id="32" name="cpe|exhibit|connector|31"/>
           <p:cNvCxnSpPr/>
           <p:nvPr/>
         </p:nvCxnSpPr>
@@ -12166,9 +12463,108 @@
           </a:ln>
         </p:spPr>
       </p:cxnSp>
-      <p:sp>
-        <p:nvSpPr>
-          <p:cNvPr id="24" name="cpe|exhibit|text|23"/>
+      <p:cxnSp>
+        <p:nvCxnSpPr>
+          <p:cNvPr id="33" name="cpe|exhibit|line|32"/>
+          <p:cNvCxnSpPr/>
+          <p:nvPr/>
+        </p:nvCxnSpPr>
+        <p:spPr>
+          <a:xfrm>
+            <a:off x="7335134" y="4489704"/>
+            <a:ext cx="2076237" cy="0"/>
+          </a:xfrm>
+          <a:prstGeom prst="line">
+            <a:avLst/>
+          </a:prstGeom>
+          <a:ln w="9525">
+            <a:solidFill>
+              <a:srgbClr val="B6C0CB"/>
+            </a:solidFill>
+          </a:ln>
+        </p:spPr>
+      </p:cxnSp>
+      <p:sp>
+        <p:nvSpPr>
+          <p:cNvPr id="34" name="cpe|exhibit|text|33"/>
+          <p:cNvSpPr txBox="1"/>
+          <p:nvPr/>
+        </p:nvSpPr>
+        <p:spPr>
+          <a:xfrm>
+            <a:off x="7335134" y="4581144"/>
+            <a:ext cx="2076237" cy="457200"/>
+          </a:xfrm>
+          <a:prstGeom prst="rect">
+            <a:avLst/>
+          </a:prstGeom>
+          <a:noFill/>
+        </p:spPr>
+        <p:txBody>
+          <a:bodyPr wrap="square" lIns="0" rIns="0" tIns="0" bIns="0" anchor="t">
+            <a:noAutofit/>
+          </a:bodyPr>
+          <a:lstStyle/>
+          <a:p>
+            <a:pPr algn="l">
+              <a:lnSpc>
+                <a:spcPct val="100000"/>
+              </a:lnSpc>
+            </a:pPr>
+            <a:r>
+              <a:rPr sz="2200" b="1">
+                <a:solidFill>
+                  <a:srgbClr val="1C2530"/>
+                </a:solidFill>
+                <a:latin typeface="Arial"/>
+              </a:rPr>
+              <a:t>85%</a:t>
+            </a:r>
+          </a:p>
+        </p:txBody>
+      </p:sp>
+      <p:sp>
+        <p:nvSpPr>
+          <p:cNvPr id="35" name="cpe|exhibit|text|34"/>
+          <p:cNvSpPr txBox="1"/>
+          <p:nvPr/>
+        </p:nvSpPr>
+        <p:spPr>
+          <a:xfrm>
+            <a:off x="7335134" y="5038344"/>
+            <a:ext cx="2076237" cy="347472"/>
+          </a:xfrm>
+          <a:prstGeom prst="rect">
+            <a:avLst/>
+          </a:prstGeom>
+          <a:noFill/>
+        </p:spPr>
+        <p:txBody>
+          <a:bodyPr wrap="square" lIns="0" rIns="0" tIns="0" bIns="0" anchor="t">
+            <a:noAutofit/>
+          </a:bodyPr>
+          <a:lstStyle/>
+          <a:p>
+            <a:pPr algn="l">
+              <a:lnSpc>
+                <a:spcPct val="100000"/>
+              </a:lnSpc>
+            </a:pPr>
+            <a:r>
+              <a:rPr sz="1100" b="0">
+                <a:solidFill>
+                  <a:srgbClr val="5B6776"/>
+                </a:solidFill>
+                <a:latin typeface="Arial"/>
+              </a:rPr>
+              <a:t>truck fill (from 77%)</a:t>
+            </a:r>
+          </a:p>
+        </p:txBody>
+      </p:sp>
+      <p:sp>
+        <p:nvSpPr>
+          <p:cNvPr id="36" name="cpe|exhibit|text|35"/>
           <p:cNvSpPr txBox="1"/>
           <p:nvPr/>
         </p:nvSpPr>
@@ -12207,14 +12603,14 @@
       </p:sp>
       <p:sp>
         <p:nvSpPr>
-          <p:cNvPr id="25" name="cpe|exhibit|text|24"/>
+          <p:cNvPr id="37" name="cpe|exhibit|text|36"/>
           <p:cNvSpPr txBox="1"/>
           <p:nvPr/>
         </p:nvSpPr>
         <p:spPr>
           <a:xfrm>
             <a:off x="7335134" y="2679192"/>
-            <a:ext cx="2076237" cy="3520440"/>
+            <a:ext cx="2076237" cy="1673352"/>
           </a:xfrm>
           <a:prstGeom prst="rect">
             <a:avLst/>
@@ -12277,7 +12673,7 @@
       </p:sp>
       <p:sp>
         <p:nvSpPr>
-          <p:cNvPr id="26" name="cpe|exhibit|fill|25"/>
+          <p:cNvPr id="38" name="cpe|exhibit|fill|37"/>
           <p:cNvSpPr/>
           <p:nvPr/>
         </p:nvSpPr>
@@ -12306,7 +12702,7 @@
       </p:sp>
       <p:sp>
         <p:nvSpPr>
-          <p:cNvPr id="27" name="cpe|exhibit|text|26"/>
+          <p:cNvPr id="39" name="cpe|exhibit|text|38"/>
           <p:cNvSpPr txBox="1"/>
           <p:nvPr/>
         </p:nvSpPr>
@@ -12343,9 +12739,108 @@
           </a:p>
         </p:txBody>
       </p:sp>
-      <p:sp>
-        <p:nvSpPr>
-          <p:cNvPr id="28" name="cpe|exhibit|text|27"/>
+      <p:cxnSp>
+        <p:nvCxnSpPr>
+          <p:cNvPr id="40" name="cpe|exhibit|line|39"/>
+          <p:cNvCxnSpPr/>
+          <p:nvPr/>
+        </p:nvCxnSpPr>
+        <p:spPr>
+          <a:xfrm>
+            <a:off x="9612539" y="4489704"/>
+            <a:ext cx="2076236" cy="0"/>
+          </a:xfrm>
+          <a:prstGeom prst="line">
+            <a:avLst/>
+          </a:prstGeom>
+          <a:ln w="9525">
+            <a:solidFill>
+              <a:srgbClr val="B6C0CB"/>
+            </a:solidFill>
+          </a:ln>
+        </p:spPr>
+      </p:cxnSp>
+      <p:sp>
+        <p:nvSpPr>
+          <p:cNvPr id="41" name="cpe|exhibit|text|40"/>
+          <p:cNvSpPr txBox="1"/>
+          <p:nvPr/>
+        </p:nvSpPr>
+        <p:spPr>
+          <a:xfrm>
+            <a:off x="9612539" y="4581144"/>
+            <a:ext cx="2076237" cy="457200"/>
+          </a:xfrm>
+          <a:prstGeom prst="rect">
+            <a:avLst/>
+          </a:prstGeom>
+          <a:noFill/>
+        </p:spPr>
+        <p:txBody>
+          <a:bodyPr wrap="square" lIns="0" rIns="0" tIns="0" bIns="0" anchor="t">
+            <a:noAutofit/>
+          </a:bodyPr>
+          <a:lstStyle/>
+          <a:p>
+            <a:pPr algn="l">
+              <a:lnSpc>
+                <a:spcPct val="100000"/>
+              </a:lnSpc>
+            </a:pPr>
+            <a:r>
+              <a:rPr sz="2200" b="1">
+                <a:solidFill>
+                  <a:srgbClr val="1C2530"/>
+                </a:solidFill>
+                <a:latin typeface="Arial"/>
+              </a:rPr>
+              <a:t>85%</a:t>
+            </a:r>
+          </a:p>
+        </p:txBody>
+      </p:sp>
+      <p:sp>
+        <p:nvSpPr>
+          <p:cNvPr id="42" name="cpe|exhibit|text|41"/>
+          <p:cNvSpPr txBox="1"/>
+          <p:nvPr/>
+        </p:nvSpPr>
+        <p:spPr>
+          <a:xfrm>
+            <a:off x="9612539" y="5038344"/>
+            <a:ext cx="2076237" cy="347472"/>
+          </a:xfrm>
+          <a:prstGeom prst="rect">
+            <a:avLst/>
+          </a:prstGeom>
+          <a:noFill/>
+        </p:spPr>
+        <p:txBody>
+          <a:bodyPr wrap="square" lIns="0" rIns="0" tIns="0" bIns="0" anchor="t">
+            <a:noAutofit/>
+          </a:bodyPr>
+          <a:lstStyle/>
+          <a:p>
+            <a:pPr algn="l">
+              <a:lnSpc>
+                <a:spcPct val="100000"/>
+              </a:lnSpc>
+            </a:pPr>
+            <a:r>
+              <a:rPr sz="1100" b="0">
+                <a:solidFill>
+                  <a:srgbClr val="5B6776"/>
+                </a:solidFill>
+                <a:latin typeface="Arial"/>
+              </a:rPr>
+              <a:t>in full, on time (from 61%)</a:t>
+            </a:r>
+          </a:p>
+        </p:txBody>
+      </p:sp>
+      <p:sp>
+        <p:nvSpPr>
+          <p:cNvPr id="43" name="cpe|exhibit|text|42"/>
           <p:cNvSpPr txBox="1"/>
           <p:nvPr/>
         </p:nvSpPr>
@@ -12384,14 +12879,14 @@
       </p:sp>
       <p:sp>
         <p:nvSpPr>
-          <p:cNvPr id="29" name="cpe|exhibit|text|28"/>
+          <p:cNvPr id="44" name="cpe|exhibit|text|43"/>
           <p:cNvSpPr txBox="1"/>
           <p:nvPr/>
         </p:nvSpPr>
         <p:spPr>
           <a:xfrm>
             <a:off x="9612539" y="2679192"/>
-            <a:ext cx="2076237" cy="3520440"/>
+            <a:ext cx="2076237" cy="1673352"/>
           </a:xfrm>
           <a:prstGeom prst="rect">
             <a:avLst/>
@@ -12448,6 +12943,103 @@
                 <a:latin typeface="Arial"/>
               </a:rPr>
               <a:t>Returns in 48h</a:t>
+            </a:r>
+          </a:p>
+        </p:txBody>
+      </p:sp>
+      <p:sp>
+        <p:nvSpPr>
+          <p:cNvPr id="45" name="cpe|takeaway|fill|44"/>
+          <p:cNvSpPr/>
+          <p:nvPr/>
+        </p:nvSpPr>
+        <p:spPr>
+          <a:xfrm>
+            <a:off x="502920" y="5632704"/>
+            <a:ext cx="11185855" cy="566928"/>
+          </a:xfrm>
+          <a:prstGeom prst="rect">
+            <a:avLst/>
+          </a:prstGeom>
+          <a:solidFill>
+            <a:srgbClr val="EEF2F6"/>
+          </a:solidFill>
+          <a:ln>
+            <a:noFill/>
+          </a:ln>
+        </p:spPr>
+        <p:txBody>
+          <a:bodyPr rtlCol="0" anchor="ctr" lIns="0" rIns="0" tIns="0" bIns="0"/>
+          <a:lstStyle/>
+          <a:p>
+            <a:pPr algn="ctr"/>
+          </a:p>
+        </p:txBody>
+      </p:sp>
+      <p:sp>
+        <p:nvSpPr>
+          <p:cNvPr id="46" name="cpe|takeaway|fill|45"/>
+          <p:cNvSpPr/>
+          <p:nvPr/>
+        </p:nvSpPr>
+        <p:spPr>
+          <a:xfrm>
+            <a:off x="502920" y="5632704"/>
+            <a:ext cx="64008" cy="566928"/>
+          </a:xfrm>
+          <a:prstGeom prst="rect">
+            <a:avLst/>
+          </a:prstGeom>
+          <a:solidFill>
+            <a:srgbClr val="E08A00"/>
+          </a:solidFill>
+          <a:ln>
+            <a:noFill/>
+          </a:ln>
+        </p:spPr>
+        <p:txBody>
+          <a:bodyPr rtlCol="0" anchor="ctr" lIns="0" rIns="0" tIns="0" bIns="0"/>
+          <a:lstStyle/>
+          <a:p>
+            <a:pPr algn="ctr"/>
+          </a:p>
+        </p:txBody>
+      </p:sp>
+      <p:sp>
+        <p:nvSpPr>
+          <p:cNvPr id="47" name="cpe|takeaway|text|46"/>
+          <p:cNvSpPr txBox="1"/>
+          <p:nvPr/>
+        </p:nvSpPr>
+        <p:spPr>
+          <a:xfrm>
+            <a:off x="795528" y="5632704"/>
+            <a:ext cx="10664647" cy="566928"/>
+          </a:xfrm>
+          <a:prstGeom prst="rect">
+            <a:avLst/>
+          </a:prstGeom>
+          <a:noFill/>
+        </p:spPr>
+        <p:txBody>
+          <a:bodyPr wrap="square" lIns="0" rIns="0" tIns="0" bIns="0" anchor="ctr">
+            <a:noAutofit/>
+          </a:bodyPr>
+          <a:lstStyle/>
+          <a:p>
+            <a:pPr algn="l">
+              <a:lnSpc>
+                <a:spcPct val="100000"/>
+              </a:lnSpc>
+            </a:pPr>
+            <a:r>
+              <a:rPr sz="1300" b="1">
+                <a:solidFill>
+                  <a:srgbClr val="13294B"/>
+                </a:solidFill>
+                <a:latin typeface="Arial"/>
+              </a:rPr>
+              <a:t>Order-to-delivery falls from 31 to 24 hours and in-full-on-time deliveries rise from 61% to 85%</a:t>
             </a:r>
           </a:p>
         </p:txBody>
@@ -12683,7 +13275,7 @@
               </a:lnSpc>
             </a:pPr>
             <a:r>
-              <a:rPr sz="1200" b="0">
+              <a:rPr sz="1400" b="0">
                 <a:solidFill>
                   <a:srgbClr val="FFFFFF"/>
                 </a:solidFill>
@@ -12751,7 +13343,7 @@
               </a:lnSpc>
             </a:pPr>
             <a:r>
-              <a:rPr sz="1200" b="0">
+              <a:rPr sz="1400" b="0">
                 <a:solidFill>
                   <a:srgbClr val="FFFFFF"/>
                 </a:solidFill>
@@ -12819,7 +13411,7 @@
               </a:lnSpc>
             </a:pPr>
             <a:r>
-              <a:rPr sz="1200" b="0">
+              <a:rPr sz="1400" b="0">
                 <a:solidFill>
                   <a:srgbClr val="FFFFFF"/>
                 </a:solidFill>
@@ -12887,7 +13479,7 @@
               </a:lnSpc>
             </a:pPr>
             <a:r>
-              <a:rPr sz="1200" b="0">
+              <a:rPr sz="1400" b="0">
                 <a:solidFill>
                   <a:srgbClr val="FFFFFF"/>
                 </a:solidFill>
@@ -12955,7 +13547,7 @@
               </a:lnSpc>
             </a:pPr>
             <a:r>
-              <a:rPr sz="1200" b="0">
+              <a:rPr sz="1400" b="0">
                 <a:solidFill>
                   <a:srgbClr val="FFFFFF"/>
                 </a:solidFill>
@@ -12994,7 +13586,7 @@
               </a:lnSpc>
             </a:pPr>
             <a:r>
-              <a:rPr sz="1200" b="1">
+              <a:rPr sz="1400" b="1">
                 <a:solidFill>
                   <a:srgbClr val="1C2530"/>
                 </a:solidFill>
@@ -13054,7 +13646,7 @@
               </a:lnSpc>
             </a:pPr>
             <a:r>
-              <a:rPr sz="1100" b="0">
+              <a:rPr sz="1300" b="0">
                 <a:solidFill>
                   <a:srgbClr val="1C2530"/>
                 </a:solidFill>
@@ -13093,7 +13685,7 @@
               </a:lnSpc>
             </a:pPr>
             <a:r>
-              <a:rPr sz="1100" b="0">
+              <a:rPr sz="1300" b="0">
                 <a:solidFill>
                   <a:srgbClr val="1C2530"/>
                 </a:solidFill>
@@ -13132,7 +13724,7 @@
               </a:lnSpc>
             </a:pPr>
             <a:r>
-              <a:rPr sz="1100" b="0">
+              <a:rPr sz="1300" b="0">
                 <a:solidFill>
                   <a:srgbClr val="1C2530"/>
                 </a:solidFill>
@@ -13171,7 +13763,7 @@
               </a:lnSpc>
             </a:pPr>
             <a:r>
-              <a:rPr sz="1100" b="0">
+              <a:rPr sz="1300" b="0">
                 <a:solidFill>
                   <a:srgbClr val="1C2530"/>
                 </a:solidFill>
@@ -13210,7 +13802,7 @@
               </a:lnSpc>
             </a:pPr>
             <a:r>
-              <a:rPr sz="1100" b="0">
+              <a:rPr sz="1300" b="0">
                 <a:solidFill>
                   <a:srgbClr val="1C2530"/>
                 </a:solidFill>
@@ -13249,7 +13841,7 @@
               </a:lnSpc>
             </a:pPr>
             <a:r>
-              <a:rPr sz="1200" b="1">
+              <a:rPr sz="1400" b="1">
                 <a:solidFill>
                   <a:srgbClr val="1C2530"/>
                 </a:solidFill>
@@ -13309,7 +13901,7 @@
               </a:lnSpc>
             </a:pPr>
             <a:r>
-              <a:rPr sz="1100" b="0">
+              <a:rPr sz="1300" b="0">
                 <a:solidFill>
                   <a:srgbClr val="1C2530"/>
                 </a:solidFill>
@@ -13377,7 +13969,7 @@
               </a:lnSpc>
             </a:pPr>
             <a:r>
-              <a:rPr sz="1100" b="0">
+              <a:rPr sz="1300" b="0">
                 <a:solidFill>
                   <a:srgbClr val="1C2530"/>
                 </a:solidFill>
@@ -13445,7 +14037,7 @@
               </a:lnSpc>
             </a:pPr>
             <a:r>
-              <a:rPr sz="1100" b="0">
+              <a:rPr sz="1300" b="0">
                 <a:solidFill>
                   <a:srgbClr val="1C2530"/>
                 </a:solidFill>
@@ -13484,7 +14076,7 @@
               </a:lnSpc>
             </a:pPr>
             <a:r>
-              <a:rPr sz="1100" b="0">
+              <a:rPr sz="1300" b="0">
                 <a:solidFill>
                   <a:srgbClr val="1C2530"/>
                 </a:solidFill>
@@ -13523,7 +14115,7 @@
               </a:lnSpc>
             </a:pPr>
             <a:r>
-              <a:rPr sz="1100" b="0">
+              <a:rPr sz="1300" b="0">
                 <a:solidFill>
                   <a:srgbClr val="1C2530"/>
                 </a:solidFill>
@@ -13562,7 +14154,7 @@
               </a:lnSpc>
             </a:pPr>
             <a:r>
-              <a:rPr sz="1200" b="1">
+              <a:rPr sz="1400" b="1">
                 <a:solidFill>
                   <a:srgbClr val="1C2530"/>
                 </a:solidFill>
@@ -13622,7 +14214,7 @@
               </a:lnSpc>
             </a:pPr>
             <a:r>
-              <a:rPr sz="1100" b="0">
+              <a:rPr sz="1300" b="0">
                 <a:solidFill>
                   <a:srgbClr val="1C2530"/>
                 </a:solidFill>
@@ -13661,7 +14253,7 @@
               </a:lnSpc>
             </a:pPr>
             <a:r>
-              <a:rPr sz="1100" b="0">
+              <a:rPr sz="1300" b="0">
                 <a:solidFill>
                   <a:srgbClr val="1C2530"/>
                 </a:solidFill>
@@ -13700,7 +14292,7 @@
               </a:lnSpc>
             </a:pPr>
             <a:r>
-              <a:rPr sz="1100" b="0">
+              <a:rPr sz="1300" b="0">
                 <a:solidFill>
                   <a:srgbClr val="1C2530"/>
                 </a:solidFill>
@@ -13739,7 +14331,7 @@
               </a:lnSpc>
             </a:pPr>
             <a:r>
-              <a:rPr sz="1100" b="0">
+              <a:rPr sz="1300" b="0">
                 <a:solidFill>
                   <a:srgbClr val="1C2530"/>
                 </a:solidFill>
@@ -13778,7 +14370,7 @@
               </a:lnSpc>
             </a:pPr>
             <a:r>
-              <a:rPr sz="1100" b="0">
+              <a:rPr sz="1300" b="0">
                 <a:solidFill>
                   <a:srgbClr val="1C2530"/>
                 </a:solidFill>
@@ -16373,7 +16965,46 @@
         <p:spPr>
           <a:xfrm>
             <a:off x="502920" y="3145536"/>
-            <a:ext cx="3594506" cy="3054096"/>
+            <a:ext cx="3594506" cy="214884"/>
+          </a:xfrm>
+          <a:prstGeom prst="rect">
+            <a:avLst/>
+          </a:prstGeom>
+          <a:noFill/>
+        </p:spPr>
+        <p:txBody>
+          <a:bodyPr wrap="square" lIns="0" rIns="0" tIns="0" bIns="0" anchor="t">
+            <a:noAutofit/>
+          </a:bodyPr>
+          <a:lstStyle/>
+          <a:p>
+            <a:pPr algn="l">
+              <a:lnSpc>
+                <a:spcPct val="100000"/>
+              </a:lnSpc>
+            </a:pPr>
+            <a:r>
+              <a:rPr sz="1200" b="1">
+                <a:solidFill>
+                  <a:srgbClr val="1C2530"/>
+                </a:solidFill>
+                <a:latin typeface="Arial"/>
+              </a:rPr>
+              <a:t>Fund the programme</a:t>
+            </a:r>
+          </a:p>
+        </p:txBody>
+      </p:sp>
+      <p:sp>
+        <p:nvSpPr>
+          <p:cNvPr id="11" name="cpe|col_1|text|10"/>
+          <p:cNvSpPr txBox="1"/>
+          <p:nvPr/>
+        </p:nvSpPr>
+        <p:spPr>
+          <a:xfrm>
+            <a:off x="502920" y="3461004"/>
+            <a:ext cx="3594506" cy="1943100"/>
           </a:xfrm>
           <a:prstGeom prst="rect">
             <a:avLst/>
@@ -16440,197 +17071,6 @@
               <a:lnSpc>
                 <a:spcPct val="108000"/>
               </a:lnSpc>
-              <a:buClr>
-                <a:srgbClr val="1C2530"/>
-              </a:buClr>
-              <a:buSzPct val="100000"/>
-              <a:buFont typeface="Arial"/>
-              <a:buChar char="•"/>
-            </a:pPr>
-            <a:r>
-              <a:rPr sz="1200" b="0">
-                <a:solidFill>
-                  <a:srgbClr val="1C2530"/>
-                </a:solidFill>
-                <a:latin typeface="Arial"/>
-              </a:rPr>
-              <a:t>Overtime controls</a:t>
-            </a:r>
-          </a:p>
-        </p:txBody>
-      </p:sp>
-      <p:sp>
-        <p:nvSpPr>
-          <p:cNvPr id="11" name="cpe|col_2|fill|10"/>
-          <p:cNvSpPr/>
-          <p:nvPr/>
-        </p:nvSpPr>
-        <p:spPr>
-          <a:xfrm>
-            <a:off x="4298594" y="1481328"/>
-            <a:ext cx="3594506" cy="566928"/>
-          </a:xfrm>
-          <a:prstGeom prst="rect">
-            <a:avLst/>
-          </a:prstGeom>
-          <a:solidFill>
-            <a:srgbClr val="13294B"/>
-          </a:solidFill>
-          <a:ln>
-            <a:noFill/>
-          </a:ln>
-        </p:spPr>
-        <p:txBody>
-          <a:bodyPr rtlCol="0" anchor="ctr" lIns="0" rIns="0" tIns="0" bIns="0"/>
-          <a:lstStyle/>
-          <a:p>
-            <a:pPr algn="ctr"/>
-          </a:p>
-        </p:txBody>
-      </p:sp>
-      <p:sp>
-        <p:nvSpPr>
-          <p:cNvPr id="12" name="cpe|col_2|text|11"/>
-          <p:cNvSpPr txBox="1"/>
-          <p:nvPr/>
-        </p:nvSpPr>
-        <p:spPr>
-          <a:xfrm>
-            <a:off x="4435754" y="1481328"/>
-            <a:ext cx="3320186" cy="566928"/>
-          </a:xfrm>
-          <a:prstGeom prst="rect">
-            <a:avLst/>
-          </a:prstGeom>
-          <a:noFill/>
-        </p:spPr>
-        <p:txBody>
-          <a:bodyPr wrap="square" lIns="0" rIns="0" tIns="0" bIns="0" anchor="ctr">
-            <a:noAutofit/>
-          </a:bodyPr>
-          <a:lstStyle/>
-          <a:p>
-            <a:pPr algn="l">
-              <a:lnSpc>
-                <a:spcPct val="100000"/>
-              </a:lnSpc>
-            </a:pPr>
-            <a:r>
-              <a:rPr sz="1400" b="1">
-                <a:solidFill>
-                  <a:srgbClr val="FFFFFF"/>
-                </a:solidFill>
-                <a:latin typeface="Arial"/>
-              </a:rPr>
-              <a:t>Phase 2 · Automation</a:t>
-            </a:r>
-          </a:p>
-        </p:txBody>
-      </p:sp>
-      <p:sp>
-        <p:nvSpPr>
-          <p:cNvPr id="13" name="cpe|col_2|text|12"/>
-          <p:cNvSpPr txBox="1"/>
-          <p:nvPr/>
-        </p:nvSpPr>
-        <p:spPr>
-          <a:xfrm>
-            <a:off x="4298594" y="2276856"/>
-            <a:ext cx="3594506" cy="502920"/>
-          </a:xfrm>
-          <a:prstGeom prst="rect">
-            <a:avLst/>
-          </a:prstGeom>
-          <a:noFill/>
-        </p:spPr>
-        <p:txBody>
-          <a:bodyPr wrap="square" lIns="0" rIns="0" tIns="0" bIns="0" anchor="t">
-            <a:noAutofit/>
-          </a:bodyPr>
-          <a:lstStyle/>
-          <a:p>
-            <a:pPr algn="l">
-              <a:lnSpc>
-                <a:spcPct val="100000"/>
-              </a:lnSpc>
-            </a:pPr>
-            <a:r>
-              <a:rPr sz="2400" b="1">
-                <a:solidFill>
-                  <a:srgbClr val="13294B"/>
-                </a:solidFill>
-                <a:latin typeface="Arial"/>
-              </a:rPr>
-              <a:t>€13M</a:t>
-            </a:r>
-          </a:p>
-        </p:txBody>
-      </p:sp>
-      <p:sp>
-        <p:nvSpPr>
-          <p:cNvPr id="14" name="cpe|col_2|text|13"/>
-          <p:cNvSpPr txBox="1"/>
-          <p:nvPr/>
-        </p:nvSpPr>
-        <p:spPr>
-          <a:xfrm>
-            <a:off x="4298594" y="2779776"/>
-            <a:ext cx="3594506" cy="274320"/>
-          </a:xfrm>
-          <a:prstGeom prst="rect">
-            <a:avLst/>
-          </a:prstGeom>
-          <a:noFill/>
-        </p:spPr>
-        <p:txBody>
-          <a:bodyPr wrap="square" lIns="0" rIns="0" tIns="0" bIns="0" anchor="t">
-            <a:noAutofit/>
-          </a:bodyPr>
-          <a:lstStyle/>
-          <a:p>
-            <a:pPr algn="l">
-              <a:lnSpc>
-                <a:spcPct val="100000"/>
-              </a:lnSpc>
-            </a:pPr>
-            <a:r>
-              <a:rPr sz="1100" b="0">
-                <a:solidFill>
-                  <a:srgbClr val="5B6776"/>
-                </a:solidFill>
-                <a:latin typeface="Arial"/>
-              </a:rPr>
-              <a:t>run-rate by Q3 2027</a:t>
-            </a:r>
-          </a:p>
-        </p:txBody>
-      </p:sp>
-      <p:sp>
-        <p:nvSpPr>
-          <p:cNvPr id="15" name="cpe|col_2|text|14"/>
-          <p:cNvSpPr txBox="1"/>
-          <p:nvPr/>
-        </p:nvSpPr>
-        <p:spPr>
-          <a:xfrm>
-            <a:off x="4298594" y="3145536"/>
-            <a:ext cx="3594506" cy="3054096"/>
-          </a:xfrm>
-          <a:prstGeom prst="rect">
-            <a:avLst/>
-          </a:prstGeom>
-          <a:noFill/>
-        </p:spPr>
-        <p:txBody>
-          <a:bodyPr wrap="square" lIns="0" rIns="0" tIns="0" bIns="0" anchor="t">
-            <a:noAutofit/>
-          </a:bodyPr>
-          <a:lstStyle/>
-          <a:p>
-            <a:pPr algn="l" marL="155448" indent="-155448">
-              <a:lnSpc>
-                <a:spcPct val="108000"/>
-              </a:lnSpc>
               <a:spcAft>
                 <a:spcPts val="600"/>
               </a:spcAft>
@@ -16648,9 +17088,239 @@
                 </a:solidFill>
                 <a:latin typeface="Arial"/>
               </a:rPr>
-              <a:t>Goods-to-person in 2 hubs</a:t>
-            </a:r>
-          </a:p>
+              <a:t>Overtime controls</a:t>
+            </a:r>
+          </a:p>
+          <a:p>
+            <a:pPr algn="l" marL="155448" indent="-155448">
+              <a:lnSpc>
+                <a:spcPct val="108000"/>
+              </a:lnSpc>
+              <a:buClr>
+                <a:srgbClr val="1C2530"/>
+              </a:buClr>
+              <a:buSzPct val="100000"/>
+              <a:buFont typeface="Arial"/>
+              <a:buChar char="•"/>
+            </a:pPr>
+            <a:r>
+              <a:rPr sz="1200" b="0">
+                <a:solidFill>
+                  <a:srgbClr val="1C2530"/>
+                </a:solidFill>
+                <a:latin typeface="Arial"/>
+              </a:rPr>
+              <a:t>Self-funding by Q4 2026</a:t>
+            </a:r>
+          </a:p>
+        </p:txBody>
+      </p:sp>
+      <p:sp>
+        <p:nvSpPr>
+          <p:cNvPr id="12" name="cpe|col_2|fill|11"/>
+          <p:cNvSpPr/>
+          <p:nvPr/>
+        </p:nvSpPr>
+        <p:spPr>
+          <a:xfrm>
+            <a:off x="4298594" y="1481328"/>
+            <a:ext cx="3594506" cy="566928"/>
+          </a:xfrm>
+          <a:prstGeom prst="rect">
+            <a:avLst/>
+          </a:prstGeom>
+          <a:solidFill>
+            <a:srgbClr val="13294B"/>
+          </a:solidFill>
+          <a:ln>
+            <a:noFill/>
+          </a:ln>
+        </p:spPr>
+        <p:txBody>
+          <a:bodyPr rtlCol="0" anchor="ctr" lIns="0" rIns="0" tIns="0" bIns="0"/>
+          <a:lstStyle/>
+          <a:p>
+            <a:pPr algn="ctr"/>
+          </a:p>
+        </p:txBody>
+      </p:sp>
+      <p:sp>
+        <p:nvSpPr>
+          <p:cNvPr id="13" name="cpe|col_2|text|12"/>
+          <p:cNvSpPr txBox="1"/>
+          <p:nvPr/>
+        </p:nvSpPr>
+        <p:spPr>
+          <a:xfrm>
+            <a:off x="4435754" y="1481328"/>
+            <a:ext cx="3320186" cy="566928"/>
+          </a:xfrm>
+          <a:prstGeom prst="rect">
+            <a:avLst/>
+          </a:prstGeom>
+          <a:noFill/>
+        </p:spPr>
+        <p:txBody>
+          <a:bodyPr wrap="square" lIns="0" rIns="0" tIns="0" bIns="0" anchor="ctr">
+            <a:noAutofit/>
+          </a:bodyPr>
+          <a:lstStyle/>
+          <a:p>
+            <a:pPr algn="l">
+              <a:lnSpc>
+                <a:spcPct val="100000"/>
+              </a:lnSpc>
+            </a:pPr>
+            <a:r>
+              <a:rPr sz="1400" b="1">
+                <a:solidFill>
+                  <a:srgbClr val="FFFFFF"/>
+                </a:solidFill>
+                <a:latin typeface="Arial"/>
+              </a:rPr>
+              <a:t>Phase 2 · Automation</a:t>
+            </a:r>
+          </a:p>
+        </p:txBody>
+      </p:sp>
+      <p:sp>
+        <p:nvSpPr>
+          <p:cNvPr id="14" name="cpe|col_2|text|13"/>
+          <p:cNvSpPr txBox="1"/>
+          <p:nvPr/>
+        </p:nvSpPr>
+        <p:spPr>
+          <a:xfrm>
+            <a:off x="4298594" y="2276856"/>
+            <a:ext cx="3594506" cy="502920"/>
+          </a:xfrm>
+          <a:prstGeom prst="rect">
+            <a:avLst/>
+          </a:prstGeom>
+          <a:noFill/>
+        </p:spPr>
+        <p:txBody>
+          <a:bodyPr wrap="square" lIns="0" rIns="0" tIns="0" bIns="0" anchor="t">
+            <a:noAutofit/>
+          </a:bodyPr>
+          <a:lstStyle/>
+          <a:p>
+            <a:pPr algn="l">
+              <a:lnSpc>
+                <a:spcPct val="100000"/>
+              </a:lnSpc>
+            </a:pPr>
+            <a:r>
+              <a:rPr sz="2400" b="1">
+                <a:solidFill>
+                  <a:srgbClr val="13294B"/>
+                </a:solidFill>
+                <a:latin typeface="Arial"/>
+              </a:rPr>
+              <a:t>€13M</a:t>
+            </a:r>
+          </a:p>
+        </p:txBody>
+      </p:sp>
+      <p:sp>
+        <p:nvSpPr>
+          <p:cNvPr id="15" name="cpe|col_2|text|14"/>
+          <p:cNvSpPr txBox="1"/>
+          <p:nvPr/>
+        </p:nvSpPr>
+        <p:spPr>
+          <a:xfrm>
+            <a:off x="4298594" y="2779776"/>
+            <a:ext cx="3594506" cy="274320"/>
+          </a:xfrm>
+          <a:prstGeom prst="rect">
+            <a:avLst/>
+          </a:prstGeom>
+          <a:noFill/>
+        </p:spPr>
+        <p:txBody>
+          <a:bodyPr wrap="square" lIns="0" rIns="0" tIns="0" bIns="0" anchor="t">
+            <a:noAutofit/>
+          </a:bodyPr>
+          <a:lstStyle/>
+          <a:p>
+            <a:pPr algn="l">
+              <a:lnSpc>
+                <a:spcPct val="100000"/>
+              </a:lnSpc>
+            </a:pPr>
+            <a:r>
+              <a:rPr sz="1100" b="0">
+                <a:solidFill>
+                  <a:srgbClr val="5B6776"/>
+                </a:solidFill>
+                <a:latin typeface="Arial"/>
+              </a:rPr>
+              <a:t>run-rate by Q3 2027</a:t>
+            </a:r>
+          </a:p>
+        </p:txBody>
+      </p:sp>
+      <p:sp>
+        <p:nvSpPr>
+          <p:cNvPr id="16" name="cpe|col_2|text|15"/>
+          <p:cNvSpPr txBox="1"/>
+          <p:nvPr/>
+        </p:nvSpPr>
+        <p:spPr>
+          <a:xfrm>
+            <a:off x="4298594" y="3145536"/>
+            <a:ext cx="3594506" cy="214884"/>
+          </a:xfrm>
+          <a:prstGeom prst="rect">
+            <a:avLst/>
+          </a:prstGeom>
+          <a:noFill/>
+        </p:spPr>
+        <p:txBody>
+          <a:bodyPr wrap="square" lIns="0" rIns="0" tIns="0" bIns="0" anchor="t">
+            <a:noAutofit/>
+          </a:bodyPr>
+          <a:lstStyle/>
+          <a:p>
+            <a:pPr algn="l">
+              <a:lnSpc>
+                <a:spcPct val="100000"/>
+              </a:lnSpc>
+            </a:pPr>
+            <a:r>
+              <a:rPr sz="1200" b="1">
+                <a:solidFill>
+                  <a:srgbClr val="1C2530"/>
+                </a:solidFill>
+                <a:latin typeface="Arial"/>
+              </a:rPr>
+              <a:t>Fix the hubs</a:t>
+            </a:r>
+          </a:p>
+        </p:txBody>
+      </p:sp>
+      <p:sp>
+        <p:nvSpPr>
+          <p:cNvPr id="17" name="cpe|col_2|text|16"/>
+          <p:cNvSpPr txBox="1"/>
+          <p:nvPr/>
+        </p:nvSpPr>
+        <p:spPr>
+          <a:xfrm>
+            <a:off x="4298594" y="3461004"/>
+            <a:ext cx="3594506" cy="1943100"/>
+          </a:xfrm>
+          <a:prstGeom prst="rect">
+            <a:avLst/>
+          </a:prstGeom>
+          <a:noFill/>
+        </p:spPr>
+        <p:txBody>
+          <a:bodyPr wrap="square" lIns="0" rIns="0" tIns="0" bIns="0" anchor="t">
+            <a:noAutofit/>
+          </a:bodyPr>
+          <a:lstStyle/>
           <a:p>
             <a:pPr algn="l" marL="155448" indent="-155448">
               <a:lnSpc>
@@ -16673,192 +17343,9 @@
                 </a:solidFill>
                 <a:latin typeface="Arial"/>
               </a:rPr>
-              <a:t>WMS go-live</a:t>
-            </a:r>
-          </a:p>
-          <a:p>
-            <a:pPr algn="l" marL="155448" indent="-155448">
-              <a:lnSpc>
-                <a:spcPct val="108000"/>
-              </a:lnSpc>
-              <a:buClr>
-                <a:srgbClr val="1C2530"/>
-              </a:buClr>
-              <a:buSzPct val="100000"/>
-              <a:buFont typeface="Arial"/>
-              <a:buChar char="•"/>
-            </a:pPr>
-            <a:r>
-              <a:rPr sz="1200" b="0">
-                <a:solidFill>
-                  <a:srgbClr val="1C2530"/>
-                </a:solidFill>
-                <a:latin typeface="Arial"/>
-              </a:rPr>
-              <a:t>Pick accuracy &gt; 99.7%</a:t>
-            </a:r>
-          </a:p>
-        </p:txBody>
-      </p:sp>
-      <p:sp>
-        <p:nvSpPr>
-          <p:cNvPr id="16" name="cpe|col_3|text|15"/>
-          <p:cNvSpPr txBox="1"/>
-          <p:nvPr/>
-        </p:nvSpPr>
-        <p:spPr>
-          <a:xfrm>
-            <a:off x="8094269" y="1481328"/>
-            <a:ext cx="3594506" cy="493776"/>
-          </a:xfrm>
-          <a:prstGeom prst="rect">
-            <a:avLst/>
-          </a:prstGeom>
-          <a:noFill/>
-        </p:spPr>
-        <p:txBody>
-          <a:bodyPr wrap="square" lIns="0" rIns="0" tIns="0" bIns="0" anchor="b">
-            <a:noAutofit/>
-          </a:bodyPr>
-          <a:lstStyle/>
-          <a:p>
-            <a:pPr algn="l">
-              <a:lnSpc>
-                <a:spcPct val="100000"/>
-              </a:lnSpc>
-            </a:pPr>
-            <a:r>
-              <a:rPr sz="1400" b="1">
-                <a:solidFill>
-                  <a:srgbClr val="13294B"/>
-                </a:solidFill>
-                <a:latin typeface="Arial"/>
-              </a:rPr>
-              <a:t>Phase 3 · Network</a:t>
-            </a:r>
-          </a:p>
-        </p:txBody>
-      </p:sp>
-      <p:cxnSp>
-        <p:nvCxnSpPr>
-          <p:cNvPr id="17" name="cpe|col_3|line|16"/>
-          <p:cNvCxnSpPr/>
-          <p:nvPr/>
-        </p:nvCxnSpPr>
-        <p:spPr>
-          <a:xfrm>
-            <a:off x="8094269" y="2048256"/>
-            <a:ext cx="3594506" cy="0"/>
-          </a:xfrm>
-          <a:prstGeom prst="line">
-            <a:avLst/>
-          </a:prstGeom>
-          <a:ln w="19050">
-            <a:solidFill>
-              <a:srgbClr val="13294B"/>
-            </a:solidFill>
-          </a:ln>
-        </p:spPr>
-      </p:cxnSp>
-      <p:sp>
-        <p:nvSpPr>
-          <p:cNvPr id="18" name="cpe|col_3|text|17"/>
-          <p:cNvSpPr txBox="1"/>
-          <p:nvPr/>
-        </p:nvSpPr>
-        <p:spPr>
-          <a:xfrm>
-            <a:off x="8094269" y="2276856"/>
-            <a:ext cx="3594506" cy="502920"/>
-          </a:xfrm>
-          <a:prstGeom prst="rect">
-            <a:avLst/>
-          </a:prstGeom>
-          <a:noFill/>
-        </p:spPr>
-        <p:txBody>
-          <a:bodyPr wrap="square" lIns="0" rIns="0" tIns="0" bIns="0" anchor="t">
-            <a:noAutofit/>
-          </a:bodyPr>
-          <a:lstStyle/>
-          <a:p>
-            <a:pPr algn="l">
-              <a:lnSpc>
-                <a:spcPct val="100000"/>
-              </a:lnSpc>
-            </a:pPr>
-            <a:r>
-              <a:rPr sz="2400" b="1">
-                <a:solidFill>
-                  <a:srgbClr val="13294B"/>
-                </a:solidFill>
-                <a:latin typeface="Arial"/>
-              </a:rPr>
-              <a:t>€17M</a:t>
-            </a:r>
-          </a:p>
-        </p:txBody>
-      </p:sp>
-      <p:sp>
-        <p:nvSpPr>
-          <p:cNvPr id="19" name="cpe|col_3|text|18"/>
-          <p:cNvSpPr txBox="1"/>
-          <p:nvPr/>
-        </p:nvSpPr>
-        <p:spPr>
-          <a:xfrm>
-            <a:off x="8094269" y="2779776"/>
-            <a:ext cx="3594506" cy="274320"/>
-          </a:xfrm>
-          <a:prstGeom prst="rect">
-            <a:avLst/>
-          </a:prstGeom>
-          <a:noFill/>
-        </p:spPr>
-        <p:txBody>
-          <a:bodyPr wrap="square" lIns="0" rIns="0" tIns="0" bIns="0" anchor="t">
-            <a:noAutofit/>
-          </a:bodyPr>
-          <a:lstStyle/>
-          <a:p>
-            <a:pPr algn="l">
-              <a:lnSpc>
-                <a:spcPct val="100000"/>
-              </a:lnSpc>
-            </a:pPr>
-            <a:r>
-              <a:rPr sz="1100" b="0">
-                <a:solidFill>
-                  <a:srgbClr val="5B6776"/>
-                </a:solidFill>
-                <a:latin typeface="Arial"/>
-              </a:rPr>
-              <a:t>run-rate by Q4 2027</a:t>
-            </a:r>
-          </a:p>
-        </p:txBody>
-      </p:sp>
-      <p:sp>
-        <p:nvSpPr>
-          <p:cNvPr id="20" name="cpe|col_3|text|19"/>
-          <p:cNvSpPr txBox="1"/>
-          <p:nvPr/>
-        </p:nvSpPr>
-        <p:spPr>
-          <a:xfrm>
-            <a:off x="8094269" y="3145536"/>
-            <a:ext cx="3594506" cy="3054096"/>
-          </a:xfrm>
-          <a:prstGeom prst="rect">
-            <a:avLst/>
-          </a:prstGeom>
-          <a:noFill/>
-        </p:spPr>
-        <p:txBody>
-          <a:bodyPr wrap="square" lIns="0" rIns="0" tIns="0" bIns="0" anchor="t">
-            <a:noAutofit/>
-          </a:bodyPr>
-          <a:lstStyle/>
+              <a:t>Goods-to-person in 2 hubs</a:t>
+            </a:r>
+          </a:p>
           <a:p>
             <a:pPr algn="l" marL="155448" indent="-155448">
               <a:lnSpc>
@@ -16881,7 +17368,7 @@
                 </a:solidFill>
                 <a:latin typeface="Arial"/>
               </a:rPr>
-              <a:t>Close 5 depots</a:t>
+              <a:t>WMS go-live</a:t>
             </a:r>
           </a:p>
           <a:p>
@@ -16906,7 +17393,7 @@
                 </a:solidFill>
                 <a:latin typeface="Arial"/>
               </a:rPr>
-              <a:t>Two new cross-docks</a:t>
+              <a:t>Pick accuracy &gt; 99.7%</a:t>
             </a:r>
           </a:p>
           <a:p>
@@ -16928,7 +17415,401 @@
                 </a:solidFill>
                 <a:latin typeface="Arial"/>
               </a:rPr>
+              <a:t>Capex €22M, payback 19 months</a:t>
+            </a:r>
+          </a:p>
+        </p:txBody>
+      </p:sp>
+      <p:sp>
+        <p:nvSpPr>
+          <p:cNvPr id="18" name="cpe|col_3|text|17"/>
+          <p:cNvSpPr txBox="1"/>
+          <p:nvPr/>
+        </p:nvSpPr>
+        <p:spPr>
+          <a:xfrm>
+            <a:off x="8094269" y="1481328"/>
+            <a:ext cx="3594506" cy="493776"/>
+          </a:xfrm>
+          <a:prstGeom prst="rect">
+            <a:avLst/>
+          </a:prstGeom>
+          <a:noFill/>
+        </p:spPr>
+        <p:txBody>
+          <a:bodyPr wrap="square" lIns="0" rIns="0" tIns="0" bIns="0" anchor="b">
+            <a:noAutofit/>
+          </a:bodyPr>
+          <a:lstStyle/>
+          <a:p>
+            <a:pPr algn="l">
+              <a:lnSpc>
+                <a:spcPct val="100000"/>
+              </a:lnSpc>
+            </a:pPr>
+            <a:r>
+              <a:rPr sz="1400" b="1">
+                <a:solidFill>
+                  <a:srgbClr val="13294B"/>
+                </a:solidFill>
+                <a:latin typeface="Arial"/>
+              </a:rPr>
+              <a:t>Phase 3 · Network</a:t>
+            </a:r>
+          </a:p>
+        </p:txBody>
+      </p:sp>
+      <p:cxnSp>
+        <p:nvCxnSpPr>
+          <p:cNvPr id="19" name="cpe|col_3|line|18"/>
+          <p:cNvCxnSpPr/>
+          <p:nvPr/>
+        </p:nvCxnSpPr>
+        <p:spPr>
+          <a:xfrm>
+            <a:off x="8094269" y="2048256"/>
+            <a:ext cx="3594506" cy="0"/>
+          </a:xfrm>
+          <a:prstGeom prst="line">
+            <a:avLst/>
+          </a:prstGeom>
+          <a:ln w="19050">
+            <a:solidFill>
+              <a:srgbClr val="13294B"/>
+            </a:solidFill>
+          </a:ln>
+        </p:spPr>
+      </p:cxnSp>
+      <p:sp>
+        <p:nvSpPr>
+          <p:cNvPr id="20" name="cpe|col_3|text|19"/>
+          <p:cNvSpPr txBox="1"/>
+          <p:nvPr/>
+        </p:nvSpPr>
+        <p:spPr>
+          <a:xfrm>
+            <a:off x="8094269" y="2276856"/>
+            <a:ext cx="3594506" cy="502920"/>
+          </a:xfrm>
+          <a:prstGeom prst="rect">
+            <a:avLst/>
+          </a:prstGeom>
+          <a:noFill/>
+        </p:spPr>
+        <p:txBody>
+          <a:bodyPr wrap="square" lIns="0" rIns="0" tIns="0" bIns="0" anchor="t">
+            <a:noAutofit/>
+          </a:bodyPr>
+          <a:lstStyle/>
+          <a:p>
+            <a:pPr algn="l">
+              <a:lnSpc>
+                <a:spcPct val="100000"/>
+              </a:lnSpc>
+            </a:pPr>
+            <a:r>
+              <a:rPr sz="2400" b="1">
+                <a:solidFill>
+                  <a:srgbClr val="13294B"/>
+                </a:solidFill>
+                <a:latin typeface="Arial"/>
+              </a:rPr>
+              <a:t>€17M</a:t>
+            </a:r>
+          </a:p>
+        </p:txBody>
+      </p:sp>
+      <p:sp>
+        <p:nvSpPr>
+          <p:cNvPr id="21" name="cpe|col_3|text|20"/>
+          <p:cNvSpPr txBox="1"/>
+          <p:nvPr/>
+        </p:nvSpPr>
+        <p:spPr>
+          <a:xfrm>
+            <a:off x="8094269" y="2779776"/>
+            <a:ext cx="3594506" cy="274320"/>
+          </a:xfrm>
+          <a:prstGeom prst="rect">
+            <a:avLst/>
+          </a:prstGeom>
+          <a:noFill/>
+        </p:spPr>
+        <p:txBody>
+          <a:bodyPr wrap="square" lIns="0" rIns="0" tIns="0" bIns="0" anchor="t">
+            <a:noAutofit/>
+          </a:bodyPr>
+          <a:lstStyle/>
+          <a:p>
+            <a:pPr algn="l">
+              <a:lnSpc>
+                <a:spcPct val="100000"/>
+              </a:lnSpc>
+            </a:pPr>
+            <a:r>
+              <a:rPr sz="1100" b="0">
+                <a:solidFill>
+                  <a:srgbClr val="5B6776"/>
+                </a:solidFill>
+                <a:latin typeface="Arial"/>
+              </a:rPr>
+              <a:t>run-rate by Q4 2027</a:t>
+            </a:r>
+          </a:p>
+        </p:txBody>
+      </p:sp>
+      <p:sp>
+        <p:nvSpPr>
+          <p:cNvPr id="22" name="cpe|col_3|text|21"/>
+          <p:cNvSpPr txBox="1"/>
+          <p:nvPr/>
+        </p:nvSpPr>
+        <p:spPr>
+          <a:xfrm>
+            <a:off x="8094269" y="3145536"/>
+            <a:ext cx="3594506" cy="214884"/>
+          </a:xfrm>
+          <a:prstGeom prst="rect">
+            <a:avLst/>
+          </a:prstGeom>
+          <a:noFill/>
+        </p:spPr>
+        <p:txBody>
+          <a:bodyPr wrap="square" lIns="0" rIns="0" tIns="0" bIns="0" anchor="t">
+            <a:noAutofit/>
+          </a:bodyPr>
+          <a:lstStyle/>
+          <a:p>
+            <a:pPr algn="l">
+              <a:lnSpc>
+                <a:spcPct val="100000"/>
+              </a:lnSpc>
+            </a:pPr>
+            <a:r>
+              <a:rPr sz="1200" b="1">
+                <a:solidFill>
+                  <a:srgbClr val="1C2530"/>
+                </a:solidFill>
+                <a:latin typeface="Arial"/>
+              </a:rPr>
+              <a:t>Redesign the network</a:t>
+            </a:r>
+          </a:p>
+        </p:txBody>
+      </p:sp>
+      <p:sp>
+        <p:nvSpPr>
+          <p:cNvPr id="23" name="cpe|col_3|text|22"/>
+          <p:cNvSpPr txBox="1"/>
+          <p:nvPr/>
+        </p:nvSpPr>
+        <p:spPr>
+          <a:xfrm>
+            <a:off x="8094269" y="3461004"/>
+            <a:ext cx="3594506" cy="1943100"/>
+          </a:xfrm>
+          <a:prstGeom prst="rect">
+            <a:avLst/>
+          </a:prstGeom>
+          <a:noFill/>
+        </p:spPr>
+        <p:txBody>
+          <a:bodyPr wrap="square" lIns="0" rIns="0" tIns="0" bIns="0" anchor="t">
+            <a:noAutofit/>
+          </a:bodyPr>
+          <a:lstStyle/>
+          <a:p>
+            <a:pPr algn="l" marL="155448" indent="-155448">
+              <a:lnSpc>
+                <a:spcPct val="108000"/>
+              </a:lnSpc>
+              <a:spcAft>
+                <a:spcPts val="600"/>
+              </a:spcAft>
+              <a:buClr>
+                <a:srgbClr val="1C2530"/>
+              </a:buClr>
+              <a:buSzPct val="100000"/>
+              <a:buFont typeface="Arial"/>
+              <a:buChar char="•"/>
+            </a:pPr>
+            <a:r>
+              <a:rPr sz="1200" b="0">
+                <a:solidFill>
+                  <a:srgbClr val="1C2530"/>
+                </a:solidFill>
+                <a:latin typeface="Arial"/>
+              </a:rPr>
+              <a:t>Close 5 depots</a:t>
+            </a:r>
+          </a:p>
+          <a:p>
+            <a:pPr algn="l" marL="155448" indent="-155448">
+              <a:lnSpc>
+                <a:spcPct val="108000"/>
+              </a:lnSpc>
+              <a:spcAft>
+                <a:spcPts val="600"/>
+              </a:spcAft>
+              <a:buClr>
+                <a:srgbClr val="1C2530"/>
+              </a:buClr>
+              <a:buSzPct val="100000"/>
+              <a:buFont typeface="Arial"/>
+              <a:buChar char="•"/>
+            </a:pPr>
+            <a:r>
+              <a:rPr sz="1200" b="0">
+                <a:solidFill>
+                  <a:srgbClr val="1C2530"/>
+                </a:solidFill>
+                <a:latin typeface="Arial"/>
+              </a:rPr>
+              <a:t>Two new cross-docks</a:t>
+            </a:r>
+          </a:p>
+          <a:p>
+            <a:pPr algn="l" marL="155448" indent="-155448">
+              <a:lnSpc>
+                <a:spcPct val="108000"/>
+              </a:lnSpc>
+              <a:spcAft>
+                <a:spcPts val="600"/>
+              </a:spcAft>
+              <a:buClr>
+                <a:srgbClr val="1C2530"/>
+              </a:buClr>
+              <a:buSzPct val="100000"/>
+              <a:buFont typeface="Arial"/>
+              <a:buChar char="•"/>
+            </a:pPr>
+            <a:r>
+              <a:rPr sz="1200" b="0">
+                <a:solidFill>
+                  <a:srgbClr val="1C2530"/>
+                </a:solidFill>
+                <a:latin typeface="Arial"/>
+              </a:rPr>
               <a:t>Dynamic routing</a:t>
+            </a:r>
+          </a:p>
+          <a:p>
+            <a:pPr algn="l" marL="155448" indent="-155448">
+              <a:lnSpc>
+                <a:spcPct val="108000"/>
+              </a:lnSpc>
+              <a:buClr>
+                <a:srgbClr val="1C2530"/>
+              </a:buClr>
+              <a:buSzPct val="100000"/>
+              <a:buFont typeface="Arial"/>
+              <a:buChar char="•"/>
+            </a:pPr>
+            <a:r>
+              <a:rPr sz="1200" b="0">
+                <a:solidFill>
+                  <a:srgbClr val="1C2530"/>
+                </a:solidFill>
+                <a:latin typeface="Arial"/>
+              </a:rPr>
+              <a:t>Needs works-council agreement</a:t>
+            </a:r>
+          </a:p>
+        </p:txBody>
+      </p:sp>
+      <p:sp>
+        <p:nvSpPr>
+          <p:cNvPr id="24" name="cpe|takeaway|fill|23"/>
+          <p:cNvSpPr/>
+          <p:nvPr/>
+        </p:nvSpPr>
+        <p:spPr>
+          <a:xfrm>
+            <a:off x="502920" y="5632704"/>
+            <a:ext cx="11185855" cy="566928"/>
+          </a:xfrm>
+          <a:prstGeom prst="rect">
+            <a:avLst/>
+          </a:prstGeom>
+          <a:solidFill>
+            <a:srgbClr val="EEF2F6"/>
+          </a:solidFill>
+          <a:ln>
+            <a:noFill/>
+          </a:ln>
+        </p:spPr>
+        <p:txBody>
+          <a:bodyPr rtlCol="0" anchor="ctr" lIns="0" rIns="0" tIns="0" bIns="0"/>
+          <a:lstStyle/>
+          <a:p>
+            <a:pPr algn="ctr"/>
+          </a:p>
+        </p:txBody>
+      </p:sp>
+      <p:sp>
+        <p:nvSpPr>
+          <p:cNvPr id="25" name="cpe|takeaway|fill|24"/>
+          <p:cNvSpPr/>
+          <p:nvPr/>
+        </p:nvSpPr>
+        <p:spPr>
+          <a:xfrm>
+            <a:off x="502920" y="5632704"/>
+            <a:ext cx="64008" cy="566928"/>
+          </a:xfrm>
+          <a:prstGeom prst="rect">
+            <a:avLst/>
+          </a:prstGeom>
+          <a:solidFill>
+            <a:srgbClr val="E08A00"/>
+          </a:solidFill>
+          <a:ln>
+            <a:noFill/>
+          </a:ln>
+        </p:spPr>
+        <p:txBody>
+          <a:bodyPr rtlCol="0" anchor="ctr" lIns="0" rIns="0" tIns="0" bIns="0"/>
+          <a:lstStyle/>
+          <a:p>
+            <a:pPr algn="ctr"/>
+          </a:p>
+        </p:txBody>
+      </p:sp>
+      <p:sp>
+        <p:nvSpPr>
+          <p:cNvPr id="26" name="cpe|takeaway|text|25"/>
+          <p:cNvSpPr txBox="1"/>
+          <p:nvPr/>
+        </p:nvSpPr>
+        <p:spPr>
+          <a:xfrm>
+            <a:off x="795528" y="5632704"/>
+            <a:ext cx="10664647" cy="566928"/>
+          </a:xfrm>
+          <a:prstGeom prst="rect">
+            <a:avLst/>
+          </a:prstGeom>
+          <a:noFill/>
+        </p:spPr>
+        <p:txBody>
+          <a:bodyPr wrap="square" lIns="0" rIns="0" tIns="0" bIns="0" anchor="ctr">
+            <a:noAutofit/>
+          </a:bodyPr>
+          <a:lstStyle/>
+          <a:p>
+            <a:pPr algn="l">
+              <a:lnSpc>
+                <a:spcPct val="100000"/>
+              </a:lnSpc>
+            </a:pPr>
+            <a:r>
+              <a:rPr sz="1300" b="1">
+                <a:solidFill>
+                  <a:srgbClr val="13294B"/>
+                </a:solidFill>
+                <a:latin typeface="Arial"/>
+              </a:rPr>
+              <a:t>Phase 1 savings fund phase 2, and phases 1-2 de-risk the network redesign before any depot closes</a:t>
             </a:r>
           </a:p>
         </p:txBody>
@@ -17115,7 +17996,7 @@
         </p:nvCxnSpPr>
         <p:spPr>
           <a:xfrm>
-            <a:off x="502920" y="3651748"/>
+            <a:off x="502920" y="3153308"/>
             <a:ext cx="11185855" cy="0"/>
           </a:xfrm>
           <a:prstGeom prst="line">
@@ -17136,7 +18017,7 @@
         </p:nvSpPr>
         <p:spPr>
           <a:xfrm>
-            <a:off x="1552926" y="3583168"/>
+            <a:off x="1552926" y="3084728"/>
             <a:ext cx="137160" cy="137160"/>
           </a:xfrm>
           <a:prstGeom prst="ellipse">
@@ -17165,7 +18046,7 @@
         </p:nvCxnSpPr>
         <p:spPr>
           <a:xfrm flipV="1">
-            <a:off x="1621506" y="3450580"/>
+            <a:off x="1621506" y="2952140"/>
             <a:ext cx="0" cy="132588"/>
           </a:xfrm>
           <a:prstGeom prst="line">
@@ -17186,7 +18067,7 @@
         </p:nvSpPr>
         <p:spPr>
           <a:xfrm>
-            <a:off x="548640" y="3148828"/>
+            <a:off x="548640" y="2650388"/>
             <a:ext cx="2145731" cy="274320"/>
           </a:xfrm>
           <a:prstGeom prst="rect">
@@ -17226,7 +18107,7 @@
         <p:spPr>
           <a:xfrm>
             <a:off x="548640" y="1481328"/>
-            <a:ext cx="2145731" cy="1667500"/>
+            <a:ext cx="2145731" cy="1169060"/>
           </a:xfrm>
           <a:prstGeom prst="rect">
             <a:avLst/>
@@ -17241,8 +18122,11 @@
           <a:p>
             <a:pPr algn="ctr">
               <a:lnSpc>
-                <a:spcPct val="100000"/>
-              </a:lnSpc>
+                <a:spcPct val="108000"/>
+              </a:lnSpc>
+              <a:spcAft>
+                <a:spcPts val="300"/>
+              </a:spcAft>
             </a:pPr>
             <a:r>
               <a:rPr sz="1100" b="0">
@@ -17252,6 +18136,22 @@
                 <a:latin typeface="Arial"/>
               </a:rPr>
               <a:t>New customer terms live</a:t>
+            </a:r>
+          </a:p>
+          <a:p>
+            <a:pPr algn="ctr">
+              <a:lnSpc>
+                <a:spcPct val="108000"/>
+              </a:lnSpc>
+            </a:pPr>
+            <a:r>
+              <a:rPr sz="1000" b="0">
+                <a:solidFill>
+                  <a:srgbClr val="5B6776"/>
+                </a:solidFill>
+                <a:latin typeface="Arial"/>
+              </a:rPr>
+              <a:t>Owner: Sales director · unlocks €3M of savings in 2026</a:t>
             </a:r>
           </a:p>
         </p:txBody>
@@ -17264,7 +18164,7 @@
         </p:nvSpPr>
         <p:spPr>
           <a:xfrm>
-            <a:off x="3790097" y="3583168"/>
+            <a:off x="3790097" y="3084728"/>
             <a:ext cx="137160" cy="137160"/>
           </a:xfrm>
           <a:prstGeom prst="ellipse">
@@ -17293,7 +18193,7 @@
         </p:nvCxnSpPr>
         <p:spPr>
           <a:xfrm>
-            <a:off x="3858677" y="3720328"/>
+            <a:off x="3858677" y="3221888"/>
             <a:ext cx="0" cy="132588"/>
           </a:xfrm>
           <a:prstGeom prst="line">
@@ -17314,7 +18214,7 @@
         </p:nvSpPr>
         <p:spPr>
           <a:xfrm>
-            <a:off x="2785811" y="3880348"/>
+            <a:off x="2785811" y="3381908"/>
             <a:ext cx="2145731" cy="274320"/>
           </a:xfrm>
           <a:prstGeom prst="rect">
@@ -17353,8 +18253,8 @@
         </p:nvSpPr>
         <p:spPr>
           <a:xfrm>
-            <a:off x="2785811" y="4154668"/>
-            <a:ext cx="2145731" cy="1667500"/>
+            <a:off x="2785811" y="3656228"/>
+            <a:ext cx="2145731" cy="1169060"/>
           </a:xfrm>
           <a:prstGeom prst="rect">
             <a:avLst/>
@@ -17369,8 +18269,11 @@
           <a:p>
             <a:pPr algn="ctr">
               <a:lnSpc>
-                <a:spcPct val="100000"/>
-              </a:lnSpc>
+                <a:spcPct val="108000"/>
+              </a:lnSpc>
+              <a:spcAft>
+                <a:spcPts val="300"/>
+              </a:spcAft>
             </a:pPr>
             <a:r>
               <a:rPr sz="1100" b="0">
@@ -17380,6 +18283,22 @@
                 <a:latin typeface="Arial"/>
               </a:rPr>
               <a:t>Transport tender awarded</a:t>
+            </a:r>
+          </a:p>
+          <a:p>
+            <a:pPr algn="ctr">
+              <a:lnSpc>
+                <a:spcPct val="108000"/>
+              </a:lnSpc>
+            </a:pPr>
+            <a:r>
+              <a:rPr sz="1000" b="0">
+                <a:solidFill>
+                  <a:srgbClr val="5B6776"/>
+                </a:solidFill>
+                <a:latin typeface="Arial"/>
+              </a:rPr>
+              <a:t>Owner: CPO · rates fixed for 2027-28</a:t>
             </a:r>
           </a:p>
         </p:txBody>
@@ -17392,7 +18311,7 @@
         </p:nvSpPr>
         <p:spPr>
           <a:xfrm>
-            <a:off x="6027268" y="3583168"/>
+            <a:off x="6027268" y="3084728"/>
             <a:ext cx="137160" cy="137160"/>
           </a:xfrm>
           <a:prstGeom prst="ellipse">
@@ -17421,7 +18340,7 @@
         </p:nvCxnSpPr>
         <p:spPr>
           <a:xfrm flipV="1">
-            <a:off x="6095848" y="3450580"/>
+            <a:off x="6095848" y="2952140"/>
             <a:ext cx="0" cy="132588"/>
           </a:xfrm>
           <a:prstGeom prst="line">
@@ -17442,7 +18361,7 @@
         </p:nvSpPr>
         <p:spPr>
           <a:xfrm>
-            <a:off x="5022982" y="3148828"/>
+            <a:off x="5022982" y="2650388"/>
             <a:ext cx="2145731" cy="274320"/>
           </a:xfrm>
           <a:prstGeom prst="rect">
@@ -17482,7 +18401,7 @@
         <p:spPr>
           <a:xfrm>
             <a:off x="5022982" y="1481328"/>
-            <a:ext cx="2145731" cy="1667500"/>
+            <a:ext cx="2145731" cy="1169060"/>
           </a:xfrm>
           <a:prstGeom prst="rect">
             <a:avLst/>
@@ -17497,8 +18416,11 @@
           <a:p>
             <a:pPr algn="ctr">
               <a:lnSpc>
-                <a:spcPct val="100000"/>
-              </a:lnSpc>
+                <a:spcPct val="108000"/>
+              </a:lnSpc>
+              <a:spcAft>
+                <a:spcPts val="300"/>
+              </a:spcAft>
             </a:pPr>
             <a:r>
               <a:rPr sz="1100" b="0">
@@ -17508,6 +18430,22 @@
                 <a:latin typeface="Arial"/>
               </a:rPr>
               <a:t>Hub 1 automation commissioned</a:t>
+            </a:r>
+          </a:p>
+          <a:p>
+            <a:pPr algn="ctr">
+              <a:lnSpc>
+                <a:spcPct val="108000"/>
+              </a:lnSpc>
+            </a:pPr>
+            <a:r>
+              <a:rPr sz="1000" b="0">
+                <a:solidFill>
+                  <a:srgbClr val="5B6776"/>
+                </a:solidFill>
+                <a:latin typeface="Arial"/>
+              </a:rPr>
+              <a:t>Owner: Head of hubs · first goods-to-person hub</a:t>
             </a:r>
           </a:p>
         </p:txBody>
@@ -17520,7 +18458,7 @@
         </p:nvSpPr>
         <p:spPr>
           <a:xfrm>
-            <a:off x="8241579" y="3560308"/>
+            <a:off x="8241579" y="3061868"/>
             <a:ext cx="182880" cy="182880"/>
           </a:xfrm>
           <a:prstGeom prst="ellipse">
@@ -17549,7 +18487,7 @@
         </p:nvCxnSpPr>
         <p:spPr>
           <a:xfrm>
-            <a:off x="8333019" y="3743188"/>
+            <a:off x="8333019" y="3244748"/>
             <a:ext cx="0" cy="109728"/>
           </a:xfrm>
           <a:prstGeom prst="line">
@@ -17570,7 +18508,7 @@
         </p:nvSpPr>
         <p:spPr>
           <a:xfrm>
-            <a:off x="7260153" y="3880348"/>
+            <a:off x="7260153" y="3381908"/>
             <a:ext cx="2145731" cy="274320"/>
           </a:xfrm>
           <a:prstGeom prst="rect">
@@ -17609,8 +18547,8 @@
         </p:nvSpPr>
         <p:spPr>
           <a:xfrm>
-            <a:off x="7260153" y="4154668"/>
-            <a:ext cx="2145731" cy="1667500"/>
+            <a:off x="7260153" y="3656228"/>
+            <a:ext cx="2145731" cy="1169060"/>
           </a:xfrm>
           <a:prstGeom prst="rect">
             <a:avLst/>
@@ -17625,17 +18563,36 @@
           <a:p>
             <a:pPr algn="ctr">
               <a:lnSpc>
-                <a:spcPct val="100000"/>
-              </a:lnSpc>
-            </a:pPr>
-            <a:r>
-              <a:rPr sz="1100" b="0">
+                <a:spcPct val="108000"/>
+              </a:lnSpc>
+              <a:spcAft>
+                <a:spcPts val="300"/>
+              </a:spcAft>
+            </a:pPr>
+            <a:r>
+              <a:rPr sz="1100" b="1">
                 <a:solidFill>
                   <a:srgbClr val="1C2530"/>
                 </a:solidFill>
                 <a:latin typeface="Arial"/>
               </a:rPr>
               <a:t>WMS go-live (critical path)</a:t>
+            </a:r>
+          </a:p>
+          <a:p>
+            <a:pPr algn="ctr">
+              <a:lnSpc>
+                <a:spcPct val="108000"/>
+              </a:lnSpc>
+            </a:pPr>
+            <a:r>
+              <a:rPr sz="1000" b="0">
+                <a:solidFill>
+                  <a:srgbClr val="5B6776"/>
+                </a:solidFill>
+                <a:latin typeface="Arial"/>
+              </a:rPr>
+              <a:t>Owner: CIO · gates hub 2 and €13M of savings</a:t>
             </a:r>
           </a:p>
         </p:txBody>
@@ -17648,7 +18605,7 @@
         </p:nvSpPr>
         <p:spPr>
           <a:xfrm>
-            <a:off x="10501610" y="3583168"/>
+            <a:off x="10501610" y="3084728"/>
             <a:ext cx="137160" cy="137160"/>
           </a:xfrm>
           <a:prstGeom prst="ellipse">
@@ -17677,7 +18634,7 @@
         </p:nvCxnSpPr>
         <p:spPr>
           <a:xfrm flipV="1">
-            <a:off x="10570190" y="3450580"/>
+            <a:off x="10570190" y="2952140"/>
             <a:ext cx="0" cy="132588"/>
           </a:xfrm>
           <a:prstGeom prst="line">
@@ -17698,7 +18655,7 @@
         </p:nvSpPr>
         <p:spPr>
           <a:xfrm>
-            <a:off x="9497324" y="3148828"/>
+            <a:off x="9497324" y="2650388"/>
             <a:ext cx="2145731" cy="274320"/>
           </a:xfrm>
           <a:prstGeom prst="rect">
@@ -17738,7 +18695,7 @@
         <p:spPr>
           <a:xfrm>
             <a:off x="9497324" y="1481328"/>
-            <a:ext cx="2145731" cy="1667500"/>
+            <a:ext cx="2145731" cy="1169060"/>
           </a:xfrm>
           <a:prstGeom prst="rect">
             <a:avLst/>
@@ -17753,17 +18710,249 @@
           <a:p>
             <a:pPr algn="ctr">
               <a:lnSpc>
+                <a:spcPct val="108000"/>
+              </a:lnSpc>
+              <a:spcAft>
+                <a:spcPts val="300"/>
+              </a:spcAft>
+            </a:pPr>
+            <a:r>
+              <a:rPr sz="1100" b="0">
+                <a:solidFill>
+                  <a:srgbClr val="1C2530"/>
+                </a:solidFill>
+                <a:latin typeface="Arial"/>
+              </a:rPr>
+              <a:t>Network: 5 depots closed</a:t>
+            </a:r>
+          </a:p>
+          <a:p>
+            <a:pPr algn="ctr">
+              <a:lnSpc>
+                <a:spcPct val="108000"/>
+              </a:lnSpc>
+            </a:pPr>
+            <a:r>
+              <a:rPr sz="1000" b="0">
+                <a:solidFill>
+                  <a:srgbClr val="5B6776"/>
+                </a:solidFill>
+                <a:latin typeface="Arial"/>
+              </a:rPr>
+              <a:t>Owner: Head of logistics · €17M run-rate</a:t>
+            </a:r>
+          </a:p>
+        </p:txBody>
+      </p:sp>
+      <p:sp>
+        <p:nvSpPr>
+          <p:cNvPr id="27" name="cpe|commentary|text|26"/>
+          <p:cNvSpPr txBox="1"/>
+          <p:nvPr/>
+        </p:nvSpPr>
+        <p:spPr>
+          <a:xfrm>
+            <a:off x="502920" y="5317236"/>
+            <a:ext cx="11185855" cy="196596"/>
+          </a:xfrm>
+          <a:prstGeom prst="rect">
+            <a:avLst/>
+          </a:prstGeom>
+          <a:noFill/>
+        </p:spPr>
+        <p:txBody>
+          <a:bodyPr wrap="square" lIns="0" rIns="0" tIns="0" bIns="0" anchor="t">
+            <a:noAutofit/>
+          </a:bodyPr>
+          <a:lstStyle/>
+          <a:p>
+            <a:pPr algn="l">
+              <a:lnSpc>
                 <a:spcPct val="100000"/>
               </a:lnSpc>
             </a:pPr>
             <a:r>
-              <a:rPr sz="1100" b="0">
+              <a:rPr sz="1200" b="1">
+                <a:solidFill>
+                  <a:srgbClr val="13294B"/>
+                </a:solidFill>
+                <a:latin typeface="Arial"/>
+              </a:rPr>
+              <a:t>Why June 2027 matters</a:t>
+            </a:r>
+          </a:p>
+        </p:txBody>
+      </p:sp>
+      <p:cxnSp>
+        <p:nvCxnSpPr>
+          <p:cNvPr id="28" name="cpe|commentary|line|27"/>
+          <p:cNvCxnSpPr/>
+          <p:nvPr/>
+        </p:nvCxnSpPr>
+        <p:spPr>
+          <a:xfrm>
+            <a:off x="502920" y="5568696"/>
+            <a:ext cx="11185855" cy="0"/>
+          </a:xfrm>
+          <a:prstGeom prst="line">
+            <a:avLst/>
+          </a:prstGeom>
+          <a:ln w="9525">
+            <a:solidFill>
+              <a:srgbClr val="B6C0CB"/>
+            </a:solidFill>
+          </a:ln>
+        </p:spPr>
+      </p:cxnSp>
+      <p:sp>
+        <p:nvSpPr>
+          <p:cNvPr id="29" name="cpe|commentary|text|28"/>
+          <p:cNvSpPr txBox="1"/>
+          <p:nvPr/>
+        </p:nvSpPr>
+        <p:spPr>
+          <a:xfrm>
+            <a:off x="502920" y="5705856"/>
+            <a:ext cx="3594506" cy="493776"/>
+          </a:xfrm>
+          <a:prstGeom prst="rect">
+            <a:avLst/>
+          </a:prstGeom>
+          <a:noFill/>
+        </p:spPr>
+        <p:txBody>
+          <a:bodyPr wrap="square" lIns="0" rIns="0" tIns="0" bIns="0" anchor="t">
+            <a:noAutofit/>
+          </a:bodyPr>
+          <a:lstStyle/>
+          <a:p>
+            <a:pPr algn="l">
+              <a:lnSpc>
+                <a:spcPct val="100000"/>
+              </a:lnSpc>
+            </a:pPr>
+            <a:r>
+              <a:rPr sz="1200" b="0">
                 <a:solidFill>
                   <a:srgbClr val="1C2530"/>
                 </a:solidFill>
                 <a:latin typeface="Arial"/>
               </a:rPr>
-              <a:t>Network: 5 depots closed</a:t>
+              <a:t>The </a:t>
+            </a:r>
+            <a:r>
+              <a:rPr sz="1200" b="1">
+                <a:solidFill>
+                  <a:srgbClr val="1C2530"/>
+                </a:solidFill>
+                <a:latin typeface="Arial"/>
+              </a:rPr>
+              <a:t>WMS go-live</a:t>
+            </a:r>
+            <a:r>
+              <a:rPr sz="1200" b="0">
+                <a:solidFill>
+                  <a:srgbClr val="1C2530"/>
+                </a:solidFill>
+                <a:latin typeface="Arial"/>
+              </a:rPr>
+              <a:t> gates hub automation and €13M of savings</a:t>
+            </a:r>
+          </a:p>
+        </p:txBody>
+      </p:sp>
+      <p:sp>
+        <p:nvSpPr>
+          <p:cNvPr id="30" name="cpe|commentary|text|29"/>
+          <p:cNvSpPr txBox="1"/>
+          <p:nvPr/>
+        </p:nvSpPr>
+        <p:spPr>
+          <a:xfrm>
+            <a:off x="4298594" y="5705856"/>
+            <a:ext cx="3594506" cy="493776"/>
+          </a:xfrm>
+          <a:prstGeom prst="rect">
+            <a:avLst/>
+          </a:prstGeom>
+          <a:noFill/>
+        </p:spPr>
+        <p:txBody>
+          <a:bodyPr wrap="square" lIns="0" rIns="0" tIns="0" bIns="0" anchor="t">
+            <a:noAutofit/>
+          </a:bodyPr>
+          <a:lstStyle/>
+          <a:p>
+            <a:pPr algn="l">
+              <a:lnSpc>
+                <a:spcPct val="100000"/>
+              </a:lnSpc>
+            </a:pPr>
+            <a:r>
+              <a:rPr sz="1200" b="0">
+                <a:solidFill>
+                  <a:srgbClr val="1C2530"/>
+                </a:solidFill>
+                <a:latin typeface="Arial"/>
+              </a:rPr>
+              <a:t>A one-quarter slip defers </a:t>
+            </a:r>
+            <a:r>
+              <a:rPr sz="1200" b="1">
+                <a:solidFill>
+                  <a:srgbClr val="1C2530"/>
+                </a:solidFill>
+                <a:latin typeface="Arial"/>
+              </a:rPr>
+              <a:t>€3.5M</a:t>
+            </a:r>
+            <a:r>
+              <a:rPr sz="1200" b="0">
+                <a:solidFill>
+                  <a:srgbClr val="1C2530"/>
+                </a:solidFill>
+                <a:latin typeface="Arial"/>
+              </a:rPr>
+              <a:t> of run-rate savings</a:t>
+            </a:r>
+          </a:p>
+        </p:txBody>
+      </p:sp>
+      <p:sp>
+        <p:nvSpPr>
+          <p:cNvPr id="31" name="cpe|commentary|text|30"/>
+          <p:cNvSpPr txBox="1"/>
+          <p:nvPr/>
+        </p:nvSpPr>
+        <p:spPr>
+          <a:xfrm>
+            <a:off x="8094269" y="5705856"/>
+            <a:ext cx="3594506" cy="493776"/>
+          </a:xfrm>
+          <a:prstGeom prst="rect">
+            <a:avLst/>
+          </a:prstGeom>
+          <a:noFill/>
+        </p:spPr>
+        <p:txBody>
+          <a:bodyPr wrap="square" lIns="0" rIns="0" tIns="0" bIns="0" anchor="t">
+            <a:noAutofit/>
+          </a:bodyPr>
+          <a:lstStyle/>
+          <a:p>
+            <a:pPr algn="l">
+              <a:lnSpc>
+                <a:spcPct val="100000"/>
+              </a:lnSpc>
+            </a:pPr>
+            <a:r>
+              <a:rPr sz="1200" b="0">
+                <a:solidFill>
+                  <a:srgbClr val="1C2530"/>
+                </a:solidFill>
+                <a:latin typeface="Arial"/>
+              </a:rPr>
+              <a:t>Mitigation: parallel data migration and a frozen scope from Q4 2026</a:t>
             </a:r>
           </a:p>
         </p:txBody>
@@ -26120,7 +27309,7 @@
         </p:nvSpPr>
         <p:spPr>
           <a:xfrm>
-            <a:off x="9624421" y="2788234"/>
+            <a:off x="9624421" y="3068069"/>
             <a:ext cx="2064355" cy="237744"/>
           </a:xfrm>
           <a:prstGeom prst="rect">
@@ -26168,7 +27357,7 @@
         </p:nvSpPr>
         <p:spPr>
           <a:xfrm>
-            <a:off x="9624421" y="4250229"/>
+            <a:off x="9624421" y="4347315"/>
             <a:ext cx="2064355" cy="237744"/>
           </a:xfrm>
           <a:prstGeom prst="rect">
@@ -26216,7 +27405,7 @@
         </p:nvSpPr>
         <p:spPr>
           <a:xfrm>
-            <a:off x="968324" y="4067349"/>
+            <a:off x="968324" y="4164435"/>
             <a:ext cx="914400" cy="237744"/>
           </a:xfrm>
           <a:prstGeom prst="rect">
@@ -26247,9 +27436,93 @@
           </a:p>
         </p:txBody>
       </p:sp>
-      <p:sp>
-        <p:nvSpPr>
-          <p:cNvPr id="13" name="cpe|takeaway|fill|12"/>
+      <p:cxnSp>
+        <p:nvCxnSpPr>
+          <p:cNvPr id="13" name="cpe|exhibit|connector|12"/>
+          <p:cNvCxnSpPr/>
+          <p:nvPr/>
+        </p:nvCxnSpPr>
+        <p:spPr>
+          <a:xfrm>
+            <a:off x="1425524" y="2364210"/>
+            <a:ext cx="6485965" cy="0"/>
+          </a:xfrm>
+          <a:prstGeom prst="line">
+            <a:avLst/>
+          </a:prstGeom>
+          <a:ln w="9525">
+            <a:solidFill>
+              <a:srgbClr val="1C2530"/>
+            </a:solidFill>
+            <a:tailEnd type="triangle" w="med" len="med"/>
+          </a:ln>
+        </p:spPr>
+      </p:cxnSp>
+      <p:cxnSp>
+        <p:nvCxnSpPr>
+          <p:cNvPr id="14" name="cpe|exhibit|connector|13"/>
+          <p:cNvCxnSpPr/>
+          <p:nvPr/>
+        </p:nvCxnSpPr>
+        <p:spPr>
+          <a:xfrm>
+            <a:off x="1425524" y="2364210"/>
+            <a:ext cx="0" cy="91440"/>
+          </a:xfrm>
+          <a:prstGeom prst="line">
+            <a:avLst/>
+          </a:prstGeom>
+          <a:ln w="9525">
+            <a:solidFill>
+              <a:srgbClr val="1C2530"/>
+            </a:solidFill>
+          </a:ln>
+        </p:spPr>
+      </p:cxnSp>
+      <p:sp>
+        <p:nvSpPr>
+          <p:cNvPr id="15" name="cpe|exhibit|label|14"/>
+          <p:cNvSpPr txBox="1"/>
+          <p:nvPr/>
+        </p:nvSpPr>
+        <p:spPr>
+          <a:xfrm>
+            <a:off x="4394601" y="2227050"/>
+            <a:ext cx="547811" cy="274320"/>
+          </a:xfrm>
+          <a:prstGeom prst="rect">
+            <a:avLst/>
+          </a:prstGeom>
+          <a:solidFill>
+            <a:srgbClr val="FFFFFF"/>
+          </a:solidFill>
+        </p:spPr>
+        <p:txBody>
+          <a:bodyPr wrap="square" lIns="0" rIns="0" tIns="0" bIns="0" anchor="ctr">
+            <a:noAutofit/>
+          </a:bodyPr>
+          <a:lstStyle/>
+          <a:p>
+            <a:pPr algn="ctr">
+              <a:lnSpc>
+                <a:spcPct val="100000"/>
+              </a:lnSpc>
+            </a:pPr>
+            <a:r>
+              <a:rPr sz="1000" b="1">
+                <a:solidFill>
+                  <a:srgbClr val="1C2530"/>
+                </a:solidFill>
+                <a:latin typeface="Arial"/>
+              </a:rPr>
+              <a:t>+21%</a:t>
+            </a:r>
+          </a:p>
+        </p:txBody>
+      </p:sp>
+      <p:sp>
+        <p:nvSpPr>
+          <p:cNvPr id="16" name="cpe|takeaway|fill|15"/>
           <p:cNvSpPr/>
           <p:nvPr/>
         </p:nvSpPr>
@@ -26278,7 +27551,7 @@
       </p:sp>
       <p:sp>
         <p:nvSpPr>
-          <p:cNvPr id="14" name="cpe|takeaway|fill|13"/>
+          <p:cNvPr id="17" name="cpe|takeaway|fill|16"/>
           <p:cNvSpPr/>
           <p:nvPr/>
         </p:nvSpPr>
@@ -26307,7 +27580,7 @@
       </p:sp>
       <p:sp>
         <p:nvSpPr>
-          <p:cNvPr id="15" name="cpe|takeaway|text|14"/>
+          <p:cNvPr id="18" name="cpe|takeaway|text|17"/>
           <p:cNvSpPr txBox="1"/>
           <p:nvPr/>
         </p:nvSpPr>

--- a/examples/gallery/output/deck.pptx
+++ b/examples/gallery/output/deck.pptx
@@ -144,10 +144,10 @@
           <c:layoutTarget val="inner"/>
           <c:xMode val="edge"/>
           <c:yMode val="edge"/>
-          <c:x val="0.08072"/>
-          <c:y val="0.01255"/>
-          <c:w val="0.85928"/>
-          <c:h val="0.96745"/>
+          <c:x val="0.12218"/>
+          <c:y val="0.01064"/>
+          <c:w val="0.81782"/>
+          <c:h val="0.96936"/>
         </c:manualLayout>
       </c:layout>
       <c:barChart>
@@ -1249,7 +1249,7 @@
           <c:x val="0.0"/>
           <c:y val="0.02"/>
           <c:w val="1.0"/>
-          <c:h val="0.91989"/>
+          <c:h val="0.90911"/>
         </c:manualLayout>
       </c:layout>
       <c:barChart>
@@ -7969,7 +7969,7 @@
               <a:buChar char="•"/>
             </a:pPr>
             <a:r>
-              <a:rPr sz="1400" b="0">
+              <a:rPr sz="1200" b="0">
                 <a:solidFill>
                   <a:srgbClr val="1C2530"/>
                 </a:solidFill>
@@ -7978,7 +7978,7 @@
               <a:t>Below </a:t>
             </a:r>
             <a:r>
-              <a:rPr sz="1400" b="1">
+              <a:rPr sz="1200" b="1">
                 <a:solidFill>
                   <a:srgbClr val="1C2530"/>
                 </a:solidFill>
@@ -7987,7 +7987,7 @@
               <a:t>400 drops a day</a:t>
             </a:r>
             <a:r>
-              <a:rPr sz="1400" b="0">
+              <a:rPr sz="1200" b="0">
                 <a:solidFill>
                   <a:srgbClr val="1C2530"/>
                 </a:solidFill>
@@ -8009,7 +8009,7 @@
               <a:buChar char="•"/>
             </a:pPr>
             <a:r>
-              <a:rPr sz="1400" b="0">
+              <a:rPr sz="1200" b="0">
                 <a:solidFill>
                   <a:srgbClr val="1C2530"/>
                 </a:solidFill>
@@ -13275,7 +13275,7 @@
               </a:lnSpc>
             </a:pPr>
             <a:r>
-              <a:rPr sz="1400" b="0">
+              <a:rPr sz="1550" b="0">
                 <a:solidFill>
                   <a:srgbClr val="FFFFFF"/>
                 </a:solidFill>
@@ -13343,7 +13343,7 @@
               </a:lnSpc>
             </a:pPr>
             <a:r>
-              <a:rPr sz="1400" b="0">
+              <a:rPr sz="1550" b="0">
                 <a:solidFill>
                   <a:srgbClr val="FFFFFF"/>
                 </a:solidFill>
@@ -13411,7 +13411,7 @@
               </a:lnSpc>
             </a:pPr>
             <a:r>
-              <a:rPr sz="1400" b="0">
+              <a:rPr sz="1550" b="0">
                 <a:solidFill>
                   <a:srgbClr val="FFFFFF"/>
                 </a:solidFill>
@@ -13479,7 +13479,7 @@
               </a:lnSpc>
             </a:pPr>
             <a:r>
-              <a:rPr sz="1400" b="0">
+              <a:rPr sz="1550" b="0">
                 <a:solidFill>
                   <a:srgbClr val="FFFFFF"/>
                 </a:solidFill>
@@ -13547,7 +13547,7 @@
               </a:lnSpc>
             </a:pPr>
             <a:r>
-              <a:rPr sz="1400" b="0">
+              <a:rPr sz="1550" b="0">
                 <a:solidFill>
                   <a:srgbClr val="FFFFFF"/>
                 </a:solidFill>
@@ -13586,7 +13586,7 @@
               </a:lnSpc>
             </a:pPr>
             <a:r>
-              <a:rPr sz="1400" b="1">
+              <a:rPr sz="1550" b="1">
                 <a:solidFill>
                   <a:srgbClr val="1C2530"/>
                 </a:solidFill>
@@ -13646,7 +13646,7 @@
               </a:lnSpc>
             </a:pPr>
             <a:r>
-              <a:rPr sz="1300" b="0">
+              <a:rPr sz="1450" b="0">
                 <a:solidFill>
                   <a:srgbClr val="1C2530"/>
                 </a:solidFill>
@@ -13685,7 +13685,7 @@
               </a:lnSpc>
             </a:pPr>
             <a:r>
-              <a:rPr sz="1300" b="0">
+              <a:rPr sz="1450" b="0">
                 <a:solidFill>
                   <a:srgbClr val="1C2530"/>
                 </a:solidFill>
@@ -13724,7 +13724,7 @@
               </a:lnSpc>
             </a:pPr>
             <a:r>
-              <a:rPr sz="1300" b="0">
+              <a:rPr sz="1450" b="0">
                 <a:solidFill>
                   <a:srgbClr val="1C2530"/>
                 </a:solidFill>
@@ -13763,7 +13763,7 @@
               </a:lnSpc>
             </a:pPr>
             <a:r>
-              <a:rPr sz="1300" b="0">
+              <a:rPr sz="1450" b="0">
                 <a:solidFill>
                   <a:srgbClr val="1C2530"/>
                 </a:solidFill>
@@ -13802,7 +13802,7 @@
               </a:lnSpc>
             </a:pPr>
             <a:r>
-              <a:rPr sz="1300" b="0">
+              <a:rPr sz="1450" b="0">
                 <a:solidFill>
                   <a:srgbClr val="1C2530"/>
                 </a:solidFill>
@@ -13841,7 +13841,7 @@
               </a:lnSpc>
             </a:pPr>
             <a:r>
-              <a:rPr sz="1400" b="1">
+              <a:rPr sz="1550" b="1">
                 <a:solidFill>
                   <a:srgbClr val="1C2530"/>
                 </a:solidFill>
@@ -13901,7 +13901,7 @@
               </a:lnSpc>
             </a:pPr>
             <a:r>
-              <a:rPr sz="1300" b="0">
+              <a:rPr sz="1450" b="0">
                 <a:solidFill>
                   <a:srgbClr val="1C2530"/>
                 </a:solidFill>
@@ -13969,7 +13969,7 @@
               </a:lnSpc>
             </a:pPr>
             <a:r>
-              <a:rPr sz="1300" b="0">
+              <a:rPr sz="1450" b="0">
                 <a:solidFill>
                   <a:srgbClr val="1C2530"/>
                 </a:solidFill>
@@ -14037,7 +14037,7 @@
               </a:lnSpc>
             </a:pPr>
             <a:r>
-              <a:rPr sz="1300" b="0">
+              <a:rPr sz="1450" b="0">
                 <a:solidFill>
                   <a:srgbClr val="1C2530"/>
                 </a:solidFill>
@@ -14076,7 +14076,7 @@
               </a:lnSpc>
             </a:pPr>
             <a:r>
-              <a:rPr sz="1300" b="0">
+              <a:rPr sz="1450" b="0">
                 <a:solidFill>
                   <a:srgbClr val="1C2530"/>
                 </a:solidFill>
@@ -14115,7 +14115,7 @@
               </a:lnSpc>
             </a:pPr>
             <a:r>
-              <a:rPr sz="1300" b="0">
+              <a:rPr sz="1450" b="0">
                 <a:solidFill>
                   <a:srgbClr val="1C2530"/>
                 </a:solidFill>
@@ -14154,7 +14154,7 @@
               </a:lnSpc>
             </a:pPr>
             <a:r>
-              <a:rPr sz="1400" b="1">
+              <a:rPr sz="1550" b="1">
                 <a:solidFill>
                   <a:srgbClr val="1C2530"/>
                 </a:solidFill>
@@ -14214,7 +14214,7 @@
               </a:lnSpc>
             </a:pPr>
             <a:r>
-              <a:rPr sz="1300" b="0">
+              <a:rPr sz="1450" b="0">
                 <a:solidFill>
                   <a:srgbClr val="1C2530"/>
                 </a:solidFill>
@@ -14253,7 +14253,7 @@
               </a:lnSpc>
             </a:pPr>
             <a:r>
-              <a:rPr sz="1300" b="0">
+              <a:rPr sz="1450" b="0">
                 <a:solidFill>
                   <a:srgbClr val="1C2530"/>
                 </a:solidFill>
@@ -14292,7 +14292,7 @@
               </a:lnSpc>
             </a:pPr>
             <a:r>
-              <a:rPr sz="1300" b="0">
+              <a:rPr sz="1450" b="0">
                 <a:solidFill>
                   <a:srgbClr val="1C2530"/>
                 </a:solidFill>
@@ -14331,7 +14331,7 @@
               </a:lnSpc>
             </a:pPr>
             <a:r>
-              <a:rPr sz="1300" b="0">
+              <a:rPr sz="1450" b="0">
                 <a:solidFill>
                   <a:srgbClr val="1C2530"/>
                 </a:solidFill>
@@ -14370,7 +14370,7 @@
               </a:lnSpc>
             </a:pPr>
             <a:r>
-              <a:rPr sz="1300" b="0">
+              <a:rPr sz="1450" b="0">
                 <a:solidFill>
                   <a:srgbClr val="1C2530"/>
                 </a:solidFill>
@@ -22311,7 +22311,7 @@
         <p:spPr>
           <a:xfrm>
             <a:off x="502920" y="1481328"/>
-            <a:ext cx="7390181" cy="274320"/>
+            <a:ext cx="11185855" cy="274320"/>
           </a:xfrm>
           <a:prstGeom prst="rect">
             <a:avLst/>
@@ -22360,7 +22360,7 @@
         </p:nvGraphicFramePr>
         <p:xfrm>
           <a:off x="502920" y="1901952"/>
-          <a:ext cx="7390181" cy="4297680"/>
+          <a:ext cx="11185855" cy="3643884"/>
         </p:xfrm>
         <a:graphic>
           <a:graphicData uri="http://schemas.openxmlformats.org/drawingml/2006/chart">
@@ -22376,8 +22376,8 @@
         </p:nvSpPr>
         <p:spPr>
           <a:xfrm>
-            <a:off x="502920" y="4870814"/>
-            <a:ext cx="1231697" cy="237744"/>
+            <a:off x="502920" y="4347535"/>
+            <a:ext cx="1864309" cy="237744"/>
           </a:xfrm>
           <a:prstGeom prst="rect">
             <a:avLst/>
@@ -22415,8 +22415,8 @@
         </p:nvSpPr>
         <p:spPr>
           <a:xfrm>
-            <a:off x="1734617" y="3919068"/>
-            <a:ext cx="1231697" cy="237744"/>
+            <a:off x="2367229" y="3550036"/>
+            <a:ext cx="1864309" cy="237744"/>
           </a:xfrm>
           <a:prstGeom prst="rect">
             <a:avLst/>
@@ -22454,8 +22454,8 @@
         </p:nvSpPr>
         <p:spPr>
           <a:xfrm>
-            <a:off x="2966314" y="3919068"/>
-            <a:ext cx="1231697" cy="237744"/>
+            <a:off x="4231538" y="3550036"/>
+            <a:ext cx="1864309" cy="237744"/>
           </a:xfrm>
           <a:prstGeom prst="rect">
             <a:avLst/>
@@ -22493,8 +22493,8 @@
         </p:nvSpPr>
         <p:spPr>
           <a:xfrm>
-            <a:off x="4198010" y="2674476"/>
-            <a:ext cx="1231697" cy="237744"/>
+            <a:off x="6095848" y="2507153"/>
+            <a:ext cx="1864309" cy="237744"/>
           </a:xfrm>
           <a:prstGeom prst="rect">
             <a:avLst/>
@@ -22532,8 +22532,8 @@
         </p:nvSpPr>
         <p:spPr>
           <a:xfrm>
-            <a:off x="5429707" y="2161997"/>
-            <a:ext cx="1231697" cy="237744"/>
+            <a:off x="7960157" y="2077730"/>
+            <a:ext cx="1864309" cy="237744"/>
           </a:xfrm>
           <a:prstGeom prst="rect">
             <a:avLst/>
@@ -22571,8 +22571,8 @@
         </p:nvSpPr>
         <p:spPr>
           <a:xfrm>
-            <a:off x="6661404" y="2161997"/>
-            <a:ext cx="1231697" cy="237744"/>
+            <a:off x="9824466" y="2077730"/>
+            <a:ext cx="1864309" cy="237744"/>
           </a:xfrm>
           <a:prstGeom prst="rect">
             <a:avLst/>
@@ -22610,8 +22610,8 @@
         </p:nvCxnSpPr>
         <p:spPr>
           <a:xfrm>
-            <a:off x="1543491" y="5135990"/>
-            <a:ext cx="382251" cy="0"/>
+            <a:off x="2077940" y="4612711"/>
+            <a:ext cx="578579" cy="0"/>
           </a:xfrm>
           <a:prstGeom prst="line">
             <a:avLst/>
@@ -22631,8 +22631,8 @@
         </p:nvCxnSpPr>
         <p:spPr>
           <a:xfrm>
-            <a:off x="2775188" y="4184244"/>
-            <a:ext cx="382251" cy="0"/>
+            <a:off x="3942249" y="3815212"/>
+            <a:ext cx="578579" cy="0"/>
           </a:xfrm>
           <a:prstGeom prst="line">
             <a:avLst/>
@@ -22652,8 +22652,8 @@
         </p:nvCxnSpPr>
         <p:spPr>
           <a:xfrm>
-            <a:off x="4006885" y="4184244"/>
-            <a:ext cx="382251" cy="0"/>
+            <a:off x="5806558" y="3815212"/>
+            <a:ext cx="578579" cy="0"/>
           </a:xfrm>
           <a:prstGeom prst="line">
             <a:avLst/>
@@ -22673,8 +22673,8 @@
         </p:nvCxnSpPr>
         <p:spPr>
           <a:xfrm>
-            <a:off x="5238582" y="2939652"/>
-            <a:ext cx="382251" cy="0"/>
+            <a:off x="7670867" y="2772329"/>
+            <a:ext cx="578579" cy="0"/>
           </a:xfrm>
           <a:prstGeom prst="line">
             <a:avLst/>
@@ -22694,8 +22694,8 @@
         </p:nvCxnSpPr>
         <p:spPr>
           <a:xfrm>
-            <a:off x="6470279" y="2427173"/>
-            <a:ext cx="382250" cy="0"/>
+            <a:off x="9535177" y="2342906"/>
+            <a:ext cx="578578" cy="0"/>
           </a:xfrm>
           <a:prstGeom prst="line">
             <a:avLst/>
@@ -22715,8 +22715,8 @@
         </p:nvCxnSpPr>
         <p:spPr>
           <a:xfrm>
-            <a:off x="8094269" y="1481328"/>
-            <a:ext cx="0" cy="4718304"/>
+            <a:off x="502920" y="5747004"/>
+            <a:ext cx="11185855" cy="0"/>
           </a:xfrm>
           <a:prstGeom prst="line">
             <a:avLst/>
@@ -22736,8 +22736,8 @@
         </p:nvSpPr>
         <p:spPr>
           <a:xfrm>
-            <a:off x="8322869" y="1481328"/>
-            <a:ext cx="3365906" cy="4718304"/>
+            <a:off x="502920" y="5884164"/>
+            <a:ext cx="5492344" cy="315468"/>
           </a:xfrm>
           <a:prstGeom prst="rect">
             <a:avLst/>
@@ -22750,19 +22750,10 @@
           </a:bodyPr>
           <a:lstStyle/>
           <a:p>
-            <a:pPr algn="l" marL="155448" indent="-155448">
-              <a:lnSpc>
-                <a:spcPct val="108000"/>
-              </a:lnSpc>
-              <a:spcAft>
-                <a:spcPts val="800"/>
-              </a:spcAft>
-              <a:buClr>
-                <a:srgbClr val="1C2530"/>
-              </a:buClr>
-              <a:buSzPct val="100000"/>
-              <a:buFont typeface="Arial"/>
-              <a:buChar char="•"/>
+            <a:pPr algn="l">
+              <a:lnSpc>
+                <a:spcPct val="100000"/>
+              </a:lnSpc>
             </a:pPr>
             <a:r>
               <a:rPr sz="1200" b="0">
@@ -22792,17 +22783,34 @@
               <a:t> of the target</a:t>
             </a:r>
           </a:p>
-          <a:p>
-            <a:pPr algn="l" marL="155448" indent="-155448">
-              <a:lnSpc>
-                <a:spcPct val="108000"/>
-              </a:lnSpc>
-              <a:buClr>
-                <a:srgbClr val="1C2530"/>
-              </a:buClr>
-              <a:buSzPct val="100000"/>
-              <a:buFont typeface="Arial"/>
-              <a:buChar char="•"/>
+        </p:txBody>
+      </p:sp>
+      <p:sp>
+        <p:nvSpPr>
+          <p:cNvPr id="21" name="cpe|commentary|text|20"/>
+          <p:cNvSpPr txBox="1"/>
+          <p:nvPr/>
+        </p:nvSpPr>
+        <p:spPr>
+          <a:xfrm>
+            <a:off x="6196432" y="5884164"/>
+            <a:ext cx="5492344" cy="315468"/>
+          </a:xfrm>
+          <a:prstGeom prst="rect">
+            <a:avLst/>
+          </a:prstGeom>
+          <a:noFill/>
+        </p:spPr>
+        <p:txBody>
+          <a:bodyPr wrap="square" lIns="0" rIns="0" tIns="0" bIns="0" anchor="t">
+            <a:noAutofit/>
+          </a:bodyPr>
+          <a:lstStyle/>
+          <a:p>
+            <a:pPr algn="l">
+              <a:lnSpc>
+                <a:spcPct val="100000"/>
+              </a:lnSpc>
             </a:pPr>
             <a:r>
               <a:rPr sz="1200" b="0">
@@ -25124,7 +25132,7 @@
         <p:spPr>
           <a:xfrm>
             <a:off x="502920" y="1481328"/>
-            <a:ext cx="11185855" cy="274320"/>
+            <a:ext cx="7390181" cy="274320"/>
           </a:xfrm>
           <a:prstGeom prst="rect">
             <a:avLst/>
@@ -25173,7 +25181,7 @@
         </p:nvGraphicFramePr>
         <p:xfrm>
           <a:off x="502920" y="1901952"/>
-          <a:ext cx="11185855" cy="3643884"/>
+          <a:ext cx="7390181" cy="4297680"/>
         </p:xfrm>
         <a:graphic>
           <a:graphicData uri="http://schemas.openxmlformats.org/drawingml/2006/chart">
@@ -25189,8 +25197,8 @@
         </p:nvCxnSpPr>
         <p:spPr>
           <a:xfrm>
-            <a:off x="8271397" y="1947672"/>
-            <a:ext cx="0" cy="3525286"/>
+            <a:off x="5722873" y="1947672"/>
+            <a:ext cx="0" cy="4166006"/>
           </a:xfrm>
           <a:prstGeom prst="line">
             <a:avLst/>
@@ -25211,7 +25219,7 @@
         </p:nvSpPr>
         <p:spPr>
           <a:xfrm>
-            <a:off x="8317117" y="1673352"/>
+            <a:off x="5768593" y="1673352"/>
             <a:ext cx="2011680" cy="237744"/>
           </a:xfrm>
           <a:prstGeom prst="rect">
@@ -25250,8 +25258,8 @@
         </p:nvCxnSpPr>
         <p:spPr>
           <a:xfrm>
-            <a:off x="502920" y="5747004"/>
-            <a:ext cx="11185855" cy="0"/>
+            <a:off x="8094269" y="1481328"/>
+            <a:ext cx="0" cy="4718304"/>
           </a:xfrm>
           <a:prstGeom prst="line">
             <a:avLst/>
@@ -25271,8 +25279,8 @@
         </p:nvSpPr>
         <p:spPr>
           <a:xfrm>
-            <a:off x="502920" y="5884164"/>
-            <a:ext cx="5492344" cy="315468"/>
+            <a:off x="8322869" y="1481328"/>
+            <a:ext cx="3365906" cy="4718304"/>
           </a:xfrm>
           <a:prstGeom prst="rect">
             <a:avLst/>
@@ -25285,10 +25293,19 @@
           </a:bodyPr>
           <a:lstStyle/>
           <a:p>
-            <a:pPr algn="l">
-              <a:lnSpc>
-                <a:spcPct val="100000"/>
-              </a:lnSpc>
+            <a:pPr algn="l" marL="155448" indent="-155448">
+              <a:lnSpc>
+                <a:spcPct val="108000"/>
+              </a:lnSpc>
+              <a:spcAft>
+                <a:spcPts val="800"/>
+              </a:spcAft>
+              <a:buClr>
+                <a:srgbClr val="1C2530"/>
+              </a:buClr>
+              <a:buSzPct val="100000"/>
+              <a:buFont typeface="Arial"/>
+              <a:buChar char="•"/>
             </a:pPr>
             <a:r>
               <a:rPr sz="1200" b="0">
@@ -25318,34 +25335,17 @@
               <a:t> above the median and 9 above the next worst peer</a:t>
             </a:r>
           </a:p>
-        </p:txBody>
-      </p:sp>
-      <p:sp>
-        <p:nvSpPr>
-          <p:cNvPr id="12" name="cpe|commentary|text|11"/>
-          <p:cNvSpPr txBox="1"/>
-          <p:nvPr/>
-        </p:nvSpPr>
-        <p:spPr>
-          <a:xfrm>
-            <a:off x="6196432" y="5884164"/>
-            <a:ext cx="5492344" cy="315468"/>
-          </a:xfrm>
-          <a:prstGeom prst="rect">
-            <a:avLst/>
-          </a:prstGeom>
-          <a:noFill/>
-        </p:spPr>
-        <p:txBody>
-          <a:bodyPr wrap="square" lIns="0" rIns="0" tIns="0" bIns="0" anchor="t">
-            <a:noAutofit/>
-          </a:bodyPr>
-          <a:lstStyle/>
-          <a:p>
-            <a:pPr algn="l">
-              <a:lnSpc>
-                <a:spcPct val="100000"/>
-              </a:lnSpc>
+          <a:p>
+            <a:pPr algn="l" marL="155448" indent="-155448">
+              <a:lnSpc>
+                <a:spcPct val="108000"/>
+              </a:lnSpc>
+              <a:buClr>
+                <a:srgbClr val="1C2530"/>
+              </a:buClr>
+              <a:buSzPct val="100000"/>
+              <a:buFont typeface="Arial"/>
+              <a:buChar char="•"/>
             </a:pPr>
             <a:r>
               <a:rPr sz="1200" b="0">
@@ -25533,15 +25533,1341 @@
           </a:p>
         </p:txBody>
       </p:sp>
+      <p:sp>
+        <p:nvSpPr>
+          <p:cNvPr id="6" name="cpe|exhibit|fill|5"/>
+          <p:cNvSpPr/>
+          <p:nvPr/>
+        </p:nvSpPr>
+        <p:spPr>
+          <a:xfrm>
+            <a:off x="502920" y="3533790"/>
+            <a:ext cx="2189074" cy="613380"/>
+          </a:xfrm>
+          <a:prstGeom prst="rect">
+            <a:avLst/>
+          </a:prstGeom>
+          <a:solidFill>
+            <a:srgbClr val="13294B"/>
+          </a:solidFill>
+          <a:ln>
+            <a:noFill/>
+          </a:ln>
+        </p:spPr>
+        <p:txBody>
+          <a:bodyPr rtlCol="0" anchor="ctr" lIns="0" rIns="0" tIns="0" bIns="0"/>
+          <a:lstStyle/>
+          <a:p>
+            <a:pPr algn="ctr"/>
+          </a:p>
+        </p:txBody>
+      </p:sp>
+      <p:sp>
+        <p:nvSpPr>
+          <p:cNvPr id="7" name="cpe|exhibit|text|6"/>
+          <p:cNvSpPr txBox="1"/>
+          <p:nvPr/>
+        </p:nvSpPr>
+        <p:spPr>
+          <a:xfrm>
+            <a:off x="576072" y="3552078"/>
+            <a:ext cx="2042770" cy="576804"/>
+          </a:xfrm>
+          <a:prstGeom prst="rect">
+            <a:avLst/>
+          </a:prstGeom>
+          <a:noFill/>
+        </p:spPr>
+        <p:txBody>
+          <a:bodyPr wrap="square" lIns="0" rIns="0" tIns="0" bIns="0" anchor="ctr">
+            <a:noAutofit/>
+          </a:bodyPr>
+          <a:lstStyle/>
+          <a:p>
+            <a:pPr algn="l">
+              <a:lnSpc>
+                <a:spcPct val="100000"/>
+              </a:lnSpc>
+            </a:pPr>
+            <a:r>
+              <a:rPr sz="1200" b="0">
+                <a:solidFill>
+                  <a:srgbClr val="FFFFFF"/>
+                </a:solidFill>
+                <a:latin typeface="Arial"/>
+              </a:rPr>
+              <a:t>Gap to peer median
+</a:t>
+            </a:r>
+            <a:r>
+              <a:rPr sz="1200" b="1">
+                <a:solidFill>
+                  <a:srgbClr val="FFFFFF"/>
+                </a:solidFill>
+                <a:latin typeface="Arial"/>
+              </a:rPr>
+              <a:t>€44M</a:t>
+            </a:r>
+          </a:p>
+        </p:txBody>
+      </p:sp>
       <p:cxnSp>
         <p:nvCxnSpPr>
-          <p:cNvPr id="6" name="cpe|commentary|line|5"/>
+          <p:cNvPr id="8" name="cpe|exhibit|connector|7"/>
           <p:cNvCxnSpPr/>
           <p:nvPr/>
         </p:nvCxnSpPr>
         <p:spPr>
           <a:xfrm>
-            <a:off x="4097426" y="1481328"/>
+            <a:off x="2691994" y="3840480"/>
+            <a:ext cx="205740" cy="0"/>
+          </a:xfrm>
+          <a:prstGeom prst="line">
+            <a:avLst/>
+          </a:prstGeom>
+          <a:ln w="9525">
+            <a:solidFill>
+              <a:srgbClr val="8A95A1"/>
+            </a:solidFill>
+          </a:ln>
+        </p:spPr>
+      </p:cxnSp>
+      <p:cxnSp>
+        <p:nvCxnSpPr>
+          <p:cNvPr id="9" name="cpe|exhibit|connector|8"/>
+          <p:cNvCxnSpPr/>
+          <p:nvPr/>
+        </p:nvCxnSpPr>
+        <p:spPr>
+          <a:xfrm>
+            <a:off x="2897734" y="2267712"/>
+            <a:ext cx="0" cy="1572768"/>
+          </a:xfrm>
+          <a:prstGeom prst="line">
+            <a:avLst/>
+          </a:prstGeom>
+          <a:ln w="9525">
+            <a:solidFill>
+              <a:srgbClr val="8A95A1"/>
+            </a:solidFill>
+          </a:ln>
+        </p:spPr>
+      </p:cxnSp>
+      <p:cxnSp>
+        <p:nvCxnSpPr>
+          <p:cNvPr id="10" name="cpe|exhibit|connector|9"/>
+          <p:cNvCxnSpPr/>
+          <p:nvPr/>
+        </p:nvCxnSpPr>
+        <p:spPr>
+          <a:xfrm>
+            <a:off x="2897734" y="2267712"/>
+            <a:ext cx="205740" cy="0"/>
+          </a:xfrm>
+          <a:prstGeom prst="line">
+            <a:avLst/>
+          </a:prstGeom>
+          <a:ln w="9525">
+            <a:solidFill>
+              <a:srgbClr val="8A95A1"/>
+            </a:solidFill>
+          </a:ln>
+        </p:spPr>
+      </p:cxnSp>
+      <p:sp>
+        <p:nvSpPr>
+          <p:cNvPr id="11" name="cpe|exhibit|fill|10"/>
+          <p:cNvSpPr/>
+          <p:nvPr/>
+        </p:nvSpPr>
+        <p:spPr>
+          <a:xfrm>
+            <a:off x="3103474" y="1961022"/>
+            <a:ext cx="2189074" cy="613380"/>
+          </a:xfrm>
+          <a:prstGeom prst="rect">
+            <a:avLst/>
+          </a:prstGeom>
+          <a:solidFill>
+            <a:srgbClr val="E08A00"/>
+          </a:solidFill>
+          <a:ln>
+            <a:noFill/>
+          </a:ln>
+        </p:spPr>
+        <p:txBody>
+          <a:bodyPr rtlCol="0" anchor="ctr" lIns="0" rIns="0" tIns="0" bIns="0"/>
+          <a:lstStyle/>
+          <a:p>
+            <a:pPr algn="ctr"/>
+          </a:p>
+        </p:txBody>
+      </p:sp>
+      <p:sp>
+        <p:nvSpPr>
+          <p:cNvPr id="12" name="cpe|exhibit|text|11"/>
+          <p:cNvSpPr txBox="1"/>
+          <p:nvPr/>
+        </p:nvSpPr>
+        <p:spPr>
+          <a:xfrm>
+            <a:off x="3176626" y="1979310"/>
+            <a:ext cx="2042770" cy="576804"/>
+          </a:xfrm>
+          <a:prstGeom prst="rect">
+            <a:avLst/>
+          </a:prstGeom>
+          <a:noFill/>
+        </p:spPr>
+        <p:txBody>
+          <a:bodyPr wrap="square" lIns="0" rIns="0" tIns="0" bIns="0" anchor="ctr">
+            <a:noAutofit/>
+          </a:bodyPr>
+          <a:lstStyle/>
+          <a:p>
+            <a:pPr algn="l">
+              <a:lnSpc>
+                <a:spcPct val="100000"/>
+              </a:lnSpc>
+            </a:pPr>
+            <a:r>
+              <a:rPr sz="1200" b="0">
+                <a:solidFill>
+                  <a:srgbClr val="1C2530"/>
+                </a:solidFill>
+                <a:latin typeface="Arial"/>
+              </a:rPr>
+              <a:t>Network
+</a:t>
+            </a:r>
+            <a:r>
+              <a:rPr sz="1200" b="1">
+                <a:solidFill>
+                  <a:srgbClr val="1C2530"/>
+                </a:solidFill>
+                <a:latin typeface="Arial"/>
+              </a:rPr>
+              <a:t>€19M</a:t>
+            </a:r>
+          </a:p>
+        </p:txBody>
+      </p:sp>
+      <p:cxnSp>
+        <p:nvCxnSpPr>
+          <p:cNvPr id="13" name="cpe|exhibit|connector|12"/>
+          <p:cNvCxnSpPr/>
+          <p:nvPr/>
+        </p:nvCxnSpPr>
+        <p:spPr>
+          <a:xfrm>
+            <a:off x="5292547" y="2267712"/>
+            <a:ext cx="205740" cy="0"/>
+          </a:xfrm>
+          <a:prstGeom prst="line">
+            <a:avLst/>
+          </a:prstGeom>
+          <a:ln w="9525">
+            <a:solidFill>
+              <a:srgbClr val="8A95A1"/>
+            </a:solidFill>
+          </a:ln>
+        </p:spPr>
+      </p:cxnSp>
+      <p:cxnSp>
+        <p:nvCxnSpPr>
+          <p:cNvPr id="14" name="cpe|exhibit|connector|13"/>
+          <p:cNvCxnSpPr/>
+          <p:nvPr/>
+        </p:nvCxnSpPr>
+        <p:spPr>
+          <a:xfrm>
+            <a:off x="5498287" y="1874520"/>
+            <a:ext cx="0" cy="393192"/>
+          </a:xfrm>
+          <a:prstGeom prst="line">
+            <a:avLst/>
+          </a:prstGeom>
+          <a:ln w="9525">
+            <a:solidFill>
+              <a:srgbClr val="8A95A1"/>
+            </a:solidFill>
+          </a:ln>
+        </p:spPr>
+      </p:cxnSp>
+      <p:cxnSp>
+        <p:nvCxnSpPr>
+          <p:cNvPr id="15" name="cpe|exhibit|connector|14"/>
+          <p:cNvCxnSpPr/>
+          <p:nvPr/>
+        </p:nvCxnSpPr>
+        <p:spPr>
+          <a:xfrm>
+            <a:off x="5498287" y="1874520"/>
+            <a:ext cx="205740" cy="0"/>
+          </a:xfrm>
+          <a:prstGeom prst="line">
+            <a:avLst/>
+          </a:prstGeom>
+          <a:ln w="9525">
+            <a:solidFill>
+              <a:srgbClr val="8A95A1"/>
+            </a:solidFill>
+          </a:ln>
+        </p:spPr>
+      </p:cxnSp>
+      <p:sp>
+        <p:nvSpPr>
+          <p:cNvPr id="16" name="cpe|exhibit|fill|15"/>
+          <p:cNvSpPr/>
+          <p:nvPr/>
+        </p:nvSpPr>
+        <p:spPr>
+          <a:xfrm>
+            <a:off x="5704027" y="1567830"/>
+            <a:ext cx="2189074" cy="613380"/>
+          </a:xfrm>
+          <a:prstGeom prst="rect">
+            <a:avLst/>
+          </a:prstGeom>
+          <a:solidFill>
+            <a:srgbClr val="F4F6F9"/>
+          </a:solidFill>
+          <a:ln>
+            <a:noFill/>
+          </a:ln>
+        </p:spPr>
+        <p:txBody>
+          <a:bodyPr rtlCol="0" anchor="ctr" lIns="0" rIns="0" tIns="0" bIns="0"/>
+          <a:lstStyle/>
+          <a:p>
+            <a:pPr algn="ctr"/>
+          </a:p>
+        </p:txBody>
+      </p:sp>
+      <p:sp>
+        <p:nvSpPr>
+          <p:cNvPr id="17" name="cpe|exhibit|text|16"/>
+          <p:cNvSpPr txBox="1"/>
+          <p:nvPr/>
+        </p:nvSpPr>
+        <p:spPr>
+          <a:xfrm>
+            <a:off x="5777179" y="1586118"/>
+            <a:ext cx="2042770" cy="576804"/>
+          </a:xfrm>
+          <a:prstGeom prst="rect">
+            <a:avLst/>
+          </a:prstGeom>
+          <a:noFill/>
+        </p:spPr>
+        <p:txBody>
+          <a:bodyPr wrap="square" lIns="0" rIns="0" tIns="0" bIns="0" anchor="ctr">
+            <a:noAutofit/>
+          </a:bodyPr>
+          <a:lstStyle/>
+          <a:p>
+            <a:pPr algn="l">
+              <a:lnSpc>
+                <a:spcPct val="100000"/>
+              </a:lnSpc>
+            </a:pPr>
+            <a:r>
+              <a:rPr sz="1200" b="0">
+                <a:solidFill>
+                  <a:srgbClr val="1C2530"/>
+                </a:solidFill>
+                <a:latin typeface="Arial"/>
+              </a:rPr>
+              <a:t>Too many depots
+</a:t>
+            </a:r>
+            <a:r>
+              <a:rPr sz="1200" b="1">
+                <a:solidFill>
+                  <a:srgbClr val="1C2530"/>
+                </a:solidFill>
+                <a:latin typeface="Arial"/>
+              </a:rPr>
+              <a:t>€11M</a:t>
+            </a:r>
+          </a:p>
+        </p:txBody>
+      </p:sp>
+      <p:cxnSp>
+        <p:nvCxnSpPr>
+          <p:cNvPr id="18" name="cpe|exhibit|connector|17"/>
+          <p:cNvCxnSpPr/>
+          <p:nvPr/>
+        </p:nvCxnSpPr>
+        <p:spPr>
+          <a:xfrm>
+            <a:off x="5292547" y="2267712"/>
+            <a:ext cx="205740" cy="0"/>
+          </a:xfrm>
+          <a:prstGeom prst="line">
+            <a:avLst/>
+          </a:prstGeom>
+          <a:ln w="9525">
+            <a:solidFill>
+              <a:srgbClr val="8A95A1"/>
+            </a:solidFill>
+          </a:ln>
+        </p:spPr>
+      </p:cxnSp>
+      <p:cxnSp>
+        <p:nvCxnSpPr>
+          <p:cNvPr id="19" name="cpe|exhibit|connector|18"/>
+          <p:cNvCxnSpPr/>
+          <p:nvPr/>
+        </p:nvCxnSpPr>
+        <p:spPr>
+          <a:xfrm>
+            <a:off x="5498287" y="2267712"/>
+            <a:ext cx="0" cy="393192"/>
+          </a:xfrm>
+          <a:prstGeom prst="line">
+            <a:avLst/>
+          </a:prstGeom>
+          <a:ln w="9525">
+            <a:solidFill>
+              <a:srgbClr val="8A95A1"/>
+            </a:solidFill>
+          </a:ln>
+        </p:spPr>
+      </p:cxnSp>
+      <p:cxnSp>
+        <p:nvCxnSpPr>
+          <p:cNvPr id="20" name="cpe|exhibit|connector|19"/>
+          <p:cNvCxnSpPr/>
+          <p:nvPr/>
+        </p:nvCxnSpPr>
+        <p:spPr>
+          <a:xfrm>
+            <a:off x="5498287" y="2660904"/>
+            <a:ext cx="205740" cy="0"/>
+          </a:xfrm>
+          <a:prstGeom prst="line">
+            <a:avLst/>
+          </a:prstGeom>
+          <a:ln w="9525">
+            <a:solidFill>
+              <a:srgbClr val="8A95A1"/>
+            </a:solidFill>
+          </a:ln>
+        </p:spPr>
+      </p:cxnSp>
+      <p:sp>
+        <p:nvSpPr>
+          <p:cNvPr id="21" name="cpe|exhibit|fill|20"/>
+          <p:cNvSpPr/>
+          <p:nvPr/>
+        </p:nvSpPr>
+        <p:spPr>
+          <a:xfrm>
+            <a:off x="5704027" y="2354214"/>
+            <a:ext cx="2189074" cy="613380"/>
+          </a:xfrm>
+          <a:prstGeom prst="rect">
+            <a:avLst/>
+          </a:prstGeom>
+          <a:solidFill>
+            <a:srgbClr val="F4F6F9"/>
+          </a:solidFill>
+          <a:ln>
+            <a:noFill/>
+          </a:ln>
+        </p:spPr>
+        <p:txBody>
+          <a:bodyPr rtlCol="0" anchor="ctr" lIns="0" rIns="0" tIns="0" bIns="0"/>
+          <a:lstStyle/>
+          <a:p>
+            <a:pPr algn="ctr"/>
+          </a:p>
+        </p:txBody>
+      </p:sp>
+      <p:sp>
+        <p:nvSpPr>
+          <p:cNvPr id="22" name="cpe|exhibit|text|21"/>
+          <p:cNvSpPr txBox="1"/>
+          <p:nvPr/>
+        </p:nvSpPr>
+        <p:spPr>
+          <a:xfrm>
+            <a:off x="5777179" y="2372502"/>
+            <a:ext cx="2042770" cy="576804"/>
+          </a:xfrm>
+          <a:prstGeom prst="rect">
+            <a:avLst/>
+          </a:prstGeom>
+          <a:noFill/>
+        </p:spPr>
+        <p:txBody>
+          <a:bodyPr wrap="square" lIns="0" rIns="0" tIns="0" bIns="0" anchor="ctr">
+            <a:noAutofit/>
+          </a:bodyPr>
+          <a:lstStyle/>
+          <a:p>
+            <a:pPr algn="l">
+              <a:lnSpc>
+                <a:spcPct val="100000"/>
+              </a:lnSpc>
+            </a:pPr>
+            <a:r>
+              <a:rPr sz="1200" b="0">
+                <a:solidFill>
+                  <a:srgbClr val="1C2530"/>
+                </a:solidFill>
+                <a:latin typeface="Arial"/>
+              </a:rPr>
+              <a:t>Low truck fill
+</a:t>
+            </a:r>
+            <a:r>
+              <a:rPr sz="1200" b="1">
+                <a:solidFill>
+                  <a:srgbClr val="1C2530"/>
+                </a:solidFill>
+                <a:latin typeface="Arial"/>
+              </a:rPr>
+              <a:t>€8M</a:t>
+            </a:r>
+          </a:p>
+        </p:txBody>
+      </p:sp>
+      <p:cxnSp>
+        <p:nvCxnSpPr>
+          <p:cNvPr id="23" name="cpe|exhibit|connector|22"/>
+          <p:cNvCxnSpPr/>
+          <p:nvPr/>
+        </p:nvCxnSpPr>
+        <p:spPr>
+          <a:xfrm>
+            <a:off x="2691994" y="3840480"/>
+            <a:ext cx="205740" cy="0"/>
+          </a:xfrm>
+          <a:prstGeom prst="line">
+            <a:avLst/>
+          </a:prstGeom>
+          <a:ln w="9525">
+            <a:solidFill>
+              <a:srgbClr val="8A95A1"/>
+            </a:solidFill>
+          </a:ln>
+        </p:spPr>
+      </p:cxnSp>
+      <p:cxnSp>
+        <p:nvCxnSpPr>
+          <p:cNvPr id="24" name="cpe|exhibit|connector|23"/>
+          <p:cNvCxnSpPr/>
+          <p:nvPr/>
+        </p:nvCxnSpPr>
+        <p:spPr>
+          <a:xfrm>
+            <a:off x="2897734" y="3840480"/>
+            <a:ext cx="205740" cy="0"/>
+          </a:xfrm>
+          <a:prstGeom prst="line">
+            <a:avLst/>
+          </a:prstGeom>
+          <a:ln w="9525">
+            <a:solidFill>
+              <a:srgbClr val="8A95A1"/>
+            </a:solidFill>
+          </a:ln>
+        </p:spPr>
+      </p:cxnSp>
+      <p:sp>
+        <p:nvSpPr>
+          <p:cNvPr id="25" name="cpe|exhibit|fill|24"/>
+          <p:cNvSpPr/>
+          <p:nvPr/>
+        </p:nvSpPr>
+        <p:spPr>
+          <a:xfrm>
+            <a:off x="3103474" y="3533790"/>
+            <a:ext cx="2189074" cy="613380"/>
+          </a:xfrm>
+          <a:prstGeom prst="rect">
+            <a:avLst/>
+          </a:prstGeom>
+          <a:solidFill>
+            <a:srgbClr val="E08A00"/>
+          </a:solidFill>
+          <a:ln>
+            <a:noFill/>
+          </a:ln>
+        </p:spPr>
+        <p:txBody>
+          <a:bodyPr rtlCol="0" anchor="ctr" lIns="0" rIns="0" tIns="0" bIns="0"/>
+          <a:lstStyle/>
+          <a:p>
+            <a:pPr algn="ctr"/>
+          </a:p>
+        </p:txBody>
+      </p:sp>
+      <p:sp>
+        <p:nvSpPr>
+          <p:cNvPr id="26" name="cpe|exhibit|text|25"/>
+          <p:cNvSpPr txBox="1"/>
+          <p:nvPr/>
+        </p:nvSpPr>
+        <p:spPr>
+          <a:xfrm>
+            <a:off x="3176626" y="3552078"/>
+            <a:ext cx="2042770" cy="576804"/>
+          </a:xfrm>
+          <a:prstGeom prst="rect">
+            <a:avLst/>
+          </a:prstGeom>
+          <a:noFill/>
+        </p:spPr>
+        <p:txBody>
+          <a:bodyPr wrap="square" lIns="0" rIns="0" tIns="0" bIns="0" anchor="ctr">
+            <a:noAutofit/>
+          </a:bodyPr>
+          <a:lstStyle/>
+          <a:p>
+            <a:pPr algn="l">
+              <a:lnSpc>
+                <a:spcPct val="100000"/>
+              </a:lnSpc>
+            </a:pPr>
+            <a:r>
+              <a:rPr sz="1200" b="0">
+                <a:solidFill>
+                  <a:srgbClr val="1C2530"/>
+                </a:solidFill>
+                <a:latin typeface="Arial"/>
+              </a:rPr>
+              <a:t>Warehousing
+</a:t>
+            </a:r>
+            <a:r>
+              <a:rPr sz="1200" b="1">
+                <a:solidFill>
+                  <a:srgbClr val="1C2530"/>
+                </a:solidFill>
+                <a:latin typeface="Arial"/>
+              </a:rPr>
+              <a:t>€12M</a:t>
+            </a:r>
+          </a:p>
+        </p:txBody>
+      </p:sp>
+      <p:cxnSp>
+        <p:nvCxnSpPr>
+          <p:cNvPr id="27" name="cpe|exhibit|connector|26"/>
+          <p:cNvCxnSpPr/>
+          <p:nvPr/>
+        </p:nvCxnSpPr>
+        <p:spPr>
+          <a:xfrm>
+            <a:off x="5292547" y="3840480"/>
+            <a:ext cx="205740" cy="0"/>
+          </a:xfrm>
+          <a:prstGeom prst="line">
+            <a:avLst/>
+          </a:prstGeom>
+          <a:ln w="9525">
+            <a:solidFill>
+              <a:srgbClr val="8A95A1"/>
+            </a:solidFill>
+          </a:ln>
+        </p:spPr>
+      </p:cxnSp>
+      <p:cxnSp>
+        <p:nvCxnSpPr>
+          <p:cNvPr id="28" name="cpe|exhibit|connector|27"/>
+          <p:cNvCxnSpPr/>
+          <p:nvPr/>
+        </p:nvCxnSpPr>
+        <p:spPr>
+          <a:xfrm>
+            <a:off x="5498287" y="3447288"/>
+            <a:ext cx="0" cy="393192"/>
+          </a:xfrm>
+          <a:prstGeom prst="line">
+            <a:avLst/>
+          </a:prstGeom>
+          <a:ln w="9525">
+            <a:solidFill>
+              <a:srgbClr val="8A95A1"/>
+            </a:solidFill>
+          </a:ln>
+        </p:spPr>
+      </p:cxnSp>
+      <p:cxnSp>
+        <p:nvCxnSpPr>
+          <p:cNvPr id="29" name="cpe|exhibit|connector|28"/>
+          <p:cNvCxnSpPr/>
+          <p:nvPr/>
+        </p:nvCxnSpPr>
+        <p:spPr>
+          <a:xfrm>
+            <a:off x="5498287" y="3447288"/>
+            <a:ext cx="205740" cy="0"/>
+          </a:xfrm>
+          <a:prstGeom prst="line">
+            <a:avLst/>
+          </a:prstGeom>
+          <a:ln w="9525">
+            <a:solidFill>
+              <a:srgbClr val="8A95A1"/>
+            </a:solidFill>
+          </a:ln>
+        </p:spPr>
+      </p:cxnSp>
+      <p:sp>
+        <p:nvSpPr>
+          <p:cNvPr id="30" name="cpe|exhibit|fill|29"/>
+          <p:cNvSpPr/>
+          <p:nvPr/>
+        </p:nvSpPr>
+        <p:spPr>
+          <a:xfrm>
+            <a:off x="5704027" y="3140598"/>
+            <a:ext cx="2189074" cy="613380"/>
+          </a:xfrm>
+          <a:prstGeom prst="rect">
+            <a:avLst/>
+          </a:prstGeom>
+          <a:solidFill>
+            <a:srgbClr val="F4F6F9"/>
+          </a:solidFill>
+          <a:ln>
+            <a:noFill/>
+          </a:ln>
+        </p:spPr>
+        <p:txBody>
+          <a:bodyPr rtlCol="0" anchor="ctr" lIns="0" rIns="0" tIns="0" bIns="0"/>
+          <a:lstStyle/>
+          <a:p>
+            <a:pPr algn="ctr"/>
+          </a:p>
+        </p:txBody>
+      </p:sp>
+      <p:sp>
+        <p:nvSpPr>
+          <p:cNvPr id="31" name="cpe|exhibit|text|30"/>
+          <p:cNvSpPr txBox="1"/>
+          <p:nvPr/>
+        </p:nvSpPr>
+        <p:spPr>
+          <a:xfrm>
+            <a:off x="5777179" y="3158886"/>
+            <a:ext cx="2042770" cy="576804"/>
+          </a:xfrm>
+          <a:prstGeom prst="rect">
+            <a:avLst/>
+          </a:prstGeom>
+          <a:noFill/>
+        </p:spPr>
+        <p:txBody>
+          <a:bodyPr wrap="square" lIns="0" rIns="0" tIns="0" bIns="0" anchor="ctr">
+            <a:noAutofit/>
+          </a:bodyPr>
+          <a:lstStyle/>
+          <a:p>
+            <a:pPr algn="l">
+              <a:lnSpc>
+                <a:spcPct val="100000"/>
+              </a:lnSpc>
+            </a:pPr>
+            <a:r>
+              <a:rPr sz="1200" b="0">
+                <a:solidFill>
+                  <a:srgbClr val="1C2530"/>
+                </a:solidFill>
+                <a:latin typeface="Arial"/>
+              </a:rPr>
+              <a:t>Manual picking
+</a:t>
+            </a:r>
+            <a:r>
+              <a:rPr sz="1200" b="1">
+                <a:solidFill>
+                  <a:srgbClr val="1C2530"/>
+                </a:solidFill>
+                <a:latin typeface="Arial"/>
+              </a:rPr>
+              <a:t>€9M</a:t>
+            </a:r>
+          </a:p>
+        </p:txBody>
+      </p:sp>
+      <p:cxnSp>
+        <p:nvCxnSpPr>
+          <p:cNvPr id="32" name="cpe|exhibit|connector|31"/>
+          <p:cNvCxnSpPr/>
+          <p:nvPr/>
+        </p:nvCxnSpPr>
+        <p:spPr>
+          <a:xfrm>
+            <a:off x="5292547" y="3840480"/>
+            <a:ext cx="205740" cy="0"/>
+          </a:xfrm>
+          <a:prstGeom prst="line">
+            <a:avLst/>
+          </a:prstGeom>
+          <a:ln w="9525">
+            <a:solidFill>
+              <a:srgbClr val="8A95A1"/>
+            </a:solidFill>
+          </a:ln>
+        </p:spPr>
+      </p:cxnSp>
+      <p:cxnSp>
+        <p:nvCxnSpPr>
+          <p:cNvPr id="33" name="cpe|exhibit|connector|32"/>
+          <p:cNvCxnSpPr/>
+          <p:nvPr/>
+        </p:nvCxnSpPr>
+        <p:spPr>
+          <a:xfrm>
+            <a:off x="5498287" y="3840480"/>
+            <a:ext cx="0" cy="393192"/>
+          </a:xfrm>
+          <a:prstGeom prst="line">
+            <a:avLst/>
+          </a:prstGeom>
+          <a:ln w="9525">
+            <a:solidFill>
+              <a:srgbClr val="8A95A1"/>
+            </a:solidFill>
+          </a:ln>
+        </p:spPr>
+      </p:cxnSp>
+      <p:cxnSp>
+        <p:nvCxnSpPr>
+          <p:cNvPr id="34" name="cpe|exhibit|connector|33"/>
+          <p:cNvCxnSpPr/>
+          <p:nvPr/>
+        </p:nvCxnSpPr>
+        <p:spPr>
+          <a:xfrm>
+            <a:off x="5498287" y="4233672"/>
+            <a:ext cx="205740" cy="0"/>
+          </a:xfrm>
+          <a:prstGeom prst="line">
+            <a:avLst/>
+          </a:prstGeom>
+          <a:ln w="9525">
+            <a:solidFill>
+              <a:srgbClr val="8A95A1"/>
+            </a:solidFill>
+          </a:ln>
+        </p:spPr>
+      </p:cxnSp>
+      <p:sp>
+        <p:nvSpPr>
+          <p:cNvPr id="35" name="cpe|exhibit|fill|34"/>
+          <p:cNvSpPr/>
+          <p:nvPr/>
+        </p:nvSpPr>
+        <p:spPr>
+          <a:xfrm>
+            <a:off x="5704027" y="3926982"/>
+            <a:ext cx="2189074" cy="613380"/>
+          </a:xfrm>
+          <a:prstGeom prst="rect">
+            <a:avLst/>
+          </a:prstGeom>
+          <a:solidFill>
+            <a:srgbClr val="F4F6F9"/>
+          </a:solidFill>
+          <a:ln>
+            <a:noFill/>
+          </a:ln>
+        </p:spPr>
+        <p:txBody>
+          <a:bodyPr rtlCol="0" anchor="ctr" lIns="0" rIns="0" tIns="0" bIns="0"/>
+          <a:lstStyle/>
+          <a:p>
+            <a:pPr algn="ctr"/>
+          </a:p>
+        </p:txBody>
+      </p:sp>
+      <p:sp>
+        <p:nvSpPr>
+          <p:cNvPr id="36" name="cpe|exhibit|text|35"/>
+          <p:cNvSpPr txBox="1"/>
+          <p:nvPr/>
+        </p:nvSpPr>
+        <p:spPr>
+          <a:xfrm>
+            <a:off x="5777179" y="3945270"/>
+            <a:ext cx="2042770" cy="576804"/>
+          </a:xfrm>
+          <a:prstGeom prst="rect">
+            <a:avLst/>
+          </a:prstGeom>
+          <a:noFill/>
+        </p:spPr>
+        <p:txBody>
+          <a:bodyPr wrap="square" lIns="0" rIns="0" tIns="0" bIns="0" anchor="ctr">
+            <a:noAutofit/>
+          </a:bodyPr>
+          <a:lstStyle/>
+          <a:p>
+            <a:pPr algn="l">
+              <a:lnSpc>
+                <a:spcPct val="100000"/>
+              </a:lnSpc>
+            </a:pPr>
+            <a:r>
+              <a:rPr sz="1200" b="0">
+                <a:solidFill>
+                  <a:srgbClr val="1C2530"/>
+                </a:solidFill>
+                <a:latin typeface="Arial"/>
+              </a:rPr>
+              <a:t>Overtime
+</a:t>
+            </a:r>
+            <a:r>
+              <a:rPr sz="1200" b="1">
+                <a:solidFill>
+                  <a:srgbClr val="1C2530"/>
+                </a:solidFill>
+                <a:latin typeface="Arial"/>
+              </a:rPr>
+              <a:t>€3M</a:t>
+            </a:r>
+          </a:p>
+        </p:txBody>
+      </p:sp>
+      <p:cxnSp>
+        <p:nvCxnSpPr>
+          <p:cNvPr id="37" name="cpe|exhibit|connector|36"/>
+          <p:cNvCxnSpPr/>
+          <p:nvPr/>
+        </p:nvCxnSpPr>
+        <p:spPr>
+          <a:xfrm>
+            <a:off x="2691994" y="3840480"/>
+            <a:ext cx="205740" cy="0"/>
+          </a:xfrm>
+          <a:prstGeom prst="line">
+            <a:avLst/>
+          </a:prstGeom>
+          <a:ln w="9525">
+            <a:solidFill>
+              <a:srgbClr val="8A95A1"/>
+            </a:solidFill>
+          </a:ln>
+        </p:spPr>
+      </p:cxnSp>
+      <p:cxnSp>
+        <p:nvCxnSpPr>
+          <p:cNvPr id="38" name="cpe|exhibit|connector|37"/>
+          <p:cNvCxnSpPr/>
+          <p:nvPr/>
+        </p:nvCxnSpPr>
+        <p:spPr>
+          <a:xfrm>
+            <a:off x="2897734" y="3840480"/>
+            <a:ext cx="0" cy="1572768"/>
+          </a:xfrm>
+          <a:prstGeom prst="line">
+            <a:avLst/>
+          </a:prstGeom>
+          <a:ln w="9525">
+            <a:solidFill>
+              <a:srgbClr val="8A95A1"/>
+            </a:solidFill>
+          </a:ln>
+        </p:spPr>
+      </p:cxnSp>
+      <p:cxnSp>
+        <p:nvCxnSpPr>
+          <p:cNvPr id="39" name="cpe|exhibit|connector|38"/>
+          <p:cNvCxnSpPr/>
+          <p:nvPr/>
+        </p:nvCxnSpPr>
+        <p:spPr>
+          <a:xfrm>
+            <a:off x="2897734" y="5413248"/>
+            <a:ext cx="205740" cy="0"/>
+          </a:xfrm>
+          <a:prstGeom prst="line">
+            <a:avLst/>
+          </a:prstGeom>
+          <a:ln w="9525">
+            <a:solidFill>
+              <a:srgbClr val="8A95A1"/>
+            </a:solidFill>
+          </a:ln>
+        </p:spPr>
+      </p:cxnSp>
+      <p:sp>
+        <p:nvSpPr>
+          <p:cNvPr id="40" name="cpe|exhibit|fill|39"/>
+          <p:cNvSpPr/>
+          <p:nvPr/>
+        </p:nvSpPr>
+        <p:spPr>
+          <a:xfrm>
+            <a:off x="3103474" y="5106558"/>
+            <a:ext cx="2189074" cy="613380"/>
+          </a:xfrm>
+          <a:prstGeom prst="rect">
+            <a:avLst/>
+          </a:prstGeom>
+          <a:solidFill>
+            <a:srgbClr val="F4F6F9"/>
+          </a:solidFill>
+          <a:ln>
+            <a:noFill/>
+          </a:ln>
+        </p:spPr>
+        <p:txBody>
+          <a:bodyPr rtlCol="0" anchor="ctr" lIns="0" rIns="0" tIns="0" bIns="0"/>
+          <a:lstStyle/>
+          <a:p>
+            <a:pPr algn="ctr"/>
+          </a:p>
+        </p:txBody>
+      </p:sp>
+      <p:sp>
+        <p:nvSpPr>
+          <p:cNvPr id="41" name="cpe|exhibit|text|40"/>
+          <p:cNvSpPr txBox="1"/>
+          <p:nvPr/>
+        </p:nvSpPr>
+        <p:spPr>
+          <a:xfrm>
+            <a:off x="3176626" y="5124846"/>
+            <a:ext cx="2042770" cy="576804"/>
+          </a:xfrm>
+          <a:prstGeom prst="rect">
+            <a:avLst/>
+          </a:prstGeom>
+          <a:noFill/>
+        </p:spPr>
+        <p:txBody>
+          <a:bodyPr wrap="square" lIns="0" rIns="0" tIns="0" bIns="0" anchor="ctr">
+            <a:noAutofit/>
+          </a:bodyPr>
+          <a:lstStyle/>
+          <a:p>
+            <a:pPr algn="l">
+              <a:lnSpc>
+                <a:spcPct val="100000"/>
+              </a:lnSpc>
+            </a:pPr>
+            <a:r>
+              <a:rPr sz="1200" b="0">
+                <a:solidFill>
+                  <a:srgbClr val="1C2530"/>
+                </a:solidFill>
+                <a:latin typeface="Arial"/>
+              </a:rPr>
+              <a:t>Customer terms
+</a:t>
+            </a:r>
+            <a:r>
+              <a:rPr sz="1200" b="1">
+                <a:solidFill>
+                  <a:srgbClr val="1C2530"/>
+                </a:solidFill>
+                <a:latin typeface="Arial"/>
+              </a:rPr>
+              <a:t>€13M</a:t>
+            </a:r>
+          </a:p>
+        </p:txBody>
+      </p:sp>
+      <p:cxnSp>
+        <p:nvCxnSpPr>
+          <p:cNvPr id="42" name="cpe|exhibit|connector|41"/>
+          <p:cNvCxnSpPr/>
+          <p:nvPr/>
+        </p:nvCxnSpPr>
+        <p:spPr>
+          <a:xfrm>
+            <a:off x="5292547" y="5413248"/>
+            <a:ext cx="205740" cy="0"/>
+          </a:xfrm>
+          <a:prstGeom prst="line">
+            <a:avLst/>
+          </a:prstGeom>
+          <a:ln w="9525">
+            <a:solidFill>
+              <a:srgbClr val="8A95A1"/>
+            </a:solidFill>
+          </a:ln>
+        </p:spPr>
+      </p:cxnSp>
+      <p:cxnSp>
+        <p:nvCxnSpPr>
+          <p:cNvPr id="43" name="cpe|exhibit|connector|42"/>
+          <p:cNvCxnSpPr/>
+          <p:nvPr/>
+        </p:nvCxnSpPr>
+        <p:spPr>
+          <a:xfrm>
+            <a:off x="5498287" y="5020056"/>
+            <a:ext cx="0" cy="393192"/>
+          </a:xfrm>
+          <a:prstGeom prst="line">
+            <a:avLst/>
+          </a:prstGeom>
+          <a:ln w="9525">
+            <a:solidFill>
+              <a:srgbClr val="8A95A1"/>
+            </a:solidFill>
+          </a:ln>
+        </p:spPr>
+      </p:cxnSp>
+      <p:cxnSp>
+        <p:nvCxnSpPr>
+          <p:cNvPr id="44" name="cpe|exhibit|connector|43"/>
+          <p:cNvCxnSpPr/>
+          <p:nvPr/>
+        </p:nvCxnSpPr>
+        <p:spPr>
+          <a:xfrm>
+            <a:off x="5498287" y="5020056"/>
+            <a:ext cx="205740" cy="0"/>
+          </a:xfrm>
+          <a:prstGeom prst="line">
+            <a:avLst/>
+          </a:prstGeom>
+          <a:ln w="9525">
+            <a:solidFill>
+              <a:srgbClr val="8A95A1"/>
+            </a:solidFill>
+          </a:ln>
+        </p:spPr>
+      </p:cxnSp>
+      <p:sp>
+        <p:nvSpPr>
+          <p:cNvPr id="45" name="cpe|exhibit|fill|44"/>
+          <p:cNvSpPr/>
+          <p:nvPr/>
+        </p:nvSpPr>
+        <p:spPr>
+          <a:xfrm>
+            <a:off x="5704027" y="4713366"/>
+            <a:ext cx="2189074" cy="613380"/>
+          </a:xfrm>
+          <a:prstGeom prst="rect">
+            <a:avLst/>
+          </a:prstGeom>
+          <a:solidFill>
+            <a:srgbClr val="F4F6F9"/>
+          </a:solidFill>
+          <a:ln>
+            <a:noFill/>
+          </a:ln>
+        </p:spPr>
+        <p:txBody>
+          <a:bodyPr rtlCol="0" anchor="ctr" lIns="0" rIns="0" tIns="0" bIns="0"/>
+          <a:lstStyle/>
+          <a:p>
+            <a:pPr algn="ctr"/>
+          </a:p>
+        </p:txBody>
+      </p:sp>
+      <p:sp>
+        <p:nvSpPr>
+          <p:cNvPr id="46" name="cpe|exhibit|text|45"/>
+          <p:cNvSpPr txBox="1"/>
+          <p:nvPr/>
+        </p:nvSpPr>
+        <p:spPr>
+          <a:xfrm>
+            <a:off x="5777179" y="4731654"/>
+            <a:ext cx="2042770" cy="576804"/>
+          </a:xfrm>
+          <a:prstGeom prst="rect">
+            <a:avLst/>
+          </a:prstGeom>
+          <a:noFill/>
+        </p:spPr>
+        <p:txBody>
+          <a:bodyPr wrap="square" lIns="0" rIns="0" tIns="0" bIns="0" anchor="ctr">
+            <a:noAutofit/>
+          </a:bodyPr>
+          <a:lstStyle/>
+          <a:p>
+            <a:pPr algn="l">
+              <a:lnSpc>
+                <a:spcPct val="100000"/>
+              </a:lnSpc>
+            </a:pPr>
+            <a:r>
+              <a:rPr sz="1200" b="0">
+                <a:solidFill>
+                  <a:srgbClr val="1C2530"/>
+                </a:solidFill>
+                <a:latin typeface="Arial"/>
+              </a:rPr>
+              <a:t>Small drops
+</a:t>
+            </a:r>
+            <a:r>
+              <a:rPr sz="1200" b="1">
+                <a:solidFill>
+                  <a:srgbClr val="1C2530"/>
+                </a:solidFill>
+                <a:latin typeface="Arial"/>
+              </a:rPr>
+              <a:t>€8M</a:t>
+            </a:r>
+          </a:p>
+        </p:txBody>
+      </p:sp>
+      <p:cxnSp>
+        <p:nvCxnSpPr>
+          <p:cNvPr id="47" name="cpe|exhibit|connector|46"/>
+          <p:cNvCxnSpPr/>
+          <p:nvPr/>
+        </p:nvCxnSpPr>
+        <p:spPr>
+          <a:xfrm>
+            <a:off x="5292547" y="5413248"/>
+            <a:ext cx="205740" cy="0"/>
+          </a:xfrm>
+          <a:prstGeom prst="line">
+            <a:avLst/>
+          </a:prstGeom>
+          <a:ln w="9525">
+            <a:solidFill>
+              <a:srgbClr val="8A95A1"/>
+            </a:solidFill>
+          </a:ln>
+        </p:spPr>
+      </p:cxnSp>
+      <p:cxnSp>
+        <p:nvCxnSpPr>
+          <p:cNvPr id="48" name="cpe|exhibit|connector|47"/>
+          <p:cNvCxnSpPr/>
+          <p:nvPr/>
+        </p:nvCxnSpPr>
+        <p:spPr>
+          <a:xfrm>
+            <a:off x="5498287" y="5413248"/>
+            <a:ext cx="0" cy="393192"/>
+          </a:xfrm>
+          <a:prstGeom prst="line">
+            <a:avLst/>
+          </a:prstGeom>
+          <a:ln w="9525">
+            <a:solidFill>
+              <a:srgbClr val="8A95A1"/>
+            </a:solidFill>
+          </a:ln>
+        </p:spPr>
+      </p:cxnSp>
+      <p:cxnSp>
+        <p:nvCxnSpPr>
+          <p:cNvPr id="49" name="cpe|exhibit|connector|48"/>
+          <p:cNvCxnSpPr/>
+          <p:nvPr/>
+        </p:nvCxnSpPr>
+        <p:spPr>
+          <a:xfrm>
+            <a:off x="5498287" y="5806440"/>
+            <a:ext cx="205740" cy="0"/>
+          </a:xfrm>
+          <a:prstGeom prst="line">
+            <a:avLst/>
+          </a:prstGeom>
+          <a:ln w="9525">
+            <a:solidFill>
+              <a:srgbClr val="8A95A1"/>
+            </a:solidFill>
+          </a:ln>
+        </p:spPr>
+      </p:cxnSp>
+      <p:sp>
+        <p:nvSpPr>
+          <p:cNvPr id="50" name="cpe|exhibit|fill|49"/>
+          <p:cNvSpPr/>
+          <p:nvPr/>
+        </p:nvSpPr>
+        <p:spPr>
+          <a:xfrm>
+            <a:off x="5704027" y="5499750"/>
+            <a:ext cx="2189074" cy="613380"/>
+          </a:xfrm>
+          <a:prstGeom prst="rect">
+            <a:avLst/>
+          </a:prstGeom>
+          <a:solidFill>
+            <a:srgbClr val="F4F6F9"/>
+          </a:solidFill>
+          <a:ln>
+            <a:noFill/>
+          </a:ln>
+        </p:spPr>
+        <p:txBody>
+          <a:bodyPr rtlCol="0" anchor="ctr" lIns="0" rIns="0" tIns="0" bIns="0"/>
+          <a:lstStyle/>
+          <a:p>
+            <a:pPr algn="ctr"/>
+          </a:p>
+        </p:txBody>
+      </p:sp>
+      <p:sp>
+        <p:nvSpPr>
+          <p:cNvPr id="51" name="cpe|exhibit|text|50"/>
+          <p:cNvSpPr txBox="1"/>
+          <p:nvPr/>
+        </p:nvSpPr>
+        <p:spPr>
+          <a:xfrm>
+            <a:off x="5777179" y="5518038"/>
+            <a:ext cx="2042770" cy="576804"/>
+          </a:xfrm>
+          <a:prstGeom prst="rect">
+            <a:avLst/>
+          </a:prstGeom>
+          <a:noFill/>
+        </p:spPr>
+        <p:txBody>
+          <a:bodyPr wrap="square" lIns="0" rIns="0" tIns="0" bIns="0" anchor="ctr">
+            <a:noAutofit/>
+          </a:bodyPr>
+          <a:lstStyle/>
+          <a:p>
+            <a:pPr algn="l">
+              <a:lnSpc>
+                <a:spcPct val="100000"/>
+              </a:lnSpc>
+            </a:pPr>
+            <a:r>
+              <a:rPr sz="1200" b="0">
+                <a:solidFill>
+                  <a:srgbClr val="1C2530"/>
+                </a:solidFill>
+                <a:latin typeface="Arial"/>
+              </a:rPr>
+              <a:t>Free returns
+</a:t>
+            </a:r>
+            <a:r>
+              <a:rPr sz="1200" b="1">
+                <a:solidFill>
+                  <a:srgbClr val="1C2530"/>
+                </a:solidFill>
+                <a:latin typeface="Arial"/>
+              </a:rPr>
+              <a:t>€5M</a:t>
+            </a:r>
+          </a:p>
+        </p:txBody>
+      </p:sp>
+      <p:cxnSp>
+        <p:nvCxnSpPr>
+          <p:cNvPr id="52" name="cpe|commentary|line|51"/>
+          <p:cNvCxnSpPr/>
+          <p:nvPr/>
+        </p:nvCxnSpPr>
+        <p:spPr>
+          <a:xfrm>
+            <a:off x="8094269" y="1481328"/>
             <a:ext cx="0" cy="4718304"/>
           </a:xfrm>
           <a:prstGeom prst="line">
@@ -25556,13 +26882,13 @@
       </p:cxnSp>
       <p:sp>
         <p:nvSpPr>
-          <p:cNvPr id="7" name="cpe|commentary|text|6"/>
-          <p:cNvSpPr txBox="1"/>
-          <p:nvPr/>
-        </p:nvSpPr>
-        <p:spPr>
-          <a:xfrm>
-            <a:off x="502920" y="1481328"/>
+          <p:cNvPr id="53" name="cpe|commentary|text|52"/>
+          <p:cNvSpPr txBox="1"/>
+          <p:nvPr/>
+        </p:nvSpPr>
+        <p:spPr>
+          <a:xfrm>
+            <a:off x="8322869" y="1481328"/>
             <a:ext cx="3365906" cy="4718304"/>
           </a:xfrm>
           <a:prstGeom prst="rect">
@@ -25591,7 +26917,7 @@
               <a:buChar char="•"/>
             </a:pPr>
             <a:r>
-              <a:rPr sz="1400" b="1">
+              <a:rPr sz="1200" b="1">
                 <a:solidFill>
                   <a:srgbClr val="1C2530"/>
                 </a:solidFill>
@@ -25600,7 +26926,7 @@
               <a:t>Network</a:t>
             </a:r>
             <a:r>
-              <a:rPr sz="1400" b="0">
+              <a:rPr sz="1200" b="0">
                 <a:solidFill>
                   <a:srgbClr val="1C2530"/>
                 </a:solidFill>
@@ -25625,7 +26951,7 @@
               <a:buChar char="•"/>
             </a:pPr>
             <a:r>
-              <a:rPr sz="1400" b="1">
+              <a:rPr sz="1200" b="1">
                 <a:solidFill>
                   <a:srgbClr val="1C2530"/>
                 </a:solidFill>
@@ -25634,7 +26960,7 @@
               <a:t>Warehousing</a:t>
             </a:r>
             <a:r>
-              <a:rPr sz="1400" b="0">
+              <a:rPr sz="1200" b="0">
                 <a:solidFill>
                   <a:srgbClr val="1C2530"/>
                 </a:solidFill>
@@ -25656,1339 +26982,13 @@
               <a:buChar char="•"/>
             </a:pPr>
             <a:r>
-              <a:rPr sz="1400" b="0">
+              <a:rPr sz="1200" b="0">
                 <a:solidFill>
                   <a:srgbClr val="1C2530"/>
                 </a:solidFill>
                 <a:latin typeface="Arial"/>
               </a:rPr>
               <a:t>Customer terms need commercial, not operational, action</a:t>
-            </a:r>
-          </a:p>
-        </p:txBody>
-      </p:sp>
-      <p:sp>
-        <p:nvSpPr>
-          <p:cNvPr id="8" name="cpe|exhibit|fill|7"/>
-          <p:cNvSpPr/>
-          <p:nvPr/>
-        </p:nvSpPr>
-        <p:spPr>
-          <a:xfrm>
-            <a:off x="4298594" y="3533790"/>
-            <a:ext cx="2189074" cy="613380"/>
-          </a:xfrm>
-          <a:prstGeom prst="rect">
-            <a:avLst/>
-          </a:prstGeom>
-          <a:solidFill>
-            <a:srgbClr val="13294B"/>
-          </a:solidFill>
-          <a:ln>
-            <a:noFill/>
-          </a:ln>
-        </p:spPr>
-        <p:txBody>
-          <a:bodyPr rtlCol="0" anchor="ctr" lIns="0" rIns="0" tIns="0" bIns="0"/>
-          <a:lstStyle/>
-          <a:p>
-            <a:pPr algn="ctr"/>
-          </a:p>
-        </p:txBody>
-      </p:sp>
-      <p:sp>
-        <p:nvSpPr>
-          <p:cNvPr id="9" name="cpe|exhibit|text|8"/>
-          <p:cNvSpPr txBox="1"/>
-          <p:nvPr/>
-        </p:nvSpPr>
-        <p:spPr>
-          <a:xfrm>
-            <a:off x="4371746" y="3552078"/>
-            <a:ext cx="2042770" cy="576804"/>
-          </a:xfrm>
-          <a:prstGeom prst="rect">
-            <a:avLst/>
-          </a:prstGeom>
-          <a:noFill/>
-        </p:spPr>
-        <p:txBody>
-          <a:bodyPr wrap="square" lIns="0" rIns="0" tIns="0" bIns="0" anchor="ctr">
-            <a:noAutofit/>
-          </a:bodyPr>
-          <a:lstStyle/>
-          <a:p>
-            <a:pPr algn="l">
-              <a:lnSpc>
-                <a:spcPct val="100000"/>
-              </a:lnSpc>
-            </a:pPr>
-            <a:r>
-              <a:rPr sz="1400" b="0">
-                <a:solidFill>
-                  <a:srgbClr val="FFFFFF"/>
-                </a:solidFill>
-                <a:latin typeface="Arial"/>
-              </a:rPr>
-              <a:t>Gap to peer median
-</a:t>
-            </a:r>
-            <a:r>
-              <a:rPr sz="1400" b="1">
-                <a:solidFill>
-                  <a:srgbClr val="FFFFFF"/>
-                </a:solidFill>
-                <a:latin typeface="Arial"/>
-              </a:rPr>
-              <a:t>€44M</a:t>
-            </a:r>
-          </a:p>
-        </p:txBody>
-      </p:sp>
-      <p:cxnSp>
-        <p:nvCxnSpPr>
-          <p:cNvPr id="10" name="cpe|exhibit|connector|9"/>
-          <p:cNvCxnSpPr/>
-          <p:nvPr/>
-        </p:nvCxnSpPr>
-        <p:spPr>
-          <a:xfrm>
-            <a:off x="6487668" y="3840480"/>
-            <a:ext cx="205740" cy="0"/>
-          </a:xfrm>
-          <a:prstGeom prst="line">
-            <a:avLst/>
-          </a:prstGeom>
-          <a:ln w="9525">
-            <a:solidFill>
-              <a:srgbClr val="8A95A1"/>
-            </a:solidFill>
-          </a:ln>
-        </p:spPr>
-      </p:cxnSp>
-      <p:cxnSp>
-        <p:nvCxnSpPr>
-          <p:cNvPr id="11" name="cpe|exhibit|connector|10"/>
-          <p:cNvCxnSpPr/>
-          <p:nvPr/>
-        </p:nvCxnSpPr>
-        <p:spPr>
-          <a:xfrm>
-            <a:off x="6693408" y="2267712"/>
-            <a:ext cx="0" cy="1572768"/>
-          </a:xfrm>
-          <a:prstGeom prst="line">
-            <a:avLst/>
-          </a:prstGeom>
-          <a:ln w="9525">
-            <a:solidFill>
-              <a:srgbClr val="8A95A1"/>
-            </a:solidFill>
-          </a:ln>
-        </p:spPr>
-      </p:cxnSp>
-      <p:cxnSp>
-        <p:nvCxnSpPr>
-          <p:cNvPr id="12" name="cpe|exhibit|connector|11"/>
-          <p:cNvCxnSpPr/>
-          <p:nvPr/>
-        </p:nvCxnSpPr>
-        <p:spPr>
-          <a:xfrm>
-            <a:off x="6693408" y="2267712"/>
-            <a:ext cx="205740" cy="0"/>
-          </a:xfrm>
-          <a:prstGeom prst="line">
-            <a:avLst/>
-          </a:prstGeom>
-          <a:ln w="9525">
-            <a:solidFill>
-              <a:srgbClr val="8A95A1"/>
-            </a:solidFill>
-          </a:ln>
-        </p:spPr>
-      </p:cxnSp>
-      <p:sp>
-        <p:nvSpPr>
-          <p:cNvPr id="13" name="cpe|exhibit|fill|12"/>
-          <p:cNvSpPr/>
-          <p:nvPr/>
-        </p:nvSpPr>
-        <p:spPr>
-          <a:xfrm>
-            <a:off x="6899148" y="1961022"/>
-            <a:ext cx="2189074" cy="613380"/>
-          </a:xfrm>
-          <a:prstGeom prst="rect">
-            <a:avLst/>
-          </a:prstGeom>
-          <a:solidFill>
-            <a:srgbClr val="E08A00"/>
-          </a:solidFill>
-          <a:ln>
-            <a:noFill/>
-          </a:ln>
-        </p:spPr>
-        <p:txBody>
-          <a:bodyPr rtlCol="0" anchor="ctr" lIns="0" rIns="0" tIns="0" bIns="0"/>
-          <a:lstStyle/>
-          <a:p>
-            <a:pPr algn="ctr"/>
-          </a:p>
-        </p:txBody>
-      </p:sp>
-      <p:sp>
-        <p:nvSpPr>
-          <p:cNvPr id="14" name="cpe|exhibit|text|13"/>
-          <p:cNvSpPr txBox="1"/>
-          <p:nvPr/>
-        </p:nvSpPr>
-        <p:spPr>
-          <a:xfrm>
-            <a:off x="6972300" y="1979310"/>
-            <a:ext cx="2042770" cy="576804"/>
-          </a:xfrm>
-          <a:prstGeom prst="rect">
-            <a:avLst/>
-          </a:prstGeom>
-          <a:noFill/>
-        </p:spPr>
-        <p:txBody>
-          <a:bodyPr wrap="square" lIns="0" rIns="0" tIns="0" bIns="0" anchor="ctr">
-            <a:noAutofit/>
-          </a:bodyPr>
-          <a:lstStyle/>
-          <a:p>
-            <a:pPr algn="l">
-              <a:lnSpc>
-                <a:spcPct val="100000"/>
-              </a:lnSpc>
-            </a:pPr>
-            <a:r>
-              <a:rPr sz="1400" b="0">
-                <a:solidFill>
-                  <a:srgbClr val="1C2530"/>
-                </a:solidFill>
-                <a:latin typeface="Arial"/>
-              </a:rPr>
-              <a:t>Network
-</a:t>
-            </a:r>
-            <a:r>
-              <a:rPr sz="1400" b="1">
-                <a:solidFill>
-                  <a:srgbClr val="1C2530"/>
-                </a:solidFill>
-                <a:latin typeface="Arial"/>
-              </a:rPr>
-              <a:t>€19M</a:t>
-            </a:r>
-          </a:p>
-        </p:txBody>
-      </p:sp>
-      <p:cxnSp>
-        <p:nvCxnSpPr>
-          <p:cNvPr id="15" name="cpe|exhibit|connector|14"/>
-          <p:cNvCxnSpPr/>
-          <p:nvPr/>
-        </p:nvCxnSpPr>
-        <p:spPr>
-          <a:xfrm>
-            <a:off x="9088222" y="2267712"/>
-            <a:ext cx="205740" cy="0"/>
-          </a:xfrm>
-          <a:prstGeom prst="line">
-            <a:avLst/>
-          </a:prstGeom>
-          <a:ln w="9525">
-            <a:solidFill>
-              <a:srgbClr val="8A95A1"/>
-            </a:solidFill>
-          </a:ln>
-        </p:spPr>
-      </p:cxnSp>
-      <p:cxnSp>
-        <p:nvCxnSpPr>
-          <p:cNvPr id="16" name="cpe|exhibit|connector|15"/>
-          <p:cNvCxnSpPr/>
-          <p:nvPr/>
-        </p:nvCxnSpPr>
-        <p:spPr>
-          <a:xfrm>
-            <a:off x="9293962" y="1874520"/>
-            <a:ext cx="0" cy="393192"/>
-          </a:xfrm>
-          <a:prstGeom prst="line">
-            <a:avLst/>
-          </a:prstGeom>
-          <a:ln w="9525">
-            <a:solidFill>
-              <a:srgbClr val="8A95A1"/>
-            </a:solidFill>
-          </a:ln>
-        </p:spPr>
-      </p:cxnSp>
-      <p:cxnSp>
-        <p:nvCxnSpPr>
-          <p:cNvPr id="17" name="cpe|exhibit|connector|16"/>
-          <p:cNvCxnSpPr/>
-          <p:nvPr/>
-        </p:nvCxnSpPr>
-        <p:spPr>
-          <a:xfrm>
-            <a:off x="9293962" y="1874520"/>
-            <a:ext cx="205740" cy="0"/>
-          </a:xfrm>
-          <a:prstGeom prst="line">
-            <a:avLst/>
-          </a:prstGeom>
-          <a:ln w="9525">
-            <a:solidFill>
-              <a:srgbClr val="8A95A1"/>
-            </a:solidFill>
-          </a:ln>
-        </p:spPr>
-      </p:cxnSp>
-      <p:sp>
-        <p:nvSpPr>
-          <p:cNvPr id="18" name="cpe|exhibit|fill|17"/>
-          <p:cNvSpPr/>
-          <p:nvPr/>
-        </p:nvSpPr>
-        <p:spPr>
-          <a:xfrm>
-            <a:off x="9499702" y="1567830"/>
-            <a:ext cx="2189074" cy="613380"/>
-          </a:xfrm>
-          <a:prstGeom prst="rect">
-            <a:avLst/>
-          </a:prstGeom>
-          <a:solidFill>
-            <a:srgbClr val="F4F6F9"/>
-          </a:solidFill>
-          <a:ln>
-            <a:noFill/>
-          </a:ln>
-        </p:spPr>
-        <p:txBody>
-          <a:bodyPr rtlCol="0" anchor="ctr" lIns="0" rIns="0" tIns="0" bIns="0"/>
-          <a:lstStyle/>
-          <a:p>
-            <a:pPr algn="ctr"/>
-          </a:p>
-        </p:txBody>
-      </p:sp>
-      <p:sp>
-        <p:nvSpPr>
-          <p:cNvPr id="19" name="cpe|exhibit|text|18"/>
-          <p:cNvSpPr txBox="1"/>
-          <p:nvPr/>
-        </p:nvSpPr>
-        <p:spPr>
-          <a:xfrm>
-            <a:off x="9572854" y="1586118"/>
-            <a:ext cx="2042770" cy="576804"/>
-          </a:xfrm>
-          <a:prstGeom prst="rect">
-            <a:avLst/>
-          </a:prstGeom>
-          <a:noFill/>
-        </p:spPr>
-        <p:txBody>
-          <a:bodyPr wrap="square" lIns="0" rIns="0" tIns="0" bIns="0" anchor="ctr">
-            <a:noAutofit/>
-          </a:bodyPr>
-          <a:lstStyle/>
-          <a:p>
-            <a:pPr algn="l">
-              <a:lnSpc>
-                <a:spcPct val="100000"/>
-              </a:lnSpc>
-            </a:pPr>
-            <a:r>
-              <a:rPr sz="1400" b="0">
-                <a:solidFill>
-                  <a:srgbClr val="1C2530"/>
-                </a:solidFill>
-                <a:latin typeface="Arial"/>
-              </a:rPr>
-              <a:t>Too many depots
-</a:t>
-            </a:r>
-            <a:r>
-              <a:rPr sz="1400" b="1">
-                <a:solidFill>
-                  <a:srgbClr val="1C2530"/>
-                </a:solidFill>
-                <a:latin typeface="Arial"/>
-              </a:rPr>
-              <a:t>€11M</a:t>
-            </a:r>
-          </a:p>
-        </p:txBody>
-      </p:sp>
-      <p:cxnSp>
-        <p:nvCxnSpPr>
-          <p:cNvPr id="20" name="cpe|exhibit|connector|19"/>
-          <p:cNvCxnSpPr/>
-          <p:nvPr/>
-        </p:nvCxnSpPr>
-        <p:spPr>
-          <a:xfrm>
-            <a:off x="9088222" y="2267712"/>
-            <a:ext cx="205740" cy="0"/>
-          </a:xfrm>
-          <a:prstGeom prst="line">
-            <a:avLst/>
-          </a:prstGeom>
-          <a:ln w="9525">
-            <a:solidFill>
-              <a:srgbClr val="8A95A1"/>
-            </a:solidFill>
-          </a:ln>
-        </p:spPr>
-      </p:cxnSp>
-      <p:cxnSp>
-        <p:nvCxnSpPr>
-          <p:cNvPr id="21" name="cpe|exhibit|connector|20"/>
-          <p:cNvCxnSpPr/>
-          <p:nvPr/>
-        </p:nvCxnSpPr>
-        <p:spPr>
-          <a:xfrm>
-            <a:off x="9293962" y="2267712"/>
-            <a:ext cx="0" cy="393192"/>
-          </a:xfrm>
-          <a:prstGeom prst="line">
-            <a:avLst/>
-          </a:prstGeom>
-          <a:ln w="9525">
-            <a:solidFill>
-              <a:srgbClr val="8A95A1"/>
-            </a:solidFill>
-          </a:ln>
-        </p:spPr>
-      </p:cxnSp>
-      <p:cxnSp>
-        <p:nvCxnSpPr>
-          <p:cNvPr id="22" name="cpe|exhibit|connector|21"/>
-          <p:cNvCxnSpPr/>
-          <p:nvPr/>
-        </p:nvCxnSpPr>
-        <p:spPr>
-          <a:xfrm>
-            <a:off x="9293962" y="2660904"/>
-            <a:ext cx="205740" cy="0"/>
-          </a:xfrm>
-          <a:prstGeom prst="line">
-            <a:avLst/>
-          </a:prstGeom>
-          <a:ln w="9525">
-            <a:solidFill>
-              <a:srgbClr val="8A95A1"/>
-            </a:solidFill>
-          </a:ln>
-        </p:spPr>
-      </p:cxnSp>
-      <p:sp>
-        <p:nvSpPr>
-          <p:cNvPr id="23" name="cpe|exhibit|fill|22"/>
-          <p:cNvSpPr/>
-          <p:nvPr/>
-        </p:nvSpPr>
-        <p:spPr>
-          <a:xfrm>
-            <a:off x="9499702" y="2354214"/>
-            <a:ext cx="2189074" cy="613380"/>
-          </a:xfrm>
-          <a:prstGeom prst="rect">
-            <a:avLst/>
-          </a:prstGeom>
-          <a:solidFill>
-            <a:srgbClr val="F4F6F9"/>
-          </a:solidFill>
-          <a:ln>
-            <a:noFill/>
-          </a:ln>
-        </p:spPr>
-        <p:txBody>
-          <a:bodyPr rtlCol="0" anchor="ctr" lIns="0" rIns="0" tIns="0" bIns="0"/>
-          <a:lstStyle/>
-          <a:p>
-            <a:pPr algn="ctr"/>
-          </a:p>
-        </p:txBody>
-      </p:sp>
-      <p:sp>
-        <p:nvSpPr>
-          <p:cNvPr id="24" name="cpe|exhibit|text|23"/>
-          <p:cNvSpPr txBox="1"/>
-          <p:nvPr/>
-        </p:nvSpPr>
-        <p:spPr>
-          <a:xfrm>
-            <a:off x="9572854" y="2372502"/>
-            <a:ext cx="2042770" cy="576804"/>
-          </a:xfrm>
-          <a:prstGeom prst="rect">
-            <a:avLst/>
-          </a:prstGeom>
-          <a:noFill/>
-        </p:spPr>
-        <p:txBody>
-          <a:bodyPr wrap="square" lIns="0" rIns="0" tIns="0" bIns="0" anchor="ctr">
-            <a:noAutofit/>
-          </a:bodyPr>
-          <a:lstStyle/>
-          <a:p>
-            <a:pPr algn="l">
-              <a:lnSpc>
-                <a:spcPct val="100000"/>
-              </a:lnSpc>
-            </a:pPr>
-            <a:r>
-              <a:rPr sz="1400" b="0">
-                <a:solidFill>
-                  <a:srgbClr val="1C2530"/>
-                </a:solidFill>
-                <a:latin typeface="Arial"/>
-              </a:rPr>
-              <a:t>Low truck fill
-</a:t>
-            </a:r>
-            <a:r>
-              <a:rPr sz="1400" b="1">
-                <a:solidFill>
-                  <a:srgbClr val="1C2530"/>
-                </a:solidFill>
-                <a:latin typeface="Arial"/>
-              </a:rPr>
-              <a:t>€8M</a:t>
-            </a:r>
-          </a:p>
-        </p:txBody>
-      </p:sp>
-      <p:cxnSp>
-        <p:nvCxnSpPr>
-          <p:cNvPr id="25" name="cpe|exhibit|connector|24"/>
-          <p:cNvCxnSpPr/>
-          <p:nvPr/>
-        </p:nvCxnSpPr>
-        <p:spPr>
-          <a:xfrm>
-            <a:off x="6487668" y="3840480"/>
-            <a:ext cx="205740" cy="0"/>
-          </a:xfrm>
-          <a:prstGeom prst="line">
-            <a:avLst/>
-          </a:prstGeom>
-          <a:ln w="9525">
-            <a:solidFill>
-              <a:srgbClr val="8A95A1"/>
-            </a:solidFill>
-          </a:ln>
-        </p:spPr>
-      </p:cxnSp>
-      <p:cxnSp>
-        <p:nvCxnSpPr>
-          <p:cNvPr id="26" name="cpe|exhibit|connector|25"/>
-          <p:cNvCxnSpPr/>
-          <p:nvPr/>
-        </p:nvCxnSpPr>
-        <p:spPr>
-          <a:xfrm>
-            <a:off x="6693408" y="3840480"/>
-            <a:ext cx="205740" cy="0"/>
-          </a:xfrm>
-          <a:prstGeom prst="line">
-            <a:avLst/>
-          </a:prstGeom>
-          <a:ln w="9525">
-            <a:solidFill>
-              <a:srgbClr val="8A95A1"/>
-            </a:solidFill>
-          </a:ln>
-        </p:spPr>
-      </p:cxnSp>
-      <p:sp>
-        <p:nvSpPr>
-          <p:cNvPr id="27" name="cpe|exhibit|fill|26"/>
-          <p:cNvSpPr/>
-          <p:nvPr/>
-        </p:nvSpPr>
-        <p:spPr>
-          <a:xfrm>
-            <a:off x="6899148" y="3533790"/>
-            <a:ext cx="2189074" cy="613380"/>
-          </a:xfrm>
-          <a:prstGeom prst="rect">
-            <a:avLst/>
-          </a:prstGeom>
-          <a:solidFill>
-            <a:srgbClr val="E08A00"/>
-          </a:solidFill>
-          <a:ln>
-            <a:noFill/>
-          </a:ln>
-        </p:spPr>
-        <p:txBody>
-          <a:bodyPr rtlCol="0" anchor="ctr" lIns="0" rIns="0" tIns="0" bIns="0"/>
-          <a:lstStyle/>
-          <a:p>
-            <a:pPr algn="ctr"/>
-          </a:p>
-        </p:txBody>
-      </p:sp>
-      <p:sp>
-        <p:nvSpPr>
-          <p:cNvPr id="28" name="cpe|exhibit|text|27"/>
-          <p:cNvSpPr txBox="1"/>
-          <p:nvPr/>
-        </p:nvSpPr>
-        <p:spPr>
-          <a:xfrm>
-            <a:off x="6972300" y="3552078"/>
-            <a:ext cx="2042770" cy="576804"/>
-          </a:xfrm>
-          <a:prstGeom prst="rect">
-            <a:avLst/>
-          </a:prstGeom>
-          <a:noFill/>
-        </p:spPr>
-        <p:txBody>
-          <a:bodyPr wrap="square" lIns="0" rIns="0" tIns="0" bIns="0" anchor="ctr">
-            <a:noAutofit/>
-          </a:bodyPr>
-          <a:lstStyle/>
-          <a:p>
-            <a:pPr algn="l">
-              <a:lnSpc>
-                <a:spcPct val="100000"/>
-              </a:lnSpc>
-            </a:pPr>
-            <a:r>
-              <a:rPr sz="1400" b="0">
-                <a:solidFill>
-                  <a:srgbClr val="1C2530"/>
-                </a:solidFill>
-                <a:latin typeface="Arial"/>
-              </a:rPr>
-              <a:t>Warehousing
-</a:t>
-            </a:r>
-            <a:r>
-              <a:rPr sz="1400" b="1">
-                <a:solidFill>
-                  <a:srgbClr val="1C2530"/>
-                </a:solidFill>
-                <a:latin typeface="Arial"/>
-              </a:rPr>
-              <a:t>€12M</a:t>
-            </a:r>
-          </a:p>
-        </p:txBody>
-      </p:sp>
-      <p:cxnSp>
-        <p:nvCxnSpPr>
-          <p:cNvPr id="29" name="cpe|exhibit|connector|28"/>
-          <p:cNvCxnSpPr/>
-          <p:nvPr/>
-        </p:nvCxnSpPr>
-        <p:spPr>
-          <a:xfrm>
-            <a:off x="9088222" y="3840480"/>
-            <a:ext cx="205740" cy="0"/>
-          </a:xfrm>
-          <a:prstGeom prst="line">
-            <a:avLst/>
-          </a:prstGeom>
-          <a:ln w="9525">
-            <a:solidFill>
-              <a:srgbClr val="8A95A1"/>
-            </a:solidFill>
-          </a:ln>
-        </p:spPr>
-      </p:cxnSp>
-      <p:cxnSp>
-        <p:nvCxnSpPr>
-          <p:cNvPr id="30" name="cpe|exhibit|connector|29"/>
-          <p:cNvCxnSpPr/>
-          <p:nvPr/>
-        </p:nvCxnSpPr>
-        <p:spPr>
-          <a:xfrm>
-            <a:off x="9293962" y="3447288"/>
-            <a:ext cx="0" cy="393192"/>
-          </a:xfrm>
-          <a:prstGeom prst="line">
-            <a:avLst/>
-          </a:prstGeom>
-          <a:ln w="9525">
-            <a:solidFill>
-              <a:srgbClr val="8A95A1"/>
-            </a:solidFill>
-          </a:ln>
-        </p:spPr>
-      </p:cxnSp>
-      <p:cxnSp>
-        <p:nvCxnSpPr>
-          <p:cNvPr id="31" name="cpe|exhibit|connector|30"/>
-          <p:cNvCxnSpPr/>
-          <p:nvPr/>
-        </p:nvCxnSpPr>
-        <p:spPr>
-          <a:xfrm>
-            <a:off x="9293962" y="3447288"/>
-            <a:ext cx="205740" cy="0"/>
-          </a:xfrm>
-          <a:prstGeom prst="line">
-            <a:avLst/>
-          </a:prstGeom>
-          <a:ln w="9525">
-            <a:solidFill>
-              <a:srgbClr val="8A95A1"/>
-            </a:solidFill>
-          </a:ln>
-        </p:spPr>
-      </p:cxnSp>
-      <p:sp>
-        <p:nvSpPr>
-          <p:cNvPr id="32" name="cpe|exhibit|fill|31"/>
-          <p:cNvSpPr/>
-          <p:nvPr/>
-        </p:nvSpPr>
-        <p:spPr>
-          <a:xfrm>
-            <a:off x="9499702" y="3140598"/>
-            <a:ext cx="2189074" cy="613380"/>
-          </a:xfrm>
-          <a:prstGeom prst="rect">
-            <a:avLst/>
-          </a:prstGeom>
-          <a:solidFill>
-            <a:srgbClr val="F4F6F9"/>
-          </a:solidFill>
-          <a:ln>
-            <a:noFill/>
-          </a:ln>
-        </p:spPr>
-        <p:txBody>
-          <a:bodyPr rtlCol="0" anchor="ctr" lIns="0" rIns="0" tIns="0" bIns="0"/>
-          <a:lstStyle/>
-          <a:p>
-            <a:pPr algn="ctr"/>
-          </a:p>
-        </p:txBody>
-      </p:sp>
-      <p:sp>
-        <p:nvSpPr>
-          <p:cNvPr id="33" name="cpe|exhibit|text|32"/>
-          <p:cNvSpPr txBox="1"/>
-          <p:nvPr/>
-        </p:nvSpPr>
-        <p:spPr>
-          <a:xfrm>
-            <a:off x="9572854" y="3158886"/>
-            <a:ext cx="2042770" cy="576804"/>
-          </a:xfrm>
-          <a:prstGeom prst="rect">
-            <a:avLst/>
-          </a:prstGeom>
-          <a:noFill/>
-        </p:spPr>
-        <p:txBody>
-          <a:bodyPr wrap="square" lIns="0" rIns="0" tIns="0" bIns="0" anchor="ctr">
-            <a:noAutofit/>
-          </a:bodyPr>
-          <a:lstStyle/>
-          <a:p>
-            <a:pPr algn="l">
-              <a:lnSpc>
-                <a:spcPct val="100000"/>
-              </a:lnSpc>
-            </a:pPr>
-            <a:r>
-              <a:rPr sz="1400" b="0">
-                <a:solidFill>
-                  <a:srgbClr val="1C2530"/>
-                </a:solidFill>
-                <a:latin typeface="Arial"/>
-              </a:rPr>
-              <a:t>Manual picking
-</a:t>
-            </a:r>
-            <a:r>
-              <a:rPr sz="1400" b="1">
-                <a:solidFill>
-                  <a:srgbClr val="1C2530"/>
-                </a:solidFill>
-                <a:latin typeface="Arial"/>
-              </a:rPr>
-              <a:t>€9M</a:t>
-            </a:r>
-          </a:p>
-        </p:txBody>
-      </p:sp>
-      <p:cxnSp>
-        <p:nvCxnSpPr>
-          <p:cNvPr id="34" name="cpe|exhibit|connector|33"/>
-          <p:cNvCxnSpPr/>
-          <p:nvPr/>
-        </p:nvCxnSpPr>
-        <p:spPr>
-          <a:xfrm>
-            <a:off x="9088222" y="3840480"/>
-            <a:ext cx="205740" cy="0"/>
-          </a:xfrm>
-          <a:prstGeom prst="line">
-            <a:avLst/>
-          </a:prstGeom>
-          <a:ln w="9525">
-            <a:solidFill>
-              <a:srgbClr val="8A95A1"/>
-            </a:solidFill>
-          </a:ln>
-        </p:spPr>
-      </p:cxnSp>
-      <p:cxnSp>
-        <p:nvCxnSpPr>
-          <p:cNvPr id="35" name="cpe|exhibit|connector|34"/>
-          <p:cNvCxnSpPr/>
-          <p:nvPr/>
-        </p:nvCxnSpPr>
-        <p:spPr>
-          <a:xfrm>
-            <a:off x="9293962" y="3840480"/>
-            <a:ext cx="0" cy="393192"/>
-          </a:xfrm>
-          <a:prstGeom prst="line">
-            <a:avLst/>
-          </a:prstGeom>
-          <a:ln w="9525">
-            <a:solidFill>
-              <a:srgbClr val="8A95A1"/>
-            </a:solidFill>
-          </a:ln>
-        </p:spPr>
-      </p:cxnSp>
-      <p:cxnSp>
-        <p:nvCxnSpPr>
-          <p:cNvPr id="36" name="cpe|exhibit|connector|35"/>
-          <p:cNvCxnSpPr/>
-          <p:nvPr/>
-        </p:nvCxnSpPr>
-        <p:spPr>
-          <a:xfrm>
-            <a:off x="9293962" y="4233672"/>
-            <a:ext cx="205740" cy="0"/>
-          </a:xfrm>
-          <a:prstGeom prst="line">
-            <a:avLst/>
-          </a:prstGeom>
-          <a:ln w="9525">
-            <a:solidFill>
-              <a:srgbClr val="8A95A1"/>
-            </a:solidFill>
-          </a:ln>
-        </p:spPr>
-      </p:cxnSp>
-      <p:sp>
-        <p:nvSpPr>
-          <p:cNvPr id="37" name="cpe|exhibit|fill|36"/>
-          <p:cNvSpPr/>
-          <p:nvPr/>
-        </p:nvSpPr>
-        <p:spPr>
-          <a:xfrm>
-            <a:off x="9499702" y="3926982"/>
-            <a:ext cx="2189074" cy="613380"/>
-          </a:xfrm>
-          <a:prstGeom prst="rect">
-            <a:avLst/>
-          </a:prstGeom>
-          <a:solidFill>
-            <a:srgbClr val="F4F6F9"/>
-          </a:solidFill>
-          <a:ln>
-            <a:noFill/>
-          </a:ln>
-        </p:spPr>
-        <p:txBody>
-          <a:bodyPr rtlCol="0" anchor="ctr" lIns="0" rIns="0" tIns="0" bIns="0"/>
-          <a:lstStyle/>
-          <a:p>
-            <a:pPr algn="ctr"/>
-          </a:p>
-        </p:txBody>
-      </p:sp>
-      <p:sp>
-        <p:nvSpPr>
-          <p:cNvPr id="38" name="cpe|exhibit|text|37"/>
-          <p:cNvSpPr txBox="1"/>
-          <p:nvPr/>
-        </p:nvSpPr>
-        <p:spPr>
-          <a:xfrm>
-            <a:off x="9572854" y="3945270"/>
-            <a:ext cx="2042770" cy="576804"/>
-          </a:xfrm>
-          <a:prstGeom prst="rect">
-            <a:avLst/>
-          </a:prstGeom>
-          <a:noFill/>
-        </p:spPr>
-        <p:txBody>
-          <a:bodyPr wrap="square" lIns="0" rIns="0" tIns="0" bIns="0" anchor="ctr">
-            <a:noAutofit/>
-          </a:bodyPr>
-          <a:lstStyle/>
-          <a:p>
-            <a:pPr algn="l">
-              <a:lnSpc>
-                <a:spcPct val="100000"/>
-              </a:lnSpc>
-            </a:pPr>
-            <a:r>
-              <a:rPr sz="1400" b="0">
-                <a:solidFill>
-                  <a:srgbClr val="1C2530"/>
-                </a:solidFill>
-                <a:latin typeface="Arial"/>
-              </a:rPr>
-              <a:t>Overtime
-</a:t>
-            </a:r>
-            <a:r>
-              <a:rPr sz="1400" b="1">
-                <a:solidFill>
-                  <a:srgbClr val="1C2530"/>
-                </a:solidFill>
-                <a:latin typeface="Arial"/>
-              </a:rPr>
-              <a:t>€3M</a:t>
-            </a:r>
-          </a:p>
-        </p:txBody>
-      </p:sp>
-      <p:cxnSp>
-        <p:nvCxnSpPr>
-          <p:cNvPr id="39" name="cpe|exhibit|connector|38"/>
-          <p:cNvCxnSpPr/>
-          <p:nvPr/>
-        </p:nvCxnSpPr>
-        <p:spPr>
-          <a:xfrm>
-            <a:off x="6487668" y="3840480"/>
-            <a:ext cx="205740" cy="0"/>
-          </a:xfrm>
-          <a:prstGeom prst="line">
-            <a:avLst/>
-          </a:prstGeom>
-          <a:ln w="9525">
-            <a:solidFill>
-              <a:srgbClr val="8A95A1"/>
-            </a:solidFill>
-          </a:ln>
-        </p:spPr>
-      </p:cxnSp>
-      <p:cxnSp>
-        <p:nvCxnSpPr>
-          <p:cNvPr id="40" name="cpe|exhibit|connector|39"/>
-          <p:cNvCxnSpPr/>
-          <p:nvPr/>
-        </p:nvCxnSpPr>
-        <p:spPr>
-          <a:xfrm>
-            <a:off x="6693408" y="3840480"/>
-            <a:ext cx="0" cy="1572768"/>
-          </a:xfrm>
-          <a:prstGeom prst="line">
-            <a:avLst/>
-          </a:prstGeom>
-          <a:ln w="9525">
-            <a:solidFill>
-              <a:srgbClr val="8A95A1"/>
-            </a:solidFill>
-          </a:ln>
-        </p:spPr>
-      </p:cxnSp>
-      <p:cxnSp>
-        <p:nvCxnSpPr>
-          <p:cNvPr id="41" name="cpe|exhibit|connector|40"/>
-          <p:cNvCxnSpPr/>
-          <p:nvPr/>
-        </p:nvCxnSpPr>
-        <p:spPr>
-          <a:xfrm>
-            <a:off x="6693408" y="5413248"/>
-            <a:ext cx="205740" cy="0"/>
-          </a:xfrm>
-          <a:prstGeom prst="line">
-            <a:avLst/>
-          </a:prstGeom>
-          <a:ln w="9525">
-            <a:solidFill>
-              <a:srgbClr val="8A95A1"/>
-            </a:solidFill>
-          </a:ln>
-        </p:spPr>
-      </p:cxnSp>
-      <p:sp>
-        <p:nvSpPr>
-          <p:cNvPr id="42" name="cpe|exhibit|fill|41"/>
-          <p:cNvSpPr/>
-          <p:nvPr/>
-        </p:nvSpPr>
-        <p:spPr>
-          <a:xfrm>
-            <a:off x="6899148" y="5106558"/>
-            <a:ext cx="2189074" cy="613380"/>
-          </a:xfrm>
-          <a:prstGeom prst="rect">
-            <a:avLst/>
-          </a:prstGeom>
-          <a:solidFill>
-            <a:srgbClr val="F4F6F9"/>
-          </a:solidFill>
-          <a:ln>
-            <a:noFill/>
-          </a:ln>
-        </p:spPr>
-        <p:txBody>
-          <a:bodyPr rtlCol="0" anchor="ctr" lIns="0" rIns="0" tIns="0" bIns="0"/>
-          <a:lstStyle/>
-          <a:p>
-            <a:pPr algn="ctr"/>
-          </a:p>
-        </p:txBody>
-      </p:sp>
-      <p:sp>
-        <p:nvSpPr>
-          <p:cNvPr id="43" name="cpe|exhibit|text|42"/>
-          <p:cNvSpPr txBox="1"/>
-          <p:nvPr/>
-        </p:nvSpPr>
-        <p:spPr>
-          <a:xfrm>
-            <a:off x="6972300" y="5124846"/>
-            <a:ext cx="2042770" cy="576804"/>
-          </a:xfrm>
-          <a:prstGeom prst="rect">
-            <a:avLst/>
-          </a:prstGeom>
-          <a:noFill/>
-        </p:spPr>
-        <p:txBody>
-          <a:bodyPr wrap="square" lIns="0" rIns="0" tIns="0" bIns="0" anchor="ctr">
-            <a:noAutofit/>
-          </a:bodyPr>
-          <a:lstStyle/>
-          <a:p>
-            <a:pPr algn="l">
-              <a:lnSpc>
-                <a:spcPct val="100000"/>
-              </a:lnSpc>
-            </a:pPr>
-            <a:r>
-              <a:rPr sz="1400" b="0">
-                <a:solidFill>
-                  <a:srgbClr val="1C2530"/>
-                </a:solidFill>
-                <a:latin typeface="Arial"/>
-              </a:rPr>
-              <a:t>Customer terms
-</a:t>
-            </a:r>
-            <a:r>
-              <a:rPr sz="1400" b="1">
-                <a:solidFill>
-                  <a:srgbClr val="1C2530"/>
-                </a:solidFill>
-                <a:latin typeface="Arial"/>
-              </a:rPr>
-              <a:t>€13M</a:t>
-            </a:r>
-          </a:p>
-        </p:txBody>
-      </p:sp>
-      <p:cxnSp>
-        <p:nvCxnSpPr>
-          <p:cNvPr id="44" name="cpe|exhibit|connector|43"/>
-          <p:cNvCxnSpPr/>
-          <p:nvPr/>
-        </p:nvCxnSpPr>
-        <p:spPr>
-          <a:xfrm>
-            <a:off x="9088222" y="5413248"/>
-            <a:ext cx="205740" cy="0"/>
-          </a:xfrm>
-          <a:prstGeom prst="line">
-            <a:avLst/>
-          </a:prstGeom>
-          <a:ln w="9525">
-            <a:solidFill>
-              <a:srgbClr val="8A95A1"/>
-            </a:solidFill>
-          </a:ln>
-        </p:spPr>
-      </p:cxnSp>
-      <p:cxnSp>
-        <p:nvCxnSpPr>
-          <p:cNvPr id="45" name="cpe|exhibit|connector|44"/>
-          <p:cNvCxnSpPr/>
-          <p:nvPr/>
-        </p:nvCxnSpPr>
-        <p:spPr>
-          <a:xfrm>
-            <a:off x="9293962" y="5020056"/>
-            <a:ext cx="0" cy="393192"/>
-          </a:xfrm>
-          <a:prstGeom prst="line">
-            <a:avLst/>
-          </a:prstGeom>
-          <a:ln w="9525">
-            <a:solidFill>
-              <a:srgbClr val="8A95A1"/>
-            </a:solidFill>
-          </a:ln>
-        </p:spPr>
-      </p:cxnSp>
-      <p:cxnSp>
-        <p:nvCxnSpPr>
-          <p:cNvPr id="46" name="cpe|exhibit|connector|45"/>
-          <p:cNvCxnSpPr/>
-          <p:nvPr/>
-        </p:nvCxnSpPr>
-        <p:spPr>
-          <a:xfrm>
-            <a:off x="9293962" y="5020056"/>
-            <a:ext cx="205740" cy="0"/>
-          </a:xfrm>
-          <a:prstGeom prst="line">
-            <a:avLst/>
-          </a:prstGeom>
-          <a:ln w="9525">
-            <a:solidFill>
-              <a:srgbClr val="8A95A1"/>
-            </a:solidFill>
-          </a:ln>
-        </p:spPr>
-      </p:cxnSp>
-      <p:sp>
-        <p:nvSpPr>
-          <p:cNvPr id="47" name="cpe|exhibit|fill|46"/>
-          <p:cNvSpPr/>
-          <p:nvPr/>
-        </p:nvSpPr>
-        <p:spPr>
-          <a:xfrm>
-            <a:off x="9499702" y="4713366"/>
-            <a:ext cx="2189074" cy="613380"/>
-          </a:xfrm>
-          <a:prstGeom prst="rect">
-            <a:avLst/>
-          </a:prstGeom>
-          <a:solidFill>
-            <a:srgbClr val="F4F6F9"/>
-          </a:solidFill>
-          <a:ln>
-            <a:noFill/>
-          </a:ln>
-        </p:spPr>
-        <p:txBody>
-          <a:bodyPr rtlCol="0" anchor="ctr" lIns="0" rIns="0" tIns="0" bIns="0"/>
-          <a:lstStyle/>
-          <a:p>
-            <a:pPr algn="ctr"/>
-          </a:p>
-        </p:txBody>
-      </p:sp>
-      <p:sp>
-        <p:nvSpPr>
-          <p:cNvPr id="48" name="cpe|exhibit|text|47"/>
-          <p:cNvSpPr txBox="1"/>
-          <p:nvPr/>
-        </p:nvSpPr>
-        <p:spPr>
-          <a:xfrm>
-            <a:off x="9572854" y="4731654"/>
-            <a:ext cx="2042770" cy="576804"/>
-          </a:xfrm>
-          <a:prstGeom prst="rect">
-            <a:avLst/>
-          </a:prstGeom>
-          <a:noFill/>
-        </p:spPr>
-        <p:txBody>
-          <a:bodyPr wrap="square" lIns="0" rIns="0" tIns="0" bIns="0" anchor="ctr">
-            <a:noAutofit/>
-          </a:bodyPr>
-          <a:lstStyle/>
-          <a:p>
-            <a:pPr algn="l">
-              <a:lnSpc>
-                <a:spcPct val="100000"/>
-              </a:lnSpc>
-            </a:pPr>
-            <a:r>
-              <a:rPr sz="1400" b="0">
-                <a:solidFill>
-                  <a:srgbClr val="1C2530"/>
-                </a:solidFill>
-                <a:latin typeface="Arial"/>
-              </a:rPr>
-              <a:t>Small drops
-</a:t>
-            </a:r>
-            <a:r>
-              <a:rPr sz="1400" b="1">
-                <a:solidFill>
-                  <a:srgbClr val="1C2530"/>
-                </a:solidFill>
-                <a:latin typeface="Arial"/>
-              </a:rPr>
-              <a:t>€8M</a:t>
-            </a:r>
-          </a:p>
-        </p:txBody>
-      </p:sp>
-      <p:cxnSp>
-        <p:nvCxnSpPr>
-          <p:cNvPr id="49" name="cpe|exhibit|connector|48"/>
-          <p:cNvCxnSpPr/>
-          <p:nvPr/>
-        </p:nvCxnSpPr>
-        <p:spPr>
-          <a:xfrm>
-            <a:off x="9088222" y="5413248"/>
-            <a:ext cx="205740" cy="0"/>
-          </a:xfrm>
-          <a:prstGeom prst="line">
-            <a:avLst/>
-          </a:prstGeom>
-          <a:ln w="9525">
-            <a:solidFill>
-              <a:srgbClr val="8A95A1"/>
-            </a:solidFill>
-          </a:ln>
-        </p:spPr>
-      </p:cxnSp>
-      <p:cxnSp>
-        <p:nvCxnSpPr>
-          <p:cNvPr id="50" name="cpe|exhibit|connector|49"/>
-          <p:cNvCxnSpPr/>
-          <p:nvPr/>
-        </p:nvCxnSpPr>
-        <p:spPr>
-          <a:xfrm>
-            <a:off x="9293962" y="5413248"/>
-            <a:ext cx="0" cy="393192"/>
-          </a:xfrm>
-          <a:prstGeom prst="line">
-            <a:avLst/>
-          </a:prstGeom>
-          <a:ln w="9525">
-            <a:solidFill>
-              <a:srgbClr val="8A95A1"/>
-            </a:solidFill>
-          </a:ln>
-        </p:spPr>
-      </p:cxnSp>
-      <p:cxnSp>
-        <p:nvCxnSpPr>
-          <p:cNvPr id="51" name="cpe|exhibit|connector|50"/>
-          <p:cNvCxnSpPr/>
-          <p:nvPr/>
-        </p:nvCxnSpPr>
-        <p:spPr>
-          <a:xfrm>
-            <a:off x="9293962" y="5806440"/>
-            <a:ext cx="205740" cy="0"/>
-          </a:xfrm>
-          <a:prstGeom prst="line">
-            <a:avLst/>
-          </a:prstGeom>
-          <a:ln w="9525">
-            <a:solidFill>
-              <a:srgbClr val="8A95A1"/>
-            </a:solidFill>
-          </a:ln>
-        </p:spPr>
-      </p:cxnSp>
-      <p:sp>
-        <p:nvSpPr>
-          <p:cNvPr id="52" name="cpe|exhibit|fill|51"/>
-          <p:cNvSpPr/>
-          <p:nvPr/>
-        </p:nvSpPr>
-        <p:spPr>
-          <a:xfrm>
-            <a:off x="9499702" y="5499750"/>
-            <a:ext cx="2189074" cy="613380"/>
-          </a:xfrm>
-          <a:prstGeom prst="rect">
-            <a:avLst/>
-          </a:prstGeom>
-          <a:solidFill>
-            <a:srgbClr val="F4F6F9"/>
-          </a:solidFill>
-          <a:ln>
-            <a:noFill/>
-          </a:ln>
-        </p:spPr>
-        <p:txBody>
-          <a:bodyPr rtlCol="0" anchor="ctr" lIns="0" rIns="0" tIns="0" bIns="0"/>
-          <a:lstStyle/>
-          <a:p>
-            <a:pPr algn="ctr"/>
-          </a:p>
-        </p:txBody>
-      </p:sp>
-      <p:sp>
-        <p:nvSpPr>
-          <p:cNvPr id="53" name="cpe|exhibit|text|52"/>
-          <p:cNvSpPr txBox="1"/>
-          <p:nvPr/>
-        </p:nvSpPr>
-        <p:spPr>
-          <a:xfrm>
-            <a:off x="9572854" y="5518038"/>
-            <a:ext cx="2042770" cy="576804"/>
-          </a:xfrm>
-          <a:prstGeom prst="rect">
-            <a:avLst/>
-          </a:prstGeom>
-          <a:noFill/>
-        </p:spPr>
-        <p:txBody>
-          <a:bodyPr wrap="square" lIns="0" rIns="0" tIns="0" bIns="0" anchor="ctr">
-            <a:noAutofit/>
-          </a:bodyPr>
-          <a:lstStyle/>
-          <a:p>
-            <a:pPr algn="l">
-              <a:lnSpc>
-                <a:spcPct val="100000"/>
-              </a:lnSpc>
-            </a:pPr>
-            <a:r>
-              <a:rPr sz="1400" b="0">
-                <a:solidFill>
-                  <a:srgbClr val="1C2530"/>
-                </a:solidFill>
-                <a:latin typeface="Arial"/>
-              </a:rPr>
-              <a:t>Free returns
-</a:t>
-            </a:r>
-            <a:r>
-              <a:rPr sz="1400" b="1">
-                <a:solidFill>
-                  <a:srgbClr val="1C2530"/>
-                </a:solidFill>
-                <a:latin typeface="Arial"/>
-              </a:rPr>
-              <a:t>€5M</a:t>
             </a:r>
           </a:p>
         </p:txBody>

--- a/examples/gallery/output/deck.pptx
+++ b/examples/gallery/output/deck.pptx
@@ -19053,24 +19053,45 @@
           </a:p>
         </p:txBody>
       </p:sp>
-      <p:sp>
-        <p:nvSpPr>
-          <p:cNvPr id="4" name="cpe|text|text|3"/>
-          <p:cNvSpPr txBox="1"/>
-          <p:nvPr/>
-        </p:nvSpPr>
-        <p:spPr>
-          <a:xfrm>
-            <a:off x="1451839" y="1481328"/>
-            <a:ext cx="731520" cy="621792"/>
-          </a:xfrm>
-          <a:prstGeom prst="rect">
-            <a:avLst/>
-          </a:prstGeom>
-          <a:noFill/>
-        </p:spPr>
-        <p:txBody>
-          <a:bodyPr wrap="square" lIns="0" rIns="0" tIns="0" bIns="0" anchor="t">
+      <p:cxnSp>
+        <p:nvCxnSpPr>
+          <p:cNvPr id="4" name="cpe|text|line|3"/>
+          <p:cNvCxnSpPr/>
+          <p:nvPr/>
+        </p:nvCxnSpPr>
+        <p:spPr>
+          <a:xfrm>
+            <a:off x="502920" y="2331903"/>
+            <a:ext cx="8339099" cy="0"/>
+          </a:xfrm>
+          <a:prstGeom prst="line">
+            <a:avLst/>
+          </a:prstGeom>
+          <a:ln w="9525">
+            <a:solidFill>
+              <a:srgbClr val="B6C0CB"/>
+            </a:solidFill>
+          </a:ln>
+        </p:spPr>
+      </p:cxnSp>
+      <p:sp>
+        <p:nvSpPr>
+          <p:cNvPr id="5" name="cpe|text|text|4"/>
+          <p:cNvSpPr txBox="1"/>
+          <p:nvPr/>
+        </p:nvSpPr>
+        <p:spPr>
+          <a:xfrm>
+            <a:off x="502920" y="2441631"/>
+            <a:ext cx="822960" cy="722376"/>
+          </a:xfrm>
+          <a:prstGeom prst="rect">
+            <a:avLst/>
+          </a:prstGeom>
+          <a:noFill/>
+        </p:spPr>
+        <p:txBody>
+          <a:bodyPr wrap="square" lIns="0" rIns="0" tIns="0" bIns="0" anchor="ctr">
             <a:noAutofit/>
           </a:bodyPr>
           <a:lstStyle/>
@@ -19081,9 +19102,9 @@
               </a:lnSpc>
             </a:pPr>
             <a:r>
-              <a:rPr sz="2000" b="1">
-                <a:solidFill>
-                  <a:srgbClr val="13294B"/>
+              <a:rPr sz="2400" b="1">
+                <a:solidFill>
+                  <a:srgbClr val="CC8005"/>
                 </a:solidFill>
                 <a:latin typeface="Arial"/>
               </a:rPr>
@@ -19094,22 +19115,22 @@
       </p:sp>
       <p:sp>
         <p:nvSpPr>
-          <p:cNvPr id="5" name="cpe|text|text|4"/>
-          <p:cNvSpPr txBox="1"/>
-          <p:nvPr/>
-        </p:nvSpPr>
-        <p:spPr>
-          <a:xfrm>
-            <a:off x="2274799" y="1499616"/>
-            <a:ext cx="7516139" cy="603504"/>
-          </a:xfrm>
-          <a:prstGeom prst="rect">
-            <a:avLst/>
-          </a:prstGeom>
-          <a:noFill/>
-        </p:spPr>
-        <p:txBody>
-          <a:bodyPr wrap="square" lIns="0" rIns="0" tIns="0" bIns="0" anchor="t">
+          <p:cNvPr id="6" name="cpe|text|text|5"/>
+          <p:cNvSpPr txBox="1"/>
+          <p:nvPr/>
+        </p:nvSpPr>
+        <p:spPr>
+          <a:xfrm>
+            <a:off x="1417320" y="2423343"/>
+            <a:ext cx="7424699" cy="758952"/>
+          </a:xfrm>
+          <a:prstGeom prst="rect">
+            <a:avLst/>
+          </a:prstGeom>
+          <a:noFill/>
+        </p:spPr>
+        <p:txBody>
+          <a:bodyPr wrap="square" lIns="0" rIns="0" tIns="0" bIns="0" anchor="ctr">
             <a:noAutofit/>
           </a:bodyPr>
           <a:lstStyle/>
@@ -19123,7 +19144,7 @@
               </a:spcAft>
             </a:pPr>
             <a:r>
-              <a:rPr sz="1600" b="1">
+              <a:rPr sz="1800" b="1">
                 <a:solidFill>
                   <a:srgbClr val="13294B"/>
                 </a:solidFill>
@@ -19139,7 +19160,7 @@
               </a:lnSpc>
             </a:pPr>
             <a:r>
-              <a:rPr sz="1200" b="0">
+              <a:rPr sz="1300" b="0">
                 <a:solidFill>
                   <a:srgbClr val="5B6776"/>
                 </a:solidFill>
@@ -19152,13 +19173,13 @@
       </p:sp>
       <p:cxnSp>
         <p:nvCxnSpPr>
-          <p:cNvPr id="6" name="cpe|text|line|5"/>
+          <p:cNvPr id="7" name="cpe|text|line|6"/>
           <p:cNvCxnSpPr/>
           <p:nvPr/>
         </p:nvCxnSpPr>
         <p:spPr>
           <a:xfrm>
-            <a:off x="1451839" y="2157984"/>
+            <a:off x="502920" y="3200583"/>
             <a:ext cx="8339099" cy="0"/>
           </a:xfrm>
           <a:prstGeom prst="line">
@@ -19173,22 +19194,22 @@
       </p:cxnSp>
       <p:sp>
         <p:nvSpPr>
-          <p:cNvPr id="7" name="cpe|text|text|6"/>
-          <p:cNvSpPr txBox="1"/>
-          <p:nvPr/>
-        </p:nvSpPr>
-        <p:spPr>
-          <a:xfrm>
-            <a:off x="1451839" y="2194560"/>
-            <a:ext cx="731520" cy="621792"/>
-          </a:xfrm>
-          <a:prstGeom prst="rect">
-            <a:avLst/>
-          </a:prstGeom>
-          <a:noFill/>
-        </p:spPr>
-        <p:txBody>
-          <a:bodyPr wrap="square" lIns="0" rIns="0" tIns="0" bIns="0" anchor="t">
+          <p:cNvPr id="8" name="cpe|text|text|7"/>
+          <p:cNvSpPr txBox="1"/>
+          <p:nvPr/>
+        </p:nvSpPr>
+        <p:spPr>
+          <a:xfrm>
+            <a:off x="502920" y="3310311"/>
+            <a:ext cx="822960" cy="722376"/>
+          </a:xfrm>
+          <a:prstGeom prst="rect">
+            <a:avLst/>
+          </a:prstGeom>
+          <a:noFill/>
+        </p:spPr>
+        <p:txBody>
+          <a:bodyPr wrap="square" lIns="0" rIns="0" tIns="0" bIns="0" anchor="ctr">
             <a:noAutofit/>
           </a:bodyPr>
           <a:lstStyle/>
@@ -19199,9 +19220,9 @@
               </a:lnSpc>
             </a:pPr>
             <a:r>
-              <a:rPr sz="2000" b="1">
-                <a:solidFill>
-                  <a:srgbClr val="13294B"/>
+              <a:rPr sz="2400" b="1">
+                <a:solidFill>
+                  <a:srgbClr val="CC8005"/>
                 </a:solidFill>
                 <a:latin typeface="Arial"/>
               </a:rPr>
@@ -19212,22 +19233,22 @@
       </p:sp>
       <p:sp>
         <p:nvSpPr>
-          <p:cNvPr id="8" name="cpe|text|text|7"/>
-          <p:cNvSpPr txBox="1"/>
-          <p:nvPr/>
-        </p:nvSpPr>
-        <p:spPr>
-          <a:xfrm>
-            <a:off x="2274799" y="2212848"/>
-            <a:ext cx="7516139" cy="603504"/>
-          </a:xfrm>
-          <a:prstGeom prst="rect">
-            <a:avLst/>
-          </a:prstGeom>
-          <a:noFill/>
-        </p:spPr>
-        <p:txBody>
-          <a:bodyPr wrap="square" lIns="0" rIns="0" tIns="0" bIns="0" anchor="t">
+          <p:cNvPr id="9" name="cpe|text|text|8"/>
+          <p:cNvSpPr txBox="1"/>
+          <p:nvPr/>
+        </p:nvSpPr>
+        <p:spPr>
+          <a:xfrm>
+            <a:off x="1417320" y="3292023"/>
+            <a:ext cx="7424699" cy="758952"/>
+          </a:xfrm>
+          <a:prstGeom prst="rect">
+            <a:avLst/>
+          </a:prstGeom>
+          <a:noFill/>
+        </p:spPr>
+        <p:txBody>
+          <a:bodyPr wrap="square" lIns="0" rIns="0" tIns="0" bIns="0" anchor="ctr">
             <a:noAutofit/>
           </a:bodyPr>
           <a:lstStyle/>
@@ -19241,7 +19262,7 @@
               </a:spcAft>
             </a:pPr>
             <a:r>
-              <a:rPr sz="1600" b="1">
+              <a:rPr sz="1800" b="1">
                 <a:solidFill>
                   <a:srgbClr val="13294B"/>
                 </a:solidFill>
@@ -19257,7 +19278,7 @@
               </a:lnSpc>
             </a:pPr>
             <a:r>
-              <a:rPr sz="1200" b="0">
+              <a:rPr sz="1300" b="0">
                 <a:solidFill>
                   <a:srgbClr val="5B6776"/>
                 </a:solidFill>
@@ -19270,13 +19291,13 @@
       </p:sp>
       <p:cxnSp>
         <p:nvCxnSpPr>
-          <p:cNvPr id="9" name="cpe|text|line|8"/>
+          <p:cNvPr id="10" name="cpe|text|line|9"/>
           <p:cNvCxnSpPr/>
           <p:nvPr/>
         </p:nvCxnSpPr>
         <p:spPr>
           <a:xfrm>
-            <a:off x="1451839" y="2871216"/>
+            <a:off x="502920" y="4069263"/>
             <a:ext cx="8339099" cy="0"/>
           </a:xfrm>
           <a:prstGeom prst="line">
@@ -19291,22 +19312,22 @@
       </p:cxnSp>
       <p:sp>
         <p:nvSpPr>
-          <p:cNvPr id="10" name="cpe|text|text|9"/>
-          <p:cNvSpPr txBox="1"/>
-          <p:nvPr/>
-        </p:nvSpPr>
-        <p:spPr>
-          <a:xfrm>
-            <a:off x="1451839" y="2907792"/>
-            <a:ext cx="731520" cy="621792"/>
-          </a:xfrm>
-          <a:prstGeom prst="rect">
-            <a:avLst/>
-          </a:prstGeom>
-          <a:noFill/>
-        </p:spPr>
-        <p:txBody>
-          <a:bodyPr wrap="square" lIns="0" rIns="0" tIns="0" bIns="0" anchor="t">
+          <p:cNvPr id="11" name="cpe|text|text|10"/>
+          <p:cNvSpPr txBox="1"/>
+          <p:nvPr/>
+        </p:nvSpPr>
+        <p:spPr>
+          <a:xfrm>
+            <a:off x="502920" y="4178991"/>
+            <a:ext cx="822960" cy="722376"/>
+          </a:xfrm>
+          <a:prstGeom prst="rect">
+            <a:avLst/>
+          </a:prstGeom>
+          <a:noFill/>
+        </p:spPr>
+        <p:txBody>
+          <a:bodyPr wrap="square" lIns="0" rIns="0" tIns="0" bIns="0" anchor="ctr">
             <a:noAutofit/>
           </a:bodyPr>
           <a:lstStyle/>
@@ -19317,9 +19338,9 @@
               </a:lnSpc>
             </a:pPr>
             <a:r>
-              <a:rPr sz="2000" b="1">
-                <a:solidFill>
-                  <a:srgbClr val="13294B"/>
+              <a:rPr sz="2400" b="1">
+                <a:solidFill>
+                  <a:srgbClr val="CC8005"/>
                 </a:solidFill>
                 <a:latin typeface="Arial"/>
               </a:rPr>
@@ -19330,22 +19351,22 @@
       </p:sp>
       <p:sp>
         <p:nvSpPr>
-          <p:cNvPr id="11" name="cpe|text|text|10"/>
-          <p:cNvSpPr txBox="1"/>
-          <p:nvPr/>
-        </p:nvSpPr>
-        <p:spPr>
-          <a:xfrm>
-            <a:off x="2274799" y="2926080"/>
-            <a:ext cx="7516139" cy="603504"/>
-          </a:xfrm>
-          <a:prstGeom prst="rect">
-            <a:avLst/>
-          </a:prstGeom>
-          <a:noFill/>
-        </p:spPr>
-        <p:txBody>
-          <a:bodyPr wrap="square" lIns="0" rIns="0" tIns="0" bIns="0" anchor="t">
+          <p:cNvPr id="12" name="cpe|text|text|11"/>
+          <p:cNvSpPr txBox="1"/>
+          <p:nvPr/>
+        </p:nvSpPr>
+        <p:spPr>
+          <a:xfrm>
+            <a:off x="1417320" y="4160703"/>
+            <a:ext cx="7424699" cy="758952"/>
+          </a:xfrm>
+          <a:prstGeom prst="rect">
+            <a:avLst/>
+          </a:prstGeom>
+          <a:noFill/>
+        </p:spPr>
+        <p:txBody>
+          <a:bodyPr wrap="square" lIns="0" rIns="0" tIns="0" bIns="0" anchor="ctr">
             <a:noAutofit/>
           </a:bodyPr>
           <a:lstStyle/>
@@ -19359,7 +19380,7 @@
               </a:spcAft>
             </a:pPr>
             <a:r>
-              <a:rPr sz="1600" b="1">
+              <a:rPr sz="1800" b="1">
                 <a:solidFill>
                   <a:srgbClr val="13294B"/>
                 </a:solidFill>
@@ -19375,7 +19396,7 @@
               </a:lnSpc>
             </a:pPr>
             <a:r>
-              <a:rPr sz="1200" b="0">
+              <a:rPr sz="1300" b="0">
                 <a:solidFill>
                   <a:srgbClr val="5B6776"/>
                 </a:solidFill>
@@ -19388,13 +19409,13 @@
       </p:sp>
       <p:cxnSp>
         <p:nvCxnSpPr>
-          <p:cNvPr id="12" name="cpe|text|line|11"/>
+          <p:cNvPr id="13" name="cpe|text|line|12"/>
           <p:cNvCxnSpPr/>
           <p:nvPr/>
         </p:nvCxnSpPr>
         <p:spPr>
           <a:xfrm>
-            <a:off x="1451839" y="3584448"/>
+            <a:off x="502920" y="4937943"/>
             <a:ext cx="8339099" cy="0"/>
           </a:xfrm>
           <a:prstGeom prst="line">
@@ -24158,7 +24179,7 @@
         </p:nvSpPr>
         <p:spPr>
           <a:xfrm>
-            <a:off x="502920" y="2665074"/>
+            <a:off x="502920" y="2892421"/>
             <a:ext cx="822960" cy="64008"/>
           </a:xfrm>
           <a:prstGeom prst="rect">
@@ -24187,8 +24208,8 @@
         </p:nvSpPr>
         <p:spPr>
           <a:xfrm>
-            <a:off x="502920" y="2847954"/>
-            <a:ext cx="9288018" cy="1550822"/>
+            <a:off x="502920" y="3139309"/>
+            <a:ext cx="9288018" cy="1028700"/>
           </a:xfrm>
           <a:prstGeom prst="rect">
             <a:avLst/>
@@ -24226,8 +24247,8 @@
         </p:nvSpPr>
         <p:spPr>
           <a:xfrm>
-            <a:off x="502920" y="4460809"/>
-            <a:ext cx="7894815" cy="930493"/>
+            <a:off x="502920" y="4350889"/>
+            <a:ext cx="7894815" cy="345186"/>
           </a:xfrm>
           <a:prstGeom prst="rect">
             <a:avLst/>
@@ -24440,15 +24461,15 @@
         <p:spPr>
           <a:xfrm>
             <a:off x="502920" y="1517904"/>
-            <a:ext cx="1325880" cy="411480"/>
-          </a:xfrm>
-          <a:prstGeom prst="rect">
-            <a:avLst/>
-          </a:prstGeom>
-          <a:noFill/>
-        </p:spPr>
-        <p:txBody>
-          <a:bodyPr wrap="square" lIns="0" rIns="0" tIns="0" bIns="0" anchor="t">
+            <a:ext cx="1325880" cy="1408176"/>
+          </a:xfrm>
+          <a:prstGeom prst="rect">
+            <a:avLst/>
+          </a:prstGeom>
+          <a:noFill/>
+        </p:spPr>
+        <p:txBody>
+          <a:bodyPr wrap="square" lIns="0" rIns="0" tIns="0" bIns="0" anchor="ctr">
             <a:noAutofit/>
           </a:bodyPr>
           <a:lstStyle/>
@@ -24487,7 +24508,7 @@
           <a:noFill/>
         </p:spPr>
         <p:txBody>
-          <a:bodyPr wrap="square" lIns="0" rIns="0" tIns="0" bIns="0" anchor="t">
+          <a:bodyPr wrap="square" lIns="0" rIns="0" tIns="0" bIns="0" anchor="ctr">
             <a:noAutofit/>
           </a:bodyPr>
           <a:lstStyle/>
@@ -24526,7 +24547,7 @@
           <a:noFill/>
         </p:spPr>
         <p:txBody>
-          <a:bodyPr wrap="square" lIns="0" rIns="0" tIns="0" bIns="0" anchor="t">
+          <a:bodyPr wrap="square" lIns="0" rIns="0" tIns="0" bIns="0" anchor="ctr">
             <a:noAutofit/>
           </a:bodyPr>
           <a:lstStyle/>
@@ -24578,15 +24599,15 @@
         <p:spPr>
           <a:xfrm>
             <a:off x="502920" y="3136392"/>
-            <a:ext cx="1325880" cy="411480"/>
-          </a:xfrm>
-          <a:prstGeom prst="rect">
-            <a:avLst/>
-          </a:prstGeom>
-          <a:noFill/>
-        </p:spPr>
-        <p:txBody>
-          <a:bodyPr wrap="square" lIns="0" rIns="0" tIns="0" bIns="0" anchor="t">
+            <a:ext cx="1325880" cy="1408176"/>
+          </a:xfrm>
+          <a:prstGeom prst="rect">
+            <a:avLst/>
+          </a:prstGeom>
+          <a:noFill/>
+        </p:spPr>
+        <p:txBody>
+          <a:bodyPr wrap="square" lIns="0" rIns="0" tIns="0" bIns="0" anchor="ctr">
             <a:noAutofit/>
           </a:bodyPr>
           <a:lstStyle/>
@@ -24625,7 +24646,7 @@
           <a:noFill/>
         </p:spPr>
         <p:txBody>
-          <a:bodyPr wrap="square" lIns="0" rIns="0" tIns="0" bIns="0" anchor="t">
+          <a:bodyPr wrap="square" lIns="0" rIns="0" tIns="0" bIns="0" anchor="ctr">
             <a:noAutofit/>
           </a:bodyPr>
           <a:lstStyle/>
@@ -24664,7 +24685,7 @@
           <a:noFill/>
         </p:spPr>
         <p:txBody>
-          <a:bodyPr wrap="square" lIns="0" rIns="0" tIns="0" bIns="0" anchor="t">
+          <a:bodyPr wrap="square" lIns="0" rIns="0" tIns="0" bIns="0" anchor="ctr">
             <a:noAutofit/>
           </a:bodyPr>
           <a:lstStyle/>
@@ -24716,15 +24737,15 @@
         <p:spPr>
           <a:xfrm>
             <a:off x="502920" y="4754880"/>
-            <a:ext cx="1325880" cy="411480"/>
-          </a:xfrm>
-          <a:prstGeom prst="rect">
-            <a:avLst/>
-          </a:prstGeom>
-          <a:noFill/>
-        </p:spPr>
-        <p:txBody>
-          <a:bodyPr wrap="square" lIns="0" rIns="0" tIns="0" bIns="0" anchor="t">
+            <a:ext cx="1325880" cy="1408176"/>
+          </a:xfrm>
+          <a:prstGeom prst="rect">
+            <a:avLst/>
+          </a:prstGeom>
+          <a:noFill/>
+        </p:spPr>
+        <p:txBody>
+          <a:bodyPr wrap="square" lIns="0" rIns="0" tIns="0" bIns="0" anchor="ctr">
             <a:noAutofit/>
           </a:bodyPr>
           <a:lstStyle/>
@@ -24763,7 +24784,7 @@
           <a:noFill/>
         </p:spPr>
         <p:txBody>
-          <a:bodyPr wrap="square" lIns="0" rIns="0" tIns="0" bIns="0" anchor="t">
+          <a:bodyPr wrap="square" lIns="0" rIns="0" tIns="0" bIns="0" anchor="ctr">
             <a:noAutofit/>
           </a:bodyPr>
           <a:lstStyle/>
@@ -24802,7 +24823,7 @@
           <a:noFill/>
         </p:spPr>
         <p:txBody>
-          <a:bodyPr wrap="square" lIns="0" rIns="0" tIns="0" bIns="0" anchor="t">
+          <a:bodyPr wrap="square" lIns="0" rIns="0" tIns="0" bIns="0" anchor="ctr">
             <a:noAutofit/>
           </a:bodyPr>
           <a:lstStyle/>

--- a/examples/gallery/output/deck.pptx
+++ b/examples/gallery/output/deck.pptx
@@ -24460,8 +24460,8 @@
         </p:nvSpPr>
         <p:spPr>
           <a:xfrm>
-            <a:off x="502920" y="1517904"/>
-            <a:ext cx="1325880" cy="1408176"/>
+            <a:off x="502920" y="2345527"/>
+            <a:ext cx="1325880" cy="704088"/>
           </a:xfrm>
           <a:prstGeom prst="rect">
             <a:avLst/>
@@ -24499,8 +24499,8 @@
         </p:nvSpPr>
         <p:spPr>
           <a:xfrm>
-            <a:off x="1920240" y="1517904"/>
-            <a:ext cx="3874185" cy="1408176"/>
+            <a:off x="1920240" y="2345527"/>
+            <a:ext cx="3874185" cy="704088"/>
           </a:xfrm>
           <a:prstGeom prst="rect">
             <a:avLst/>
@@ -24538,8 +24538,8 @@
         </p:nvSpPr>
         <p:spPr>
           <a:xfrm>
-            <a:off x="6023025" y="1517904"/>
-            <a:ext cx="5665750" cy="1408176"/>
+            <a:off x="6023025" y="2345527"/>
+            <a:ext cx="5665750" cy="704088"/>
           </a:xfrm>
           <a:prstGeom prst="rect">
             <a:avLst/>
@@ -24577,7 +24577,7 @@
         </p:nvCxnSpPr>
         <p:spPr>
           <a:xfrm>
-            <a:off x="502920" y="3031236"/>
+            <a:off x="502920" y="3154771"/>
             <a:ext cx="11185855" cy="0"/>
           </a:xfrm>
           <a:prstGeom prst="line">
@@ -24598,8 +24598,8 @@
         </p:nvSpPr>
         <p:spPr>
           <a:xfrm>
-            <a:off x="502920" y="3136392"/>
-            <a:ext cx="1325880" cy="1408176"/>
+            <a:off x="502920" y="3259927"/>
+            <a:ext cx="1325880" cy="845820"/>
           </a:xfrm>
           <a:prstGeom prst="rect">
             <a:avLst/>
@@ -24637,8 +24637,8 @@
         </p:nvSpPr>
         <p:spPr>
           <a:xfrm>
-            <a:off x="1920240" y="3136392"/>
-            <a:ext cx="3874185" cy="1408176"/>
+            <a:off x="1920240" y="3259927"/>
+            <a:ext cx="3874185" cy="845820"/>
           </a:xfrm>
           <a:prstGeom prst="rect">
             <a:avLst/>
@@ -24676,8 +24676,8 @@
         </p:nvSpPr>
         <p:spPr>
           <a:xfrm>
-            <a:off x="6023025" y="3136392"/>
-            <a:ext cx="5665750" cy="1408176"/>
+            <a:off x="6023025" y="3259927"/>
+            <a:ext cx="5665750" cy="845820"/>
           </a:xfrm>
           <a:prstGeom prst="rect">
             <a:avLst/>
@@ -24715,7 +24715,7 @@
         </p:nvCxnSpPr>
         <p:spPr>
           <a:xfrm>
-            <a:off x="502920" y="4649724"/>
+            <a:off x="502920" y="4210903"/>
             <a:ext cx="11185855" cy="0"/>
           </a:xfrm>
           <a:prstGeom prst="line">
@@ -24736,8 +24736,8 @@
         </p:nvSpPr>
         <p:spPr>
           <a:xfrm>
-            <a:off x="502920" y="4754880"/>
-            <a:ext cx="1325880" cy="1408176"/>
+            <a:off x="502920" y="4316059"/>
+            <a:ext cx="1325880" cy="704088"/>
           </a:xfrm>
           <a:prstGeom prst="rect">
             <a:avLst/>
@@ -24775,8 +24775,8 @@
         </p:nvSpPr>
         <p:spPr>
           <a:xfrm>
-            <a:off x="1920240" y="4754880"/>
-            <a:ext cx="3874185" cy="1408176"/>
+            <a:off x="1920240" y="4316059"/>
+            <a:ext cx="3874185" cy="704088"/>
           </a:xfrm>
           <a:prstGeom prst="rect">
             <a:avLst/>
@@ -24814,8 +24814,8 @@
         </p:nvSpPr>
         <p:spPr>
           <a:xfrm>
-            <a:off x="6023025" y="4754880"/>
-            <a:ext cx="5665750" cy="1408176"/>
+            <a:off x="6023025" y="4316059"/>
+            <a:ext cx="5665750" cy="704088"/>
           </a:xfrm>
           <a:prstGeom prst="rect">
             <a:avLst/>
@@ -24845,6 +24845,48 @@
           </a:p>
         </p:txBody>
       </p:sp>
+      <p:cxnSp>
+        <p:nvCxnSpPr>
+          <p:cNvPr id="17" name="cpe|statements|line|16"/>
+          <p:cNvCxnSpPr/>
+          <p:nvPr/>
+        </p:nvCxnSpPr>
+        <p:spPr>
+          <a:xfrm>
+            <a:off x="502920" y="2240371"/>
+            <a:ext cx="11185855" cy="0"/>
+          </a:xfrm>
+          <a:prstGeom prst="line">
+            <a:avLst/>
+          </a:prstGeom>
+          <a:ln w="9525">
+            <a:solidFill>
+              <a:srgbClr val="B6C0CB"/>
+            </a:solidFill>
+          </a:ln>
+        </p:spPr>
+      </p:cxnSp>
+      <p:cxnSp>
+        <p:nvCxnSpPr>
+          <p:cNvPr id="18" name="cpe|statements|line|17"/>
+          <p:cNvCxnSpPr/>
+          <p:nvPr/>
+        </p:nvCxnSpPr>
+        <p:spPr>
+          <a:xfrm>
+            <a:off x="502920" y="4988143"/>
+            <a:ext cx="11185855" cy="0"/>
+          </a:xfrm>
+          <a:prstGeom prst="line">
+            <a:avLst/>
+          </a:prstGeom>
+          <a:ln w="6350">
+            <a:solidFill>
+              <a:srgbClr val="E3E8ED"/>
+            </a:solidFill>
+          </a:ln>
+        </p:spPr>
+      </p:cxnSp>
     </p:spTree>
   </p:cSld>
   <p:clrMapOvr>

--- a/examples/gallery/output/deck.pptx
+++ b/examples/gallery/output/deck.pptx
@@ -7151,7 +7151,7 @@
         </p:nvSpPr>
         <p:spPr>
           <a:xfrm>
-            <a:off x="502920" y="2148840"/>
+            <a:off x="502920" y="2090776"/>
             <a:ext cx="822960" cy="64008"/>
           </a:xfrm>
           <a:prstGeom prst="rect">
@@ -7180,8 +7180,8 @@
         </p:nvSpPr>
         <p:spPr>
           <a:xfrm>
-            <a:off x="502920" y="2377440"/>
-            <a:ext cx="9288018" cy="1737360"/>
+            <a:off x="502920" y="2383384"/>
+            <a:ext cx="9288018" cy="1161288"/>
           </a:xfrm>
           <a:prstGeom prst="rect">
             <a:avLst/>
@@ -7219,8 +7219,8 @@
         </p:nvSpPr>
         <p:spPr>
           <a:xfrm>
-            <a:off x="502920" y="4160520"/>
-            <a:ext cx="8339099" cy="822960"/>
+            <a:off x="502920" y="3745840"/>
+            <a:ext cx="8339099" cy="329184"/>
           </a:xfrm>
           <a:prstGeom prst="rect">
             <a:avLst/>
@@ -7252,13 +7252,42 @@
       </p:sp>
       <p:sp>
         <p:nvSpPr>
-          <p:cNvPr id="5" name="cpe|text|text|4"/>
-          <p:cNvSpPr txBox="1"/>
-          <p:nvPr/>
-        </p:nvSpPr>
-        <p:spPr>
-          <a:xfrm>
-            <a:off x="502920" y="5989320"/>
+          <p:cNvPr id="5" name="cpe|text|bleed|4"/>
+          <p:cNvSpPr/>
+          <p:nvPr/>
+        </p:nvSpPr>
+        <p:spPr>
+          <a:xfrm>
+            <a:off x="0" y="5486400"/>
+            <a:ext cx="12191695" cy="1371600"/>
+          </a:xfrm>
+          <a:prstGeom prst="rect">
+            <a:avLst/>
+          </a:prstGeom>
+          <a:solidFill>
+            <a:srgbClr val="13294B"/>
+          </a:solidFill>
+          <a:ln>
+            <a:noFill/>
+          </a:ln>
+        </p:spPr>
+        <p:txBody>
+          <a:bodyPr rtlCol="0" anchor="ctr" lIns="0" rIns="0" tIns="0" bIns="0"/>
+          <a:lstStyle/>
+          <a:p>
+            <a:pPr algn="ctr"/>
+          </a:p>
+        </p:txBody>
+      </p:sp>
+      <p:sp>
+        <p:nvSpPr>
+          <p:cNvPr id="6" name="cpe|text|text|5"/>
+          <p:cNvSpPr txBox="1"/>
+          <p:nvPr/>
+        </p:nvSpPr>
+        <p:spPr>
+          <a:xfrm>
+            <a:off x="502920" y="6012180"/>
             <a:ext cx="8339099" cy="320040"/>
           </a:xfrm>
           <a:prstGeom prst="rect">
@@ -7267,7 +7296,7 @@
           <a:noFill/>
         </p:spPr>
         <p:txBody>
-          <a:bodyPr wrap="square" lIns="0" rIns="0" tIns="0" bIns="0" anchor="t">
+          <a:bodyPr wrap="square" lIns="0" rIns="0" tIns="0" bIns="0" anchor="ctr">
             <a:noAutofit/>
           </a:bodyPr>
           <a:lstStyle/>
@@ -7278,9 +7307,9 @@
               </a:lnSpc>
             </a:pPr>
             <a:r>
-              <a:rPr sz="1000" b="0">
-                <a:solidFill>
-                  <a:srgbClr val="5B6776"/>
+              <a:rPr sz="1100" b="0">
+                <a:solidFill>
+                  <a:srgbClr val="FFFFFF"/>
                 </a:solidFill>
                 <a:latin typeface="Arial"/>
               </a:rPr>

--- a/examples/gallery/output/deck.pptx
+++ b/examples/gallery/output/deck.pptx
@@ -11516,8 +11516,8 @@
         </p:nvSpPr>
         <p:spPr>
           <a:xfrm>
-            <a:off x="502920" y="1481328"/>
-            <a:ext cx="2076237" cy="658368"/>
+            <a:off x="502920" y="1689781"/>
+            <a:ext cx="2076237" cy="734695"/>
           </a:xfrm>
           <a:prstGeom prst="rect">
             <a:avLst/>
@@ -11545,8 +11545,8 @@
         </p:nvSpPr>
         <p:spPr>
           <a:xfrm>
-            <a:off x="640080" y="1481328"/>
-            <a:ext cx="1801917" cy="658368"/>
+            <a:off x="640080" y="1689781"/>
+            <a:ext cx="1801917" cy="734695"/>
           </a:xfrm>
           <a:prstGeom prst="rect">
             <a:avLst/>
@@ -11565,7 +11565,7 @@
               </a:lnSpc>
             </a:pPr>
             <a:r>
-              <a:rPr sz="1200" b="0">
+              <a:rPr sz="1450" b="0">
                 <a:solidFill>
                   <a:srgbClr val="1C2530"/>
                 </a:solidFill>
@@ -11584,7 +11584,7 @@
         </p:nvCxnSpPr>
         <p:spPr>
           <a:xfrm>
-            <a:off x="2597445" y="1810512"/>
+            <a:off x="2597445" y="2057128"/>
             <a:ext cx="164592" cy="0"/>
           </a:xfrm>
           <a:prstGeom prst="line">
@@ -11598,27 +11598,45 @@
           </a:ln>
         </p:spPr>
       </p:cxnSp>
-      <p:cxnSp>
-        <p:nvCxnSpPr>
-          <p:cNvPr id="9" name="cpe|exhibit|line|8"/>
-          <p:cNvCxnSpPr/>
-          <p:nvPr/>
-        </p:nvCxnSpPr>
-        <p:spPr>
-          <a:xfrm>
-            <a:off x="502920" y="4489704"/>
-            <a:ext cx="2076237" cy="0"/>
-          </a:xfrm>
-          <a:prstGeom prst="line">
-            <a:avLst/>
-          </a:prstGeom>
-          <a:ln w="9525">
-            <a:solidFill>
-              <a:srgbClr val="B6C0CB"/>
-            </a:solidFill>
-          </a:ln>
-        </p:spPr>
-      </p:cxnSp>
+      <p:sp>
+        <p:nvSpPr>
+          <p:cNvPr id="9" name="cpe|exhibit|text|8"/>
+          <p:cNvSpPr txBox="1"/>
+          <p:nvPr/>
+        </p:nvSpPr>
+        <p:spPr>
+          <a:xfrm>
+            <a:off x="502920" y="2653076"/>
+            <a:ext cx="2076237" cy="256032"/>
+          </a:xfrm>
+          <a:prstGeom prst="rect">
+            <a:avLst/>
+          </a:prstGeom>
+          <a:noFill/>
+        </p:spPr>
+        <p:txBody>
+          <a:bodyPr wrap="square" lIns="0" rIns="0" tIns="0" bIns="0" anchor="t">
+            <a:noAutofit/>
+          </a:bodyPr>
+          <a:lstStyle/>
+          <a:p>
+            <a:pPr algn="l">
+              <a:lnSpc>
+                <a:spcPct val="100000"/>
+              </a:lnSpc>
+            </a:pPr>
+            <a:r>
+              <a:rPr sz="1200" b="0">
+                <a:solidFill>
+                  <a:srgbClr val="5B6776"/>
+                </a:solidFill>
+                <a:latin typeface="Arial"/>
+              </a:rPr>
+              <a:t>Sales ops · &lt;1h</a:t>
+            </a:r>
+          </a:p>
+        </p:txBody>
+      </p:sp>
       <p:sp>
         <p:nvSpPr>
           <p:cNvPr id="10" name="cpe|exhibit|text|9"/>
@@ -11627,125 +11645,8 @@
         </p:nvSpPr>
         <p:spPr>
           <a:xfrm>
-            <a:off x="502920" y="4581144"/>
-            <a:ext cx="2076237" cy="457200"/>
-          </a:xfrm>
-          <a:prstGeom prst="rect">
-            <a:avLst/>
-          </a:prstGeom>
-          <a:noFill/>
-        </p:spPr>
-        <p:txBody>
-          <a:bodyPr wrap="square" lIns="0" rIns="0" tIns="0" bIns="0" anchor="t">
-            <a:noAutofit/>
-          </a:bodyPr>
-          <a:lstStyle/>
-          <a:p>
-            <a:pPr algn="l">
-              <a:lnSpc>
-                <a:spcPct val="100000"/>
-              </a:lnSpc>
-            </a:pPr>
-            <a:r>
-              <a:rPr sz="2200" b="1">
-                <a:solidFill>
-                  <a:srgbClr val="1C2530"/>
-                </a:solidFill>
-                <a:latin typeface="Arial"/>
-              </a:rPr>
-              <a:t>0.3%</a:t>
-            </a:r>
-          </a:p>
-        </p:txBody>
-      </p:sp>
-      <p:sp>
-        <p:nvSpPr>
-          <p:cNvPr id="11" name="cpe|exhibit|text|10"/>
-          <p:cNvSpPr txBox="1"/>
-          <p:nvPr/>
-        </p:nvSpPr>
-        <p:spPr>
-          <a:xfrm>
-            <a:off x="502920" y="5038344"/>
-            <a:ext cx="2076237" cy="347472"/>
-          </a:xfrm>
-          <a:prstGeom prst="rect">
-            <a:avLst/>
-          </a:prstGeom>
-          <a:noFill/>
-        </p:spPr>
-        <p:txBody>
-          <a:bodyPr wrap="square" lIns="0" rIns="0" tIns="0" bIns="0" anchor="t">
-            <a:noAutofit/>
-          </a:bodyPr>
-          <a:lstStyle/>
-          <a:p>
-            <a:pPr algn="l">
-              <a:lnSpc>
-                <a:spcPct val="100000"/>
-              </a:lnSpc>
-            </a:pPr>
-            <a:r>
-              <a:rPr sz="1100" b="0">
-                <a:solidFill>
-                  <a:srgbClr val="5B6776"/>
-                </a:solidFill>
-                <a:latin typeface="Arial"/>
-              </a:rPr>
-              <a:t>order errors (from 2.1%)</a:t>
-            </a:r>
-          </a:p>
-        </p:txBody>
-      </p:sp>
-      <p:sp>
-        <p:nvSpPr>
-          <p:cNvPr id="12" name="cpe|exhibit|text|11"/>
-          <p:cNvSpPr txBox="1"/>
-          <p:nvPr/>
-        </p:nvSpPr>
-        <p:spPr>
-          <a:xfrm>
-            <a:off x="502920" y="2368296"/>
-            <a:ext cx="2076237" cy="256032"/>
-          </a:xfrm>
-          <a:prstGeom prst="rect">
-            <a:avLst/>
-          </a:prstGeom>
-          <a:noFill/>
-        </p:spPr>
-        <p:txBody>
-          <a:bodyPr wrap="square" lIns="0" rIns="0" tIns="0" bIns="0" anchor="t">
-            <a:noAutofit/>
-          </a:bodyPr>
-          <a:lstStyle/>
-          <a:p>
-            <a:pPr algn="l">
-              <a:lnSpc>
-                <a:spcPct val="100000"/>
-              </a:lnSpc>
-            </a:pPr>
-            <a:r>
-              <a:rPr sz="1000" b="0">
-                <a:solidFill>
-                  <a:srgbClr val="5B6776"/>
-                </a:solidFill>
-                <a:latin typeface="Arial"/>
-              </a:rPr>
-              <a:t>Sales ops · &lt;1h</a:t>
-            </a:r>
-          </a:p>
-        </p:txBody>
-      </p:sp>
-      <p:sp>
-        <p:nvSpPr>
-          <p:cNvPr id="13" name="cpe|exhibit|text|12"/>
-          <p:cNvSpPr txBox="1"/>
-          <p:nvPr/>
-        </p:nvSpPr>
-        <p:spPr>
-          <a:xfrm>
-            <a:off x="502920" y="2679192"/>
-            <a:ext cx="2076237" cy="1673352"/>
+            <a:off x="502920" y="2963972"/>
+            <a:ext cx="2076237" cy="780669"/>
           </a:xfrm>
           <a:prstGeom prst="rect">
             <a:avLst/>
@@ -11773,7 +11674,7 @@
               <a:buChar char="•"/>
             </a:pPr>
             <a:r>
-              <a:rPr sz="1100" b="0">
+              <a:rPr sz="1300" b="0">
                 <a:solidFill>
                   <a:srgbClr val="1C2530"/>
                 </a:solidFill>
@@ -11795,13 +11696,112 @@
               <a:buChar char="•"/>
             </a:pPr>
             <a:r>
-              <a:rPr sz="1100" b="0">
+              <a:rPr sz="1300" b="0">
                 <a:solidFill>
                   <a:srgbClr val="1C2530"/>
                 </a:solidFill>
                 <a:latin typeface="Arial"/>
               </a:rPr>
               <a:t>Minimum order value</a:t>
+            </a:r>
+          </a:p>
+        </p:txBody>
+      </p:sp>
+      <p:cxnSp>
+        <p:nvCxnSpPr>
+          <p:cNvPr id="11" name="cpe|exhibit|line|10"/>
+          <p:cNvCxnSpPr/>
+          <p:nvPr/>
+        </p:nvCxnSpPr>
+        <p:spPr>
+          <a:xfrm>
+            <a:off x="502920" y="4018961"/>
+            <a:ext cx="2076237" cy="0"/>
+          </a:xfrm>
+          <a:prstGeom prst="line">
+            <a:avLst/>
+          </a:prstGeom>
+          <a:ln w="9525">
+            <a:solidFill>
+              <a:srgbClr val="B6C0CB"/>
+            </a:solidFill>
+          </a:ln>
+        </p:spPr>
+      </p:cxnSp>
+      <p:sp>
+        <p:nvSpPr>
+          <p:cNvPr id="12" name="cpe|exhibit|text|11"/>
+          <p:cNvSpPr txBox="1"/>
+          <p:nvPr/>
+        </p:nvSpPr>
+        <p:spPr>
+          <a:xfrm>
+            <a:off x="502920" y="4110401"/>
+            <a:ext cx="2076237" cy="548640"/>
+          </a:xfrm>
+          <a:prstGeom prst="rect">
+            <a:avLst/>
+          </a:prstGeom>
+          <a:noFill/>
+        </p:spPr>
+        <p:txBody>
+          <a:bodyPr wrap="square" lIns="0" rIns="0" tIns="0" bIns="0" anchor="t">
+            <a:noAutofit/>
+          </a:bodyPr>
+          <a:lstStyle/>
+          <a:p>
+            <a:pPr algn="l">
+              <a:lnSpc>
+                <a:spcPct val="100000"/>
+              </a:lnSpc>
+            </a:pPr>
+            <a:r>
+              <a:rPr sz="2650" b="1">
+                <a:solidFill>
+                  <a:srgbClr val="1C2530"/>
+                </a:solidFill>
+                <a:latin typeface="Arial"/>
+              </a:rPr>
+              <a:t>0.3%</a:t>
+            </a:r>
+          </a:p>
+        </p:txBody>
+      </p:sp>
+      <p:sp>
+        <p:nvSpPr>
+          <p:cNvPr id="13" name="cpe|exhibit|text|12"/>
+          <p:cNvSpPr txBox="1"/>
+          <p:nvPr/>
+        </p:nvSpPr>
+        <p:spPr>
+          <a:xfrm>
+            <a:off x="502920" y="4659041"/>
+            <a:ext cx="2076237" cy="347472"/>
+          </a:xfrm>
+          <a:prstGeom prst="rect">
+            <a:avLst/>
+          </a:prstGeom>
+          <a:noFill/>
+        </p:spPr>
+        <p:txBody>
+          <a:bodyPr wrap="square" lIns="0" rIns="0" tIns="0" bIns="0" anchor="t">
+            <a:noAutofit/>
+          </a:bodyPr>
+          <a:lstStyle/>
+          <a:p>
+            <a:pPr algn="l">
+              <a:lnSpc>
+                <a:spcPct val="100000"/>
+              </a:lnSpc>
+            </a:pPr>
+            <a:r>
+              <a:rPr sz="1300" b="0">
+                <a:solidFill>
+                  <a:srgbClr val="5B6776"/>
+                </a:solidFill>
+                <a:latin typeface="Arial"/>
+              </a:rPr>
+              <a:t>order errors (from 2.1%)</a:t>
             </a:r>
           </a:p>
         </p:txBody>
@@ -11814,8 +11814,8 @@
         </p:nvSpPr>
         <p:spPr>
           <a:xfrm>
-            <a:off x="2780325" y="1481328"/>
-            <a:ext cx="2076237" cy="658368"/>
+            <a:off x="2780325" y="1689781"/>
+            <a:ext cx="2076237" cy="734695"/>
           </a:xfrm>
           <a:prstGeom prst="rect">
             <a:avLst/>
@@ -11843,8 +11843,8 @@
         </p:nvSpPr>
         <p:spPr>
           <a:xfrm>
-            <a:off x="2917485" y="1481328"/>
-            <a:ext cx="1801917" cy="658368"/>
+            <a:off x="2917485" y="1689781"/>
+            <a:ext cx="1801917" cy="734695"/>
           </a:xfrm>
           <a:prstGeom prst="rect">
             <a:avLst/>
@@ -11863,7 +11863,7 @@
               </a:lnSpc>
             </a:pPr>
             <a:r>
-              <a:rPr sz="1200" b="0">
+              <a:rPr sz="1450" b="0">
                 <a:solidFill>
                   <a:srgbClr val="1C2530"/>
                 </a:solidFill>
@@ -11882,7 +11882,7 @@
         </p:nvCxnSpPr>
         <p:spPr>
           <a:xfrm>
-            <a:off x="4874849" y="1810512"/>
+            <a:off x="4874849" y="2057128"/>
             <a:ext cx="164592" cy="0"/>
           </a:xfrm>
           <a:prstGeom prst="line">
@@ -11896,27 +11896,45 @@
           </a:ln>
         </p:spPr>
       </p:cxnSp>
-      <p:cxnSp>
-        <p:nvCxnSpPr>
-          <p:cNvPr id="17" name="cpe|exhibit|line|16"/>
-          <p:cNvCxnSpPr/>
-          <p:nvPr/>
-        </p:nvCxnSpPr>
-        <p:spPr>
-          <a:xfrm>
-            <a:off x="2780325" y="4489704"/>
-            <a:ext cx="2076236" cy="0"/>
-          </a:xfrm>
-          <a:prstGeom prst="line">
-            <a:avLst/>
-          </a:prstGeom>
-          <a:ln w="9525">
-            <a:solidFill>
-              <a:srgbClr val="B6C0CB"/>
-            </a:solidFill>
-          </a:ln>
-        </p:spPr>
-      </p:cxnSp>
+      <p:sp>
+        <p:nvSpPr>
+          <p:cNvPr id="17" name="cpe|exhibit|text|16"/>
+          <p:cNvSpPr txBox="1"/>
+          <p:nvPr/>
+        </p:nvSpPr>
+        <p:spPr>
+          <a:xfrm>
+            <a:off x="2780325" y="2653076"/>
+            <a:ext cx="2076237" cy="256032"/>
+          </a:xfrm>
+          <a:prstGeom prst="rect">
+            <a:avLst/>
+          </a:prstGeom>
+          <a:noFill/>
+        </p:spPr>
+        <p:txBody>
+          <a:bodyPr wrap="square" lIns="0" rIns="0" tIns="0" bIns="0" anchor="t">
+            <a:noAutofit/>
+          </a:bodyPr>
+          <a:lstStyle/>
+          <a:p>
+            <a:pPr algn="l">
+              <a:lnSpc>
+                <a:spcPct val="100000"/>
+              </a:lnSpc>
+            </a:pPr>
+            <a:r>
+              <a:rPr sz="1200" b="0">
+                <a:solidFill>
+                  <a:srgbClr val="5B6776"/>
+                </a:solidFill>
+                <a:latin typeface="Arial"/>
+              </a:rPr>
+              <a:t>Planning · 2h</a:t>
+            </a:r>
+          </a:p>
+        </p:txBody>
+      </p:sp>
       <p:sp>
         <p:nvSpPr>
           <p:cNvPr id="18" name="cpe|exhibit|text|17"/>
@@ -11925,125 +11943,8 @@
         </p:nvSpPr>
         <p:spPr>
           <a:xfrm>
-            <a:off x="2780325" y="4581144"/>
-            <a:ext cx="2076237" cy="457200"/>
-          </a:xfrm>
-          <a:prstGeom prst="rect">
-            <a:avLst/>
-          </a:prstGeom>
-          <a:noFill/>
-        </p:spPr>
-        <p:txBody>
-          <a:bodyPr wrap="square" lIns="0" rIns="0" tIns="0" bIns="0" anchor="t">
-            <a:noAutofit/>
-          </a:bodyPr>
-          <a:lstStyle/>
-          <a:p>
-            <a:pPr algn="l">
-              <a:lnSpc>
-                <a:spcPct val="100000"/>
-              </a:lnSpc>
-            </a:pPr>
-            <a:r>
-              <a:rPr sz="2200" b="1">
-                <a:solidFill>
-                  <a:srgbClr val="1C2530"/>
-                </a:solidFill>
-                <a:latin typeface="Arial"/>
-              </a:rPr>
-              <a:t>2h</a:t>
-            </a:r>
-          </a:p>
-        </p:txBody>
-      </p:sp>
-      <p:sp>
-        <p:nvSpPr>
-          <p:cNvPr id="19" name="cpe|exhibit|text|18"/>
-          <p:cNvSpPr txBox="1"/>
-          <p:nvPr/>
-        </p:nvSpPr>
-        <p:spPr>
-          <a:xfrm>
-            <a:off x="2780325" y="5038344"/>
-            <a:ext cx="2076237" cy="347472"/>
-          </a:xfrm>
-          <a:prstGeom prst="rect">
-            <a:avLst/>
-          </a:prstGeom>
-          <a:noFill/>
-        </p:spPr>
-        <p:txBody>
-          <a:bodyPr wrap="square" lIns="0" rIns="0" tIns="0" bIns="0" anchor="t">
-            <a:noAutofit/>
-          </a:bodyPr>
-          <a:lstStyle/>
-          <a:p>
-            <a:pPr algn="l">
-              <a:lnSpc>
-                <a:spcPct val="100000"/>
-              </a:lnSpc>
-            </a:pPr>
-            <a:r>
-              <a:rPr sz="1100" b="0">
-                <a:solidFill>
-                  <a:srgbClr val="5B6776"/>
-                </a:solidFill>
-                <a:latin typeface="Arial"/>
-              </a:rPr>
-              <a:t>planning time (from 3h)</a:t>
-            </a:r>
-          </a:p>
-        </p:txBody>
-      </p:sp>
-      <p:sp>
-        <p:nvSpPr>
-          <p:cNvPr id="20" name="cpe|exhibit|text|19"/>
-          <p:cNvSpPr txBox="1"/>
-          <p:nvPr/>
-        </p:nvSpPr>
-        <p:spPr>
-          <a:xfrm>
-            <a:off x="2780325" y="2368296"/>
-            <a:ext cx="2076237" cy="256032"/>
-          </a:xfrm>
-          <a:prstGeom prst="rect">
-            <a:avLst/>
-          </a:prstGeom>
-          <a:noFill/>
-        </p:spPr>
-        <p:txBody>
-          <a:bodyPr wrap="square" lIns="0" rIns="0" tIns="0" bIns="0" anchor="t">
-            <a:noAutofit/>
-          </a:bodyPr>
-          <a:lstStyle/>
-          <a:p>
-            <a:pPr algn="l">
-              <a:lnSpc>
-                <a:spcPct val="100000"/>
-              </a:lnSpc>
-            </a:pPr>
-            <a:r>
-              <a:rPr sz="1000" b="0">
-                <a:solidFill>
-                  <a:srgbClr val="5B6776"/>
-                </a:solidFill>
-                <a:latin typeface="Arial"/>
-              </a:rPr>
-              <a:t>Planning · 2h</a:t>
-            </a:r>
-          </a:p>
-        </p:txBody>
-      </p:sp>
-      <p:sp>
-        <p:nvSpPr>
-          <p:cNvPr id="21" name="cpe|exhibit|text|20"/>
-          <p:cNvSpPr txBox="1"/>
-          <p:nvPr/>
-        </p:nvSpPr>
-        <p:spPr>
-          <a:xfrm>
-            <a:off x="2780325" y="2679192"/>
-            <a:ext cx="2076237" cy="1673352"/>
+            <a:off x="2780325" y="2963972"/>
+            <a:ext cx="2076237" cy="780669"/>
           </a:xfrm>
           <a:prstGeom prst="rect">
             <a:avLst/>
@@ -12071,7 +11972,7 @@
               <a:buChar char="•"/>
             </a:pPr>
             <a:r>
-              <a:rPr sz="1100" b="0">
+              <a:rPr sz="1300" b="0">
                 <a:solidFill>
                   <a:srgbClr val="1C2530"/>
                 </a:solidFill>
@@ -12093,13 +11994,112 @@
               <a:buChar char="•"/>
             </a:pPr>
             <a:r>
-              <a:rPr sz="1100" b="0">
+              <a:rPr sz="1300" b="0">
                 <a:solidFill>
                   <a:srgbClr val="1C2530"/>
                 </a:solidFill>
                 <a:latin typeface="Arial"/>
               </a:rPr>
               <a:t>Daily wave plan</a:t>
+            </a:r>
+          </a:p>
+        </p:txBody>
+      </p:sp>
+      <p:cxnSp>
+        <p:nvCxnSpPr>
+          <p:cNvPr id="19" name="cpe|exhibit|line|18"/>
+          <p:cNvCxnSpPr/>
+          <p:nvPr/>
+        </p:nvCxnSpPr>
+        <p:spPr>
+          <a:xfrm>
+            <a:off x="2780325" y="4018961"/>
+            <a:ext cx="2076236" cy="0"/>
+          </a:xfrm>
+          <a:prstGeom prst="line">
+            <a:avLst/>
+          </a:prstGeom>
+          <a:ln w="9525">
+            <a:solidFill>
+              <a:srgbClr val="B6C0CB"/>
+            </a:solidFill>
+          </a:ln>
+        </p:spPr>
+      </p:cxnSp>
+      <p:sp>
+        <p:nvSpPr>
+          <p:cNvPr id="20" name="cpe|exhibit|text|19"/>
+          <p:cNvSpPr txBox="1"/>
+          <p:nvPr/>
+        </p:nvSpPr>
+        <p:spPr>
+          <a:xfrm>
+            <a:off x="2780325" y="4110401"/>
+            <a:ext cx="2076237" cy="548640"/>
+          </a:xfrm>
+          <a:prstGeom prst="rect">
+            <a:avLst/>
+          </a:prstGeom>
+          <a:noFill/>
+        </p:spPr>
+        <p:txBody>
+          <a:bodyPr wrap="square" lIns="0" rIns="0" tIns="0" bIns="0" anchor="t">
+            <a:noAutofit/>
+          </a:bodyPr>
+          <a:lstStyle/>
+          <a:p>
+            <a:pPr algn="l">
+              <a:lnSpc>
+                <a:spcPct val="100000"/>
+              </a:lnSpc>
+            </a:pPr>
+            <a:r>
+              <a:rPr sz="2650" b="1">
+                <a:solidFill>
+                  <a:srgbClr val="1C2530"/>
+                </a:solidFill>
+                <a:latin typeface="Arial"/>
+              </a:rPr>
+              <a:t>2h</a:t>
+            </a:r>
+          </a:p>
+        </p:txBody>
+      </p:sp>
+      <p:sp>
+        <p:nvSpPr>
+          <p:cNvPr id="21" name="cpe|exhibit|text|20"/>
+          <p:cNvSpPr txBox="1"/>
+          <p:nvPr/>
+        </p:nvSpPr>
+        <p:spPr>
+          <a:xfrm>
+            <a:off x="2780325" y="4659041"/>
+            <a:ext cx="2076237" cy="347472"/>
+          </a:xfrm>
+          <a:prstGeom prst="rect">
+            <a:avLst/>
+          </a:prstGeom>
+          <a:noFill/>
+        </p:spPr>
+        <p:txBody>
+          <a:bodyPr wrap="square" lIns="0" rIns="0" tIns="0" bIns="0" anchor="t">
+            <a:noAutofit/>
+          </a:bodyPr>
+          <a:lstStyle/>
+          <a:p>
+            <a:pPr algn="l">
+              <a:lnSpc>
+                <a:spcPct val="100000"/>
+              </a:lnSpc>
+            </a:pPr>
+            <a:r>
+              <a:rPr sz="1300" b="0">
+                <a:solidFill>
+                  <a:srgbClr val="5B6776"/>
+                </a:solidFill>
+                <a:latin typeface="Arial"/>
+              </a:rPr>
+              <a:t>planning time (from 3h)</a:t>
             </a:r>
           </a:p>
         </p:txBody>
@@ -12112,8 +12112,8 @@
         </p:nvSpPr>
         <p:spPr>
           <a:xfrm>
-            <a:off x="5057729" y="1481328"/>
-            <a:ext cx="2076237" cy="658368"/>
+            <a:off x="5057729" y="1689781"/>
+            <a:ext cx="2076237" cy="734695"/>
           </a:xfrm>
           <a:prstGeom prst="rect">
             <a:avLst/>
@@ -12141,8 +12141,8 @@
         </p:nvSpPr>
         <p:spPr>
           <a:xfrm>
-            <a:off x="5194889" y="1481328"/>
-            <a:ext cx="1801917" cy="658368"/>
+            <a:off x="5194889" y="1689781"/>
+            <a:ext cx="1801917" cy="734695"/>
           </a:xfrm>
           <a:prstGeom prst="rect">
             <a:avLst/>
@@ -12161,7 +12161,7 @@
               </a:lnSpc>
             </a:pPr>
             <a:r>
-              <a:rPr sz="1200" b="0">
+              <a:rPr sz="1450" b="0">
                 <a:solidFill>
                   <a:srgbClr val="FFFFFF"/>
                 </a:solidFill>
@@ -12180,7 +12180,7 @@
         </p:nvCxnSpPr>
         <p:spPr>
           <a:xfrm>
-            <a:off x="7152254" y="1810512"/>
+            <a:off x="7152254" y="2057128"/>
             <a:ext cx="164592" cy="0"/>
           </a:xfrm>
           <a:prstGeom prst="line">
@@ -12194,27 +12194,45 @@
           </a:ln>
         </p:spPr>
       </p:cxnSp>
-      <p:cxnSp>
-        <p:nvCxnSpPr>
-          <p:cNvPr id="25" name="cpe|exhibit|line|24"/>
-          <p:cNvCxnSpPr/>
-          <p:nvPr/>
-        </p:nvCxnSpPr>
-        <p:spPr>
-          <a:xfrm>
-            <a:off x="5057729" y="4489704"/>
-            <a:ext cx="2076237" cy="0"/>
-          </a:xfrm>
-          <a:prstGeom prst="line">
-            <a:avLst/>
-          </a:prstGeom>
-          <a:ln w="9525">
-            <a:solidFill>
-              <a:srgbClr val="B6C0CB"/>
-            </a:solidFill>
-          </a:ln>
-        </p:spPr>
-      </p:cxnSp>
+      <p:sp>
+        <p:nvSpPr>
+          <p:cNvPr id="25" name="cpe|exhibit|text|24"/>
+          <p:cNvSpPr txBox="1"/>
+          <p:nvPr/>
+        </p:nvSpPr>
+        <p:spPr>
+          <a:xfrm>
+            <a:off x="5057729" y="2653076"/>
+            <a:ext cx="2076237" cy="256032"/>
+          </a:xfrm>
+          <a:prstGeom prst="rect">
+            <a:avLst/>
+          </a:prstGeom>
+          <a:noFill/>
+        </p:spPr>
+        <p:txBody>
+          <a:bodyPr wrap="square" lIns="0" rIns="0" tIns="0" bIns="0" anchor="t">
+            <a:noAutofit/>
+          </a:bodyPr>
+          <a:lstStyle/>
+          <a:p>
+            <a:pPr algn="l">
+              <a:lnSpc>
+                <a:spcPct val="100000"/>
+              </a:lnSpc>
+            </a:pPr>
+            <a:r>
+              <a:rPr sz="1200" b="0">
+                <a:solidFill>
+                  <a:srgbClr val="5B6776"/>
+                </a:solidFill>
+                <a:latin typeface="Arial"/>
+              </a:rPr>
+              <a:t>Hub ops · 4h</a:t>
+            </a:r>
+          </a:p>
+        </p:txBody>
+      </p:sp>
       <p:sp>
         <p:nvSpPr>
           <p:cNvPr id="26" name="cpe|exhibit|text|25"/>
@@ -12223,125 +12241,8 @@
         </p:nvSpPr>
         <p:spPr>
           <a:xfrm>
-            <a:off x="5057729" y="4581144"/>
-            <a:ext cx="2076237" cy="457200"/>
-          </a:xfrm>
-          <a:prstGeom prst="rect">
-            <a:avLst/>
-          </a:prstGeom>
-          <a:noFill/>
-        </p:spPr>
-        <p:txBody>
-          <a:bodyPr wrap="square" lIns="0" rIns="0" tIns="0" bIns="0" anchor="t">
-            <a:noAutofit/>
-          </a:bodyPr>
-          <a:lstStyle/>
-          <a:p>
-            <a:pPr algn="l">
-              <a:lnSpc>
-                <a:spcPct val="100000"/>
-              </a:lnSpc>
-            </a:pPr>
-            <a:r>
-              <a:rPr sz="2200" b="1">
-                <a:solidFill>
-                  <a:srgbClr val="13294B"/>
-                </a:solidFill>
-                <a:latin typeface="Arial"/>
-              </a:rPr>
-              <a:t>99.7%</a:t>
-            </a:r>
-          </a:p>
-        </p:txBody>
-      </p:sp>
-      <p:sp>
-        <p:nvSpPr>
-          <p:cNvPr id="27" name="cpe|exhibit|text|26"/>
-          <p:cNvSpPr txBox="1"/>
-          <p:nvPr/>
-        </p:nvSpPr>
-        <p:spPr>
-          <a:xfrm>
-            <a:off x="5057729" y="5038344"/>
-            <a:ext cx="2076237" cy="347472"/>
-          </a:xfrm>
-          <a:prstGeom prst="rect">
-            <a:avLst/>
-          </a:prstGeom>
-          <a:noFill/>
-        </p:spPr>
-        <p:txBody>
-          <a:bodyPr wrap="square" lIns="0" rIns="0" tIns="0" bIns="0" anchor="t">
-            <a:noAutofit/>
-          </a:bodyPr>
-          <a:lstStyle/>
-          <a:p>
-            <a:pPr algn="l">
-              <a:lnSpc>
-                <a:spcPct val="100000"/>
-              </a:lnSpc>
-            </a:pPr>
-            <a:r>
-              <a:rPr sz="1100" b="0">
-                <a:solidFill>
-                  <a:srgbClr val="5B6776"/>
-                </a:solidFill>
-                <a:latin typeface="Arial"/>
-              </a:rPr>
-              <a:t>pick accuracy (from 97.9%)</a:t>
-            </a:r>
-          </a:p>
-        </p:txBody>
-      </p:sp>
-      <p:sp>
-        <p:nvSpPr>
-          <p:cNvPr id="28" name="cpe|exhibit|text|27"/>
-          <p:cNvSpPr txBox="1"/>
-          <p:nvPr/>
-        </p:nvSpPr>
-        <p:spPr>
-          <a:xfrm>
-            <a:off x="5057729" y="2368296"/>
-            <a:ext cx="2076237" cy="256032"/>
-          </a:xfrm>
-          <a:prstGeom prst="rect">
-            <a:avLst/>
-          </a:prstGeom>
-          <a:noFill/>
-        </p:spPr>
-        <p:txBody>
-          <a:bodyPr wrap="square" lIns="0" rIns="0" tIns="0" bIns="0" anchor="t">
-            <a:noAutofit/>
-          </a:bodyPr>
-          <a:lstStyle/>
-          <a:p>
-            <a:pPr algn="l">
-              <a:lnSpc>
-                <a:spcPct val="100000"/>
-              </a:lnSpc>
-            </a:pPr>
-            <a:r>
-              <a:rPr sz="1000" b="0">
-                <a:solidFill>
-                  <a:srgbClr val="5B6776"/>
-                </a:solidFill>
-                <a:latin typeface="Arial"/>
-              </a:rPr>
-              <a:t>Hub ops · 4h</a:t>
-            </a:r>
-          </a:p>
-        </p:txBody>
-      </p:sp>
-      <p:sp>
-        <p:nvSpPr>
-          <p:cNvPr id="29" name="cpe|exhibit|text|28"/>
-          <p:cNvSpPr txBox="1"/>
-          <p:nvPr/>
-        </p:nvSpPr>
-        <p:spPr>
-          <a:xfrm>
-            <a:off x="5057729" y="2679192"/>
-            <a:ext cx="2076237" cy="1673352"/>
+            <a:off x="5057729" y="2963972"/>
+            <a:ext cx="2076237" cy="780669"/>
           </a:xfrm>
           <a:prstGeom prst="rect">
             <a:avLst/>
@@ -12369,7 +12270,7 @@
               <a:buChar char="•"/>
             </a:pPr>
             <a:r>
-              <a:rPr sz="1100" b="0">
+              <a:rPr sz="1300" b="0">
                 <a:solidFill>
                   <a:srgbClr val="1C2530"/>
                 </a:solidFill>
@@ -12391,13 +12292,112 @@
               <a:buChar char="•"/>
             </a:pPr>
             <a:r>
-              <a:rPr sz="1100" b="0">
+              <a:rPr sz="1300" b="0">
                 <a:solidFill>
                   <a:srgbClr val="1C2530"/>
                 </a:solidFill>
                 <a:latin typeface="Arial"/>
               </a:rPr>
               <a:t>Error rate &lt; 0.3%</a:t>
+            </a:r>
+          </a:p>
+        </p:txBody>
+      </p:sp>
+      <p:cxnSp>
+        <p:nvCxnSpPr>
+          <p:cNvPr id="27" name="cpe|exhibit|line|26"/>
+          <p:cNvCxnSpPr/>
+          <p:nvPr/>
+        </p:nvCxnSpPr>
+        <p:spPr>
+          <a:xfrm>
+            <a:off x="5057729" y="4018961"/>
+            <a:ext cx="2076237" cy="0"/>
+          </a:xfrm>
+          <a:prstGeom prst="line">
+            <a:avLst/>
+          </a:prstGeom>
+          <a:ln w="9525">
+            <a:solidFill>
+              <a:srgbClr val="B6C0CB"/>
+            </a:solidFill>
+          </a:ln>
+        </p:spPr>
+      </p:cxnSp>
+      <p:sp>
+        <p:nvSpPr>
+          <p:cNvPr id="28" name="cpe|exhibit|text|27"/>
+          <p:cNvSpPr txBox="1"/>
+          <p:nvPr/>
+        </p:nvSpPr>
+        <p:spPr>
+          <a:xfrm>
+            <a:off x="5057729" y="4110401"/>
+            <a:ext cx="2076237" cy="548640"/>
+          </a:xfrm>
+          <a:prstGeom prst="rect">
+            <a:avLst/>
+          </a:prstGeom>
+          <a:noFill/>
+        </p:spPr>
+        <p:txBody>
+          <a:bodyPr wrap="square" lIns="0" rIns="0" tIns="0" bIns="0" anchor="t">
+            <a:noAutofit/>
+          </a:bodyPr>
+          <a:lstStyle/>
+          <a:p>
+            <a:pPr algn="l">
+              <a:lnSpc>
+                <a:spcPct val="100000"/>
+              </a:lnSpc>
+            </a:pPr>
+            <a:r>
+              <a:rPr sz="2650" b="1">
+                <a:solidFill>
+                  <a:srgbClr val="13294B"/>
+                </a:solidFill>
+                <a:latin typeface="Arial"/>
+              </a:rPr>
+              <a:t>99.7%</a:t>
+            </a:r>
+          </a:p>
+        </p:txBody>
+      </p:sp>
+      <p:sp>
+        <p:nvSpPr>
+          <p:cNvPr id="29" name="cpe|exhibit|text|28"/>
+          <p:cNvSpPr txBox="1"/>
+          <p:nvPr/>
+        </p:nvSpPr>
+        <p:spPr>
+          <a:xfrm>
+            <a:off x="5057729" y="4659041"/>
+            <a:ext cx="2076237" cy="347472"/>
+          </a:xfrm>
+          <a:prstGeom prst="rect">
+            <a:avLst/>
+          </a:prstGeom>
+          <a:noFill/>
+        </p:spPr>
+        <p:txBody>
+          <a:bodyPr wrap="square" lIns="0" rIns="0" tIns="0" bIns="0" anchor="t">
+            <a:noAutofit/>
+          </a:bodyPr>
+          <a:lstStyle/>
+          <a:p>
+            <a:pPr algn="l">
+              <a:lnSpc>
+                <a:spcPct val="100000"/>
+              </a:lnSpc>
+            </a:pPr>
+            <a:r>
+              <a:rPr sz="1300" b="0">
+                <a:solidFill>
+                  <a:srgbClr val="5B6776"/>
+                </a:solidFill>
+                <a:latin typeface="Arial"/>
+              </a:rPr>
+              <a:t>pick accuracy (from 97.9%)</a:t>
             </a:r>
           </a:p>
         </p:txBody>
@@ -12410,8 +12410,8 @@
         </p:nvSpPr>
         <p:spPr>
           <a:xfrm>
-            <a:off x="7335134" y="1481328"/>
-            <a:ext cx="2076237" cy="658368"/>
+            <a:off x="7335134" y="1689781"/>
+            <a:ext cx="2076237" cy="734695"/>
           </a:xfrm>
           <a:prstGeom prst="rect">
             <a:avLst/>
@@ -12439,8 +12439,8 @@
         </p:nvSpPr>
         <p:spPr>
           <a:xfrm>
-            <a:off x="7472294" y="1481328"/>
-            <a:ext cx="1801917" cy="658368"/>
+            <a:off x="7472294" y="1689781"/>
+            <a:ext cx="1801917" cy="734695"/>
           </a:xfrm>
           <a:prstGeom prst="rect">
             <a:avLst/>
@@ -12459,7 +12459,7 @@
               </a:lnSpc>
             </a:pPr>
             <a:r>
-              <a:rPr sz="1200" b="0">
+              <a:rPr sz="1450" b="0">
                 <a:solidFill>
                   <a:srgbClr val="1C2530"/>
                 </a:solidFill>
@@ -12478,7 +12478,7 @@
         </p:nvCxnSpPr>
         <p:spPr>
           <a:xfrm>
-            <a:off x="9429659" y="1810512"/>
+            <a:off x="9429659" y="2057128"/>
             <a:ext cx="164592" cy="0"/>
           </a:xfrm>
           <a:prstGeom prst="line">
@@ -12492,27 +12492,45 @@
           </a:ln>
         </p:spPr>
       </p:cxnSp>
-      <p:cxnSp>
-        <p:nvCxnSpPr>
-          <p:cNvPr id="33" name="cpe|exhibit|line|32"/>
-          <p:cNvCxnSpPr/>
-          <p:nvPr/>
-        </p:nvCxnSpPr>
-        <p:spPr>
-          <a:xfrm>
-            <a:off x="7335134" y="4489704"/>
-            <a:ext cx="2076237" cy="0"/>
-          </a:xfrm>
-          <a:prstGeom prst="line">
-            <a:avLst/>
-          </a:prstGeom>
-          <a:ln w="9525">
-            <a:solidFill>
-              <a:srgbClr val="B6C0CB"/>
-            </a:solidFill>
-          </a:ln>
-        </p:spPr>
-      </p:cxnSp>
+      <p:sp>
+        <p:nvSpPr>
+          <p:cNvPr id="33" name="cpe|exhibit|text|32"/>
+          <p:cNvSpPr txBox="1"/>
+          <p:nvPr/>
+        </p:nvSpPr>
+        <p:spPr>
+          <a:xfrm>
+            <a:off x="7335134" y="2653076"/>
+            <a:ext cx="2076237" cy="256032"/>
+          </a:xfrm>
+          <a:prstGeom prst="rect">
+            <a:avLst/>
+          </a:prstGeom>
+          <a:noFill/>
+        </p:spPr>
+        <p:txBody>
+          <a:bodyPr wrap="square" lIns="0" rIns="0" tIns="0" bIns="0" anchor="t">
+            <a:noAutofit/>
+          </a:bodyPr>
+          <a:lstStyle/>
+          <a:p>
+            <a:pPr algn="l">
+              <a:lnSpc>
+                <a:spcPct val="100000"/>
+              </a:lnSpc>
+            </a:pPr>
+            <a:r>
+              <a:rPr sz="1200" b="0">
+                <a:solidFill>
+                  <a:srgbClr val="5B6776"/>
+                </a:solidFill>
+                <a:latin typeface="Arial"/>
+              </a:rPr>
+              <a:t>Transport · 1h</a:t>
+            </a:r>
+          </a:p>
+        </p:txBody>
+      </p:sp>
       <p:sp>
         <p:nvSpPr>
           <p:cNvPr id="34" name="cpe|exhibit|text|33"/>
@@ -12521,125 +12539,8 @@
         </p:nvSpPr>
         <p:spPr>
           <a:xfrm>
-            <a:off x="7335134" y="4581144"/>
-            <a:ext cx="2076237" cy="457200"/>
-          </a:xfrm>
-          <a:prstGeom prst="rect">
-            <a:avLst/>
-          </a:prstGeom>
-          <a:noFill/>
-        </p:spPr>
-        <p:txBody>
-          <a:bodyPr wrap="square" lIns="0" rIns="0" tIns="0" bIns="0" anchor="t">
-            <a:noAutofit/>
-          </a:bodyPr>
-          <a:lstStyle/>
-          <a:p>
-            <a:pPr algn="l">
-              <a:lnSpc>
-                <a:spcPct val="100000"/>
-              </a:lnSpc>
-            </a:pPr>
-            <a:r>
-              <a:rPr sz="2200" b="1">
-                <a:solidFill>
-                  <a:srgbClr val="1C2530"/>
-                </a:solidFill>
-                <a:latin typeface="Arial"/>
-              </a:rPr>
-              <a:t>85%</a:t>
-            </a:r>
-          </a:p>
-        </p:txBody>
-      </p:sp>
-      <p:sp>
-        <p:nvSpPr>
-          <p:cNvPr id="35" name="cpe|exhibit|text|34"/>
-          <p:cNvSpPr txBox="1"/>
-          <p:nvPr/>
-        </p:nvSpPr>
-        <p:spPr>
-          <a:xfrm>
-            <a:off x="7335134" y="5038344"/>
-            <a:ext cx="2076237" cy="347472"/>
-          </a:xfrm>
-          <a:prstGeom prst="rect">
-            <a:avLst/>
-          </a:prstGeom>
-          <a:noFill/>
-        </p:spPr>
-        <p:txBody>
-          <a:bodyPr wrap="square" lIns="0" rIns="0" tIns="0" bIns="0" anchor="t">
-            <a:noAutofit/>
-          </a:bodyPr>
-          <a:lstStyle/>
-          <a:p>
-            <a:pPr algn="l">
-              <a:lnSpc>
-                <a:spcPct val="100000"/>
-              </a:lnSpc>
-            </a:pPr>
-            <a:r>
-              <a:rPr sz="1100" b="0">
-                <a:solidFill>
-                  <a:srgbClr val="5B6776"/>
-                </a:solidFill>
-                <a:latin typeface="Arial"/>
-              </a:rPr>
-              <a:t>truck fill (from 77%)</a:t>
-            </a:r>
-          </a:p>
-        </p:txBody>
-      </p:sp>
-      <p:sp>
-        <p:nvSpPr>
-          <p:cNvPr id="36" name="cpe|exhibit|text|35"/>
-          <p:cNvSpPr txBox="1"/>
-          <p:nvPr/>
-        </p:nvSpPr>
-        <p:spPr>
-          <a:xfrm>
-            <a:off x="7335134" y="2368296"/>
-            <a:ext cx="2076237" cy="256032"/>
-          </a:xfrm>
-          <a:prstGeom prst="rect">
-            <a:avLst/>
-          </a:prstGeom>
-          <a:noFill/>
-        </p:spPr>
-        <p:txBody>
-          <a:bodyPr wrap="square" lIns="0" rIns="0" tIns="0" bIns="0" anchor="t">
-            <a:noAutofit/>
-          </a:bodyPr>
-          <a:lstStyle/>
-          <a:p>
-            <a:pPr algn="l">
-              <a:lnSpc>
-                <a:spcPct val="100000"/>
-              </a:lnSpc>
-            </a:pPr>
-            <a:r>
-              <a:rPr sz="1000" b="0">
-                <a:solidFill>
-                  <a:srgbClr val="5B6776"/>
-                </a:solidFill>
-                <a:latin typeface="Arial"/>
-              </a:rPr>
-              <a:t>Transport · 1h</a:t>
-            </a:r>
-          </a:p>
-        </p:txBody>
-      </p:sp>
-      <p:sp>
-        <p:nvSpPr>
-          <p:cNvPr id="37" name="cpe|exhibit|text|36"/>
-          <p:cNvSpPr txBox="1"/>
-          <p:nvPr/>
-        </p:nvSpPr>
-        <p:spPr>
-          <a:xfrm>
-            <a:off x="7335134" y="2679192"/>
-            <a:ext cx="2076237" cy="1673352"/>
+            <a:off x="7335134" y="2963972"/>
+            <a:ext cx="2076237" cy="780669"/>
           </a:xfrm>
           <a:prstGeom prst="rect">
             <a:avLst/>
@@ -12667,7 +12568,7 @@
               <a:buChar char="•"/>
             </a:pPr>
             <a:r>
-              <a:rPr sz="1100" b="0">
+              <a:rPr sz="1300" b="0">
                 <a:solidFill>
                   <a:srgbClr val="1C2530"/>
                 </a:solidFill>
@@ -12689,13 +12590,112 @@
               <a:buChar char="•"/>
             </a:pPr>
             <a:r>
-              <a:rPr sz="1100" b="0">
+              <a:rPr sz="1300" b="0">
                 <a:solidFill>
                   <a:srgbClr val="1C2530"/>
                 </a:solidFill>
                 <a:latin typeface="Arial"/>
               </a:rPr>
               <a:t>Fill ≥ 85%</a:t>
+            </a:r>
+          </a:p>
+        </p:txBody>
+      </p:sp>
+      <p:cxnSp>
+        <p:nvCxnSpPr>
+          <p:cNvPr id="35" name="cpe|exhibit|line|34"/>
+          <p:cNvCxnSpPr/>
+          <p:nvPr/>
+        </p:nvCxnSpPr>
+        <p:spPr>
+          <a:xfrm>
+            <a:off x="7335134" y="4018961"/>
+            <a:ext cx="2076237" cy="0"/>
+          </a:xfrm>
+          <a:prstGeom prst="line">
+            <a:avLst/>
+          </a:prstGeom>
+          <a:ln w="9525">
+            <a:solidFill>
+              <a:srgbClr val="B6C0CB"/>
+            </a:solidFill>
+          </a:ln>
+        </p:spPr>
+      </p:cxnSp>
+      <p:sp>
+        <p:nvSpPr>
+          <p:cNvPr id="36" name="cpe|exhibit|text|35"/>
+          <p:cNvSpPr txBox="1"/>
+          <p:nvPr/>
+        </p:nvSpPr>
+        <p:spPr>
+          <a:xfrm>
+            <a:off x="7335134" y="4110401"/>
+            <a:ext cx="2076237" cy="548640"/>
+          </a:xfrm>
+          <a:prstGeom prst="rect">
+            <a:avLst/>
+          </a:prstGeom>
+          <a:noFill/>
+        </p:spPr>
+        <p:txBody>
+          <a:bodyPr wrap="square" lIns="0" rIns="0" tIns="0" bIns="0" anchor="t">
+            <a:noAutofit/>
+          </a:bodyPr>
+          <a:lstStyle/>
+          <a:p>
+            <a:pPr algn="l">
+              <a:lnSpc>
+                <a:spcPct val="100000"/>
+              </a:lnSpc>
+            </a:pPr>
+            <a:r>
+              <a:rPr sz="2650" b="1">
+                <a:solidFill>
+                  <a:srgbClr val="1C2530"/>
+                </a:solidFill>
+                <a:latin typeface="Arial"/>
+              </a:rPr>
+              <a:t>85%</a:t>
+            </a:r>
+          </a:p>
+        </p:txBody>
+      </p:sp>
+      <p:sp>
+        <p:nvSpPr>
+          <p:cNvPr id="37" name="cpe|exhibit|text|36"/>
+          <p:cNvSpPr txBox="1"/>
+          <p:nvPr/>
+        </p:nvSpPr>
+        <p:spPr>
+          <a:xfrm>
+            <a:off x="7335134" y="4659041"/>
+            <a:ext cx="2076237" cy="347472"/>
+          </a:xfrm>
+          <a:prstGeom prst="rect">
+            <a:avLst/>
+          </a:prstGeom>
+          <a:noFill/>
+        </p:spPr>
+        <p:txBody>
+          <a:bodyPr wrap="square" lIns="0" rIns="0" tIns="0" bIns="0" anchor="t">
+            <a:noAutofit/>
+          </a:bodyPr>
+          <a:lstStyle/>
+          <a:p>
+            <a:pPr algn="l">
+              <a:lnSpc>
+                <a:spcPct val="100000"/>
+              </a:lnSpc>
+            </a:pPr>
+            <a:r>
+              <a:rPr sz="1300" b="0">
+                <a:solidFill>
+                  <a:srgbClr val="5B6776"/>
+                </a:solidFill>
+                <a:latin typeface="Arial"/>
+              </a:rPr>
+              <a:t>truck fill (from 77%)</a:t>
             </a:r>
           </a:p>
         </p:txBody>
@@ -12708,8 +12708,8 @@
         </p:nvSpPr>
         <p:spPr>
           <a:xfrm>
-            <a:off x="9612539" y="1481328"/>
-            <a:ext cx="2076237" cy="658368"/>
+            <a:off x="9612539" y="1689781"/>
+            <a:ext cx="2076237" cy="734695"/>
           </a:xfrm>
           <a:prstGeom prst="rect">
             <a:avLst/>
@@ -12737,8 +12737,8 @@
         </p:nvSpPr>
         <p:spPr>
           <a:xfrm>
-            <a:off x="9749699" y="1481328"/>
-            <a:ext cx="1801917" cy="658368"/>
+            <a:off x="9749699" y="1689781"/>
+            <a:ext cx="1801917" cy="734695"/>
           </a:xfrm>
           <a:prstGeom prst="rect">
             <a:avLst/>
@@ -12757,38 +12757,56 @@
               </a:lnSpc>
             </a:pPr>
             <a:r>
+              <a:rPr sz="1450" b="0">
+                <a:solidFill>
+                  <a:srgbClr val="1C2530"/>
+                </a:solidFill>
+                <a:latin typeface="Arial"/>
+              </a:rPr>
+              <a:t>5  Delivery</a:t>
+            </a:r>
+          </a:p>
+        </p:txBody>
+      </p:sp>
+      <p:sp>
+        <p:nvSpPr>
+          <p:cNvPr id="40" name="cpe|exhibit|text|39"/>
+          <p:cNvSpPr txBox="1"/>
+          <p:nvPr/>
+        </p:nvSpPr>
+        <p:spPr>
+          <a:xfrm>
+            <a:off x="9612539" y="2653076"/>
+            <a:ext cx="2076237" cy="256032"/>
+          </a:xfrm>
+          <a:prstGeom prst="rect">
+            <a:avLst/>
+          </a:prstGeom>
+          <a:noFill/>
+        </p:spPr>
+        <p:txBody>
+          <a:bodyPr wrap="square" lIns="0" rIns="0" tIns="0" bIns="0" anchor="t">
+            <a:noAutofit/>
+          </a:bodyPr>
+          <a:lstStyle/>
+          <a:p>
+            <a:pPr algn="l">
+              <a:lnSpc>
+                <a:spcPct val="100000"/>
+              </a:lnSpc>
+            </a:pPr>
+            <a:r>
               <a:rPr sz="1200" b="0">
                 <a:solidFill>
-                  <a:srgbClr val="1C2530"/>
-                </a:solidFill>
-                <a:latin typeface="Arial"/>
-              </a:rPr>
-              <a:t>5  Delivery</a:t>
-            </a:r>
-          </a:p>
-        </p:txBody>
-      </p:sp>
-      <p:cxnSp>
-        <p:nvCxnSpPr>
-          <p:cNvPr id="40" name="cpe|exhibit|line|39"/>
-          <p:cNvCxnSpPr/>
-          <p:nvPr/>
-        </p:nvCxnSpPr>
-        <p:spPr>
-          <a:xfrm>
-            <a:off x="9612539" y="4489704"/>
-            <a:ext cx="2076236" cy="0"/>
-          </a:xfrm>
-          <a:prstGeom prst="line">
-            <a:avLst/>
-          </a:prstGeom>
-          <a:ln w="9525">
-            <a:solidFill>
-              <a:srgbClr val="B6C0CB"/>
-            </a:solidFill>
-          </a:ln>
-        </p:spPr>
-      </p:cxnSp>
+                  <a:srgbClr val="5B6776"/>
+                </a:solidFill>
+                <a:latin typeface="Arial"/>
+              </a:rPr>
+              <a:t>Carriers · 24h</a:t>
+            </a:r>
+          </a:p>
+        </p:txBody>
+      </p:sp>
       <p:sp>
         <p:nvSpPr>
           <p:cNvPr id="41" name="cpe|exhibit|text|40"/>
@@ -12797,125 +12815,8 @@
         </p:nvSpPr>
         <p:spPr>
           <a:xfrm>
-            <a:off x="9612539" y="4581144"/>
-            <a:ext cx="2076237" cy="457200"/>
-          </a:xfrm>
-          <a:prstGeom prst="rect">
-            <a:avLst/>
-          </a:prstGeom>
-          <a:noFill/>
-        </p:spPr>
-        <p:txBody>
-          <a:bodyPr wrap="square" lIns="0" rIns="0" tIns="0" bIns="0" anchor="t">
-            <a:noAutofit/>
-          </a:bodyPr>
-          <a:lstStyle/>
-          <a:p>
-            <a:pPr algn="l">
-              <a:lnSpc>
-                <a:spcPct val="100000"/>
-              </a:lnSpc>
-            </a:pPr>
-            <a:r>
-              <a:rPr sz="2200" b="1">
-                <a:solidFill>
-                  <a:srgbClr val="1C2530"/>
-                </a:solidFill>
-                <a:latin typeface="Arial"/>
-              </a:rPr>
-              <a:t>85%</a:t>
-            </a:r>
-          </a:p>
-        </p:txBody>
-      </p:sp>
-      <p:sp>
-        <p:nvSpPr>
-          <p:cNvPr id="42" name="cpe|exhibit|text|41"/>
-          <p:cNvSpPr txBox="1"/>
-          <p:nvPr/>
-        </p:nvSpPr>
-        <p:spPr>
-          <a:xfrm>
-            <a:off x="9612539" y="5038344"/>
-            <a:ext cx="2076237" cy="347472"/>
-          </a:xfrm>
-          <a:prstGeom prst="rect">
-            <a:avLst/>
-          </a:prstGeom>
-          <a:noFill/>
-        </p:spPr>
-        <p:txBody>
-          <a:bodyPr wrap="square" lIns="0" rIns="0" tIns="0" bIns="0" anchor="t">
-            <a:noAutofit/>
-          </a:bodyPr>
-          <a:lstStyle/>
-          <a:p>
-            <a:pPr algn="l">
-              <a:lnSpc>
-                <a:spcPct val="100000"/>
-              </a:lnSpc>
-            </a:pPr>
-            <a:r>
-              <a:rPr sz="1100" b="0">
-                <a:solidFill>
-                  <a:srgbClr val="5B6776"/>
-                </a:solidFill>
-                <a:latin typeface="Arial"/>
-              </a:rPr>
-              <a:t>in full, on time (from 61%)</a:t>
-            </a:r>
-          </a:p>
-        </p:txBody>
-      </p:sp>
-      <p:sp>
-        <p:nvSpPr>
-          <p:cNvPr id="43" name="cpe|exhibit|text|42"/>
-          <p:cNvSpPr txBox="1"/>
-          <p:nvPr/>
-        </p:nvSpPr>
-        <p:spPr>
-          <a:xfrm>
-            <a:off x="9612539" y="2368296"/>
-            <a:ext cx="2076237" cy="256032"/>
-          </a:xfrm>
-          <a:prstGeom prst="rect">
-            <a:avLst/>
-          </a:prstGeom>
-          <a:noFill/>
-        </p:spPr>
-        <p:txBody>
-          <a:bodyPr wrap="square" lIns="0" rIns="0" tIns="0" bIns="0" anchor="t">
-            <a:noAutofit/>
-          </a:bodyPr>
-          <a:lstStyle/>
-          <a:p>
-            <a:pPr algn="l">
-              <a:lnSpc>
-                <a:spcPct val="100000"/>
-              </a:lnSpc>
-            </a:pPr>
-            <a:r>
-              <a:rPr sz="1000" b="0">
-                <a:solidFill>
-                  <a:srgbClr val="5B6776"/>
-                </a:solidFill>
-                <a:latin typeface="Arial"/>
-              </a:rPr>
-              <a:t>Carriers · 24h</a:t>
-            </a:r>
-          </a:p>
-        </p:txBody>
-      </p:sp>
-      <p:sp>
-        <p:nvSpPr>
-          <p:cNvPr id="44" name="cpe|exhibit|text|43"/>
-          <p:cNvSpPr txBox="1"/>
-          <p:nvPr/>
-        </p:nvSpPr>
-        <p:spPr>
-          <a:xfrm>
-            <a:off x="9612539" y="2679192"/>
-            <a:ext cx="2076237" cy="1673352"/>
+            <a:off x="9612539" y="2963972"/>
+            <a:ext cx="2076237" cy="780669"/>
           </a:xfrm>
           <a:prstGeom prst="rect">
             <a:avLst/>
@@ -12943,7 +12844,7 @@
               <a:buChar char="•"/>
             </a:pPr>
             <a:r>
-              <a:rPr sz="1100" b="0">
+              <a:rPr sz="1300" b="0">
                 <a:solidFill>
                   <a:srgbClr val="1C2530"/>
                 </a:solidFill>
@@ -12965,13 +12866,112 @@
               <a:buChar char="•"/>
             </a:pPr>
             <a:r>
-              <a:rPr sz="1100" b="0">
+              <a:rPr sz="1300" b="0">
                 <a:solidFill>
                   <a:srgbClr val="1C2530"/>
                 </a:solidFill>
                 <a:latin typeface="Arial"/>
               </a:rPr>
               <a:t>Returns in 48h</a:t>
+            </a:r>
+          </a:p>
+        </p:txBody>
+      </p:sp>
+      <p:cxnSp>
+        <p:nvCxnSpPr>
+          <p:cNvPr id="42" name="cpe|exhibit|line|41"/>
+          <p:cNvCxnSpPr/>
+          <p:nvPr/>
+        </p:nvCxnSpPr>
+        <p:spPr>
+          <a:xfrm>
+            <a:off x="9612539" y="4018961"/>
+            <a:ext cx="2076236" cy="0"/>
+          </a:xfrm>
+          <a:prstGeom prst="line">
+            <a:avLst/>
+          </a:prstGeom>
+          <a:ln w="9525">
+            <a:solidFill>
+              <a:srgbClr val="B6C0CB"/>
+            </a:solidFill>
+          </a:ln>
+        </p:spPr>
+      </p:cxnSp>
+      <p:sp>
+        <p:nvSpPr>
+          <p:cNvPr id="43" name="cpe|exhibit|text|42"/>
+          <p:cNvSpPr txBox="1"/>
+          <p:nvPr/>
+        </p:nvSpPr>
+        <p:spPr>
+          <a:xfrm>
+            <a:off x="9612539" y="4110401"/>
+            <a:ext cx="2076237" cy="548640"/>
+          </a:xfrm>
+          <a:prstGeom prst="rect">
+            <a:avLst/>
+          </a:prstGeom>
+          <a:noFill/>
+        </p:spPr>
+        <p:txBody>
+          <a:bodyPr wrap="square" lIns="0" rIns="0" tIns="0" bIns="0" anchor="t">
+            <a:noAutofit/>
+          </a:bodyPr>
+          <a:lstStyle/>
+          <a:p>
+            <a:pPr algn="l">
+              <a:lnSpc>
+                <a:spcPct val="100000"/>
+              </a:lnSpc>
+            </a:pPr>
+            <a:r>
+              <a:rPr sz="2650" b="1">
+                <a:solidFill>
+                  <a:srgbClr val="1C2530"/>
+                </a:solidFill>
+                <a:latin typeface="Arial"/>
+              </a:rPr>
+              <a:t>85%</a:t>
+            </a:r>
+          </a:p>
+        </p:txBody>
+      </p:sp>
+      <p:sp>
+        <p:nvSpPr>
+          <p:cNvPr id="44" name="cpe|exhibit|text|43"/>
+          <p:cNvSpPr txBox="1"/>
+          <p:nvPr/>
+        </p:nvSpPr>
+        <p:spPr>
+          <a:xfrm>
+            <a:off x="9612539" y="4659041"/>
+            <a:ext cx="2076237" cy="347472"/>
+          </a:xfrm>
+          <a:prstGeom prst="rect">
+            <a:avLst/>
+          </a:prstGeom>
+          <a:noFill/>
+        </p:spPr>
+        <p:txBody>
+          <a:bodyPr wrap="square" lIns="0" rIns="0" tIns="0" bIns="0" anchor="t">
+            <a:noAutofit/>
+          </a:bodyPr>
+          <a:lstStyle/>
+          <a:p>
+            <a:pPr algn="l">
+              <a:lnSpc>
+                <a:spcPct val="100000"/>
+              </a:lnSpc>
+            </a:pPr>
+            <a:r>
+              <a:rPr sz="1300" b="0">
+                <a:solidFill>
+                  <a:srgbClr val="5B6776"/>
+                </a:solidFill>
+                <a:latin typeface="Arial"/>
+              </a:rPr>
+              <a:t>in full, on time (from 61%)</a:t>
             </a:r>
           </a:p>
         </p:txBody>
@@ -14592,7 +14592,7 @@
         </p:nvSpPr>
         <p:spPr>
           <a:xfrm>
-            <a:off x="4998568" y="1481328"/>
+            <a:off x="4998568" y="2045879"/>
             <a:ext cx="2194560" cy="868680"/>
           </a:xfrm>
           <a:prstGeom prst="rect">
@@ -14621,7 +14621,7 @@
         </p:nvSpPr>
         <p:spPr>
           <a:xfrm>
-            <a:off x="5053432" y="1481328"/>
+            <a:off x="5053432" y="2045879"/>
             <a:ext cx="2084832" cy="868680"/>
           </a:xfrm>
           <a:prstGeom prst="rect">
@@ -14679,7 +14679,7 @@
         </p:nvCxnSpPr>
         <p:spPr>
           <a:xfrm>
-            <a:off x="6095848" y="2350008"/>
+            <a:off x="6095848" y="2914559"/>
             <a:ext cx="0" cy="192024"/>
           </a:xfrm>
           <a:prstGeom prst="line">
@@ -14700,7 +14700,7 @@
         </p:nvCxnSpPr>
         <p:spPr>
           <a:xfrm>
-            <a:off x="6095848" y="2542032"/>
+            <a:off x="6095848" y="3106583"/>
             <a:ext cx="0" cy="192024"/>
           </a:xfrm>
           <a:prstGeom prst="line">
@@ -14721,7 +14721,7 @@
         </p:nvSpPr>
         <p:spPr>
           <a:xfrm>
-            <a:off x="4998568" y="2734056"/>
+            <a:off x="4998568" y="3298607"/>
             <a:ext cx="2194560" cy="868680"/>
           </a:xfrm>
           <a:prstGeom prst="rect">
@@ -14750,7 +14750,7 @@
         </p:nvSpPr>
         <p:spPr>
           <a:xfrm>
-            <a:off x="5053432" y="2734056"/>
+            <a:off x="5053432" y="3298607"/>
             <a:ext cx="2084832" cy="868680"/>
           </a:xfrm>
           <a:prstGeom prst="rect">
@@ -14808,7 +14808,7 @@
         </p:nvCxnSpPr>
         <p:spPr>
           <a:xfrm>
-            <a:off x="6095848" y="3602736"/>
+            <a:off x="6095848" y="4167287"/>
             <a:ext cx="0" cy="192024"/>
           </a:xfrm>
           <a:prstGeom prst="line">
@@ -14829,7 +14829,7 @@
         </p:nvCxnSpPr>
         <p:spPr>
           <a:xfrm>
-            <a:off x="1901152" y="3794760"/>
+            <a:off x="1901152" y="4359311"/>
             <a:ext cx="4194696" cy="0"/>
           </a:xfrm>
           <a:prstGeom prst="line">
@@ -14850,7 +14850,7 @@
         </p:nvCxnSpPr>
         <p:spPr>
           <a:xfrm>
-            <a:off x="1901152" y="3794760"/>
+            <a:off x="1901152" y="4359311"/>
             <a:ext cx="0" cy="192024"/>
           </a:xfrm>
           <a:prstGeom prst="line">
@@ -14871,7 +14871,7 @@
         </p:nvSpPr>
         <p:spPr>
           <a:xfrm>
-            <a:off x="803872" y="3986784"/>
+            <a:off x="803872" y="4551335"/>
             <a:ext cx="2194560" cy="868680"/>
           </a:xfrm>
           <a:prstGeom prst="rect">
@@ -14900,7 +14900,7 @@
         </p:nvSpPr>
         <p:spPr>
           <a:xfrm>
-            <a:off x="858736" y="3986784"/>
+            <a:off x="858736" y="4551335"/>
             <a:ext cx="2084832" cy="868680"/>
           </a:xfrm>
           <a:prstGeom prst="rect">
@@ -14958,7 +14958,7 @@
         </p:nvCxnSpPr>
         <p:spPr>
           <a:xfrm>
-            <a:off x="6095848" y="3602736"/>
+            <a:off x="6095848" y="4167287"/>
             <a:ext cx="0" cy="192024"/>
           </a:xfrm>
           <a:prstGeom prst="line">
@@ -14979,7 +14979,7 @@
         </p:nvCxnSpPr>
         <p:spPr>
           <a:xfrm>
-            <a:off x="4697616" y="3794760"/>
+            <a:off x="4697616" y="4359311"/>
             <a:ext cx="1398232" cy="0"/>
           </a:xfrm>
           <a:prstGeom prst="line">
@@ -15000,7 +15000,7 @@
         </p:nvCxnSpPr>
         <p:spPr>
           <a:xfrm>
-            <a:off x="4697616" y="3794760"/>
+            <a:off x="4697616" y="4359311"/>
             <a:ext cx="0" cy="192024"/>
           </a:xfrm>
           <a:prstGeom prst="line">
@@ -15021,7 +15021,7 @@
         </p:nvSpPr>
         <p:spPr>
           <a:xfrm>
-            <a:off x="3600336" y="3986784"/>
+            <a:off x="3600336" y="4551335"/>
             <a:ext cx="2194560" cy="868680"/>
           </a:xfrm>
           <a:prstGeom prst="rect">
@@ -15050,7 +15050,7 @@
         </p:nvSpPr>
         <p:spPr>
           <a:xfrm>
-            <a:off x="3655200" y="3986784"/>
+            <a:off x="3655200" y="4551335"/>
             <a:ext cx="2084832" cy="868680"/>
           </a:xfrm>
           <a:prstGeom prst="rect">
@@ -15108,7 +15108,7 @@
         </p:nvCxnSpPr>
         <p:spPr>
           <a:xfrm>
-            <a:off x="6095848" y="3602736"/>
+            <a:off x="6095848" y="4167287"/>
             <a:ext cx="0" cy="192024"/>
           </a:xfrm>
           <a:prstGeom prst="line">
@@ -15129,7 +15129,7 @@
         </p:nvCxnSpPr>
         <p:spPr>
           <a:xfrm>
-            <a:off x="6095848" y="3794760"/>
+            <a:off x="6095848" y="4359311"/>
             <a:ext cx="1398232" cy="0"/>
           </a:xfrm>
           <a:prstGeom prst="line">
@@ -15150,7 +15150,7 @@
         </p:nvCxnSpPr>
         <p:spPr>
           <a:xfrm>
-            <a:off x="7494080" y="3794760"/>
+            <a:off x="7494080" y="4359311"/>
             <a:ext cx="0" cy="192024"/>
           </a:xfrm>
           <a:prstGeom prst="line">
@@ -15171,7 +15171,7 @@
         </p:nvSpPr>
         <p:spPr>
           <a:xfrm>
-            <a:off x="6396800" y="3986784"/>
+            <a:off x="6396800" y="4551335"/>
             <a:ext cx="2194560" cy="868680"/>
           </a:xfrm>
           <a:prstGeom prst="rect">
@@ -15200,7 +15200,7 @@
         </p:nvSpPr>
         <p:spPr>
           <a:xfrm>
-            <a:off x="6451663" y="3986784"/>
+            <a:off x="6451663" y="4551335"/>
             <a:ext cx="2084832" cy="868680"/>
           </a:xfrm>
           <a:prstGeom prst="rect">
@@ -15258,7 +15258,7 @@
         </p:nvCxnSpPr>
         <p:spPr>
           <a:xfrm>
-            <a:off x="6095848" y="3602736"/>
+            <a:off x="6095848" y="4167287"/>
             <a:ext cx="0" cy="192024"/>
           </a:xfrm>
           <a:prstGeom prst="line">
@@ -15279,7 +15279,7 @@
         </p:nvCxnSpPr>
         <p:spPr>
           <a:xfrm>
-            <a:off x="6095848" y="3794760"/>
+            <a:off x="6095848" y="4359311"/>
             <a:ext cx="4194695" cy="0"/>
           </a:xfrm>
           <a:prstGeom prst="line">
@@ -15300,7 +15300,7 @@
         </p:nvCxnSpPr>
         <p:spPr>
           <a:xfrm>
-            <a:off x="10290543" y="3794760"/>
+            <a:off x="10290543" y="4359311"/>
             <a:ext cx="0" cy="192024"/>
           </a:xfrm>
           <a:prstGeom prst="line">
@@ -15321,7 +15321,7 @@
         </p:nvSpPr>
         <p:spPr>
           <a:xfrm>
-            <a:off x="9193263" y="3986784"/>
+            <a:off x="9193263" y="4551335"/>
             <a:ext cx="2194560" cy="868680"/>
           </a:xfrm>
           <a:prstGeom prst="rect">
@@ -15350,7 +15350,7 @@
         </p:nvSpPr>
         <p:spPr>
           <a:xfrm>
-            <a:off x="9248127" y="3986784"/>
+            <a:off x="9248127" y="4551335"/>
             <a:ext cx="2084832" cy="868680"/>
           </a:xfrm>
           <a:prstGeom prst="rect">
@@ -16855,7 +16855,7 @@
         </p:nvSpPr>
         <p:spPr>
           <a:xfrm>
-            <a:off x="502920" y="1481328"/>
+            <a:off x="502920" y="1774005"/>
             <a:ext cx="3594506" cy="493776"/>
           </a:xfrm>
           <a:prstGeom prst="rect">
@@ -16875,7 +16875,7 @@
               </a:lnSpc>
             </a:pPr>
             <a:r>
-              <a:rPr sz="1400" b="1">
+              <a:rPr sz="1550" b="1">
                 <a:solidFill>
                   <a:srgbClr val="13294B"/>
                 </a:solidFill>
@@ -16894,7 +16894,7 @@
         </p:nvCxnSpPr>
         <p:spPr>
           <a:xfrm>
-            <a:off x="502920" y="2048256"/>
+            <a:off x="502920" y="2340933"/>
             <a:ext cx="3594506" cy="0"/>
           </a:xfrm>
           <a:prstGeom prst="line">
@@ -16915,8 +16915,8 @@
         </p:nvSpPr>
         <p:spPr>
           <a:xfrm>
-            <a:off x="502920" y="2276856"/>
-            <a:ext cx="3594506" cy="502920"/>
+            <a:off x="502920" y="2569533"/>
+            <a:ext cx="3594506" cy="553212"/>
           </a:xfrm>
           <a:prstGeom prst="rect">
             <a:avLst/>
@@ -16935,7 +16935,7 @@
               </a:lnSpc>
             </a:pPr>
             <a:r>
-              <a:rPr sz="2400" b="1">
+              <a:rPr sz="2650" b="1">
                 <a:solidFill>
                   <a:srgbClr val="13294B"/>
                 </a:solidFill>
@@ -16954,7 +16954,7 @@
         </p:nvSpPr>
         <p:spPr>
           <a:xfrm>
-            <a:off x="502920" y="2779776"/>
+            <a:off x="502920" y="3122745"/>
             <a:ext cx="3594506" cy="274320"/>
           </a:xfrm>
           <a:prstGeom prst="rect">
@@ -16974,7 +16974,7 @@
               </a:lnSpc>
             </a:pPr>
             <a:r>
-              <a:rPr sz="1100" b="0">
+              <a:rPr sz="1200" b="0">
                 <a:solidFill>
                   <a:srgbClr val="5B6776"/>
                 </a:solidFill>
@@ -16993,8 +16993,8 @@
         </p:nvSpPr>
         <p:spPr>
           <a:xfrm>
-            <a:off x="502920" y="3145536"/>
-            <a:ext cx="3594506" cy="214884"/>
+            <a:off x="502920" y="3488505"/>
+            <a:ext cx="3594506" cy="229743"/>
           </a:xfrm>
           <a:prstGeom prst="rect">
             <a:avLst/>
@@ -17013,7 +17013,7 @@
               </a:lnSpc>
             </a:pPr>
             <a:r>
-              <a:rPr sz="1200" b="1">
+              <a:rPr sz="1300" b="1">
                 <a:solidFill>
                   <a:srgbClr val="1C2530"/>
                 </a:solidFill>
@@ -17032,8 +17032,8 @@
         </p:nvSpPr>
         <p:spPr>
           <a:xfrm>
-            <a:off x="502920" y="3461004"/>
-            <a:ext cx="3594506" cy="1943100"/>
+            <a:off x="502920" y="3818832"/>
+            <a:ext cx="3594506" cy="1585272"/>
           </a:xfrm>
           <a:prstGeom prst="rect">
             <a:avLst/>
@@ -17051,7 +17051,7 @@
                 <a:spcPct val="108000"/>
               </a:lnSpc>
               <a:spcAft>
-                <a:spcPts val="600"/>
+                <a:spcPts val="660"/>
               </a:spcAft>
               <a:buClr>
                 <a:srgbClr val="1C2530"/>
@@ -17061,7 +17061,7 @@
               <a:buChar char="•"/>
             </a:pPr>
             <a:r>
-              <a:rPr sz="1200" b="0">
+              <a:rPr sz="1300" b="0">
                 <a:solidFill>
                   <a:srgbClr val="1C2530"/>
                 </a:solidFill>
@@ -17076,7 +17076,7 @@
                 <a:spcPct val="108000"/>
               </a:lnSpc>
               <a:spcAft>
-                <a:spcPts val="600"/>
+                <a:spcPts val="660"/>
               </a:spcAft>
               <a:buClr>
                 <a:srgbClr val="1C2530"/>
@@ -17086,7 +17086,7 @@
               <a:buChar char="•"/>
             </a:pPr>
             <a:r>
-              <a:rPr sz="1200" b="0">
+              <a:rPr sz="1300" b="0">
                 <a:solidFill>
                   <a:srgbClr val="1C2530"/>
                 </a:solidFill>
@@ -17101,7 +17101,7 @@
                 <a:spcPct val="108000"/>
               </a:lnSpc>
               <a:spcAft>
-                <a:spcPts val="600"/>
+                <a:spcPts val="660"/>
               </a:spcAft>
               <a:buClr>
                 <a:srgbClr val="1C2530"/>
@@ -17111,7 +17111,7 @@
               <a:buChar char="•"/>
             </a:pPr>
             <a:r>
-              <a:rPr sz="1200" b="0">
+              <a:rPr sz="1300" b="0">
                 <a:solidFill>
                   <a:srgbClr val="1C2530"/>
                 </a:solidFill>
@@ -17133,7 +17133,7 @@
               <a:buChar char="•"/>
             </a:pPr>
             <a:r>
-              <a:rPr sz="1200" b="0">
+              <a:rPr sz="1300" b="0">
                 <a:solidFill>
                   <a:srgbClr val="1C2530"/>
                 </a:solidFill>
@@ -17152,7 +17152,7 @@
         </p:nvSpPr>
         <p:spPr>
           <a:xfrm>
-            <a:off x="4298594" y="1481328"/>
+            <a:off x="4298594" y="1774005"/>
             <a:ext cx="3594506" cy="566928"/>
           </a:xfrm>
           <a:prstGeom prst="rect">
@@ -17181,7 +17181,7 @@
         </p:nvSpPr>
         <p:spPr>
           <a:xfrm>
-            <a:off x="4435754" y="1481328"/>
+            <a:off x="4435754" y="1774005"/>
             <a:ext cx="3320186" cy="566928"/>
           </a:xfrm>
           <a:prstGeom prst="rect">
@@ -17201,7 +17201,7 @@
               </a:lnSpc>
             </a:pPr>
             <a:r>
-              <a:rPr sz="1400" b="1">
+              <a:rPr sz="1550" b="1">
                 <a:solidFill>
                   <a:srgbClr val="FFFFFF"/>
                 </a:solidFill>
@@ -17220,8 +17220,8 @@
         </p:nvSpPr>
         <p:spPr>
           <a:xfrm>
-            <a:off x="4298594" y="2276856"/>
-            <a:ext cx="3594506" cy="502920"/>
+            <a:off x="4298594" y="2569533"/>
+            <a:ext cx="3594506" cy="553212"/>
           </a:xfrm>
           <a:prstGeom prst="rect">
             <a:avLst/>
@@ -17240,7 +17240,7 @@
               </a:lnSpc>
             </a:pPr>
             <a:r>
-              <a:rPr sz="2400" b="1">
+              <a:rPr sz="2650" b="1">
                 <a:solidFill>
                   <a:srgbClr val="13294B"/>
                 </a:solidFill>
@@ -17259,7 +17259,7 @@
         </p:nvSpPr>
         <p:spPr>
           <a:xfrm>
-            <a:off x="4298594" y="2779776"/>
+            <a:off x="4298594" y="3122745"/>
             <a:ext cx="3594506" cy="274320"/>
           </a:xfrm>
           <a:prstGeom prst="rect">
@@ -17279,7 +17279,7 @@
               </a:lnSpc>
             </a:pPr>
             <a:r>
-              <a:rPr sz="1100" b="0">
+              <a:rPr sz="1200" b="0">
                 <a:solidFill>
                   <a:srgbClr val="5B6776"/>
                 </a:solidFill>
@@ -17298,8 +17298,8 @@
         </p:nvSpPr>
         <p:spPr>
           <a:xfrm>
-            <a:off x="4298594" y="3145536"/>
-            <a:ext cx="3594506" cy="214884"/>
+            <a:off x="4298594" y="3488505"/>
+            <a:ext cx="3594506" cy="229743"/>
           </a:xfrm>
           <a:prstGeom prst="rect">
             <a:avLst/>
@@ -17318,7 +17318,7 @@
               </a:lnSpc>
             </a:pPr>
             <a:r>
-              <a:rPr sz="1200" b="1">
+              <a:rPr sz="1300" b="1">
                 <a:solidFill>
                   <a:srgbClr val="1C2530"/>
                 </a:solidFill>
@@ -17337,8 +17337,8 @@
         </p:nvSpPr>
         <p:spPr>
           <a:xfrm>
-            <a:off x="4298594" y="3461004"/>
-            <a:ext cx="3594506" cy="1943100"/>
+            <a:off x="4298594" y="3818832"/>
+            <a:ext cx="3594506" cy="1585272"/>
           </a:xfrm>
           <a:prstGeom prst="rect">
             <a:avLst/>
@@ -17356,7 +17356,7 @@
                 <a:spcPct val="108000"/>
               </a:lnSpc>
               <a:spcAft>
-                <a:spcPts val="600"/>
+                <a:spcPts val="660"/>
               </a:spcAft>
               <a:buClr>
                 <a:srgbClr val="1C2530"/>
@@ -17366,7 +17366,7 @@
               <a:buChar char="•"/>
             </a:pPr>
             <a:r>
-              <a:rPr sz="1200" b="0">
+              <a:rPr sz="1300" b="0">
                 <a:solidFill>
                   <a:srgbClr val="1C2530"/>
                 </a:solidFill>
@@ -17381,7 +17381,7 @@
                 <a:spcPct val="108000"/>
               </a:lnSpc>
               <a:spcAft>
-                <a:spcPts val="600"/>
+                <a:spcPts val="660"/>
               </a:spcAft>
               <a:buClr>
                 <a:srgbClr val="1C2530"/>
@@ -17391,7 +17391,7 @@
               <a:buChar char="•"/>
             </a:pPr>
             <a:r>
-              <a:rPr sz="1200" b="0">
+              <a:rPr sz="1300" b="0">
                 <a:solidFill>
                   <a:srgbClr val="1C2530"/>
                 </a:solidFill>
@@ -17406,7 +17406,7 @@
                 <a:spcPct val="108000"/>
               </a:lnSpc>
               <a:spcAft>
-                <a:spcPts val="600"/>
+                <a:spcPts val="660"/>
               </a:spcAft>
               <a:buClr>
                 <a:srgbClr val="1C2530"/>
@@ -17416,7 +17416,7 @@
               <a:buChar char="•"/>
             </a:pPr>
             <a:r>
-              <a:rPr sz="1200" b="0">
+              <a:rPr sz="1300" b="0">
                 <a:solidFill>
                   <a:srgbClr val="1C2530"/>
                 </a:solidFill>
@@ -17438,7 +17438,7 @@
               <a:buChar char="•"/>
             </a:pPr>
             <a:r>
-              <a:rPr sz="1200" b="0">
+              <a:rPr sz="1300" b="0">
                 <a:solidFill>
                   <a:srgbClr val="1C2530"/>
                 </a:solidFill>
@@ -17457,7 +17457,7 @@
         </p:nvSpPr>
         <p:spPr>
           <a:xfrm>
-            <a:off x="8094269" y="1481328"/>
+            <a:off x="8094269" y="1774005"/>
             <a:ext cx="3594506" cy="493776"/>
           </a:xfrm>
           <a:prstGeom prst="rect">
@@ -17477,7 +17477,7 @@
               </a:lnSpc>
             </a:pPr>
             <a:r>
-              <a:rPr sz="1400" b="1">
+              <a:rPr sz="1550" b="1">
                 <a:solidFill>
                   <a:srgbClr val="13294B"/>
                 </a:solidFill>
@@ -17496,7 +17496,7 @@
         </p:nvCxnSpPr>
         <p:spPr>
           <a:xfrm>
-            <a:off x="8094269" y="2048256"/>
+            <a:off x="8094269" y="2340933"/>
             <a:ext cx="3594506" cy="0"/>
           </a:xfrm>
           <a:prstGeom prst="line">
@@ -17517,8 +17517,8 @@
         </p:nvSpPr>
         <p:spPr>
           <a:xfrm>
-            <a:off x="8094269" y="2276856"/>
-            <a:ext cx="3594506" cy="502920"/>
+            <a:off x="8094269" y="2569533"/>
+            <a:ext cx="3594506" cy="553212"/>
           </a:xfrm>
           <a:prstGeom prst="rect">
             <a:avLst/>
@@ -17537,7 +17537,7 @@
               </a:lnSpc>
             </a:pPr>
             <a:r>
-              <a:rPr sz="2400" b="1">
+              <a:rPr sz="2650" b="1">
                 <a:solidFill>
                   <a:srgbClr val="13294B"/>
                 </a:solidFill>
@@ -17556,7 +17556,7 @@
         </p:nvSpPr>
         <p:spPr>
           <a:xfrm>
-            <a:off x="8094269" y="2779776"/>
+            <a:off x="8094269" y="3122745"/>
             <a:ext cx="3594506" cy="274320"/>
           </a:xfrm>
           <a:prstGeom prst="rect">
@@ -17576,7 +17576,7 @@
               </a:lnSpc>
             </a:pPr>
             <a:r>
-              <a:rPr sz="1100" b="0">
+              <a:rPr sz="1200" b="0">
                 <a:solidFill>
                   <a:srgbClr val="5B6776"/>
                 </a:solidFill>
@@ -17595,8 +17595,8 @@
         </p:nvSpPr>
         <p:spPr>
           <a:xfrm>
-            <a:off x="8094269" y="3145536"/>
-            <a:ext cx="3594506" cy="214884"/>
+            <a:off x="8094269" y="3488505"/>
+            <a:ext cx="3594506" cy="229743"/>
           </a:xfrm>
           <a:prstGeom prst="rect">
             <a:avLst/>
@@ -17615,7 +17615,7 @@
               </a:lnSpc>
             </a:pPr>
             <a:r>
-              <a:rPr sz="1200" b="1">
+              <a:rPr sz="1300" b="1">
                 <a:solidFill>
                   <a:srgbClr val="1C2530"/>
                 </a:solidFill>
@@ -17634,8 +17634,8 @@
         </p:nvSpPr>
         <p:spPr>
           <a:xfrm>
-            <a:off x="8094269" y="3461004"/>
-            <a:ext cx="3594506" cy="1943100"/>
+            <a:off x="8094269" y="3818832"/>
+            <a:ext cx="3594506" cy="1585272"/>
           </a:xfrm>
           <a:prstGeom prst="rect">
             <a:avLst/>
@@ -17653,7 +17653,7 @@
                 <a:spcPct val="108000"/>
               </a:lnSpc>
               <a:spcAft>
-                <a:spcPts val="600"/>
+                <a:spcPts val="660"/>
               </a:spcAft>
               <a:buClr>
                 <a:srgbClr val="1C2530"/>
@@ -17663,7 +17663,7 @@
               <a:buChar char="•"/>
             </a:pPr>
             <a:r>
-              <a:rPr sz="1200" b="0">
+              <a:rPr sz="1300" b="0">
                 <a:solidFill>
                   <a:srgbClr val="1C2530"/>
                 </a:solidFill>
@@ -17678,7 +17678,7 @@
                 <a:spcPct val="108000"/>
               </a:lnSpc>
               <a:spcAft>
-                <a:spcPts val="600"/>
+                <a:spcPts val="660"/>
               </a:spcAft>
               <a:buClr>
                 <a:srgbClr val="1C2530"/>
@@ -17688,7 +17688,7 @@
               <a:buChar char="•"/>
             </a:pPr>
             <a:r>
-              <a:rPr sz="1200" b="0">
+              <a:rPr sz="1300" b="0">
                 <a:solidFill>
                   <a:srgbClr val="1C2530"/>
                 </a:solidFill>
@@ -17703,7 +17703,7 @@
                 <a:spcPct val="108000"/>
               </a:lnSpc>
               <a:spcAft>
-                <a:spcPts val="600"/>
+                <a:spcPts val="660"/>
               </a:spcAft>
               <a:buClr>
                 <a:srgbClr val="1C2530"/>
@@ -17713,7 +17713,7 @@
               <a:buChar char="•"/>
             </a:pPr>
             <a:r>
-              <a:rPr sz="1200" b="0">
+              <a:rPr sz="1300" b="0">
                 <a:solidFill>
                   <a:srgbClr val="1C2530"/>
                 </a:solidFill>
@@ -17735,7 +17735,7 @@
               <a:buChar char="•"/>
             </a:pPr>
             <a:r>
-              <a:rPr sz="1200" b="0">
+              <a:rPr sz="1300" b="0">
                 <a:solidFill>
                   <a:srgbClr val="1C2530"/>
                 </a:solidFill>
@@ -21478,7 +21478,7 @@
         </p:nvCxnSpPr>
         <p:spPr>
           <a:xfrm>
-            <a:off x="502920" y="1481328"/>
+            <a:off x="502920" y="1948266"/>
             <a:ext cx="5391760" cy="0"/>
           </a:xfrm>
           <a:prstGeom prst="line">
@@ -21499,8 +21499,8 @@
         </p:nvSpPr>
         <p:spPr>
           <a:xfrm>
-            <a:off x="502920" y="1618488"/>
-            <a:ext cx="5391760" cy="685800"/>
+            <a:off x="502920" y="2085426"/>
+            <a:ext cx="5391760" cy="702945"/>
           </a:xfrm>
           <a:prstGeom prst="rect">
             <a:avLst/>
@@ -21519,7 +21519,7 @@
               </a:lnSpc>
             </a:pPr>
             <a:r>
-              <a:rPr sz="3400" b="1">
+              <a:rPr sz="4100" b="1">
                 <a:solidFill>
                   <a:srgbClr val="13294B"/>
                 </a:solidFill>
@@ -21538,8 +21538,8 @@
         </p:nvSpPr>
         <p:spPr>
           <a:xfrm>
-            <a:off x="502920" y="2304288"/>
-            <a:ext cx="5391760" cy="237744"/>
+            <a:off x="502920" y="2788371"/>
+            <a:ext cx="5391760" cy="247650"/>
           </a:xfrm>
           <a:prstGeom prst="rect">
             <a:avLst/>
@@ -21558,7 +21558,7 @@
               </a:lnSpc>
             </a:pPr>
             <a:r>
-              <a:rPr sz="1100" b="1">
+              <a:rPr sz="1300" b="1">
                 <a:solidFill>
                   <a:srgbClr val="2E7D4F"/>
                 </a:solidFill>
@@ -21577,8 +21577,8 @@
         </p:nvSpPr>
         <p:spPr>
           <a:xfrm>
-            <a:off x="502920" y="2560320"/>
-            <a:ext cx="5391760" cy="209169"/>
+            <a:off x="502920" y="3036021"/>
+            <a:ext cx="5391760" cy="238887"/>
           </a:xfrm>
           <a:prstGeom prst="rect">
             <a:avLst/>
@@ -21597,7 +21597,7 @@
               </a:lnSpc>
             </a:pPr>
             <a:r>
-              <a:rPr sz="1100" b="0">
+              <a:rPr sz="1300" b="0">
                 <a:solidFill>
                   <a:srgbClr val="5B6776"/>
                 </a:solidFill>
@@ -21616,8 +21616,8 @@
         </p:nvSpPr>
         <p:spPr>
           <a:xfrm>
-            <a:off x="502920" y="2796921"/>
-            <a:ext cx="5391760" cy="860679"/>
+            <a:off x="502920" y="3302340"/>
+            <a:ext cx="5391760" cy="266319"/>
           </a:xfrm>
           <a:prstGeom prst="rect">
             <a:avLst/>
@@ -21636,7 +21636,7 @@
               </a:lnSpc>
             </a:pPr>
             <a:r>
-              <a:rPr sz="1100" b="0">
+              <a:rPr sz="1300" b="0">
                 <a:solidFill>
                   <a:srgbClr val="1C2530"/>
                 </a:solidFill>
@@ -21655,7 +21655,7 @@
         </p:nvCxnSpPr>
         <p:spPr>
           <a:xfrm>
-            <a:off x="6297016" y="1481328"/>
+            <a:off x="6297016" y="1948266"/>
             <a:ext cx="5391759" cy="0"/>
           </a:xfrm>
           <a:prstGeom prst="line">
@@ -21676,8 +21676,8 @@
         </p:nvSpPr>
         <p:spPr>
           <a:xfrm>
-            <a:off x="6297016" y="1618488"/>
-            <a:ext cx="5391760" cy="685800"/>
+            <a:off x="6297016" y="2085426"/>
+            <a:ext cx="5391760" cy="702945"/>
           </a:xfrm>
           <a:prstGeom prst="rect">
             <a:avLst/>
@@ -21696,7 +21696,7 @@
               </a:lnSpc>
             </a:pPr>
             <a:r>
-              <a:rPr sz="3400" b="1">
+              <a:rPr sz="4100" b="1">
                 <a:solidFill>
                   <a:srgbClr val="13294B"/>
                 </a:solidFill>
@@ -21715,8 +21715,8 @@
         </p:nvSpPr>
         <p:spPr>
           <a:xfrm>
-            <a:off x="6297016" y="2304288"/>
-            <a:ext cx="5391760" cy="237744"/>
+            <a:off x="6297016" y="2788371"/>
+            <a:ext cx="5391760" cy="247650"/>
           </a:xfrm>
           <a:prstGeom prst="rect">
             <a:avLst/>
@@ -21735,7 +21735,7 @@
               </a:lnSpc>
             </a:pPr>
             <a:r>
-              <a:rPr sz="1100" b="1">
+              <a:rPr sz="1300" b="1">
                 <a:solidFill>
                   <a:srgbClr val="2E7D4F"/>
                 </a:solidFill>
@@ -21754,8 +21754,8 @@
         </p:nvSpPr>
         <p:spPr>
           <a:xfrm>
-            <a:off x="6297016" y="2560320"/>
-            <a:ext cx="5391760" cy="209169"/>
+            <a:off x="6297016" y="3036021"/>
+            <a:ext cx="5391760" cy="238887"/>
           </a:xfrm>
           <a:prstGeom prst="rect">
             <a:avLst/>
@@ -21774,7 +21774,7 @@
               </a:lnSpc>
             </a:pPr>
             <a:r>
-              <a:rPr sz="1100" b="0">
+              <a:rPr sz="1300" b="0">
                 <a:solidFill>
                   <a:srgbClr val="5B6776"/>
                 </a:solidFill>
@@ -21793,8 +21793,8 @@
         </p:nvSpPr>
         <p:spPr>
           <a:xfrm>
-            <a:off x="6297016" y="2796921"/>
-            <a:ext cx="5391760" cy="860679"/>
+            <a:off x="6297016" y="3302340"/>
+            <a:ext cx="5391760" cy="266319"/>
           </a:xfrm>
           <a:prstGeom prst="rect">
             <a:avLst/>
@@ -21813,7 +21813,7 @@
               </a:lnSpc>
             </a:pPr>
             <a:r>
-              <a:rPr sz="1100" b="0">
+              <a:rPr sz="1300" b="0">
                 <a:solidFill>
                   <a:srgbClr val="1C2530"/>
                 </a:solidFill>
@@ -21832,7 +21832,7 @@
         </p:nvCxnSpPr>
         <p:spPr>
           <a:xfrm>
-            <a:off x="502920" y="4023360"/>
+            <a:off x="502920" y="3934419"/>
             <a:ext cx="5391760" cy="0"/>
           </a:xfrm>
           <a:prstGeom prst="line">
@@ -21853,8 +21853,8 @@
         </p:nvSpPr>
         <p:spPr>
           <a:xfrm>
-            <a:off x="502920" y="4160520"/>
-            <a:ext cx="5391760" cy="685800"/>
+            <a:off x="502920" y="4071579"/>
+            <a:ext cx="5391760" cy="702945"/>
           </a:xfrm>
           <a:prstGeom prst="rect">
             <a:avLst/>
@@ -21873,7 +21873,7 @@
               </a:lnSpc>
             </a:pPr>
             <a:r>
-              <a:rPr sz="3400" b="1">
+              <a:rPr sz="4100" b="1">
                 <a:solidFill>
                   <a:srgbClr val="13294B"/>
                 </a:solidFill>
@@ -21892,8 +21892,8 @@
         </p:nvSpPr>
         <p:spPr>
           <a:xfrm>
-            <a:off x="502920" y="4846320"/>
-            <a:ext cx="5391760" cy="237744"/>
+            <a:off x="502920" y="4774524"/>
+            <a:ext cx="5391760" cy="247650"/>
           </a:xfrm>
           <a:prstGeom prst="rect">
             <a:avLst/>
@@ -21912,7 +21912,7 @@
               </a:lnSpc>
             </a:pPr>
             <a:r>
-              <a:rPr sz="1100" b="1">
+              <a:rPr sz="1300" b="1">
                 <a:solidFill>
                   <a:srgbClr val="2E7D4F"/>
                 </a:solidFill>
@@ -21931,8 +21931,8 @@
         </p:nvSpPr>
         <p:spPr>
           <a:xfrm>
-            <a:off x="502920" y="5102352"/>
-            <a:ext cx="5391760" cy="209169"/>
+            <a:off x="502920" y="5022174"/>
+            <a:ext cx="5391760" cy="238887"/>
           </a:xfrm>
           <a:prstGeom prst="rect">
             <a:avLst/>
@@ -21951,7 +21951,7 @@
               </a:lnSpc>
             </a:pPr>
             <a:r>
-              <a:rPr sz="1100" b="0">
+              <a:rPr sz="1300" b="0">
                 <a:solidFill>
                   <a:srgbClr val="5B6776"/>
                 </a:solidFill>
@@ -21970,8 +21970,8 @@
         </p:nvSpPr>
         <p:spPr>
           <a:xfrm>
-            <a:off x="502920" y="5338953"/>
-            <a:ext cx="5391760" cy="860679"/>
+            <a:off x="502920" y="5288493"/>
+            <a:ext cx="5391760" cy="266319"/>
           </a:xfrm>
           <a:prstGeom prst="rect">
             <a:avLst/>
@@ -21990,7 +21990,7 @@
               </a:lnSpc>
             </a:pPr>
             <a:r>
-              <a:rPr sz="1100" b="0">
+              <a:rPr sz="1300" b="0">
                 <a:solidFill>
                   <a:srgbClr val="1C2530"/>
                 </a:solidFill>
@@ -22009,7 +22009,7 @@
         </p:nvCxnSpPr>
         <p:spPr>
           <a:xfrm>
-            <a:off x="6297016" y="4023360"/>
+            <a:off x="6297016" y="3934419"/>
             <a:ext cx="5391759" cy="0"/>
           </a:xfrm>
           <a:prstGeom prst="line">
@@ -22030,8 +22030,8 @@
         </p:nvSpPr>
         <p:spPr>
           <a:xfrm>
-            <a:off x="6297016" y="4160520"/>
-            <a:ext cx="5391760" cy="685800"/>
+            <a:off x="6297016" y="4071579"/>
+            <a:ext cx="5391760" cy="702945"/>
           </a:xfrm>
           <a:prstGeom prst="rect">
             <a:avLst/>
@@ -22050,7 +22050,7 @@
               </a:lnSpc>
             </a:pPr>
             <a:r>
-              <a:rPr sz="3400" b="1">
+              <a:rPr sz="4100" b="1">
                 <a:solidFill>
                   <a:srgbClr val="13294B"/>
                 </a:solidFill>
@@ -22069,8 +22069,8 @@
         </p:nvSpPr>
         <p:spPr>
           <a:xfrm>
-            <a:off x="6297016" y="4846320"/>
-            <a:ext cx="5391760" cy="237744"/>
+            <a:off x="6297016" y="4774524"/>
+            <a:ext cx="5391760" cy="247650"/>
           </a:xfrm>
           <a:prstGeom prst="rect">
             <a:avLst/>
@@ -22089,7 +22089,7 @@
               </a:lnSpc>
             </a:pPr>
             <a:r>
-              <a:rPr sz="1100" b="1">
+              <a:rPr sz="1300" b="1">
                 <a:solidFill>
                   <a:srgbClr val="2E7D4F"/>
                 </a:solidFill>
@@ -22108,8 +22108,8 @@
         </p:nvSpPr>
         <p:spPr>
           <a:xfrm>
-            <a:off x="6297016" y="5102352"/>
-            <a:ext cx="5391760" cy="209169"/>
+            <a:off x="6297016" y="5022174"/>
+            <a:ext cx="5391760" cy="238887"/>
           </a:xfrm>
           <a:prstGeom prst="rect">
             <a:avLst/>
@@ -22128,7 +22128,7 @@
               </a:lnSpc>
             </a:pPr>
             <a:r>
-              <a:rPr sz="1100" b="0">
+              <a:rPr sz="1300" b="0">
                 <a:solidFill>
                   <a:srgbClr val="5B6776"/>
                 </a:solidFill>
@@ -22147,8 +22147,8 @@
         </p:nvSpPr>
         <p:spPr>
           <a:xfrm>
-            <a:off x="6297016" y="5338953"/>
-            <a:ext cx="5391760" cy="860679"/>
+            <a:off x="6297016" y="5288493"/>
+            <a:ext cx="5391760" cy="266319"/>
           </a:xfrm>
           <a:prstGeom prst="rect">
             <a:avLst/>
@@ -22167,7 +22167,7 @@
               </a:lnSpc>
             </a:pPr>
             <a:r>
-              <a:rPr sz="1100" b="0">
+              <a:rPr sz="1300" b="0">
                 <a:solidFill>
                   <a:srgbClr val="1C2530"/>
                 </a:solidFill>
